--- a/output/wordlabs-sharp-3day.pptx
+++ b/output/wordlabs-sharp-3day.pptx
@@ -6040,7 +6040,7 @@
                 <a:ea typeface="Calibri" pitchFamily="34" charset="-122"/>
                 <a:cs typeface="Calibri" pitchFamily="34" charset="-120"/>
               </a:rPr>
-              <a:t>The </a:t>
+              <a:t>The teacher noticed how </a:t>
             </a:r>
             <a:pPr algn="l" indent="0" marL="0">
               <a:buNone/>
@@ -6057,7 +6057,7 @@
                 <a:ea typeface="Calibri" pitchFamily="34" charset="-122"/>
                 <a:cs typeface="Calibri" pitchFamily="34" charset="-120"/>
               </a:rPr>
-              <a:t>sharpness</a:t>
+              <a:t>sharply</a:t>
             </a:r>
             <a:pPr algn="l" indent="0" marL="0">
               <a:buNone/>
@@ -6071,7 +6071,7 @@
                 <a:ea typeface="Calibri" pitchFamily="34" charset="-122"/>
                 <a:cs typeface="Calibri" pitchFamily="34" charset="-120"/>
               </a:rPr>
-              <a:t> of the blade surprised us, so we </a:t>
+              <a:t> the student had written her letters, showing great </a:t>
             </a:r>
             <a:pPr algn="l" indent="0" marL="0">
               <a:buNone/>
@@ -6088,7 +6088,7 @@
                 <a:ea typeface="Calibri" pitchFamily="34" charset="-122"/>
                 <a:cs typeface="Calibri" pitchFamily="34" charset="-120"/>
               </a:rPr>
-              <a:t>sharpened</a:t>
+              <a:t>sharpness</a:t>
             </a:r>
             <a:pPr algn="l" indent="0" marL="0">
               <a:buNone/>
@@ -6102,7 +6102,7 @@
                 <a:ea typeface="Calibri" pitchFamily="34" charset="-122"/>
                 <a:cs typeface="Calibri" pitchFamily="34" charset="-120"/>
               </a:rPr>
-              <a:t> our skills at using it safely.</a:t>
+              <a:t> in her work.</a:t>
             </a:r>
             <a:endParaRPr lang="en-US" sz="1800" dirty="0"/>
           </a:p>
@@ -6257,7 +6257,7 @@
                 <a:ea typeface="Trebuchet MS" pitchFamily="34" charset="-122"/>
                 <a:cs typeface="Trebuchet MS" pitchFamily="34" charset="-120"/>
               </a:rPr>
-              <a:t>sharpness</a:t>
+              <a:t>sharply</a:t>
             </a:r>
             <a:endParaRPr lang="en-US" sz="1400" dirty="0"/>
           </a:p>
@@ -6385,7 +6385,7 @@
                 <a:ea typeface="Trebuchet MS" pitchFamily="34" charset="-122"/>
                 <a:cs typeface="Trebuchet MS" pitchFamily="34" charset="-120"/>
               </a:rPr>
-              <a:t>sharpened</a:t>
+              <a:t>sharpness</a:t>
             </a:r>
             <a:endParaRPr lang="en-US" sz="1400" dirty="0"/>
           </a:p>
@@ -6855,7 +6855,7 @@
                 <a:ea typeface="Trebuchet MS" pitchFamily="34" charset="-122"/>
                 <a:cs typeface="Trebuchet MS" pitchFamily="34" charset="-120"/>
               </a:rPr>
-              <a:t>sharpness</a:t>
+              <a:t>sharply</a:t>
             </a:r>
             <a:endParaRPr lang="en-US" sz="2800" dirty="0"/>
           </a:p>
@@ -7682,7 +7682,7 @@
                 <a:ea typeface="Trebuchet MS" pitchFamily="34" charset="-122"/>
                 <a:cs typeface="Trebuchet MS" pitchFamily="34" charset="-120"/>
               </a:rPr>
-              <a:t>sharpness</a:t>
+              <a:t>sharply</a:t>
             </a:r>
             <a:endParaRPr lang="en-US" sz="2800" dirty="0"/>
           </a:p>
@@ -7933,7 +7933,7 @@
                 <a:ea typeface="Trebuchet MS" pitchFamily="34" charset="-122"/>
                 <a:cs typeface="Trebuchet MS" pitchFamily="34" charset="-120"/>
               </a:rPr>
-              <a:t>ness</a:t>
+              <a:t>ly</a:t>
             </a:r>
             <a:endParaRPr lang="en-US" sz="1300" dirty="0"/>
           </a:p>
@@ -7972,7 +7972,7 @@
                 <a:ea typeface="Calibri" pitchFamily="34" charset="-122"/>
                 <a:cs typeface="Calibri" pitchFamily="34" charset="-120"/>
               </a:rPr>
-              <a:t>quality or state of</a:t>
+              <a:t>in a particular way (adverb)</a:t>
             </a:r>
             <a:endParaRPr lang="en-US" sz="850" dirty="0"/>
           </a:p>
@@ -8667,7 +8667,7 @@
                 <a:ea typeface="Trebuchet MS" pitchFamily="34" charset="-122"/>
                 <a:cs typeface="Trebuchet MS" pitchFamily="34" charset="-120"/>
               </a:rPr>
-              <a:t>sharpness</a:t>
+              <a:t>sharply</a:t>
             </a:r>
             <a:endParaRPr lang="en-US" sz="2800" dirty="0"/>
           </a:p>
@@ -8918,7 +8918,7 @@
                 <a:ea typeface="Trebuchet MS" pitchFamily="34" charset="-122"/>
                 <a:cs typeface="Trebuchet MS" pitchFamily="34" charset="-120"/>
               </a:rPr>
-              <a:t>ness</a:t>
+              <a:t>ly</a:t>
             </a:r>
             <a:endParaRPr lang="en-US" sz="1300" dirty="0"/>
           </a:p>
@@ -8957,7 +8957,7 @@
                 <a:ea typeface="Calibri" pitchFamily="34" charset="-122"/>
                 <a:cs typeface="Calibri" pitchFamily="34" charset="-120"/>
               </a:rPr>
-              <a:t>quality or state of</a:t>
+              <a:t>in a particular way (adverb)</a:t>
             </a:r>
             <a:endParaRPr lang="en-US" sz="850" dirty="0"/>
           </a:p>
@@ -9221,7 +9221,7 @@
                 <a:ea typeface="Trebuchet MS" pitchFamily="34" charset="-122"/>
                 <a:cs typeface="Trebuchet MS" pitchFamily="34" charset="-120"/>
               </a:rPr>
-              <a:t>ness</a:t>
+              <a:t>ly</a:t>
             </a:r>
             <a:endParaRPr lang="en-US" sz="1400" dirty="0"/>
           </a:p>
@@ -9784,7 +9784,7 @@
                 <a:ea typeface="Trebuchet MS" pitchFamily="34" charset="-122"/>
                 <a:cs typeface="Trebuchet MS" pitchFamily="34" charset="-120"/>
               </a:rPr>
-              <a:t>sharpness</a:t>
+              <a:t>sharply</a:t>
             </a:r>
             <a:endParaRPr lang="en-US" sz="2800" dirty="0"/>
           </a:p>
@@ -10035,7 +10035,7 @@
                 <a:ea typeface="Trebuchet MS" pitchFamily="34" charset="-122"/>
                 <a:cs typeface="Trebuchet MS" pitchFamily="34" charset="-120"/>
               </a:rPr>
-              <a:t>ness</a:t>
+              <a:t>ly</a:t>
             </a:r>
             <a:endParaRPr lang="en-US" sz="1300" dirty="0"/>
           </a:p>
@@ -10074,7 +10074,7 @@
                 <a:ea typeface="Calibri" pitchFamily="34" charset="-122"/>
                 <a:cs typeface="Calibri" pitchFamily="34" charset="-120"/>
               </a:rPr>
-              <a:t>quality or state of</a:t>
+              <a:t>in a particular way (adverb)</a:t>
             </a:r>
             <a:endParaRPr lang="en-US" sz="850" dirty="0"/>
           </a:p>
@@ -10338,7 +10338,7 @@
                 <a:ea typeface="Trebuchet MS" pitchFamily="34" charset="-122"/>
                 <a:cs typeface="Trebuchet MS" pitchFamily="34" charset="-120"/>
               </a:rPr>
-              <a:t>ness</a:t>
+              <a:t>ly</a:t>
             </a:r>
             <a:endParaRPr lang="en-US" sz="1400" dirty="0"/>
           </a:p>
@@ -10445,7 +10445,7 @@
         </p:nvSpPr>
         <p:spPr>
           <a:xfrm>
-            <a:off x="2254649" y="4169664"/>
+            <a:off x="2427732" y="4169664"/>
             <a:ext cx="685800" cy="475488"/>
           </a:xfrm>
           <a:prstGeom prst="rect">
@@ -10472,7 +10472,7 @@
         </p:nvSpPr>
         <p:spPr>
           <a:xfrm>
-            <a:off x="2254649" y="4169664"/>
+            <a:off x="2427732" y="4169664"/>
             <a:ext cx="685800" cy="475488"/>
           </a:xfrm>
           <a:prstGeom prst="rect">
@@ -10511,7 +10511,7 @@
         </p:nvSpPr>
         <p:spPr>
           <a:xfrm>
-            <a:off x="3293146" y="4169664"/>
+            <a:off x="3639312" y="4169664"/>
             <a:ext cx="685800" cy="475488"/>
           </a:xfrm>
           <a:prstGeom prst="rect">
@@ -10538,7 +10538,7 @@
         </p:nvSpPr>
         <p:spPr>
           <a:xfrm>
-            <a:off x="3293146" y="4169664"/>
+            <a:off x="3639312" y="4169664"/>
             <a:ext cx="685800" cy="475488"/>
           </a:xfrm>
           <a:prstGeom prst="rect">
@@ -10577,7 +10577,7 @@
         </p:nvSpPr>
         <p:spPr>
           <a:xfrm>
-            <a:off x="4331643" y="4169664"/>
+            <a:off x="4850892" y="4169664"/>
             <a:ext cx="685800" cy="475488"/>
           </a:xfrm>
           <a:prstGeom prst="rect">
@@ -10604,7 +10604,7 @@
         </p:nvSpPr>
         <p:spPr>
           <a:xfrm>
-            <a:off x="4331643" y="4169664"/>
+            <a:off x="4850892" y="4169664"/>
             <a:ext cx="685800" cy="475488"/>
           </a:xfrm>
           <a:prstGeom prst="rect">
@@ -10643,7 +10643,7 @@
         </p:nvSpPr>
         <p:spPr>
           <a:xfrm>
-            <a:off x="5370141" y="4169664"/>
+            <a:off x="6062472" y="4169664"/>
             <a:ext cx="685800" cy="475488"/>
           </a:xfrm>
           <a:prstGeom prst="rect">
@@ -10670,7 +10670,7 @@
         </p:nvSpPr>
         <p:spPr>
           <a:xfrm>
-            <a:off x="5370141" y="4169664"/>
+            <a:off x="6062472" y="4169664"/>
             <a:ext cx="685800" cy="475488"/>
           </a:xfrm>
           <a:prstGeom prst="rect">
@@ -10695,7 +10695,7 @@
                 <a:ea typeface="Trebuchet MS" pitchFamily="34" charset="-122"/>
                 <a:cs typeface="Trebuchet MS" pitchFamily="34" charset="-120"/>
               </a:rPr>
-              <a:t>n</a:t>
+              <a:t>l</a:t>
             </a:r>
             <a:endParaRPr lang="en-US" sz="900" dirty="0"/>
           </a:p>
@@ -10709,7 +10709,7 @@
         </p:nvSpPr>
         <p:spPr>
           <a:xfrm>
-            <a:off x="6408638" y="4169664"/>
+            <a:off x="7274052" y="4169664"/>
             <a:ext cx="685800" cy="475488"/>
           </a:xfrm>
           <a:prstGeom prst="rect">
@@ -10736,7 +10736,7 @@
         </p:nvSpPr>
         <p:spPr>
           <a:xfrm>
-            <a:off x="6408638" y="4169664"/>
+            <a:off x="7274052" y="4169664"/>
             <a:ext cx="685800" cy="475488"/>
           </a:xfrm>
           <a:prstGeom prst="rect">
@@ -10761,73 +10761,7 @@
                 <a:ea typeface="Trebuchet MS" pitchFamily="34" charset="-122"/>
                 <a:cs typeface="Trebuchet MS" pitchFamily="34" charset="-120"/>
               </a:rPr>
-              <a:t>e</a:t>
-            </a:r>
-            <a:endParaRPr lang="en-US" sz="900" dirty="0"/>
-          </a:p>
-        </p:txBody>
-      </p:sp>
-      <p:sp>
-        <p:nvSpPr>
-          <p:cNvPr id="43" name="Shape 41"/>
-          <p:cNvSpPr/>
-          <p:nvPr/>
-        </p:nvSpPr>
-        <p:spPr>
-          <a:xfrm>
-            <a:off x="7447135" y="4169664"/>
-            <a:ext cx="685800" cy="475488"/>
-          </a:xfrm>
-          <a:prstGeom prst="rect">
-            <a:avLst>
-              <a:gd name="adj" fmla="val 7692"/>
-            </a:avLst>
-          </a:prstGeom>
-          <a:solidFill>
-            <a:srgbClr val="FFFFFF"/>
-          </a:solidFill>
-          <a:ln w="12700">
-            <a:solidFill>
-              <a:srgbClr val="DB2777"/>
-            </a:solidFill>
-            <a:prstDash val="solid"/>
-          </a:ln>
-        </p:spPr>
-      </p:sp>
-      <p:sp>
-        <p:nvSpPr>
-          <p:cNvPr id="44" name="Text 42"/>
-          <p:cNvSpPr/>
-          <p:nvPr/>
-        </p:nvSpPr>
-        <p:spPr>
-          <a:xfrm>
-            <a:off x="7447135" y="4169664"/>
-            <a:ext cx="685800" cy="475488"/>
-          </a:xfrm>
-          <a:prstGeom prst="rect">
-            <a:avLst/>
-          </a:prstGeom>
-          <a:noFill/>
-          <a:ln/>
-        </p:spPr>
-        <p:txBody>
-          <a:bodyPr wrap="square" lIns="0" tIns="0" rIns="0" bIns="0" rtlCol="0" anchor="ctr"/>
-          <a:lstStyle/>
-          <a:p>
-            <a:pPr algn="ctr" indent="0" marL="0">
-              <a:buNone/>
-            </a:pPr>
-            <a:r>
-              <a:rPr lang="en-US" sz="900" b="1" dirty="0">
-                <a:solidFill>
-                  <a:srgbClr val="9D174D"/>
-                </a:solidFill>
-                <a:latin typeface="Trebuchet MS" pitchFamily="34" charset="0"/>
-                <a:ea typeface="Trebuchet MS" pitchFamily="34" charset="-122"/>
-                <a:cs typeface="Trebuchet MS" pitchFamily="34" charset="-120"/>
-              </a:rPr>
-              <a:t>ss</a:t>
+              <a:t>y</a:t>
             </a:r>
             <a:endParaRPr lang="en-US" sz="900" dirty="0"/>
           </a:p>
@@ -11258,7 +11192,7 @@
                 <a:ea typeface="Trebuchet MS" pitchFamily="34" charset="-122"/>
                 <a:cs typeface="Trebuchet MS" pitchFamily="34" charset="-120"/>
               </a:rPr>
-              <a:t>sharpened</a:t>
+              <a:t>sharpness</a:t>
             </a:r>
             <a:endParaRPr lang="en-US" sz="2800" dirty="0"/>
           </a:p>
@@ -12085,7 +12019,7 @@
                 <a:ea typeface="Trebuchet MS" pitchFamily="34" charset="-122"/>
                 <a:cs typeface="Trebuchet MS" pitchFamily="34" charset="-120"/>
               </a:rPr>
-              <a:t>sharpened</a:t>
+              <a:t>sharpness</a:t>
             </a:r>
             <a:endParaRPr lang="en-US" sz="2800" dirty="0"/>
           </a:p>
@@ -12165,7 +12099,7 @@
         </p:nvSpPr>
         <p:spPr>
           <a:xfrm>
-            <a:off x="2221992" y="2258568"/>
+            <a:off x="2938272" y="2258568"/>
             <a:ext cx="1828800" cy="292608"/>
           </a:xfrm>
           <a:prstGeom prst="rect">
@@ -12199,7 +12133,7 @@
         </p:nvSpPr>
         <p:spPr>
           <a:xfrm>
-            <a:off x="2221992" y="2258568"/>
+            <a:off x="2938272" y="2258568"/>
             <a:ext cx="1828800" cy="292608"/>
           </a:xfrm>
           <a:prstGeom prst="rect">
@@ -12238,7 +12172,7 @@
         </p:nvSpPr>
         <p:spPr>
           <a:xfrm>
-            <a:off x="2221992" y="2569464"/>
+            <a:off x="2938272" y="2569464"/>
             <a:ext cx="1828800" cy="201168"/>
           </a:xfrm>
           <a:prstGeom prst="rect">
@@ -12277,7 +12211,7 @@
         </p:nvSpPr>
         <p:spPr>
           <a:xfrm>
-            <a:off x="4370832" y="2258568"/>
+            <a:off x="5803392" y="2258568"/>
             <a:ext cx="1828800" cy="292608"/>
           </a:xfrm>
           <a:prstGeom prst="rect">
@@ -12311,7 +12245,7 @@
         </p:nvSpPr>
         <p:spPr>
           <a:xfrm>
-            <a:off x="4370832" y="2258568"/>
+            <a:off x="5803392" y="2258568"/>
             <a:ext cx="1828800" cy="292608"/>
           </a:xfrm>
           <a:prstGeom prst="rect">
@@ -12336,7 +12270,7 @@
                 <a:ea typeface="Trebuchet MS" pitchFamily="34" charset="-122"/>
                 <a:cs typeface="Trebuchet MS" pitchFamily="34" charset="-120"/>
               </a:rPr>
-              <a:t>en</a:t>
+              <a:t>ness</a:t>
             </a:r>
             <a:endParaRPr lang="en-US" sz="1300" dirty="0"/>
           </a:p>
@@ -12350,7 +12284,7 @@
         </p:nvSpPr>
         <p:spPr>
           <a:xfrm>
-            <a:off x="4370832" y="2569464"/>
+            <a:off x="5803392" y="2569464"/>
             <a:ext cx="1828800" cy="201168"/>
           </a:xfrm>
           <a:prstGeom prst="rect">
@@ -12375,7 +12309,7 @@
                 <a:ea typeface="Calibri" pitchFamily="34" charset="-122"/>
                 <a:cs typeface="Calibri" pitchFamily="34" charset="-120"/>
               </a:rPr>
-              <a:t>to make or become</a:t>
+              <a:t>the state or quality of</a:t>
             </a:r>
             <a:endParaRPr lang="en-US" sz="850" dirty="0"/>
           </a:p>
@@ -12389,30 +12323,23 @@
         </p:nvSpPr>
         <p:spPr>
           <a:xfrm>
-            <a:off x="6519672" y="2258568"/>
-            <a:ext cx="1828800" cy="292608"/>
+            <a:off x="365760" y="3273552"/>
+            <a:ext cx="1371600" cy="658368"/>
           </a:xfrm>
           <a:prstGeom prst="rect">
             <a:avLst>
-              <a:gd name="adj" fmla="val 25000"/>
+              <a:gd name="adj" fmla="val 8333"/>
             </a:avLst>
           </a:prstGeom>
           <a:solidFill>
-            <a:srgbClr val="FCE7F3"/>
-          </a:solidFill>
-          <a:ln w="19050">
-            <a:solidFill>
-              <a:srgbClr val="DB2777"/>
-            </a:solidFill>
-            <a:prstDash val="solid"/>
-          </a:ln>
-          <a:effectLst>
-            <a:outerShdw sx="100000" sy="100000" kx="0" ky="0" algn="bl" rotWithShape="0" blurRad="101600" dist="38100" dir="8100000">
-              <a:srgbClr val="000000">
-                <a:alpha val="12000"/>
-              </a:srgbClr>
-            </a:outerShdw>
-          </a:effectLst>
+            <a:srgbClr val="E2E8F0"/>
+          </a:solidFill>
+          <a:ln w="12700">
+            <a:solidFill>
+              <a:srgbClr val="E2E8F0"/>
+            </a:solidFill>
+            <a:prstDash val="solid"/>
+          </a:ln>
         </p:spPr>
       </p:sp>
       <p:sp>
@@ -12423,8 +12350,8 @@
         </p:nvSpPr>
         <p:spPr>
           <a:xfrm>
-            <a:off x="6519672" y="2258568"/>
-            <a:ext cx="1828800" cy="292608"/>
+            <a:off x="365760" y="3273552"/>
+            <a:ext cx="1371600" cy="658368"/>
           </a:xfrm>
           <a:prstGeom prst="rect">
             <a:avLst/>
@@ -12440,73 +12367,100 @@
               <a:buNone/>
             </a:pPr>
             <a:r>
-              <a:rPr lang="en-US" sz="1300" b="1" dirty="0">
-                <a:solidFill>
-                  <a:srgbClr val="9D174D"/>
+              <a:rPr lang="en-US" sz="1100" b="1" dirty="0">
+                <a:solidFill>
+                  <a:srgbClr val="475569"/>
                 </a:solidFill>
                 <a:latin typeface="Trebuchet MS" pitchFamily="34" charset="0"/>
                 <a:ea typeface="Trebuchet MS" pitchFamily="34" charset="-122"/>
                 <a:cs typeface="Trebuchet MS" pitchFamily="34" charset="-120"/>
               </a:rPr>
-              <a:t>ed</a:t>
-            </a:r>
-            <a:endParaRPr lang="en-US" sz="1300" dirty="0"/>
-          </a:p>
-        </p:txBody>
-      </p:sp>
-      <p:sp>
-        <p:nvSpPr>
-          <p:cNvPr id="24" name="Text 22"/>
-          <p:cNvSpPr/>
-          <p:nvPr/>
-        </p:nvSpPr>
-        <p:spPr>
-          <a:xfrm>
-            <a:off x="6519672" y="2569464"/>
-            <a:ext cx="1828800" cy="201168"/>
-          </a:xfrm>
-          <a:prstGeom prst="rect">
-            <a:avLst/>
-          </a:prstGeom>
-          <a:noFill/>
-          <a:ln/>
-        </p:spPr>
-        <p:txBody>
-          <a:bodyPr wrap="square" lIns="0" tIns="0" rIns="0" bIns="0" rtlCol="0" anchor="t"/>
-          <a:lstStyle/>
-          <a:p>
-            <a:pPr algn="ctr" indent="0" marL="0">
-              <a:buNone/>
-            </a:pPr>
-            <a:r>
-              <a:rPr lang="en-US" sz="850" dirty="0">
-                <a:solidFill>
-                  <a:srgbClr val="475569"/>
+              <a:t>Syllables</a:t>
+            </a:r>
+            <a:endParaRPr lang="en-US" sz="1100" dirty="0"/>
+          </a:p>
+        </p:txBody>
+      </p:sp>
+      <p:sp>
+        <p:nvSpPr>
+          <p:cNvPr id="24" name="Shape 22"/>
+          <p:cNvSpPr/>
+          <p:nvPr/>
+        </p:nvSpPr>
+        <p:spPr>
+          <a:xfrm>
+            <a:off x="1874520" y="3273552"/>
+            <a:ext cx="6903720" cy="658368"/>
+          </a:xfrm>
+          <a:prstGeom prst="rect">
+            <a:avLst>
+              <a:gd name="adj" fmla="val 8333"/>
+            </a:avLst>
+          </a:prstGeom>
+          <a:solidFill>
+            <a:srgbClr val="F8FAFC"/>
+          </a:solidFill>
+          <a:ln w="12700">
+            <a:solidFill>
+              <a:srgbClr val="E2E8F0"/>
+            </a:solidFill>
+            <a:prstDash val="dash"/>
+          </a:ln>
+        </p:spPr>
+      </p:sp>
+      <p:sp>
+        <p:nvSpPr>
+          <p:cNvPr id="25" name="Text 23"/>
+          <p:cNvSpPr/>
+          <p:nvPr/>
+        </p:nvSpPr>
+        <p:spPr>
+          <a:xfrm>
+            <a:off x="1874520" y="3273552"/>
+            <a:ext cx="6903720" cy="658368"/>
+          </a:xfrm>
+          <a:prstGeom prst="rect">
+            <a:avLst/>
+          </a:prstGeom>
+          <a:noFill/>
+          <a:ln/>
+        </p:spPr>
+        <p:txBody>
+          <a:bodyPr wrap="square" rtlCol="0" anchor="ctr"/>
+          <a:lstStyle/>
+          <a:p>
+            <a:pPr algn="ctr" indent="0" marL="0">
+              <a:buNone/>
+            </a:pPr>
+            <a:r>
+              <a:rPr lang="en-US" sz="1100" i="1" dirty="0">
+                <a:solidFill>
+                  <a:srgbClr val="CBD5E1"/>
                 </a:solidFill>
                 <a:latin typeface="Calibri" pitchFamily="34" charset="0"/>
                 <a:ea typeface="Calibri" pitchFamily="34" charset="-122"/>
                 <a:cs typeface="Calibri" pitchFamily="34" charset="-120"/>
               </a:rPr>
-              <a:t>past tense</a:t>
-            </a:r>
-            <a:endParaRPr lang="en-US" sz="850" dirty="0"/>
-          </a:p>
-        </p:txBody>
-      </p:sp>
-      <p:sp>
-        <p:nvSpPr>
-          <p:cNvPr id="25" name="Shape 23"/>
-          <p:cNvSpPr/>
-          <p:nvPr/>
-        </p:nvSpPr>
-        <p:spPr>
-          <a:xfrm>
-            <a:off x="365760" y="3273552"/>
-            <a:ext cx="1371600" cy="658368"/>
+              <a:t>Write here...</a:t>
+            </a:r>
+            <a:endParaRPr lang="en-US" sz="1100" dirty="0"/>
+          </a:p>
+        </p:txBody>
+      </p:sp>
+      <p:sp>
+        <p:nvSpPr>
+          <p:cNvPr id="26" name="Shape 24"/>
+          <p:cNvSpPr/>
+          <p:nvPr/>
+        </p:nvSpPr>
+        <p:spPr>
+          <a:xfrm>
+            <a:off x="365760" y="4096512"/>
+            <a:ext cx="1371600" cy="804672"/>
           </a:xfrm>
           <a:prstGeom prst="rect">
             <a:avLst>
-              <a:gd name="adj" fmla="val 8333"/>
+              <a:gd name="adj" fmla="val 6818"/>
             </a:avLst>
           </a:prstGeom>
           <a:solidFill>
@@ -12522,14 +12476,14 @@
       </p:sp>
       <p:sp>
         <p:nvSpPr>
-          <p:cNvPr id="26" name="Text 24"/>
-          <p:cNvSpPr/>
-          <p:nvPr/>
-        </p:nvSpPr>
-        <p:spPr>
-          <a:xfrm>
-            <a:off x="365760" y="3273552"/>
-            <a:ext cx="1371600" cy="658368"/>
+          <p:cNvPr id="27" name="Text 25"/>
+          <p:cNvSpPr/>
+          <p:nvPr/>
+        </p:nvSpPr>
+        <p:spPr>
+          <a:xfrm>
+            <a:off x="365760" y="4096512"/>
+            <a:ext cx="1371600" cy="804672"/>
           </a:xfrm>
           <a:prstGeom prst="rect">
             <a:avLst/>
@@ -12553,7 +12507,7 @@
                 <a:ea typeface="Trebuchet MS" pitchFamily="34" charset="-122"/>
                 <a:cs typeface="Trebuchet MS" pitchFamily="34" charset="-120"/>
               </a:rPr>
-              <a:t>Syllables</a:t>
+              <a:t>Phonemes</a:t>
             </a:r>
             <a:endParaRPr lang="en-US" sz="1100" dirty="0"/>
           </a:p>
@@ -12561,80 +12515,14 @@
       </p:sp>
       <p:sp>
         <p:nvSpPr>
-          <p:cNvPr id="27" name="Shape 25"/>
-          <p:cNvSpPr/>
-          <p:nvPr/>
-        </p:nvSpPr>
-        <p:spPr>
-          <a:xfrm>
-            <a:off x="1874520" y="3273552"/>
-            <a:ext cx="6903720" cy="658368"/>
-          </a:xfrm>
-          <a:prstGeom prst="rect">
-            <a:avLst>
-              <a:gd name="adj" fmla="val 8333"/>
-            </a:avLst>
-          </a:prstGeom>
-          <a:solidFill>
-            <a:srgbClr val="F8FAFC"/>
-          </a:solidFill>
-          <a:ln w="12700">
-            <a:solidFill>
-              <a:srgbClr val="E2E8F0"/>
-            </a:solidFill>
-            <a:prstDash val="dash"/>
-          </a:ln>
-        </p:spPr>
-      </p:sp>
-      <p:sp>
-        <p:nvSpPr>
-          <p:cNvPr id="28" name="Text 26"/>
-          <p:cNvSpPr/>
-          <p:nvPr/>
-        </p:nvSpPr>
-        <p:spPr>
-          <a:xfrm>
-            <a:off x="1874520" y="3273552"/>
-            <a:ext cx="6903720" cy="658368"/>
-          </a:xfrm>
-          <a:prstGeom prst="rect">
-            <a:avLst/>
-          </a:prstGeom>
-          <a:noFill/>
-          <a:ln/>
-        </p:spPr>
-        <p:txBody>
-          <a:bodyPr wrap="square" rtlCol="0" anchor="ctr"/>
-          <a:lstStyle/>
-          <a:p>
-            <a:pPr algn="ctr" indent="0" marL="0">
-              <a:buNone/>
-            </a:pPr>
-            <a:r>
-              <a:rPr lang="en-US" sz="1100" i="1" dirty="0">
-                <a:solidFill>
-                  <a:srgbClr val="CBD5E1"/>
-                </a:solidFill>
-                <a:latin typeface="Calibri" pitchFamily="34" charset="0"/>
-                <a:ea typeface="Calibri" pitchFamily="34" charset="-122"/>
-                <a:cs typeface="Calibri" pitchFamily="34" charset="-120"/>
-              </a:rPr>
-              <a:t>Write here...</a:t>
-            </a:r>
-            <a:endParaRPr lang="en-US" sz="1100" dirty="0"/>
-          </a:p>
-        </p:txBody>
-      </p:sp>
-      <p:sp>
-        <p:nvSpPr>
-          <p:cNvPr id="29" name="Shape 27"/>
-          <p:cNvSpPr/>
-          <p:nvPr/>
-        </p:nvSpPr>
-        <p:spPr>
-          <a:xfrm>
-            <a:off x="365760" y="4096512"/>
-            <a:ext cx="1371600" cy="804672"/>
+          <p:cNvPr id="28" name="Shape 26"/>
+          <p:cNvSpPr/>
+          <p:nvPr/>
+        </p:nvSpPr>
+        <p:spPr>
+          <a:xfrm>
+            <a:off x="1874520" y="4096512"/>
+            <a:ext cx="6903720" cy="804672"/>
           </a:xfrm>
           <a:prstGeom prst="rect">
             <a:avLst>
@@ -12642,85 +12530,19 @@
             </a:avLst>
           </a:prstGeom>
           <a:solidFill>
-            <a:srgbClr val="E2E8F0"/>
+            <a:srgbClr val="F8FAFC"/>
           </a:solidFill>
           <a:ln w="12700">
             <a:solidFill>
               <a:srgbClr val="E2E8F0"/>
             </a:solidFill>
-            <a:prstDash val="solid"/>
-          </a:ln>
-        </p:spPr>
-      </p:sp>
-      <p:sp>
-        <p:nvSpPr>
-          <p:cNvPr id="30" name="Text 28"/>
-          <p:cNvSpPr/>
-          <p:nvPr/>
-        </p:nvSpPr>
-        <p:spPr>
-          <a:xfrm>
-            <a:off x="365760" y="4096512"/>
-            <a:ext cx="1371600" cy="804672"/>
-          </a:xfrm>
-          <a:prstGeom prst="rect">
-            <a:avLst/>
-          </a:prstGeom>
-          <a:noFill/>
-          <a:ln/>
-        </p:spPr>
-        <p:txBody>
-          <a:bodyPr wrap="square" lIns="0" tIns="0" rIns="0" bIns="0" rtlCol="0" anchor="ctr"/>
-          <a:lstStyle/>
-          <a:p>
-            <a:pPr algn="ctr" indent="0" marL="0">
-              <a:buNone/>
-            </a:pPr>
-            <a:r>
-              <a:rPr lang="en-US" sz="1100" b="1" dirty="0">
-                <a:solidFill>
-                  <a:srgbClr val="475569"/>
-                </a:solidFill>
-                <a:latin typeface="Trebuchet MS" pitchFamily="34" charset="0"/>
-                <a:ea typeface="Trebuchet MS" pitchFamily="34" charset="-122"/>
-                <a:cs typeface="Trebuchet MS" pitchFamily="34" charset="-120"/>
-              </a:rPr>
-              <a:t>Phonemes</a:t>
-            </a:r>
-            <a:endParaRPr lang="en-US" sz="1100" dirty="0"/>
-          </a:p>
-        </p:txBody>
-      </p:sp>
-      <p:sp>
-        <p:nvSpPr>
-          <p:cNvPr id="31" name="Shape 29"/>
-          <p:cNvSpPr/>
-          <p:nvPr/>
-        </p:nvSpPr>
-        <p:spPr>
-          <a:xfrm>
-            <a:off x="1874520" y="4096512"/>
-            <a:ext cx="6903720" cy="804672"/>
-          </a:xfrm>
-          <a:prstGeom prst="rect">
-            <a:avLst>
-              <a:gd name="adj" fmla="val 6818"/>
-            </a:avLst>
-          </a:prstGeom>
-          <a:solidFill>
-            <a:srgbClr val="F8FAFC"/>
-          </a:solidFill>
-          <a:ln w="12700">
-            <a:solidFill>
-              <a:srgbClr val="E2E8F0"/>
-            </a:solidFill>
             <a:prstDash val="dash"/>
           </a:ln>
         </p:spPr>
       </p:sp>
       <p:sp>
         <p:nvSpPr>
-          <p:cNvPr id="32" name="Text 30"/>
+          <p:cNvPr id="29" name="Text 27"/>
           <p:cNvSpPr/>
           <p:nvPr/>
         </p:nvSpPr>
@@ -13182,7 +13004,7 @@
                 <a:ea typeface="Trebuchet MS" pitchFamily="34" charset="-122"/>
                 <a:cs typeface="Trebuchet MS" pitchFamily="34" charset="-120"/>
               </a:rPr>
-              <a:t>sharpened</a:t>
+              <a:t>sharpness</a:t>
             </a:r>
             <a:endParaRPr lang="en-US" sz="2800" dirty="0"/>
           </a:p>
@@ -13262,7 +13084,7 @@
         </p:nvSpPr>
         <p:spPr>
           <a:xfrm>
-            <a:off x="2221992" y="2258568"/>
+            <a:off x="2938272" y="2258568"/>
             <a:ext cx="1828800" cy="292608"/>
           </a:xfrm>
           <a:prstGeom prst="rect">
@@ -13296,7 +13118,7 @@
         </p:nvSpPr>
         <p:spPr>
           <a:xfrm>
-            <a:off x="2221992" y="2258568"/>
+            <a:off x="2938272" y="2258568"/>
             <a:ext cx="1828800" cy="292608"/>
           </a:xfrm>
           <a:prstGeom prst="rect">
@@ -13335,7 +13157,7 @@
         </p:nvSpPr>
         <p:spPr>
           <a:xfrm>
-            <a:off x="2221992" y="2569464"/>
+            <a:off x="2938272" y="2569464"/>
             <a:ext cx="1828800" cy="201168"/>
           </a:xfrm>
           <a:prstGeom prst="rect">
@@ -13374,7 +13196,7 @@
         </p:nvSpPr>
         <p:spPr>
           <a:xfrm>
-            <a:off x="4370832" y="2258568"/>
+            <a:off x="5803392" y="2258568"/>
             <a:ext cx="1828800" cy="292608"/>
           </a:xfrm>
           <a:prstGeom prst="rect">
@@ -13408,7 +13230,7 @@
         </p:nvSpPr>
         <p:spPr>
           <a:xfrm>
-            <a:off x="4370832" y="2258568"/>
+            <a:off x="5803392" y="2258568"/>
             <a:ext cx="1828800" cy="292608"/>
           </a:xfrm>
           <a:prstGeom prst="rect">
@@ -13433,7 +13255,7 @@
                 <a:ea typeface="Trebuchet MS" pitchFamily="34" charset="-122"/>
                 <a:cs typeface="Trebuchet MS" pitchFamily="34" charset="-120"/>
               </a:rPr>
-              <a:t>en</a:t>
+              <a:t>ness</a:t>
             </a:r>
             <a:endParaRPr lang="en-US" sz="1300" dirty="0"/>
           </a:p>
@@ -13447,7 +13269,7 @@
         </p:nvSpPr>
         <p:spPr>
           <a:xfrm>
-            <a:off x="4370832" y="2569464"/>
+            <a:off x="5803392" y="2569464"/>
             <a:ext cx="1828800" cy="201168"/>
           </a:xfrm>
           <a:prstGeom prst="rect">
@@ -13472,7 +13294,7 @@
                 <a:ea typeface="Calibri" pitchFamily="34" charset="-122"/>
                 <a:cs typeface="Calibri" pitchFamily="34" charset="-120"/>
               </a:rPr>
-              <a:t>to make or become</a:t>
+              <a:t>the state or quality of</a:t>
             </a:r>
             <a:endParaRPr lang="en-US" sz="850" dirty="0"/>
           </a:p>
@@ -13486,30 +13308,23 @@
         </p:nvSpPr>
         <p:spPr>
           <a:xfrm>
-            <a:off x="6519672" y="2258568"/>
-            <a:ext cx="1828800" cy="292608"/>
+            <a:off x="365760" y="3273552"/>
+            <a:ext cx="1371600" cy="658368"/>
           </a:xfrm>
           <a:prstGeom prst="rect">
             <a:avLst>
-              <a:gd name="adj" fmla="val 25000"/>
+              <a:gd name="adj" fmla="val 8333"/>
             </a:avLst>
           </a:prstGeom>
           <a:solidFill>
-            <a:srgbClr val="FCE7F3"/>
-          </a:solidFill>
-          <a:ln w="19050">
-            <a:solidFill>
-              <a:srgbClr val="DB2777"/>
-            </a:solidFill>
-            <a:prstDash val="solid"/>
-          </a:ln>
-          <a:effectLst>
-            <a:outerShdw sx="100000" sy="100000" kx="0" ky="0" algn="bl" rotWithShape="0" blurRad="101600" dist="38100" dir="8100000">
-              <a:srgbClr val="000000">
-                <a:alpha val="12000"/>
-              </a:srgbClr>
-            </a:outerShdw>
-          </a:effectLst>
+            <a:srgbClr val="E2E8F0"/>
+          </a:solidFill>
+          <a:ln w="12700">
+            <a:solidFill>
+              <a:srgbClr val="E2E8F0"/>
+            </a:solidFill>
+            <a:prstDash val="solid"/>
+          </a:ln>
         </p:spPr>
       </p:sp>
       <p:sp>
@@ -13520,8 +13335,8 @@
         </p:nvSpPr>
         <p:spPr>
           <a:xfrm>
-            <a:off x="6519672" y="2258568"/>
-            <a:ext cx="1828800" cy="292608"/>
+            <a:off x="365760" y="3273552"/>
+            <a:ext cx="1371600" cy="658368"/>
           </a:xfrm>
           <a:prstGeom prst="rect">
             <a:avLst/>
@@ -13537,69 +13352,30 @@
               <a:buNone/>
             </a:pPr>
             <a:r>
-              <a:rPr lang="en-US" sz="1300" b="1" dirty="0">
-                <a:solidFill>
-                  <a:srgbClr val="9D174D"/>
+              <a:rPr lang="en-US" sz="1100" b="1" dirty="0">
+                <a:solidFill>
+                  <a:srgbClr val="475569"/>
                 </a:solidFill>
                 <a:latin typeface="Trebuchet MS" pitchFamily="34" charset="0"/>
                 <a:ea typeface="Trebuchet MS" pitchFamily="34" charset="-122"/>
                 <a:cs typeface="Trebuchet MS" pitchFamily="34" charset="-120"/>
               </a:rPr>
-              <a:t>ed</a:t>
-            </a:r>
-            <a:endParaRPr lang="en-US" sz="1300" dirty="0"/>
-          </a:p>
-        </p:txBody>
-      </p:sp>
-      <p:sp>
-        <p:nvSpPr>
-          <p:cNvPr id="24" name="Text 22"/>
-          <p:cNvSpPr/>
-          <p:nvPr/>
-        </p:nvSpPr>
-        <p:spPr>
-          <a:xfrm>
-            <a:off x="6519672" y="2569464"/>
-            <a:ext cx="1828800" cy="201168"/>
-          </a:xfrm>
-          <a:prstGeom prst="rect">
-            <a:avLst/>
-          </a:prstGeom>
-          <a:noFill/>
-          <a:ln/>
-        </p:spPr>
-        <p:txBody>
-          <a:bodyPr wrap="square" lIns="0" tIns="0" rIns="0" bIns="0" rtlCol="0" anchor="t"/>
-          <a:lstStyle/>
-          <a:p>
-            <a:pPr algn="ctr" indent="0" marL="0">
-              <a:buNone/>
-            </a:pPr>
-            <a:r>
-              <a:rPr lang="en-US" sz="850" dirty="0">
-                <a:solidFill>
-                  <a:srgbClr val="475569"/>
-                </a:solidFill>
-                <a:latin typeface="Calibri" pitchFamily="34" charset="0"/>
-                <a:ea typeface="Calibri" pitchFamily="34" charset="-122"/>
-                <a:cs typeface="Calibri" pitchFamily="34" charset="-120"/>
-              </a:rPr>
-              <a:t>past tense</a:t>
-            </a:r>
-            <a:endParaRPr lang="en-US" sz="850" dirty="0"/>
-          </a:p>
-        </p:txBody>
-      </p:sp>
-      <p:sp>
-        <p:nvSpPr>
-          <p:cNvPr id="25" name="Shape 23"/>
-          <p:cNvSpPr/>
-          <p:nvPr/>
-        </p:nvSpPr>
-        <p:spPr>
-          <a:xfrm>
-            <a:off x="365760" y="3273552"/>
-            <a:ext cx="1371600" cy="658368"/>
+              <a:t>Syllables</a:t>
+            </a:r>
+            <a:endParaRPr lang="en-US" sz="1100" dirty="0"/>
+          </a:p>
+        </p:txBody>
+      </p:sp>
+      <p:sp>
+        <p:nvSpPr>
+          <p:cNvPr id="24" name="Shape 22"/>
+          <p:cNvSpPr/>
+          <p:nvPr/>
+        </p:nvSpPr>
+        <p:spPr>
+          <a:xfrm>
+            <a:off x="1874520" y="3273552"/>
+            <a:ext cx="6903720" cy="658368"/>
           </a:xfrm>
           <a:prstGeom prst="rect">
             <a:avLst>
@@ -13607,11 +13383,38 @@
             </a:avLst>
           </a:prstGeom>
           <a:solidFill>
-            <a:srgbClr val="E2E8F0"/>
-          </a:solidFill>
-          <a:ln w="12700">
-            <a:solidFill>
-              <a:srgbClr val="E2E8F0"/>
+            <a:srgbClr val="CCFBF1"/>
+          </a:solidFill>
+          <a:ln w="12700">
+            <a:solidFill>
+              <a:srgbClr val="0D9488"/>
+            </a:solidFill>
+            <a:prstDash val="solid"/>
+          </a:ln>
+        </p:spPr>
+      </p:sp>
+      <p:sp>
+        <p:nvSpPr>
+          <p:cNvPr id="25" name="Shape 23"/>
+          <p:cNvSpPr/>
+          <p:nvPr/>
+        </p:nvSpPr>
+        <p:spPr>
+          <a:xfrm>
+            <a:off x="2999232" y="3364992"/>
+            <a:ext cx="1645920" cy="475488"/>
+          </a:xfrm>
+          <a:prstGeom prst="rect">
+            <a:avLst>
+              <a:gd name="adj" fmla="val 9615"/>
+            </a:avLst>
+          </a:prstGeom>
+          <a:solidFill>
+            <a:srgbClr val="FFFFFF"/>
+          </a:solidFill>
+          <a:ln w="12700">
+            <a:solidFill>
+              <a:srgbClr val="0D9488"/>
             </a:solidFill>
             <a:prstDash val="solid"/>
           </a:ln>
@@ -13625,8 +13428,8 @@
         </p:nvSpPr>
         <p:spPr>
           <a:xfrm>
-            <a:off x="365760" y="3273552"/>
-            <a:ext cx="1371600" cy="658368"/>
+            <a:off x="2999232" y="3364992"/>
+            <a:ext cx="1645920" cy="475488"/>
           </a:xfrm>
           <a:prstGeom prst="rect">
             <a:avLst/>
@@ -13642,46 +13445,58 @@
               <a:buNone/>
             </a:pPr>
             <a:r>
-              <a:rPr lang="en-US" sz="1100" b="1" dirty="0">
-                <a:solidFill>
-                  <a:srgbClr val="475569"/>
+              <a:rPr lang="en-US" sz="1400" b="1" dirty="0">
+                <a:solidFill>
+                  <a:srgbClr val="0D9488"/>
                 </a:solidFill>
                 <a:latin typeface="Trebuchet MS" pitchFamily="34" charset="0"/>
                 <a:ea typeface="Trebuchet MS" pitchFamily="34" charset="-122"/>
                 <a:cs typeface="Trebuchet MS" pitchFamily="34" charset="-120"/>
               </a:rPr>
-              <a:t>Syllables</a:t>
-            </a:r>
-            <a:endParaRPr lang="en-US" sz="1100" dirty="0"/>
-          </a:p>
-        </p:txBody>
-      </p:sp>
-      <p:sp>
-        <p:nvSpPr>
-          <p:cNvPr id="27" name="Shape 25"/>
-          <p:cNvSpPr/>
-          <p:nvPr/>
-        </p:nvSpPr>
-        <p:spPr>
-          <a:xfrm>
-            <a:off x="1874520" y="3273552"/>
-            <a:ext cx="6903720" cy="658368"/>
-          </a:xfrm>
-          <a:prstGeom prst="rect">
-            <a:avLst>
-              <a:gd name="adj" fmla="val 8333"/>
-            </a:avLst>
-          </a:prstGeom>
-          <a:solidFill>
-            <a:srgbClr val="CCFBF1"/>
-          </a:solidFill>
-          <a:ln w="12700">
-            <a:solidFill>
-              <a:srgbClr val="0D9488"/>
-            </a:solidFill>
-            <a:prstDash val="solid"/>
-          </a:ln>
-        </p:spPr>
+              <a:t>sharp</a:t>
+            </a:r>
+            <a:endParaRPr lang="en-US" sz="1400" dirty="0"/>
+          </a:p>
+        </p:txBody>
+      </p:sp>
+      <p:sp>
+        <p:nvSpPr>
+          <p:cNvPr id="27" name="Text 25"/>
+          <p:cNvSpPr/>
+          <p:nvPr/>
+        </p:nvSpPr>
+        <p:spPr>
+          <a:xfrm>
+            <a:off x="4645152" y="3364992"/>
+            <a:ext cx="1097280" cy="475488"/>
+          </a:xfrm>
+          <a:prstGeom prst="rect">
+            <a:avLst/>
+          </a:prstGeom>
+          <a:noFill/>
+          <a:ln/>
+        </p:spPr>
+        <p:txBody>
+          <a:bodyPr wrap="square" lIns="0" tIns="0" rIns="0" bIns="0" rtlCol="0" anchor="ctr"/>
+          <a:lstStyle/>
+          <a:p>
+            <a:pPr algn="ctr" indent="0" marL="0">
+              <a:buNone/>
+            </a:pPr>
+            <a:r>
+              <a:rPr lang="en-US" sz="1600" b="1" dirty="0">
+                <a:solidFill>
+                  <a:srgbClr val="0D9488"/>
+                </a:solidFill>
+                <a:latin typeface="Trebuchet MS" pitchFamily="34" charset="0"/>
+                <a:ea typeface="Trebuchet MS" pitchFamily="34" charset="-122"/>
+                <a:cs typeface="Trebuchet MS" pitchFamily="34" charset="-120"/>
+              </a:rPr>
+              <a:t>·</a:t>
+            </a:r>
+            <a:endParaRPr lang="en-US" sz="1600" dirty="0"/>
+          </a:p>
+        </p:txBody>
       </p:sp>
       <p:sp>
         <p:nvSpPr>
@@ -13691,7 +13506,7 @@
         </p:nvSpPr>
         <p:spPr>
           <a:xfrm>
-            <a:off x="2999232" y="3364992"/>
+            <a:off x="5742432" y="3364992"/>
             <a:ext cx="1645920" cy="475488"/>
           </a:xfrm>
           <a:prstGeom prst="rect">
@@ -13718,7 +13533,7 @@
         </p:nvSpPr>
         <p:spPr>
           <a:xfrm>
-            <a:off x="2999232" y="3364992"/>
+            <a:off x="5742432" y="3364992"/>
             <a:ext cx="1645920" cy="475488"/>
           </a:xfrm>
           <a:prstGeom prst="rect">
@@ -13743,7 +13558,7 @@
                 <a:ea typeface="Trebuchet MS" pitchFamily="34" charset="-122"/>
                 <a:cs typeface="Trebuchet MS" pitchFamily="34" charset="-120"/>
               </a:rPr>
-              <a:t>sharp</a:t>
+              <a:t>ness</a:t>
             </a:r>
             <a:endParaRPr lang="en-US" sz="1400" dirty="0"/>
           </a:p>
@@ -13751,14 +13566,41 @@
       </p:sp>
       <p:sp>
         <p:nvSpPr>
-          <p:cNvPr id="30" name="Text 28"/>
-          <p:cNvSpPr/>
-          <p:nvPr/>
-        </p:nvSpPr>
-        <p:spPr>
-          <a:xfrm>
-            <a:off x="4645152" y="3364992"/>
-            <a:ext cx="1097280" cy="475488"/>
+          <p:cNvPr id="30" name="Shape 28"/>
+          <p:cNvSpPr/>
+          <p:nvPr/>
+        </p:nvSpPr>
+        <p:spPr>
+          <a:xfrm>
+            <a:off x="365760" y="4096512"/>
+            <a:ext cx="1371600" cy="804672"/>
+          </a:xfrm>
+          <a:prstGeom prst="rect">
+            <a:avLst>
+              <a:gd name="adj" fmla="val 6818"/>
+            </a:avLst>
+          </a:prstGeom>
+          <a:solidFill>
+            <a:srgbClr val="E2E8F0"/>
+          </a:solidFill>
+          <a:ln w="12700">
+            <a:solidFill>
+              <a:srgbClr val="E2E8F0"/>
+            </a:solidFill>
+            <a:prstDash val="solid"/>
+          </a:ln>
+        </p:spPr>
+      </p:sp>
+      <p:sp>
+        <p:nvSpPr>
+          <p:cNvPr id="31" name="Text 29"/>
+          <p:cNvSpPr/>
+          <p:nvPr/>
+        </p:nvSpPr>
+        <p:spPr>
+          <a:xfrm>
+            <a:off x="365760" y="4096512"/>
+            <a:ext cx="1371600" cy="804672"/>
           </a:xfrm>
           <a:prstGeom prst="rect">
             <a:avLst/>
@@ -13774,96 +13616,30 @@
               <a:buNone/>
             </a:pPr>
             <a:r>
-              <a:rPr lang="en-US" sz="1600" b="1" dirty="0">
-                <a:solidFill>
-                  <a:srgbClr val="0D9488"/>
+              <a:rPr lang="en-US" sz="1100" b="1" dirty="0">
+                <a:solidFill>
+                  <a:srgbClr val="475569"/>
                 </a:solidFill>
                 <a:latin typeface="Trebuchet MS" pitchFamily="34" charset="0"/>
                 <a:ea typeface="Trebuchet MS" pitchFamily="34" charset="-122"/>
                 <a:cs typeface="Trebuchet MS" pitchFamily="34" charset="-120"/>
               </a:rPr>
-              <a:t>·</a:t>
-            </a:r>
-            <a:endParaRPr lang="en-US" sz="1600" dirty="0"/>
-          </a:p>
-        </p:txBody>
-      </p:sp>
-      <p:sp>
-        <p:nvSpPr>
-          <p:cNvPr id="31" name="Shape 29"/>
-          <p:cNvSpPr/>
-          <p:nvPr/>
-        </p:nvSpPr>
-        <p:spPr>
-          <a:xfrm>
-            <a:off x="5742432" y="3364992"/>
-            <a:ext cx="1645920" cy="475488"/>
-          </a:xfrm>
-          <a:prstGeom prst="rect">
-            <a:avLst>
-              <a:gd name="adj" fmla="val 9615"/>
-            </a:avLst>
-          </a:prstGeom>
-          <a:solidFill>
-            <a:srgbClr val="FFFFFF"/>
-          </a:solidFill>
-          <a:ln w="12700">
-            <a:solidFill>
-              <a:srgbClr val="0D9488"/>
-            </a:solidFill>
-            <a:prstDash val="solid"/>
-          </a:ln>
-        </p:spPr>
-      </p:sp>
-      <p:sp>
-        <p:nvSpPr>
-          <p:cNvPr id="32" name="Text 30"/>
-          <p:cNvSpPr/>
-          <p:nvPr/>
-        </p:nvSpPr>
-        <p:spPr>
-          <a:xfrm>
-            <a:off x="5742432" y="3364992"/>
-            <a:ext cx="1645920" cy="475488"/>
-          </a:xfrm>
-          <a:prstGeom prst="rect">
-            <a:avLst/>
-          </a:prstGeom>
-          <a:noFill/>
-          <a:ln/>
-        </p:spPr>
-        <p:txBody>
-          <a:bodyPr wrap="square" lIns="0" tIns="0" rIns="0" bIns="0" rtlCol="0" anchor="ctr"/>
-          <a:lstStyle/>
-          <a:p>
-            <a:pPr algn="ctr" indent="0" marL="0">
-              <a:buNone/>
-            </a:pPr>
-            <a:r>
-              <a:rPr lang="en-US" sz="1400" b="1" dirty="0">
-                <a:solidFill>
-                  <a:srgbClr val="0D9488"/>
-                </a:solidFill>
-                <a:latin typeface="Trebuchet MS" pitchFamily="34" charset="0"/>
-                <a:ea typeface="Trebuchet MS" pitchFamily="34" charset="-122"/>
-                <a:cs typeface="Trebuchet MS" pitchFamily="34" charset="-120"/>
-              </a:rPr>
-              <a:t>ened</a:t>
-            </a:r>
-            <a:endParaRPr lang="en-US" sz="1400" dirty="0"/>
-          </a:p>
-        </p:txBody>
-      </p:sp>
-      <p:sp>
-        <p:nvSpPr>
-          <p:cNvPr id="33" name="Shape 31"/>
-          <p:cNvSpPr/>
-          <p:nvPr/>
-        </p:nvSpPr>
-        <p:spPr>
-          <a:xfrm>
-            <a:off x="365760" y="4096512"/>
-            <a:ext cx="1371600" cy="804672"/>
+              <a:t>Phonemes</a:t>
+            </a:r>
+            <a:endParaRPr lang="en-US" sz="1100" dirty="0"/>
+          </a:p>
+        </p:txBody>
+      </p:sp>
+      <p:sp>
+        <p:nvSpPr>
+          <p:cNvPr id="32" name="Shape 30"/>
+          <p:cNvSpPr/>
+          <p:nvPr/>
+        </p:nvSpPr>
+        <p:spPr>
+          <a:xfrm>
+            <a:off x="1874520" y="4096512"/>
+            <a:ext cx="6903720" cy="804672"/>
           </a:xfrm>
           <a:prstGeom prst="rect">
             <a:avLst>
@@ -13871,85 +13647,19 @@
             </a:avLst>
           </a:prstGeom>
           <a:solidFill>
-            <a:srgbClr val="E2E8F0"/>
+            <a:srgbClr val="F8FAFC"/>
           </a:solidFill>
           <a:ln w="12700">
             <a:solidFill>
               <a:srgbClr val="E2E8F0"/>
             </a:solidFill>
-            <a:prstDash val="solid"/>
-          </a:ln>
-        </p:spPr>
-      </p:sp>
-      <p:sp>
-        <p:nvSpPr>
-          <p:cNvPr id="34" name="Text 32"/>
-          <p:cNvSpPr/>
-          <p:nvPr/>
-        </p:nvSpPr>
-        <p:spPr>
-          <a:xfrm>
-            <a:off x="365760" y="4096512"/>
-            <a:ext cx="1371600" cy="804672"/>
-          </a:xfrm>
-          <a:prstGeom prst="rect">
-            <a:avLst/>
-          </a:prstGeom>
-          <a:noFill/>
-          <a:ln/>
-        </p:spPr>
-        <p:txBody>
-          <a:bodyPr wrap="square" lIns="0" tIns="0" rIns="0" bIns="0" rtlCol="0" anchor="ctr"/>
-          <a:lstStyle/>
-          <a:p>
-            <a:pPr algn="ctr" indent="0" marL="0">
-              <a:buNone/>
-            </a:pPr>
-            <a:r>
-              <a:rPr lang="en-US" sz="1100" b="1" dirty="0">
-                <a:solidFill>
-                  <a:srgbClr val="475569"/>
-                </a:solidFill>
-                <a:latin typeface="Trebuchet MS" pitchFamily="34" charset="0"/>
-                <a:ea typeface="Trebuchet MS" pitchFamily="34" charset="-122"/>
-                <a:cs typeface="Trebuchet MS" pitchFamily="34" charset="-120"/>
-              </a:rPr>
-              <a:t>Phonemes</a:t>
-            </a:r>
-            <a:endParaRPr lang="en-US" sz="1100" dirty="0"/>
-          </a:p>
-        </p:txBody>
-      </p:sp>
-      <p:sp>
-        <p:nvSpPr>
-          <p:cNvPr id="35" name="Shape 33"/>
-          <p:cNvSpPr/>
-          <p:nvPr/>
-        </p:nvSpPr>
-        <p:spPr>
-          <a:xfrm>
-            <a:off x="1874520" y="4096512"/>
-            <a:ext cx="6903720" cy="804672"/>
-          </a:xfrm>
-          <a:prstGeom prst="rect">
-            <a:avLst>
-              <a:gd name="adj" fmla="val 6818"/>
-            </a:avLst>
-          </a:prstGeom>
-          <a:solidFill>
-            <a:srgbClr val="F8FAFC"/>
-          </a:solidFill>
-          <a:ln w="12700">
-            <a:solidFill>
-              <a:srgbClr val="E2E8F0"/>
-            </a:solidFill>
             <a:prstDash val="dash"/>
           </a:ln>
         </p:spPr>
       </p:sp>
       <p:sp>
         <p:nvSpPr>
-          <p:cNvPr id="36" name="Text 34"/>
+          <p:cNvPr id="33" name="Text 31"/>
           <p:cNvSpPr/>
           <p:nvPr/>
         </p:nvSpPr>
@@ -14676,7 +14386,7 @@
                 <a:ea typeface="Trebuchet MS" pitchFamily="34" charset="-122"/>
                 <a:cs typeface="Trebuchet MS" pitchFamily="34" charset="-120"/>
               </a:rPr>
-              <a:t>sharpened</a:t>
+              <a:t>sharpness</a:t>
             </a:r>
             <a:endParaRPr lang="en-US" sz="2800" dirty="0"/>
           </a:p>
@@ -14756,7 +14466,7 @@
         </p:nvSpPr>
         <p:spPr>
           <a:xfrm>
-            <a:off x="2221992" y="2258568"/>
+            <a:off x="2938272" y="2258568"/>
             <a:ext cx="1828800" cy="292608"/>
           </a:xfrm>
           <a:prstGeom prst="rect">
@@ -14790,7 +14500,7 @@
         </p:nvSpPr>
         <p:spPr>
           <a:xfrm>
-            <a:off x="2221992" y="2258568"/>
+            <a:off x="2938272" y="2258568"/>
             <a:ext cx="1828800" cy="292608"/>
           </a:xfrm>
           <a:prstGeom prst="rect">
@@ -14829,7 +14539,7 @@
         </p:nvSpPr>
         <p:spPr>
           <a:xfrm>
-            <a:off x="2221992" y="2569464"/>
+            <a:off x="2938272" y="2569464"/>
             <a:ext cx="1828800" cy="201168"/>
           </a:xfrm>
           <a:prstGeom prst="rect">
@@ -14868,7 +14578,7 @@
         </p:nvSpPr>
         <p:spPr>
           <a:xfrm>
-            <a:off x="4370832" y="2258568"/>
+            <a:off x="5803392" y="2258568"/>
             <a:ext cx="1828800" cy="292608"/>
           </a:xfrm>
           <a:prstGeom prst="rect">
@@ -14902,7 +14612,7 @@
         </p:nvSpPr>
         <p:spPr>
           <a:xfrm>
-            <a:off x="4370832" y="2258568"/>
+            <a:off x="5803392" y="2258568"/>
             <a:ext cx="1828800" cy="292608"/>
           </a:xfrm>
           <a:prstGeom prst="rect">
@@ -14927,7 +14637,7 @@
                 <a:ea typeface="Trebuchet MS" pitchFamily="34" charset="-122"/>
                 <a:cs typeface="Trebuchet MS" pitchFamily="34" charset="-120"/>
               </a:rPr>
-              <a:t>en</a:t>
+              <a:t>ness</a:t>
             </a:r>
             <a:endParaRPr lang="en-US" sz="1300" dirty="0"/>
           </a:p>
@@ -14941,7 +14651,7 @@
         </p:nvSpPr>
         <p:spPr>
           <a:xfrm>
-            <a:off x="4370832" y="2569464"/>
+            <a:off x="5803392" y="2569464"/>
             <a:ext cx="1828800" cy="201168"/>
           </a:xfrm>
           <a:prstGeom prst="rect">
@@ -14966,7 +14676,7 @@
                 <a:ea typeface="Calibri" pitchFamily="34" charset="-122"/>
                 <a:cs typeface="Calibri" pitchFamily="34" charset="-120"/>
               </a:rPr>
-              <a:t>to make or become</a:t>
+              <a:t>the state or quality of</a:t>
             </a:r>
             <a:endParaRPr lang="en-US" sz="850" dirty="0"/>
           </a:p>
@@ -14980,30 +14690,23 @@
         </p:nvSpPr>
         <p:spPr>
           <a:xfrm>
-            <a:off x="6519672" y="2258568"/>
-            <a:ext cx="1828800" cy="292608"/>
+            <a:off x="365760" y="3273552"/>
+            <a:ext cx="1371600" cy="658368"/>
           </a:xfrm>
           <a:prstGeom prst="rect">
             <a:avLst>
-              <a:gd name="adj" fmla="val 25000"/>
+              <a:gd name="adj" fmla="val 8333"/>
             </a:avLst>
           </a:prstGeom>
           <a:solidFill>
-            <a:srgbClr val="FCE7F3"/>
-          </a:solidFill>
-          <a:ln w="19050">
-            <a:solidFill>
-              <a:srgbClr val="DB2777"/>
-            </a:solidFill>
-            <a:prstDash val="solid"/>
-          </a:ln>
-          <a:effectLst>
-            <a:outerShdw sx="100000" sy="100000" kx="0" ky="0" algn="bl" rotWithShape="0" blurRad="101600" dist="38100" dir="8100000">
-              <a:srgbClr val="000000">
-                <a:alpha val="12000"/>
-              </a:srgbClr>
-            </a:outerShdw>
-          </a:effectLst>
+            <a:srgbClr val="E2E8F0"/>
+          </a:solidFill>
+          <a:ln w="12700">
+            <a:solidFill>
+              <a:srgbClr val="E2E8F0"/>
+            </a:solidFill>
+            <a:prstDash val="solid"/>
+          </a:ln>
         </p:spPr>
       </p:sp>
       <p:sp>
@@ -15014,8 +14717,8 @@
         </p:nvSpPr>
         <p:spPr>
           <a:xfrm>
-            <a:off x="6519672" y="2258568"/>
-            <a:ext cx="1828800" cy="292608"/>
+            <a:off x="365760" y="3273552"/>
+            <a:ext cx="1371600" cy="658368"/>
           </a:xfrm>
           <a:prstGeom prst="rect">
             <a:avLst/>
@@ -15031,69 +14734,30 @@
               <a:buNone/>
             </a:pPr>
             <a:r>
-              <a:rPr lang="en-US" sz="1300" b="1" dirty="0">
-                <a:solidFill>
-                  <a:srgbClr val="9D174D"/>
+              <a:rPr lang="en-US" sz="1100" b="1" dirty="0">
+                <a:solidFill>
+                  <a:srgbClr val="475569"/>
                 </a:solidFill>
                 <a:latin typeface="Trebuchet MS" pitchFamily="34" charset="0"/>
                 <a:ea typeface="Trebuchet MS" pitchFamily="34" charset="-122"/>
                 <a:cs typeface="Trebuchet MS" pitchFamily="34" charset="-120"/>
               </a:rPr>
-              <a:t>ed</a:t>
-            </a:r>
-            <a:endParaRPr lang="en-US" sz="1300" dirty="0"/>
-          </a:p>
-        </p:txBody>
-      </p:sp>
-      <p:sp>
-        <p:nvSpPr>
-          <p:cNvPr id="24" name="Text 22"/>
-          <p:cNvSpPr/>
-          <p:nvPr/>
-        </p:nvSpPr>
-        <p:spPr>
-          <a:xfrm>
-            <a:off x="6519672" y="2569464"/>
-            <a:ext cx="1828800" cy="201168"/>
-          </a:xfrm>
-          <a:prstGeom prst="rect">
-            <a:avLst/>
-          </a:prstGeom>
-          <a:noFill/>
-          <a:ln/>
-        </p:spPr>
-        <p:txBody>
-          <a:bodyPr wrap="square" lIns="0" tIns="0" rIns="0" bIns="0" rtlCol="0" anchor="t"/>
-          <a:lstStyle/>
-          <a:p>
-            <a:pPr algn="ctr" indent="0" marL="0">
-              <a:buNone/>
-            </a:pPr>
-            <a:r>
-              <a:rPr lang="en-US" sz="850" dirty="0">
-                <a:solidFill>
-                  <a:srgbClr val="475569"/>
-                </a:solidFill>
-                <a:latin typeface="Calibri" pitchFamily="34" charset="0"/>
-                <a:ea typeface="Calibri" pitchFamily="34" charset="-122"/>
-                <a:cs typeface="Calibri" pitchFamily="34" charset="-120"/>
-              </a:rPr>
-              <a:t>past tense</a:t>
-            </a:r>
-            <a:endParaRPr lang="en-US" sz="850" dirty="0"/>
-          </a:p>
-        </p:txBody>
-      </p:sp>
-      <p:sp>
-        <p:nvSpPr>
-          <p:cNvPr id="25" name="Shape 23"/>
-          <p:cNvSpPr/>
-          <p:nvPr/>
-        </p:nvSpPr>
-        <p:spPr>
-          <a:xfrm>
-            <a:off x="365760" y="3273552"/>
-            <a:ext cx="1371600" cy="658368"/>
+              <a:t>Syllables</a:t>
+            </a:r>
+            <a:endParaRPr lang="en-US" sz="1100" dirty="0"/>
+          </a:p>
+        </p:txBody>
+      </p:sp>
+      <p:sp>
+        <p:nvSpPr>
+          <p:cNvPr id="24" name="Shape 22"/>
+          <p:cNvSpPr/>
+          <p:nvPr/>
+        </p:nvSpPr>
+        <p:spPr>
+          <a:xfrm>
+            <a:off x="1874520" y="3273552"/>
+            <a:ext cx="6903720" cy="658368"/>
           </a:xfrm>
           <a:prstGeom prst="rect">
             <a:avLst>
@@ -15101,11 +14765,38 @@
             </a:avLst>
           </a:prstGeom>
           <a:solidFill>
-            <a:srgbClr val="E2E8F0"/>
-          </a:solidFill>
-          <a:ln w="12700">
-            <a:solidFill>
-              <a:srgbClr val="E2E8F0"/>
+            <a:srgbClr val="CCFBF1"/>
+          </a:solidFill>
+          <a:ln w="12700">
+            <a:solidFill>
+              <a:srgbClr val="0D9488"/>
+            </a:solidFill>
+            <a:prstDash val="solid"/>
+          </a:ln>
+        </p:spPr>
+      </p:sp>
+      <p:sp>
+        <p:nvSpPr>
+          <p:cNvPr id="25" name="Shape 23"/>
+          <p:cNvSpPr/>
+          <p:nvPr/>
+        </p:nvSpPr>
+        <p:spPr>
+          <a:xfrm>
+            <a:off x="2999232" y="3364992"/>
+            <a:ext cx="1645920" cy="475488"/>
+          </a:xfrm>
+          <a:prstGeom prst="rect">
+            <a:avLst>
+              <a:gd name="adj" fmla="val 9615"/>
+            </a:avLst>
+          </a:prstGeom>
+          <a:solidFill>
+            <a:srgbClr val="FFFFFF"/>
+          </a:solidFill>
+          <a:ln w="12700">
+            <a:solidFill>
+              <a:srgbClr val="0D9488"/>
             </a:solidFill>
             <a:prstDash val="solid"/>
           </a:ln>
@@ -15119,8 +14810,8 @@
         </p:nvSpPr>
         <p:spPr>
           <a:xfrm>
-            <a:off x="365760" y="3273552"/>
-            <a:ext cx="1371600" cy="658368"/>
+            <a:off x="2999232" y="3364992"/>
+            <a:ext cx="1645920" cy="475488"/>
           </a:xfrm>
           <a:prstGeom prst="rect">
             <a:avLst/>
@@ -15136,15 +14827,186 @@
               <a:buNone/>
             </a:pPr>
             <a:r>
-              <a:rPr lang="en-US" sz="1100" b="1" dirty="0">
-                <a:solidFill>
-                  <a:srgbClr val="475569"/>
+              <a:rPr lang="en-US" sz="1400" b="1" dirty="0">
+                <a:solidFill>
+                  <a:srgbClr val="0D9488"/>
                 </a:solidFill>
                 <a:latin typeface="Trebuchet MS" pitchFamily="34" charset="0"/>
                 <a:ea typeface="Trebuchet MS" pitchFamily="34" charset="-122"/>
                 <a:cs typeface="Trebuchet MS" pitchFamily="34" charset="-120"/>
               </a:rPr>
-              <a:t>Syllables</a:t>
+              <a:t>sharp</a:t>
+            </a:r>
+            <a:endParaRPr lang="en-US" sz="1400" dirty="0"/>
+          </a:p>
+        </p:txBody>
+      </p:sp>
+      <p:sp>
+        <p:nvSpPr>
+          <p:cNvPr id="27" name="Text 25"/>
+          <p:cNvSpPr/>
+          <p:nvPr/>
+        </p:nvSpPr>
+        <p:spPr>
+          <a:xfrm>
+            <a:off x="4645152" y="3364992"/>
+            <a:ext cx="1097280" cy="475488"/>
+          </a:xfrm>
+          <a:prstGeom prst="rect">
+            <a:avLst/>
+          </a:prstGeom>
+          <a:noFill/>
+          <a:ln/>
+        </p:spPr>
+        <p:txBody>
+          <a:bodyPr wrap="square" lIns="0" tIns="0" rIns="0" bIns="0" rtlCol="0" anchor="ctr"/>
+          <a:lstStyle/>
+          <a:p>
+            <a:pPr algn="ctr" indent="0" marL="0">
+              <a:buNone/>
+            </a:pPr>
+            <a:r>
+              <a:rPr lang="en-US" sz="1600" b="1" dirty="0">
+                <a:solidFill>
+                  <a:srgbClr val="0D9488"/>
+                </a:solidFill>
+                <a:latin typeface="Trebuchet MS" pitchFamily="34" charset="0"/>
+                <a:ea typeface="Trebuchet MS" pitchFamily="34" charset="-122"/>
+                <a:cs typeface="Trebuchet MS" pitchFamily="34" charset="-120"/>
+              </a:rPr>
+              <a:t>·</a:t>
+            </a:r>
+            <a:endParaRPr lang="en-US" sz="1600" dirty="0"/>
+          </a:p>
+        </p:txBody>
+      </p:sp>
+      <p:sp>
+        <p:nvSpPr>
+          <p:cNvPr id="28" name="Shape 26"/>
+          <p:cNvSpPr/>
+          <p:nvPr/>
+        </p:nvSpPr>
+        <p:spPr>
+          <a:xfrm>
+            <a:off x="5742432" y="3364992"/>
+            <a:ext cx="1645920" cy="475488"/>
+          </a:xfrm>
+          <a:prstGeom prst="rect">
+            <a:avLst>
+              <a:gd name="adj" fmla="val 9615"/>
+            </a:avLst>
+          </a:prstGeom>
+          <a:solidFill>
+            <a:srgbClr val="FFFFFF"/>
+          </a:solidFill>
+          <a:ln w="12700">
+            <a:solidFill>
+              <a:srgbClr val="0D9488"/>
+            </a:solidFill>
+            <a:prstDash val="solid"/>
+          </a:ln>
+        </p:spPr>
+      </p:sp>
+      <p:sp>
+        <p:nvSpPr>
+          <p:cNvPr id="29" name="Text 27"/>
+          <p:cNvSpPr/>
+          <p:nvPr/>
+        </p:nvSpPr>
+        <p:spPr>
+          <a:xfrm>
+            <a:off x="5742432" y="3364992"/>
+            <a:ext cx="1645920" cy="475488"/>
+          </a:xfrm>
+          <a:prstGeom prst="rect">
+            <a:avLst/>
+          </a:prstGeom>
+          <a:noFill/>
+          <a:ln/>
+        </p:spPr>
+        <p:txBody>
+          <a:bodyPr wrap="square" lIns="0" tIns="0" rIns="0" bIns="0" rtlCol="0" anchor="ctr"/>
+          <a:lstStyle/>
+          <a:p>
+            <a:pPr algn="ctr" indent="0" marL="0">
+              <a:buNone/>
+            </a:pPr>
+            <a:r>
+              <a:rPr lang="en-US" sz="1400" b="1" dirty="0">
+                <a:solidFill>
+                  <a:srgbClr val="0D9488"/>
+                </a:solidFill>
+                <a:latin typeface="Trebuchet MS" pitchFamily="34" charset="0"/>
+                <a:ea typeface="Trebuchet MS" pitchFamily="34" charset="-122"/>
+                <a:cs typeface="Trebuchet MS" pitchFamily="34" charset="-120"/>
+              </a:rPr>
+              <a:t>ness</a:t>
+            </a:r>
+            <a:endParaRPr lang="en-US" sz="1400" dirty="0"/>
+          </a:p>
+        </p:txBody>
+      </p:sp>
+      <p:sp>
+        <p:nvSpPr>
+          <p:cNvPr id="30" name="Shape 28"/>
+          <p:cNvSpPr/>
+          <p:nvPr/>
+        </p:nvSpPr>
+        <p:spPr>
+          <a:xfrm>
+            <a:off x="365760" y="4096512"/>
+            <a:ext cx="1371600" cy="804672"/>
+          </a:xfrm>
+          <a:prstGeom prst="rect">
+            <a:avLst>
+              <a:gd name="adj" fmla="val 6818"/>
+            </a:avLst>
+          </a:prstGeom>
+          <a:solidFill>
+            <a:srgbClr val="E2E8F0"/>
+          </a:solidFill>
+          <a:ln w="12700">
+            <a:solidFill>
+              <a:srgbClr val="E2E8F0"/>
+            </a:solidFill>
+            <a:prstDash val="solid"/>
+          </a:ln>
+        </p:spPr>
+      </p:sp>
+      <p:sp>
+        <p:nvSpPr>
+          <p:cNvPr id="31" name="Text 29"/>
+          <p:cNvSpPr/>
+          <p:nvPr/>
+        </p:nvSpPr>
+        <p:spPr>
+          <a:xfrm>
+            <a:off x="365760" y="4096512"/>
+            <a:ext cx="1371600" cy="804672"/>
+          </a:xfrm>
+          <a:prstGeom prst="rect">
+            <a:avLst/>
+          </a:prstGeom>
+          <a:noFill/>
+          <a:ln/>
+        </p:spPr>
+        <p:txBody>
+          <a:bodyPr wrap="square" lIns="0" tIns="0" rIns="0" bIns="0" rtlCol="0" anchor="ctr"/>
+          <a:lstStyle/>
+          <a:p>
+            <a:pPr algn="ctr" indent="0" marL="0">
+              <a:buNone/>
+            </a:pPr>
+            <a:r>
+              <a:rPr lang="en-US" sz="1100" b="1" dirty="0">
+                <a:solidFill>
+                  <a:srgbClr val="475569"/>
+                </a:solidFill>
+                <a:latin typeface="Trebuchet MS" pitchFamily="34" charset="0"/>
+                <a:ea typeface="Trebuchet MS" pitchFamily="34" charset="-122"/>
+                <a:cs typeface="Trebuchet MS" pitchFamily="34" charset="-120"/>
+              </a:rPr>
+              <a:t>Phonemes</a:t>
             </a:r>
             <a:endParaRPr lang="en-US" sz="1100" dirty="0"/>
           </a:p>
@@ -15152,13 +15014,13 @@
       </p:sp>
       <p:sp>
         <p:nvSpPr>
-          <p:cNvPr id="27" name="Shape 25"/>
-          <p:cNvSpPr/>
-          <p:nvPr/>
-        </p:nvSpPr>
-        <p:spPr>
-          <a:xfrm>
-            <a:off x="1874520" y="3273552"/>
+          <p:cNvPr id="32" name="Shape 30"/>
+          <p:cNvSpPr/>
+          <p:nvPr/>
+        </p:nvSpPr>
+        <p:spPr>
+          <a:xfrm>
+            <a:off x="1874520" y="4096512"/>
             <a:ext cx="6903720" cy="658368"/>
           </a:xfrm>
           <a:prstGeom prst="rect">
@@ -15167,30 +15029,30 @@
             </a:avLst>
           </a:prstGeom>
           <a:solidFill>
-            <a:srgbClr val="CCFBF1"/>
-          </a:solidFill>
-          <a:ln w="12700">
-            <a:solidFill>
-              <a:srgbClr val="0D9488"/>
-            </a:solidFill>
-            <a:prstDash val="solid"/>
-          </a:ln>
-        </p:spPr>
-      </p:sp>
-      <p:sp>
-        <p:nvSpPr>
-          <p:cNvPr id="28" name="Shape 26"/>
-          <p:cNvSpPr/>
-          <p:nvPr/>
-        </p:nvSpPr>
-        <p:spPr>
-          <a:xfrm>
-            <a:off x="2999232" y="3364992"/>
-            <a:ext cx="1645920" cy="475488"/>
+            <a:srgbClr val="FCE7F3"/>
+          </a:solidFill>
+          <a:ln w="12700">
+            <a:solidFill>
+              <a:srgbClr val="DB2777"/>
+            </a:solidFill>
+            <a:prstDash val="solid"/>
+          </a:ln>
+        </p:spPr>
+      </p:sp>
+      <p:sp>
+        <p:nvSpPr>
+          <p:cNvPr id="33" name="Shape 31"/>
+          <p:cNvSpPr/>
+          <p:nvPr/>
+        </p:nvSpPr>
+        <p:spPr>
+          <a:xfrm>
+            <a:off x="2254649" y="4169664"/>
+            <a:ext cx="685800" cy="475488"/>
           </a:xfrm>
           <a:prstGeom prst="rect">
             <a:avLst>
-              <a:gd name="adj" fmla="val 9615"/>
+              <a:gd name="adj" fmla="val 7692"/>
             </a:avLst>
           </a:prstGeom>
           <a:solidFill>
@@ -15198,22 +15060,22 @@
           </a:solidFill>
           <a:ln w="12700">
             <a:solidFill>
-              <a:srgbClr val="0D9488"/>
-            </a:solidFill>
-            <a:prstDash val="solid"/>
-          </a:ln>
-        </p:spPr>
-      </p:sp>
-      <p:sp>
-        <p:nvSpPr>
-          <p:cNvPr id="29" name="Text 27"/>
-          <p:cNvSpPr/>
-          <p:nvPr/>
-        </p:nvSpPr>
-        <p:spPr>
-          <a:xfrm>
-            <a:off x="2999232" y="3364992"/>
-            <a:ext cx="1645920" cy="475488"/>
+              <a:srgbClr val="DB2777"/>
+            </a:solidFill>
+            <a:prstDash val="solid"/>
+          </a:ln>
+        </p:spPr>
+      </p:sp>
+      <p:sp>
+        <p:nvSpPr>
+          <p:cNvPr id="34" name="Text 32"/>
+          <p:cNvSpPr/>
+          <p:nvPr/>
+        </p:nvSpPr>
+        <p:spPr>
+          <a:xfrm>
+            <a:off x="2254649" y="4169664"/>
+            <a:ext cx="685800" cy="475488"/>
           </a:xfrm>
           <a:prstGeom prst="rect">
             <a:avLst/>
@@ -15229,30 +15091,57 @@
               <a:buNone/>
             </a:pPr>
             <a:r>
-              <a:rPr lang="en-US" sz="1400" b="1" dirty="0">
-                <a:solidFill>
-                  <a:srgbClr val="0D9488"/>
+              <a:rPr lang="en-US" sz="900" b="1" dirty="0">
+                <a:solidFill>
+                  <a:srgbClr val="9D174D"/>
                 </a:solidFill>
                 <a:latin typeface="Trebuchet MS" pitchFamily="34" charset="0"/>
                 <a:ea typeface="Trebuchet MS" pitchFamily="34" charset="-122"/>
                 <a:cs typeface="Trebuchet MS" pitchFamily="34" charset="-120"/>
               </a:rPr>
-              <a:t>sharp</a:t>
-            </a:r>
-            <a:endParaRPr lang="en-US" sz="1400" dirty="0"/>
-          </a:p>
-        </p:txBody>
-      </p:sp>
-      <p:sp>
-        <p:nvSpPr>
-          <p:cNvPr id="30" name="Text 28"/>
-          <p:cNvSpPr/>
-          <p:nvPr/>
-        </p:nvSpPr>
-        <p:spPr>
-          <a:xfrm>
-            <a:off x="4645152" y="3364992"/>
-            <a:ext cx="1097280" cy="475488"/>
+              <a:t>sh</a:t>
+            </a:r>
+            <a:endParaRPr lang="en-US" sz="900" dirty="0"/>
+          </a:p>
+        </p:txBody>
+      </p:sp>
+      <p:sp>
+        <p:nvSpPr>
+          <p:cNvPr id="35" name="Shape 33"/>
+          <p:cNvSpPr/>
+          <p:nvPr/>
+        </p:nvSpPr>
+        <p:spPr>
+          <a:xfrm>
+            <a:off x="3293146" y="4169664"/>
+            <a:ext cx="685800" cy="475488"/>
+          </a:xfrm>
+          <a:prstGeom prst="rect">
+            <a:avLst>
+              <a:gd name="adj" fmla="val 7692"/>
+            </a:avLst>
+          </a:prstGeom>
+          <a:solidFill>
+            <a:srgbClr val="FFFFFF"/>
+          </a:solidFill>
+          <a:ln w="12700">
+            <a:solidFill>
+              <a:srgbClr val="DB2777"/>
+            </a:solidFill>
+            <a:prstDash val="solid"/>
+          </a:ln>
+        </p:spPr>
+      </p:sp>
+      <p:sp>
+        <p:nvSpPr>
+          <p:cNvPr id="36" name="Text 34"/>
+          <p:cNvSpPr/>
+          <p:nvPr/>
+        </p:nvSpPr>
+        <p:spPr>
+          <a:xfrm>
+            <a:off x="3293146" y="4169664"/>
+            <a:ext cx="685800" cy="475488"/>
           </a:xfrm>
           <a:prstGeom prst="rect">
             <a:avLst/>
@@ -15268,34 +15157,34 @@
               <a:buNone/>
             </a:pPr>
             <a:r>
-              <a:rPr lang="en-US" sz="1600" b="1" dirty="0">
-                <a:solidFill>
-                  <a:srgbClr val="0D9488"/>
+              <a:rPr lang="en-US" sz="900" b="1" dirty="0">
+                <a:solidFill>
+                  <a:srgbClr val="9D174D"/>
                 </a:solidFill>
                 <a:latin typeface="Trebuchet MS" pitchFamily="34" charset="0"/>
                 <a:ea typeface="Trebuchet MS" pitchFamily="34" charset="-122"/>
                 <a:cs typeface="Trebuchet MS" pitchFamily="34" charset="-120"/>
               </a:rPr>
-              <a:t>·</a:t>
-            </a:r>
-            <a:endParaRPr lang="en-US" sz="1600" dirty="0"/>
-          </a:p>
-        </p:txBody>
-      </p:sp>
-      <p:sp>
-        <p:nvSpPr>
-          <p:cNvPr id="31" name="Shape 29"/>
-          <p:cNvSpPr/>
-          <p:nvPr/>
-        </p:nvSpPr>
-        <p:spPr>
-          <a:xfrm>
-            <a:off x="5742432" y="3364992"/>
-            <a:ext cx="1645920" cy="475488"/>
+              <a:t>ar</a:t>
+            </a:r>
+            <a:endParaRPr lang="en-US" sz="900" dirty="0"/>
+          </a:p>
+        </p:txBody>
+      </p:sp>
+      <p:sp>
+        <p:nvSpPr>
+          <p:cNvPr id="37" name="Shape 35"/>
+          <p:cNvSpPr/>
+          <p:nvPr/>
+        </p:nvSpPr>
+        <p:spPr>
+          <a:xfrm>
+            <a:off x="4331643" y="4169664"/>
+            <a:ext cx="685800" cy="475488"/>
           </a:xfrm>
           <a:prstGeom prst="rect">
             <a:avLst>
-              <a:gd name="adj" fmla="val 9615"/>
+              <a:gd name="adj" fmla="val 7692"/>
             </a:avLst>
           </a:prstGeom>
           <a:solidFill>
@@ -15303,22 +15192,22 @@
           </a:solidFill>
           <a:ln w="12700">
             <a:solidFill>
-              <a:srgbClr val="0D9488"/>
-            </a:solidFill>
-            <a:prstDash val="solid"/>
-          </a:ln>
-        </p:spPr>
-      </p:sp>
-      <p:sp>
-        <p:nvSpPr>
-          <p:cNvPr id="32" name="Text 30"/>
-          <p:cNvSpPr/>
-          <p:nvPr/>
-        </p:nvSpPr>
-        <p:spPr>
-          <a:xfrm>
-            <a:off x="5742432" y="3364992"/>
-            <a:ext cx="1645920" cy="475488"/>
+              <a:srgbClr val="DB2777"/>
+            </a:solidFill>
+            <a:prstDash val="solid"/>
+          </a:ln>
+        </p:spPr>
+      </p:sp>
+      <p:sp>
+        <p:nvSpPr>
+          <p:cNvPr id="38" name="Text 36"/>
+          <p:cNvSpPr/>
+          <p:nvPr/>
+        </p:nvSpPr>
+        <p:spPr>
+          <a:xfrm>
+            <a:off x="4331643" y="4169664"/>
+            <a:ext cx="685800" cy="475488"/>
           </a:xfrm>
           <a:prstGeom prst="rect">
             <a:avLst/>
@@ -15334,57 +15223,57 @@
               <a:buNone/>
             </a:pPr>
             <a:r>
-              <a:rPr lang="en-US" sz="1400" b="1" dirty="0">
-                <a:solidFill>
-                  <a:srgbClr val="0D9488"/>
+              <a:rPr lang="en-US" sz="900" b="1" dirty="0">
+                <a:solidFill>
+                  <a:srgbClr val="9D174D"/>
                 </a:solidFill>
                 <a:latin typeface="Trebuchet MS" pitchFamily="34" charset="0"/>
                 <a:ea typeface="Trebuchet MS" pitchFamily="34" charset="-122"/>
                 <a:cs typeface="Trebuchet MS" pitchFamily="34" charset="-120"/>
               </a:rPr>
-              <a:t>ened</a:t>
-            </a:r>
-            <a:endParaRPr lang="en-US" sz="1400" dirty="0"/>
-          </a:p>
-        </p:txBody>
-      </p:sp>
-      <p:sp>
-        <p:nvSpPr>
-          <p:cNvPr id="33" name="Shape 31"/>
-          <p:cNvSpPr/>
-          <p:nvPr/>
-        </p:nvSpPr>
-        <p:spPr>
-          <a:xfrm>
-            <a:off x="365760" y="4096512"/>
-            <a:ext cx="1371600" cy="804672"/>
+              <a:t>p</a:t>
+            </a:r>
+            <a:endParaRPr lang="en-US" sz="900" dirty="0"/>
+          </a:p>
+        </p:txBody>
+      </p:sp>
+      <p:sp>
+        <p:nvSpPr>
+          <p:cNvPr id="39" name="Shape 37"/>
+          <p:cNvSpPr/>
+          <p:nvPr/>
+        </p:nvSpPr>
+        <p:spPr>
+          <a:xfrm>
+            <a:off x="5370141" y="4169664"/>
+            <a:ext cx="685800" cy="475488"/>
           </a:xfrm>
           <a:prstGeom prst="rect">
             <a:avLst>
-              <a:gd name="adj" fmla="val 6818"/>
+              <a:gd name="adj" fmla="val 7692"/>
             </a:avLst>
           </a:prstGeom>
           <a:solidFill>
-            <a:srgbClr val="E2E8F0"/>
-          </a:solidFill>
-          <a:ln w="12700">
-            <a:solidFill>
-              <a:srgbClr val="E2E8F0"/>
-            </a:solidFill>
-            <a:prstDash val="solid"/>
-          </a:ln>
-        </p:spPr>
-      </p:sp>
-      <p:sp>
-        <p:nvSpPr>
-          <p:cNvPr id="34" name="Text 32"/>
-          <p:cNvSpPr/>
-          <p:nvPr/>
-        </p:nvSpPr>
-        <p:spPr>
-          <a:xfrm>
-            <a:off x="365760" y="4096512"/>
-            <a:ext cx="1371600" cy="804672"/>
+            <a:srgbClr val="FFFFFF"/>
+          </a:solidFill>
+          <a:ln w="12700">
+            <a:solidFill>
+              <a:srgbClr val="DB2777"/>
+            </a:solidFill>
+            <a:prstDash val="solid"/>
+          </a:ln>
+        </p:spPr>
+      </p:sp>
+      <p:sp>
+        <p:nvSpPr>
+          <p:cNvPr id="40" name="Text 38"/>
+          <p:cNvSpPr/>
+          <p:nvPr/>
+        </p:nvSpPr>
+        <p:spPr>
+          <a:xfrm>
+            <a:off x="5370141" y="4169664"/>
+            <a:ext cx="685800" cy="475488"/>
           </a:xfrm>
           <a:prstGeom prst="rect">
             <a:avLst/>
@@ -15400,56 +15289,29 @@
               <a:buNone/>
             </a:pPr>
             <a:r>
-              <a:rPr lang="en-US" sz="1100" b="1" dirty="0">
-                <a:solidFill>
-                  <a:srgbClr val="475569"/>
+              <a:rPr lang="en-US" sz="900" b="1" dirty="0">
+                <a:solidFill>
+                  <a:srgbClr val="9D174D"/>
                 </a:solidFill>
                 <a:latin typeface="Trebuchet MS" pitchFamily="34" charset="0"/>
                 <a:ea typeface="Trebuchet MS" pitchFamily="34" charset="-122"/>
                 <a:cs typeface="Trebuchet MS" pitchFamily="34" charset="-120"/>
               </a:rPr>
-              <a:t>Phonemes</a:t>
-            </a:r>
-            <a:endParaRPr lang="en-US" sz="1100" dirty="0"/>
-          </a:p>
-        </p:txBody>
-      </p:sp>
-      <p:sp>
-        <p:nvSpPr>
-          <p:cNvPr id="35" name="Shape 33"/>
-          <p:cNvSpPr/>
-          <p:nvPr/>
-        </p:nvSpPr>
-        <p:spPr>
-          <a:xfrm>
-            <a:off x="1874520" y="4096512"/>
-            <a:ext cx="6903720" cy="658368"/>
-          </a:xfrm>
-          <a:prstGeom prst="rect">
-            <a:avLst>
-              <a:gd name="adj" fmla="val 8333"/>
-            </a:avLst>
-          </a:prstGeom>
-          <a:solidFill>
-            <a:srgbClr val="FCE7F3"/>
-          </a:solidFill>
-          <a:ln w="12700">
-            <a:solidFill>
-              <a:srgbClr val="DB2777"/>
-            </a:solidFill>
-            <a:prstDash val="solid"/>
-          </a:ln>
-        </p:spPr>
-      </p:sp>
-      <p:sp>
-        <p:nvSpPr>
-          <p:cNvPr id="36" name="Shape 34"/>
-          <p:cNvSpPr/>
-          <p:nvPr/>
-        </p:nvSpPr>
-        <p:spPr>
-          <a:xfrm>
-            <a:off x="2254649" y="4169664"/>
+              <a:t>n</a:t>
+            </a:r>
+            <a:endParaRPr lang="en-US" sz="900" dirty="0"/>
+          </a:p>
+        </p:txBody>
+      </p:sp>
+      <p:sp>
+        <p:nvSpPr>
+          <p:cNvPr id="41" name="Shape 39"/>
+          <p:cNvSpPr/>
+          <p:nvPr/>
+        </p:nvSpPr>
+        <p:spPr>
+          <a:xfrm>
+            <a:off x="6408638" y="4169664"/>
             <a:ext cx="685800" cy="475488"/>
           </a:xfrm>
           <a:prstGeom prst="rect">
@@ -15470,13 +15332,13 @@
       </p:sp>
       <p:sp>
         <p:nvSpPr>
-          <p:cNvPr id="37" name="Text 35"/>
-          <p:cNvSpPr/>
-          <p:nvPr/>
-        </p:nvSpPr>
-        <p:spPr>
-          <a:xfrm>
-            <a:off x="2254649" y="4169664"/>
+          <p:cNvPr id="42" name="Text 40"/>
+          <p:cNvSpPr/>
+          <p:nvPr/>
+        </p:nvSpPr>
+        <p:spPr>
+          <a:xfrm>
+            <a:off x="6408638" y="4169664"/>
             <a:ext cx="685800" cy="475488"/>
           </a:xfrm>
           <a:prstGeom prst="rect">
@@ -15501,7 +15363,7 @@
                 <a:ea typeface="Trebuchet MS" pitchFamily="34" charset="-122"/>
                 <a:cs typeface="Trebuchet MS" pitchFamily="34" charset="-120"/>
               </a:rPr>
-              <a:t>sh</a:t>
+              <a:t>e</a:t>
             </a:r>
             <a:endParaRPr lang="en-US" sz="900" dirty="0"/>
           </a:p>
@@ -15509,13 +15371,13 @@
       </p:sp>
       <p:sp>
         <p:nvSpPr>
-          <p:cNvPr id="38" name="Shape 36"/>
-          <p:cNvSpPr/>
-          <p:nvPr/>
-        </p:nvSpPr>
-        <p:spPr>
-          <a:xfrm>
-            <a:off x="3293146" y="4169664"/>
+          <p:cNvPr id="43" name="Shape 41"/>
+          <p:cNvSpPr/>
+          <p:nvPr/>
+        </p:nvSpPr>
+        <p:spPr>
+          <a:xfrm>
+            <a:off x="7447135" y="4169664"/>
             <a:ext cx="685800" cy="475488"/>
           </a:xfrm>
           <a:prstGeom prst="rect">
@@ -15536,13 +15398,13 @@
       </p:sp>
       <p:sp>
         <p:nvSpPr>
-          <p:cNvPr id="39" name="Text 37"/>
-          <p:cNvSpPr/>
-          <p:nvPr/>
-        </p:nvSpPr>
-        <p:spPr>
-          <a:xfrm>
-            <a:off x="3293146" y="4169664"/>
+          <p:cNvPr id="44" name="Text 42"/>
+          <p:cNvSpPr/>
+          <p:nvPr/>
+        </p:nvSpPr>
+        <p:spPr>
+          <a:xfrm>
+            <a:off x="7447135" y="4169664"/>
             <a:ext cx="685800" cy="475488"/>
           </a:xfrm>
           <a:prstGeom prst="rect">
@@ -15567,271 +15429,7 @@
                 <a:ea typeface="Trebuchet MS" pitchFamily="34" charset="-122"/>
                 <a:cs typeface="Trebuchet MS" pitchFamily="34" charset="-120"/>
               </a:rPr>
-              <a:t>ar</a:t>
-            </a:r>
-            <a:endParaRPr lang="en-US" sz="900" dirty="0"/>
-          </a:p>
-        </p:txBody>
-      </p:sp>
-      <p:sp>
-        <p:nvSpPr>
-          <p:cNvPr id="40" name="Shape 38"/>
-          <p:cNvSpPr/>
-          <p:nvPr/>
-        </p:nvSpPr>
-        <p:spPr>
-          <a:xfrm>
-            <a:off x="4331643" y="4169664"/>
-            <a:ext cx="685800" cy="475488"/>
-          </a:xfrm>
-          <a:prstGeom prst="rect">
-            <a:avLst>
-              <a:gd name="adj" fmla="val 7692"/>
-            </a:avLst>
-          </a:prstGeom>
-          <a:solidFill>
-            <a:srgbClr val="FFFFFF"/>
-          </a:solidFill>
-          <a:ln w="12700">
-            <a:solidFill>
-              <a:srgbClr val="DB2777"/>
-            </a:solidFill>
-            <a:prstDash val="solid"/>
-          </a:ln>
-        </p:spPr>
-      </p:sp>
-      <p:sp>
-        <p:nvSpPr>
-          <p:cNvPr id="41" name="Text 39"/>
-          <p:cNvSpPr/>
-          <p:nvPr/>
-        </p:nvSpPr>
-        <p:spPr>
-          <a:xfrm>
-            <a:off x="4331643" y="4169664"/>
-            <a:ext cx="685800" cy="475488"/>
-          </a:xfrm>
-          <a:prstGeom prst="rect">
-            <a:avLst/>
-          </a:prstGeom>
-          <a:noFill/>
-          <a:ln/>
-        </p:spPr>
-        <p:txBody>
-          <a:bodyPr wrap="square" lIns="0" tIns="0" rIns="0" bIns="0" rtlCol="0" anchor="ctr"/>
-          <a:lstStyle/>
-          <a:p>
-            <a:pPr algn="ctr" indent="0" marL="0">
-              <a:buNone/>
-            </a:pPr>
-            <a:r>
-              <a:rPr lang="en-US" sz="900" b="1" dirty="0">
-                <a:solidFill>
-                  <a:srgbClr val="9D174D"/>
-                </a:solidFill>
-                <a:latin typeface="Trebuchet MS" pitchFamily="34" charset="0"/>
-                <a:ea typeface="Trebuchet MS" pitchFamily="34" charset="-122"/>
-                <a:cs typeface="Trebuchet MS" pitchFamily="34" charset="-120"/>
-              </a:rPr>
-              <a:t>p</a:t>
-            </a:r>
-            <a:endParaRPr lang="en-US" sz="900" dirty="0"/>
-          </a:p>
-        </p:txBody>
-      </p:sp>
-      <p:sp>
-        <p:nvSpPr>
-          <p:cNvPr id="42" name="Shape 40"/>
-          <p:cNvSpPr/>
-          <p:nvPr/>
-        </p:nvSpPr>
-        <p:spPr>
-          <a:xfrm>
-            <a:off x="5370141" y="4169664"/>
-            <a:ext cx="685800" cy="475488"/>
-          </a:xfrm>
-          <a:prstGeom prst="rect">
-            <a:avLst>
-              <a:gd name="adj" fmla="val 7692"/>
-            </a:avLst>
-          </a:prstGeom>
-          <a:solidFill>
-            <a:srgbClr val="FFFFFF"/>
-          </a:solidFill>
-          <a:ln w="12700">
-            <a:solidFill>
-              <a:srgbClr val="DB2777"/>
-            </a:solidFill>
-            <a:prstDash val="solid"/>
-          </a:ln>
-        </p:spPr>
-      </p:sp>
-      <p:sp>
-        <p:nvSpPr>
-          <p:cNvPr id="43" name="Text 41"/>
-          <p:cNvSpPr/>
-          <p:nvPr/>
-        </p:nvSpPr>
-        <p:spPr>
-          <a:xfrm>
-            <a:off x="5370141" y="4169664"/>
-            <a:ext cx="685800" cy="475488"/>
-          </a:xfrm>
-          <a:prstGeom prst="rect">
-            <a:avLst/>
-          </a:prstGeom>
-          <a:noFill/>
-          <a:ln/>
-        </p:spPr>
-        <p:txBody>
-          <a:bodyPr wrap="square" lIns="0" tIns="0" rIns="0" bIns="0" rtlCol="0" anchor="ctr"/>
-          <a:lstStyle/>
-          <a:p>
-            <a:pPr algn="ctr" indent="0" marL="0">
-              <a:buNone/>
-            </a:pPr>
-            <a:r>
-              <a:rPr lang="en-US" sz="900" b="1" dirty="0">
-                <a:solidFill>
-                  <a:srgbClr val="9D174D"/>
-                </a:solidFill>
-                <a:latin typeface="Trebuchet MS" pitchFamily="34" charset="0"/>
-                <a:ea typeface="Trebuchet MS" pitchFamily="34" charset="-122"/>
-                <a:cs typeface="Trebuchet MS" pitchFamily="34" charset="-120"/>
-              </a:rPr>
-              <a:t>e</a:t>
-            </a:r>
-            <a:endParaRPr lang="en-US" sz="900" dirty="0"/>
-          </a:p>
-        </p:txBody>
-      </p:sp>
-      <p:sp>
-        <p:nvSpPr>
-          <p:cNvPr id="44" name="Shape 42"/>
-          <p:cNvSpPr/>
-          <p:nvPr/>
-        </p:nvSpPr>
-        <p:spPr>
-          <a:xfrm>
-            <a:off x="6408638" y="4169664"/>
-            <a:ext cx="685800" cy="475488"/>
-          </a:xfrm>
-          <a:prstGeom prst="rect">
-            <a:avLst>
-              <a:gd name="adj" fmla="val 7692"/>
-            </a:avLst>
-          </a:prstGeom>
-          <a:solidFill>
-            <a:srgbClr val="FFFFFF"/>
-          </a:solidFill>
-          <a:ln w="12700">
-            <a:solidFill>
-              <a:srgbClr val="DB2777"/>
-            </a:solidFill>
-            <a:prstDash val="solid"/>
-          </a:ln>
-        </p:spPr>
-      </p:sp>
-      <p:sp>
-        <p:nvSpPr>
-          <p:cNvPr id="45" name="Text 43"/>
-          <p:cNvSpPr/>
-          <p:nvPr/>
-        </p:nvSpPr>
-        <p:spPr>
-          <a:xfrm>
-            <a:off x="6408638" y="4169664"/>
-            <a:ext cx="685800" cy="475488"/>
-          </a:xfrm>
-          <a:prstGeom prst="rect">
-            <a:avLst/>
-          </a:prstGeom>
-          <a:noFill/>
-          <a:ln/>
-        </p:spPr>
-        <p:txBody>
-          <a:bodyPr wrap="square" lIns="0" tIns="0" rIns="0" bIns="0" rtlCol="0" anchor="ctr"/>
-          <a:lstStyle/>
-          <a:p>
-            <a:pPr algn="ctr" indent="0" marL="0">
-              <a:buNone/>
-            </a:pPr>
-            <a:r>
-              <a:rPr lang="en-US" sz="900" b="1" dirty="0">
-                <a:solidFill>
-                  <a:srgbClr val="9D174D"/>
-                </a:solidFill>
-                <a:latin typeface="Trebuchet MS" pitchFamily="34" charset="0"/>
-                <a:ea typeface="Trebuchet MS" pitchFamily="34" charset="-122"/>
-                <a:cs typeface="Trebuchet MS" pitchFamily="34" charset="-120"/>
-              </a:rPr>
-              <a:t>n</a:t>
-            </a:r>
-            <a:endParaRPr lang="en-US" sz="900" dirty="0"/>
-          </a:p>
-        </p:txBody>
-      </p:sp>
-      <p:sp>
-        <p:nvSpPr>
-          <p:cNvPr id="46" name="Shape 44"/>
-          <p:cNvSpPr/>
-          <p:nvPr/>
-        </p:nvSpPr>
-        <p:spPr>
-          <a:xfrm>
-            <a:off x="7447135" y="4169664"/>
-            <a:ext cx="685800" cy="475488"/>
-          </a:xfrm>
-          <a:prstGeom prst="rect">
-            <a:avLst>
-              <a:gd name="adj" fmla="val 7692"/>
-            </a:avLst>
-          </a:prstGeom>
-          <a:solidFill>
-            <a:srgbClr val="FFFFFF"/>
-          </a:solidFill>
-          <a:ln w="12700">
-            <a:solidFill>
-              <a:srgbClr val="DB2777"/>
-            </a:solidFill>
-            <a:prstDash val="solid"/>
-          </a:ln>
-        </p:spPr>
-      </p:sp>
-      <p:sp>
-        <p:nvSpPr>
-          <p:cNvPr id="47" name="Text 45"/>
-          <p:cNvSpPr/>
-          <p:nvPr/>
-        </p:nvSpPr>
-        <p:spPr>
-          <a:xfrm>
-            <a:off x="7447135" y="4169664"/>
-            <a:ext cx="685800" cy="475488"/>
-          </a:xfrm>
-          <a:prstGeom prst="rect">
-            <a:avLst/>
-          </a:prstGeom>
-          <a:noFill/>
-          <a:ln/>
-        </p:spPr>
-        <p:txBody>
-          <a:bodyPr wrap="square" lIns="0" tIns="0" rIns="0" bIns="0" rtlCol="0" anchor="ctr"/>
-          <a:lstStyle/>
-          <a:p>
-            <a:pPr algn="ctr" indent="0" marL="0">
-              <a:buNone/>
-            </a:pPr>
-            <a:r>
-              <a:rPr lang="en-US" sz="900" b="1" dirty="0">
-                <a:solidFill>
-                  <a:srgbClr val="9D174D"/>
-                </a:solidFill>
-                <a:latin typeface="Trebuchet MS" pitchFamily="34" charset="0"/>
-                <a:ea typeface="Trebuchet MS" pitchFamily="34" charset="-122"/>
-                <a:cs typeface="Trebuchet MS" pitchFamily="34" charset="-120"/>
-              </a:rPr>
-              <a:t>ed</a:t>
+              <a:t>ss</a:t>
             </a:r>
             <a:endParaRPr lang="en-US" sz="900" dirty="0"/>
           </a:p>
@@ -17157,7 +16755,7 @@
                 <a:ea typeface="Calibri" pitchFamily="34" charset="-122"/>
                 <a:cs typeface="Calibri" pitchFamily="34" charset="-120"/>
               </a:rPr>
-              <a:t>She </a:t>
+              <a:t>She used the </a:t>
             </a:r>
             <a:pPr algn="l" indent="0" marL="0">
               <a:buNone/>
@@ -17174,7 +16772,7 @@
                 <a:ea typeface="Calibri" pitchFamily="34" charset="-122"/>
                 <a:cs typeface="Calibri" pitchFamily="34" charset="-120"/>
               </a:rPr>
-              <a:t>sharply</a:t>
+              <a:t>sharpener</a:t>
             </a:r>
             <a:pPr algn="l" indent="0" marL="0">
               <a:buNone/>
@@ -17188,7 +16786,7 @@
                 <a:ea typeface="Calibri" pitchFamily="34" charset="-122"/>
                 <a:cs typeface="Calibri" pitchFamily="34" charset="-120"/>
               </a:rPr>
-              <a:t> reminded us that the </a:t>
+              <a:t> carefully, then </a:t>
             </a:r>
             <a:pPr algn="l" indent="0" marL="0">
               <a:buNone/>
@@ -17205,7 +16803,7 @@
                 <a:ea typeface="Calibri" pitchFamily="34" charset="-122"/>
                 <a:cs typeface="Calibri" pitchFamily="34" charset="-120"/>
               </a:rPr>
-              <a:t>sharpener</a:t>
+              <a:t>sharpened</a:t>
             </a:r>
             <a:pPr algn="l" indent="0" marL="0">
               <a:buNone/>
@@ -17219,7 +16817,7 @@
                 <a:ea typeface="Calibri" pitchFamily="34" charset="-122"/>
                 <a:cs typeface="Calibri" pitchFamily="34" charset="-120"/>
               </a:rPr>
-              <a:t> was missing, but we still managed to </a:t>
+              <a:t> her pencil until it was the </a:t>
             </a:r>
             <a:pPr algn="l" indent="0" marL="0">
               <a:buNone/>
@@ -17236,7 +16834,7 @@
                 <a:ea typeface="Calibri" pitchFamily="34" charset="-122"/>
                 <a:cs typeface="Calibri" pitchFamily="34" charset="-120"/>
               </a:rPr>
-              <a:t>sharpen</a:t>
+              <a:t>sharpest</a:t>
             </a:r>
             <a:pPr algn="l" indent="0" marL="0">
               <a:buNone/>
@@ -17250,7 +16848,7 @@
                 <a:ea typeface="Calibri" pitchFamily="34" charset="-122"/>
                 <a:cs typeface="Calibri" pitchFamily="34" charset="-120"/>
               </a:rPr>
-              <a:t> our pencils before class.</a:t>
+              <a:t> one in the classroom.</a:t>
             </a:r>
             <a:endParaRPr lang="en-US" sz="1800" dirty="0"/>
           </a:p>
@@ -17405,7 +17003,7 @@
                 <a:ea typeface="Trebuchet MS" pitchFamily="34" charset="-122"/>
                 <a:cs typeface="Trebuchet MS" pitchFamily="34" charset="-120"/>
               </a:rPr>
-              <a:t>sharply</a:t>
+              <a:t>sharpener</a:t>
             </a:r>
             <a:endParaRPr lang="en-US" sz="1400" dirty="0"/>
           </a:p>
@@ -17533,7 +17131,7 @@
                 <a:ea typeface="Trebuchet MS" pitchFamily="34" charset="-122"/>
                 <a:cs typeface="Trebuchet MS" pitchFamily="34" charset="-120"/>
               </a:rPr>
-              <a:t>sharpener</a:t>
+              <a:t>sharpened</a:t>
             </a:r>
             <a:endParaRPr lang="en-US" sz="1400" dirty="0"/>
           </a:p>
@@ -17661,7 +17259,7 @@
                 <a:ea typeface="Trebuchet MS" pitchFamily="34" charset="-122"/>
                 <a:cs typeface="Trebuchet MS" pitchFamily="34" charset="-120"/>
               </a:rPr>
-              <a:t>sharpen</a:t>
+              <a:t>sharpest</a:t>
             </a:r>
             <a:endParaRPr lang="en-US" sz="1400" dirty="0"/>
           </a:p>
@@ -18131,7 +17729,7 @@
                 <a:ea typeface="Trebuchet MS" pitchFamily="34" charset="-122"/>
                 <a:cs typeface="Trebuchet MS" pitchFamily="34" charset="-120"/>
               </a:rPr>
-              <a:t>sharply</a:t>
+              <a:t>sharpener</a:t>
             </a:r>
             <a:endParaRPr lang="en-US" sz="2800" dirty="0"/>
           </a:p>
@@ -18958,7 +18556,7 @@
                 <a:ea typeface="Trebuchet MS" pitchFamily="34" charset="-122"/>
                 <a:cs typeface="Trebuchet MS" pitchFamily="34" charset="-120"/>
               </a:rPr>
-              <a:t>sharply</a:t>
+              <a:t>sharpener</a:t>
             </a:r>
             <a:endParaRPr lang="en-US" sz="2800" dirty="0"/>
           </a:p>
@@ -19038,7 +18636,7 @@
         </p:nvSpPr>
         <p:spPr>
           <a:xfrm>
-            <a:off x="2938272" y="2258568"/>
+            <a:off x="2221992" y="2258568"/>
             <a:ext cx="1828800" cy="292608"/>
           </a:xfrm>
           <a:prstGeom prst="rect">
@@ -19072,7 +18670,7 @@
         </p:nvSpPr>
         <p:spPr>
           <a:xfrm>
-            <a:off x="2938272" y="2258568"/>
+            <a:off x="2221992" y="2258568"/>
             <a:ext cx="1828800" cy="292608"/>
           </a:xfrm>
           <a:prstGeom prst="rect">
@@ -19111,7 +18709,7 @@
         </p:nvSpPr>
         <p:spPr>
           <a:xfrm>
-            <a:off x="2938272" y="2569464"/>
+            <a:off x="2221992" y="2569464"/>
             <a:ext cx="1828800" cy="201168"/>
           </a:xfrm>
           <a:prstGeom prst="rect">
@@ -19150,7 +18748,7 @@
         </p:nvSpPr>
         <p:spPr>
           <a:xfrm>
-            <a:off x="5803392" y="2258568"/>
+            <a:off x="4370832" y="2258568"/>
             <a:ext cx="1828800" cy="292608"/>
           </a:xfrm>
           <a:prstGeom prst="rect">
@@ -19184,7 +18782,7 @@
         </p:nvSpPr>
         <p:spPr>
           <a:xfrm>
-            <a:off x="5803392" y="2258568"/>
+            <a:off x="4370832" y="2258568"/>
             <a:ext cx="1828800" cy="292608"/>
           </a:xfrm>
           <a:prstGeom prst="rect">
@@ -19209,7 +18807,7 @@
                 <a:ea typeface="Trebuchet MS" pitchFamily="34" charset="-122"/>
                 <a:cs typeface="Trebuchet MS" pitchFamily="34" charset="-120"/>
               </a:rPr>
-              <a:t>ly</a:t>
+              <a:t>en</a:t>
             </a:r>
             <a:endParaRPr lang="en-US" sz="1300" dirty="0"/>
           </a:p>
@@ -19223,7 +18821,7 @@
         </p:nvSpPr>
         <p:spPr>
           <a:xfrm>
-            <a:off x="5803392" y="2569464"/>
+            <a:off x="4370832" y="2569464"/>
             <a:ext cx="1828800" cy="201168"/>
           </a:xfrm>
           <a:prstGeom prst="rect">
@@ -19248,7 +18846,7 @@
                 <a:ea typeface="Calibri" pitchFamily="34" charset="-122"/>
                 <a:cs typeface="Calibri" pitchFamily="34" charset="-120"/>
               </a:rPr>
-              <a:t>in a certain way</a:t>
+              <a:t>to cause or become</a:t>
             </a:r>
             <a:endParaRPr lang="en-US" sz="850" dirty="0"/>
           </a:p>
@@ -19257,6 +18855,118 @@
       <p:sp>
         <p:nvSpPr>
           <p:cNvPr id="22" name="Shape 20"/>
+          <p:cNvSpPr/>
+          <p:nvPr/>
+        </p:nvSpPr>
+        <p:spPr>
+          <a:xfrm>
+            <a:off x="6519672" y="2258568"/>
+            <a:ext cx="1828800" cy="292608"/>
+          </a:xfrm>
+          <a:prstGeom prst="rect">
+            <a:avLst>
+              <a:gd name="adj" fmla="val 25000"/>
+            </a:avLst>
+          </a:prstGeom>
+          <a:solidFill>
+            <a:srgbClr val="FCE7F3"/>
+          </a:solidFill>
+          <a:ln w="19050">
+            <a:solidFill>
+              <a:srgbClr val="DB2777"/>
+            </a:solidFill>
+            <a:prstDash val="solid"/>
+          </a:ln>
+          <a:effectLst>
+            <a:outerShdw sx="100000" sy="100000" kx="0" ky="0" algn="bl" rotWithShape="0" blurRad="101600" dist="38100" dir="8100000">
+              <a:srgbClr val="000000">
+                <a:alpha val="12000"/>
+              </a:srgbClr>
+            </a:outerShdw>
+          </a:effectLst>
+        </p:spPr>
+      </p:sp>
+      <p:sp>
+        <p:nvSpPr>
+          <p:cNvPr id="23" name="Text 21"/>
+          <p:cNvSpPr/>
+          <p:nvPr/>
+        </p:nvSpPr>
+        <p:spPr>
+          <a:xfrm>
+            <a:off x="6519672" y="2258568"/>
+            <a:ext cx="1828800" cy="292608"/>
+          </a:xfrm>
+          <a:prstGeom prst="rect">
+            <a:avLst/>
+          </a:prstGeom>
+          <a:noFill/>
+          <a:ln/>
+        </p:spPr>
+        <p:txBody>
+          <a:bodyPr wrap="square" lIns="0" tIns="0" rIns="0" bIns="0" rtlCol="0" anchor="ctr"/>
+          <a:lstStyle/>
+          <a:p>
+            <a:pPr algn="ctr" indent="0" marL="0">
+              <a:buNone/>
+            </a:pPr>
+            <a:r>
+              <a:rPr lang="en-US" sz="1300" b="1" dirty="0">
+                <a:solidFill>
+                  <a:srgbClr val="9D174D"/>
+                </a:solidFill>
+                <a:latin typeface="Trebuchet MS" pitchFamily="34" charset="0"/>
+                <a:ea typeface="Trebuchet MS" pitchFamily="34" charset="-122"/>
+                <a:cs typeface="Trebuchet MS" pitchFamily="34" charset="-120"/>
+              </a:rPr>
+              <a:t>er</a:t>
+            </a:r>
+            <a:endParaRPr lang="en-US" sz="1300" dirty="0"/>
+          </a:p>
+        </p:txBody>
+      </p:sp>
+      <p:sp>
+        <p:nvSpPr>
+          <p:cNvPr id="24" name="Text 22"/>
+          <p:cNvSpPr/>
+          <p:nvPr/>
+        </p:nvSpPr>
+        <p:spPr>
+          <a:xfrm>
+            <a:off x="6519672" y="2569464"/>
+            <a:ext cx="1828800" cy="201168"/>
+          </a:xfrm>
+          <a:prstGeom prst="rect">
+            <a:avLst/>
+          </a:prstGeom>
+          <a:noFill/>
+          <a:ln/>
+        </p:spPr>
+        <p:txBody>
+          <a:bodyPr wrap="square" lIns="0" tIns="0" rIns="0" bIns="0" rtlCol="0" anchor="t"/>
+          <a:lstStyle/>
+          <a:p>
+            <a:pPr algn="ctr" indent="0" marL="0">
+              <a:buNone/>
+            </a:pPr>
+            <a:r>
+              <a:rPr lang="en-US" sz="850" dirty="0">
+                <a:solidFill>
+                  <a:srgbClr val="475569"/>
+                </a:solidFill>
+                <a:latin typeface="Calibri" pitchFamily="34" charset="0"/>
+                <a:ea typeface="Calibri" pitchFamily="34" charset="-122"/>
+                <a:cs typeface="Calibri" pitchFamily="34" charset="-120"/>
+              </a:rPr>
+              <a:t>a person or thing that does something</a:t>
+            </a:r>
+            <a:endParaRPr lang="en-US" sz="850" dirty="0"/>
+          </a:p>
+        </p:txBody>
+      </p:sp>
+      <p:sp>
+        <p:nvSpPr>
+          <p:cNvPr id="25" name="Shape 23"/>
           <p:cNvSpPr/>
           <p:nvPr/>
         </p:nvSpPr>
@@ -19283,7 +18993,7 @@
       </p:sp>
       <p:sp>
         <p:nvSpPr>
-          <p:cNvPr id="23" name="Text 21"/>
+          <p:cNvPr id="26" name="Text 24"/>
           <p:cNvSpPr/>
           <p:nvPr/>
         </p:nvSpPr>
@@ -19322,7 +19032,7 @@
       </p:sp>
       <p:sp>
         <p:nvSpPr>
-          <p:cNvPr id="24" name="Shape 22"/>
+          <p:cNvPr id="27" name="Shape 25"/>
           <p:cNvSpPr/>
           <p:nvPr/>
         </p:nvSpPr>
@@ -19349,7 +19059,7 @@
       </p:sp>
       <p:sp>
         <p:nvSpPr>
-          <p:cNvPr id="25" name="Text 23"/>
+          <p:cNvPr id="28" name="Text 26"/>
           <p:cNvSpPr/>
           <p:nvPr/>
         </p:nvSpPr>
@@ -19388,7 +19098,7 @@
       </p:sp>
       <p:sp>
         <p:nvSpPr>
-          <p:cNvPr id="26" name="Shape 24"/>
+          <p:cNvPr id="29" name="Shape 27"/>
           <p:cNvSpPr/>
           <p:nvPr/>
         </p:nvSpPr>
@@ -19415,7 +19125,7 @@
       </p:sp>
       <p:sp>
         <p:nvSpPr>
-          <p:cNvPr id="27" name="Text 25"/>
+          <p:cNvPr id="30" name="Text 28"/>
           <p:cNvSpPr/>
           <p:nvPr/>
         </p:nvSpPr>
@@ -19454,7 +19164,7 @@
       </p:sp>
       <p:sp>
         <p:nvSpPr>
-          <p:cNvPr id="28" name="Shape 26"/>
+          <p:cNvPr id="31" name="Shape 29"/>
           <p:cNvSpPr/>
           <p:nvPr/>
         </p:nvSpPr>
@@ -19481,7 +19191,7 @@
       </p:sp>
       <p:sp>
         <p:nvSpPr>
-          <p:cNvPr id="29" name="Text 27"/>
+          <p:cNvPr id="32" name="Text 30"/>
           <p:cNvSpPr/>
           <p:nvPr/>
         </p:nvSpPr>
@@ -19943,7 +19653,7 @@
                 <a:ea typeface="Trebuchet MS" pitchFamily="34" charset="-122"/>
                 <a:cs typeface="Trebuchet MS" pitchFamily="34" charset="-120"/>
               </a:rPr>
-              <a:t>sharply</a:t>
+              <a:t>sharpener</a:t>
             </a:r>
             <a:endParaRPr lang="en-US" sz="2800" dirty="0"/>
           </a:p>
@@ -20023,7 +19733,7 @@
         </p:nvSpPr>
         <p:spPr>
           <a:xfrm>
-            <a:off x="2938272" y="2258568"/>
+            <a:off x="2221992" y="2258568"/>
             <a:ext cx="1828800" cy="292608"/>
           </a:xfrm>
           <a:prstGeom prst="rect">
@@ -20057,7 +19767,7 @@
         </p:nvSpPr>
         <p:spPr>
           <a:xfrm>
-            <a:off x="2938272" y="2258568"/>
+            <a:off x="2221992" y="2258568"/>
             <a:ext cx="1828800" cy="292608"/>
           </a:xfrm>
           <a:prstGeom prst="rect">
@@ -20096,7 +19806,7 @@
         </p:nvSpPr>
         <p:spPr>
           <a:xfrm>
-            <a:off x="2938272" y="2569464"/>
+            <a:off x="2221992" y="2569464"/>
             <a:ext cx="1828800" cy="201168"/>
           </a:xfrm>
           <a:prstGeom prst="rect">
@@ -20135,7 +19845,7 @@
         </p:nvSpPr>
         <p:spPr>
           <a:xfrm>
-            <a:off x="5803392" y="2258568"/>
+            <a:off x="4370832" y="2258568"/>
             <a:ext cx="1828800" cy="292608"/>
           </a:xfrm>
           <a:prstGeom prst="rect">
@@ -20169,7 +19879,7 @@
         </p:nvSpPr>
         <p:spPr>
           <a:xfrm>
-            <a:off x="5803392" y="2258568"/>
+            <a:off x="4370832" y="2258568"/>
             <a:ext cx="1828800" cy="292608"/>
           </a:xfrm>
           <a:prstGeom prst="rect">
@@ -20194,7 +19904,7 @@
                 <a:ea typeface="Trebuchet MS" pitchFamily="34" charset="-122"/>
                 <a:cs typeface="Trebuchet MS" pitchFamily="34" charset="-120"/>
               </a:rPr>
-              <a:t>ly</a:t>
+              <a:t>en</a:t>
             </a:r>
             <a:endParaRPr lang="en-US" sz="1300" dirty="0"/>
           </a:p>
@@ -20208,7 +19918,7 @@
         </p:nvSpPr>
         <p:spPr>
           <a:xfrm>
-            <a:off x="5803392" y="2569464"/>
+            <a:off x="4370832" y="2569464"/>
             <a:ext cx="1828800" cy="201168"/>
           </a:xfrm>
           <a:prstGeom prst="rect">
@@ -20233,7 +19943,7 @@
                 <a:ea typeface="Calibri" pitchFamily="34" charset="-122"/>
                 <a:cs typeface="Calibri" pitchFamily="34" charset="-120"/>
               </a:rPr>
-              <a:t>in a certain way</a:t>
+              <a:t>to cause or become</a:t>
             </a:r>
             <a:endParaRPr lang="en-US" sz="850" dirty="0"/>
           </a:p>
@@ -20242,6 +19952,118 @@
       <p:sp>
         <p:nvSpPr>
           <p:cNvPr id="22" name="Shape 20"/>
+          <p:cNvSpPr/>
+          <p:nvPr/>
+        </p:nvSpPr>
+        <p:spPr>
+          <a:xfrm>
+            <a:off x="6519672" y="2258568"/>
+            <a:ext cx="1828800" cy="292608"/>
+          </a:xfrm>
+          <a:prstGeom prst="rect">
+            <a:avLst>
+              <a:gd name="adj" fmla="val 25000"/>
+            </a:avLst>
+          </a:prstGeom>
+          <a:solidFill>
+            <a:srgbClr val="FCE7F3"/>
+          </a:solidFill>
+          <a:ln w="19050">
+            <a:solidFill>
+              <a:srgbClr val="DB2777"/>
+            </a:solidFill>
+            <a:prstDash val="solid"/>
+          </a:ln>
+          <a:effectLst>
+            <a:outerShdw sx="100000" sy="100000" kx="0" ky="0" algn="bl" rotWithShape="0" blurRad="101600" dist="38100" dir="8100000">
+              <a:srgbClr val="000000">
+                <a:alpha val="12000"/>
+              </a:srgbClr>
+            </a:outerShdw>
+          </a:effectLst>
+        </p:spPr>
+      </p:sp>
+      <p:sp>
+        <p:nvSpPr>
+          <p:cNvPr id="23" name="Text 21"/>
+          <p:cNvSpPr/>
+          <p:nvPr/>
+        </p:nvSpPr>
+        <p:spPr>
+          <a:xfrm>
+            <a:off x="6519672" y="2258568"/>
+            <a:ext cx="1828800" cy="292608"/>
+          </a:xfrm>
+          <a:prstGeom prst="rect">
+            <a:avLst/>
+          </a:prstGeom>
+          <a:noFill/>
+          <a:ln/>
+        </p:spPr>
+        <p:txBody>
+          <a:bodyPr wrap="square" lIns="0" tIns="0" rIns="0" bIns="0" rtlCol="0" anchor="ctr"/>
+          <a:lstStyle/>
+          <a:p>
+            <a:pPr algn="ctr" indent="0" marL="0">
+              <a:buNone/>
+            </a:pPr>
+            <a:r>
+              <a:rPr lang="en-US" sz="1300" b="1" dirty="0">
+                <a:solidFill>
+                  <a:srgbClr val="9D174D"/>
+                </a:solidFill>
+                <a:latin typeface="Trebuchet MS" pitchFamily="34" charset="0"/>
+                <a:ea typeface="Trebuchet MS" pitchFamily="34" charset="-122"/>
+                <a:cs typeface="Trebuchet MS" pitchFamily="34" charset="-120"/>
+              </a:rPr>
+              <a:t>er</a:t>
+            </a:r>
+            <a:endParaRPr lang="en-US" sz="1300" dirty="0"/>
+          </a:p>
+        </p:txBody>
+      </p:sp>
+      <p:sp>
+        <p:nvSpPr>
+          <p:cNvPr id="24" name="Text 22"/>
+          <p:cNvSpPr/>
+          <p:nvPr/>
+        </p:nvSpPr>
+        <p:spPr>
+          <a:xfrm>
+            <a:off x="6519672" y="2569464"/>
+            <a:ext cx="1828800" cy="201168"/>
+          </a:xfrm>
+          <a:prstGeom prst="rect">
+            <a:avLst/>
+          </a:prstGeom>
+          <a:noFill/>
+          <a:ln/>
+        </p:spPr>
+        <p:txBody>
+          <a:bodyPr wrap="square" lIns="0" tIns="0" rIns="0" bIns="0" rtlCol="0" anchor="t"/>
+          <a:lstStyle/>
+          <a:p>
+            <a:pPr algn="ctr" indent="0" marL="0">
+              <a:buNone/>
+            </a:pPr>
+            <a:r>
+              <a:rPr lang="en-US" sz="850" dirty="0">
+                <a:solidFill>
+                  <a:srgbClr val="475569"/>
+                </a:solidFill>
+                <a:latin typeface="Calibri" pitchFamily="34" charset="0"/>
+                <a:ea typeface="Calibri" pitchFamily="34" charset="-122"/>
+                <a:cs typeface="Calibri" pitchFamily="34" charset="-120"/>
+              </a:rPr>
+              <a:t>a person or thing that does something</a:t>
+            </a:r>
+            <a:endParaRPr lang="en-US" sz="850" dirty="0"/>
+          </a:p>
+        </p:txBody>
+      </p:sp>
+      <p:sp>
+        <p:nvSpPr>
+          <p:cNvPr id="25" name="Shape 23"/>
           <p:cNvSpPr/>
           <p:nvPr/>
         </p:nvSpPr>
@@ -20268,7 +20090,7 @@
       </p:sp>
       <p:sp>
         <p:nvSpPr>
-          <p:cNvPr id="23" name="Text 21"/>
+          <p:cNvPr id="26" name="Text 24"/>
           <p:cNvSpPr/>
           <p:nvPr/>
         </p:nvSpPr>
@@ -20307,7 +20129,7 @@
       </p:sp>
       <p:sp>
         <p:nvSpPr>
-          <p:cNvPr id="24" name="Shape 22"/>
+          <p:cNvPr id="27" name="Shape 25"/>
           <p:cNvSpPr/>
           <p:nvPr/>
         </p:nvSpPr>
@@ -20334,13 +20156,13 @@
       </p:sp>
       <p:sp>
         <p:nvSpPr>
-          <p:cNvPr id="25" name="Shape 23"/>
-          <p:cNvSpPr/>
-          <p:nvPr/>
-        </p:nvSpPr>
-        <p:spPr>
-          <a:xfrm>
-            <a:off x="2999232" y="3364992"/>
+          <p:cNvPr id="28" name="Shape 26"/>
+          <p:cNvSpPr/>
+          <p:nvPr/>
+        </p:nvSpPr>
+        <p:spPr>
+          <a:xfrm>
+            <a:off x="2313432" y="3364992"/>
             <a:ext cx="1645920" cy="475488"/>
           </a:xfrm>
           <a:prstGeom prst="rect">
@@ -20361,13 +20183,13 @@
       </p:sp>
       <p:sp>
         <p:nvSpPr>
-          <p:cNvPr id="26" name="Text 24"/>
-          <p:cNvSpPr/>
-          <p:nvPr/>
-        </p:nvSpPr>
-        <p:spPr>
-          <a:xfrm>
-            <a:off x="2999232" y="3364992"/>
+          <p:cNvPr id="29" name="Text 27"/>
+          <p:cNvSpPr/>
+          <p:nvPr/>
+        </p:nvSpPr>
+        <p:spPr>
+          <a:xfrm>
+            <a:off x="2313432" y="3364992"/>
             <a:ext cx="1645920" cy="475488"/>
           </a:xfrm>
           <a:prstGeom prst="rect">
@@ -20400,14 +20222,14 @@
       </p:sp>
       <p:sp>
         <p:nvSpPr>
-          <p:cNvPr id="27" name="Text 25"/>
-          <p:cNvSpPr/>
-          <p:nvPr/>
-        </p:nvSpPr>
-        <p:spPr>
-          <a:xfrm>
-            <a:off x="4645152" y="3364992"/>
-            <a:ext cx="1097280" cy="475488"/>
+          <p:cNvPr id="30" name="Text 28"/>
+          <p:cNvSpPr/>
+          <p:nvPr/>
+        </p:nvSpPr>
+        <p:spPr>
+          <a:xfrm>
+            <a:off x="3959352" y="3364992"/>
+            <a:ext cx="411480" cy="475488"/>
           </a:xfrm>
           <a:prstGeom prst="rect">
             <a:avLst/>
@@ -20439,13 +20261,13 @@
       </p:sp>
       <p:sp>
         <p:nvSpPr>
-          <p:cNvPr id="28" name="Shape 26"/>
-          <p:cNvSpPr/>
-          <p:nvPr/>
-        </p:nvSpPr>
-        <p:spPr>
-          <a:xfrm>
-            <a:off x="5742432" y="3364992"/>
+          <p:cNvPr id="31" name="Shape 29"/>
+          <p:cNvSpPr/>
+          <p:nvPr/>
+        </p:nvSpPr>
+        <p:spPr>
+          <a:xfrm>
+            <a:off x="4370832" y="3364992"/>
             <a:ext cx="1645920" cy="475488"/>
           </a:xfrm>
           <a:prstGeom prst="rect">
@@ -20466,13 +20288,13 @@
       </p:sp>
       <p:sp>
         <p:nvSpPr>
-          <p:cNvPr id="29" name="Text 27"/>
-          <p:cNvSpPr/>
-          <p:nvPr/>
-        </p:nvSpPr>
-        <p:spPr>
-          <a:xfrm>
-            <a:off x="5742432" y="3364992"/>
+          <p:cNvPr id="32" name="Text 30"/>
+          <p:cNvSpPr/>
+          <p:nvPr/>
+        </p:nvSpPr>
+        <p:spPr>
+          <a:xfrm>
+            <a:off x="4370832" y="3364992"/>
             <a:ext cx="1645920" cy="475488"/>
           </a:xfrm>
           <a:prstGeom prst="rect">
@@ -20497,7 +20319,7 @@
                 <a:ea typeface="Trebuchet MS" pitchFamily="34" charset="-122"/>
                 <a:cs typeface="Trebuchet MS" pitchFamily="34" charset="-120"/>
               </a:rPr>
-              <a:t>ly</a:t>
+              <a:t>en</a:t>
             </a:r>
             <a:endParaRPr lang="en-US" sz="1400" dirty="0"/>
           </a:p>
@@ -20505,7 +20327,112 @@
       </p:sp>
       <p:sp>
         <p:nvSpPr>
-          <p:cNvPr id="30" name="Shape 28"/>
+          <p:cNvPr id="33" name="Text 31"/>
+          <p:cNvSpPr/>
+          <p:nvPr/>
+        </p:nvSpPr>
+        <p:spPr>
+          <a:xfrm>
+            <a:off x="6016752" y="3364992"/>
+            <a:ext cx="411480" cy="475488"/>
+          </a:xfrm>
+          <a:prstGeom prst="rect">
+            <a:avLst/>
+          </a:prstGeom>
+          <a:noFill/>
+          <a:ln/>
+        </p:spPr>
+        <p:txBody>
+          <a:bodyPr wrap="square" lIns="0" tIns="0" rIns="0" bIns="0" rtlCol="0" anchor="ctr"/>
+          <a:lstStyle/>
+          <a:p>
+            <a:pPr algn="ctr" indent="0" marL="0">
+              <a:buNone/>
+            </a:pPr>
+            <a:r>
+              <a:rPr lang="en-US" sz="1600" b="1" dirty="0">
+                <a:solidFill>
+                  <a:srgbClr val="0D9488"/>
+                </a:solidFill>
+                <a:latin typeface="Trebuchet MS" pitchFamily="34" charset="0"/>
+                <a:ea typeface="Trebuchet MS" pitchFamily="34" charset="-122"/>
+                <a:cs typeface="Trebuchet MS" pitchFamily="34" charset="-120"/>
+              </a:rPr>
+              <a:t>·</a:t>
+            </a:r>
+            <a:endParaRPr lang="en-US" sz="1600" dirty="0"/>
+          </a:p>
+        </p:txBody>
+      </p:sp>
+      <p:sp>
+        <p:nvSpPr>
+          <p:cNvPr id="34" name="Shape 32"/>
+          <p:cNvSpPr/>
+          <p:nvPr/>
+        </p:nvSpPr>
+        <p:spPr>
+          <a:xfrm>
+            <a:off x="6428232" y="3364992"/>
+            <a:ext cx="1645920" cy="475488"/>
+          </a:xfrm>
+          <a:prstGeom prst="rect">
+            <a:avLst>
+              <a:gd name="adj" fmla="val 9615"/>
+            </a:avLst>
+          </a:prstGeom>
+          <a:solidFill>
+            <a:srgbClr val="FFFFFF"/>
+          </a:solidFill>
+          <a:ln w="12700">
+            <a:solidFill>
+              <a:srgbClr val="0D9488"/>
+            </a:solidFill>
+            <a:prstDash val="solid"/>
+          </a:ln>
+        </p:spPr>
+      </p:sp>
+      <p:sp>
+        <p:nvSpPr>
+          <p:cNvPr id="35" name="Text 33"/>
+          <p:cNvSpPr/>
+          <p:nvPr/>
+        </p:nvSpPr>
+        <p:spPr>
+          <a:xfrm>
+            <a:off x="6428232" y="3364992"/>
+            <a:ext cx="1645920" cy="475488"/>
+          </a:xfrm>
+          <a:prstGeom prst="rect">
+            <a:avLst/>
+          </a:prstGeom>
+          <a:noFill/>
+          <a:ln/>
+        </p:spPr>
+        <p:txBody>
+          <a:bodyPr wrap="square" lIns="0" tIns="0" rIns="0" bIns="0" rtlCol="0" anchor="ctr"/>
+          <a:lstStyle/>
+          <a:p>
+            <a:pPr algn="ctr" indent="0" marL="0">
+              <a:buNone/>
+            </a:pPr>
+            <a:r>
+              <a:rPr lang="en-US" sz="1400" b="1" dirty="0">
+                <a:solidFill>
+                  <a:srgbClr val="0D9488"/>
+                </a:solidFill>
+                <a:latin typeface="Trebuchet MS" pitchFamily="34" charset="0"/>
+                <a:ea typeface="Trebuchet MS" pitchFamily="34" charset="-122"/>
+                <a:cs typeface="Trebuchet MS" pitchFamily="34" charset="-120"/>
+              </a:rPr>
+              <a:t>er</a:t>
+            </a:r>
+            <a:endParaRPr lang="en-US" sz="1400" dirty="0"/>
+          </a:p>
+        </p:txBody>
+      </p:sp>
+      <p:sp>
+        <p:nvSpPr>
+          <p:cNvPr id="36" name="Shape 34"/>
           <p:cNvSpPr/>
           <p:nvPr/>
         </p:nvSpPr>
@@ -20532,7 +20459,7 @@
       </p:sp>
       <p:sp>
         <p:nvSpPr>
-          <p:cNvPr id="31" name="Text 29"/>
+          <p:cNvPr id="37" name="Text 35"/>
           <p:cNvSpPr/>
           <p:nvPr/>
         </p:nvSpPr>
@@ -20571,7 +20498,7 @@
       </p:sp>
       <p:sp>
         <p:nvSpPr>
-          <p:cNvPr id="32" name="Shape 30"/>
+          <p:cNvPr id="38" name="Shape 36"/>
           <p:cNvSpPr/>
           <p:nvPr/>
         </p:nvSpPr>
@@ -20598,7 +20525,7 @@
       </p:sp>
       <p:sp>
         <p:nvSpPr>
-          <p:cNvPr id="33" name="Text 31"/>
+          <p:cNvPr id="39" name="Text 37"/>
           <p:cNvSpPr/>
           <p:nvPr/>
         </p:nvSpPr>
@@ -21060,7 +20987,7 @@
                 <a:ea typeface="Trebuchet MS" pitchFamily="34" charset="-122"/>
                 <a:cs typeface="Trebuchet MS" pitchFamily="34" charset="-120"/>
               </a:rPr>
-              <a:t>sharply</a:t>
+              <a:t>sharpener</a:t>
             </a:r>
             <a:endParaRPr lang="en-US" sz="2800" dirty="0"/>
           </a:p>
@@ -21140,7 +21067,7 @@
         </p:nvSpPr>
         <p:spPr>
           <a:xfrm>
-            <a:off x="2938272" y="2258568"/>
+            <a:off x="2221992" y="2258568"/>
             <a:ext cx="1828800" cy="292608"/>
           </a:xfrm>
           <a:prstGeom prst="rect">
@@ -21174,7 +21101,7 @@
         </p:nvSpPr>
         <p:spPr>
           <a:xfrm>
-            <a:off x="2938272" y="2258568"/>
+            <a:off x="2221992" y="2258568"/>
             <a:ext cx="1828800" cy="292608"/>
           </a:xfrm>
           <a:prstGeom prst="rect">
@@ -21213,7 +21140,7 @@
         </p:nvSpPr>
         <p:spPr>
           <a:xfrm>
-            <a:off x="2938272" y="2569464"/>
+            <a:off x="2221992" y="2569464"/>
             <a:ext cx="1828800" cy="201168"/>
           </a:xfrm>
           <a:prstGeom prst="rect">
@@ -21252,7 +21179,7 @@
         </p:nvSpPr>
         <p:spPr>
           <a:xfrm>
-            <a:off x="5803392" y="2258568"/>
+            <a:off x="4370832" y="2258568"/>
             <a:ext cx="1828800" cy="292608"/>
           </a:xfrm>
           <a:prstGeom prst="rect">
@@ -21286,7 +21213,7 @@
         </p:nvSpPr>
         <p:spPr>
           <a:xfrm>
-            <a:off x="5803392" y="2258568"/>
+            <a:off x="4370832" y="2258568"/>
             <a:ext cx="1828800" cy="292608"/>
           </a:xfrm>
           <a:prstGeom prst="rect">
@@ -21311,7 +21238,7 @@
                 <a:ea typeface="Trebuchet MS" pitchFamily="34" charset="-122"/>
                 <a:cs typeface="Trebuchet MS" pitchFamily="34" charset="-120"/>
               </a:rPr>
-              <a:t>ly</a:t>
+              <a:t>en</a:t>
             </a:r>
             <a:endParaRPr lang="en-US" sz="1300" dirty="0"/>
           </a:p>
@@ -21325,7 +21252,7 @@
         </p:nvSpPr>
         <p:spPr>
           <a:xfrm>
-            <a:off x="5803392" y="2569464"/>
+            <a:off x="4370832" y="2569464"/>
             <a:ext cx="1828800" cy="201168"/>
           </a:xfrm>
           <a:prstGeom prst="rect">
@@ -21350,7 +21277,7 @@
                 <a:ea typeface="Calibri" pitchFamily="34" charset="-122"/>
                 <a:cs typeface="Calibri" pitchFamily="34" charset="-120"/>
               </a:rPr>
-              <a:t>in a certain way</a:t>
+              <a:t>to cause or become</a:t>
             </a:r>
             <a:endParaRPr lang="en-US" sz="850" dirty="0"/>
           </a:p>
@@ -21359,6 +21286,118 @@
       <p:sp>
         <p:nvSpPr>
           <p:cNvPr id="22" name="Shape 20"/>
+          <p:cNvSpPr/>
+          <p:nvPr/>
+        </p:nvSpPr>
+        <p:spPr>
+          <a:xfrm>
+            <a:off x="6519672" y="2258568"/>
+            <a:ext cx="1828800" cy="292608"/>
+          </a:xfrm>
+          <a:prstGeom prst="rect">
+            <a:avLst>
+              <a:gd name="adj" fmla="val 25000"/>
+            </a:avLst>
+          </a:prstGeom>
+          <a:solidFill>
+            <a:srgbClr val="FCE7F3"/>
+          </a:solidFill>
+          <a:ln w="19050">
+            <a:solidFill>
+              <a:srgbClr val="DB2777"/>
+            </a:solidFill>
+            <a:prstDash val="solid"/>
+          </a:ln>
+          <a:effectLst>
+            <a:outerShdw sx="100000" sy="100000" kx="0" ky="0" algn="bl" rotWithShape="0" blurRad="101600" dist="38100" dir="8100000">
+              <a:srgbClr val="000000">
+                <a:alpha val="12000"/>
+              </a:srgbClr>
+            </a:outerShdw>
+          </a:effectLst>
+        </p:spPr>
+      </p:sp>
+      <p:sp>
+        <p:nvSpPr>
+          <p:cNvPr id="23" name="Text 21"/>
+          <p:cNvSpPr/>
+          <p:nvPr/>
+        </p:nvSpPr>
+        <p:spPr>
+          <a:xfrm>
+            <a:off x="6519672" y="2258568"/>
+            <a:ext cx="1828800" cy="292608"/>
+          </a:xfrm>
+          <a:prstGeom prst="rect">
+            <a:avLst/>
+          </a:prstGeom>
+          <a:noFill/>
+          <a:ln/>
+        </p:spPr>
+        <p:txBody>
+          <a:bodyPr wrap="square" lIns="0" tIns="0" rIns="0" bIns="0" rtlCol="0" anchor="ctr"/>
+          <a:lstStyle/>
+          <a:p>
+            <a:pPr algn="ctr" indent="0" marL="0">
+              <a:buNone/>
+            </a:pPr>
+            <a:r>
+              <a:rPr lang="en-US" sz="1300" b="1" dirty="0">
+                <a:solidFill>
+                  <a:srgbClr val="9D174D"/>
+                </a:solidFill>
+                <a:latin typeface="Trebuchet MS" pitchFamily="34" charset="0"/>
+                <a:ea typeface="Trebuchet MS" pitchFamily="34" charset="-122"/>
+                <a:cs typeface="Trebuchet MS" pitchFamily="34" charset="-120"/>
+              </a:rPr>
+              <a:t>er</a:t>
+            </a:r>
+            <a:endParaRPr lang="en-US" sz="1300" dirty="0"/>
+          </a:p>
+        </p:txBody>
+      </p:sp>
+      <p:sp>
+        <p:nvSpPr>
+          <p:cNvPr id="24" name="Text 22"/>
+          <p:cNvSpPr/>
+          <p:nvPr/>
+        </p:nvSpPr>
+        <p:spPr>
+          <a:xfrm>
+            <a:off x="6519672" y="2569464"/>
+            <a:ext cx="1828800" cy="201168"/>
+          </a:xfrm>
+          <a:prstGeom prst="rect">
+            <a:avLst/>
+          </a:prstGeom>
+          <a:noFill/>
+          <a:ln/>
+        </p:spPr>
+        <p:txBody>
+          <a:bodyPr wrap="square" lIns="0" tIns="0" rIns="0" bIns="0" rtlCol="0" anchor="t"/>
+          <a:lstStyle/>
+          <a:p>
+            <a:pPr algn="ctr" indent="0" marL="0">
+              <a:buNone/>
+            </a:pPr>
+            <a:r>
+              <a:rPr lang="en-US" sz="850" dirty="0">
+                <a:solidFill>
+                  <a:srgbClr val="475569"/>
+                </a:solidFill>
+                <a:latin typeface="Calibri" pitchFamily="34" charset="0"/>
+                <a:ea typeface="Calibri" pitchFamily="34" charset="-122"/>
+                <a:cs typeface="Calibri" pitchFamily="34" charset="-120"/>
+              </a:rPr>
+              <a:t>a person or thing that does something</a:t>
+            </a:r>
+            <a:endParaRPr lang="en-US" sz="850" dirty="0"/>
+          </a:p>
+        </p:txBody>
+      </p:sp>
+      <p:sp>
+        <p:nvSpPr>
+          <p:cNvPr id="25" name="Shape 23"/>
           <p:cNvSpPr/>
           <p:nvPr/>
         </p:nvSpPr>
@@ -21385,7 +21424,7 @@
       </p:sp>
       <p:sp>
         <p:nvSpPr>
-          <p:cNvPr id="23" name="Text 21"/>
+          <p:cNvPr id="26" name="Text 24"/>
           <p:cNvSpPr/>
           <p:nvPr/>
         </p:nvSpPr>
@@ -21424,7 +21463,7 @@
       </p:sp>
       <p:sp>
         <p:nvSpPr>
-          <p:cNvPr id="24" name="Shape 22"/>
+          <p:cNvPr id="27" name="Shape 25"/>
           <p:cNvSpPr/>
           <p:nvPr/>
         </p:nvSpPr>
@@ -21451,13 +21490,13 @@
       </p:sp>
       <p:sp>
         <p:nvSpPr>
-          <p:cNvPr id="25" name="Shape 23"/>
-          <p:cNvSpPr/>
-          <p:nvPr/>
-        </p:nvSpPr>
-        <p:spPr>
-          <a:xfrm>
-            <a:off x="2999232" y="3364992"/>
+          <p:cNvPr id="28" name="Shape 26"/>
+          <p:cNvSpPr/>
+          <p:nvPr/>
+        </p:nvSpPr>
+        <p:spPr>
+          <a:xfrm>
+            <a:off x="2313432" y="3364992"/>
             <a:ext cx="1645920" cy="475488"/>
           </a:xfrm>
           <a:prstGeom prst="rect">
@@ -21478,13 +21517,13 @@
       </p:sp>
       <p:sp>
         <p:nvSpPr>
-          <p:cNvPr id="26" name="Text 24"/>
-          <p:cNvSpPr/>
-          <p:nvPr/>
-        </p:nvSpPr>
-        <p:spPr>
-          <a:xfrm>
-            <a:off x="2999232" y="3364992"/>
+          <p:cNvPr id="29" name="Text 27"/>
+          <p:cNvSpPr/>
+          <p:nvPr/>
+        </p:nvSpPr>
+        <p:spPr>
+          <a:xfrm>
+            <a:off x="2313432" y="3364992"/>
             <a:ext cx="1645920" cy="475488"/>
           </a:xfrm>
           <a:prstGeom prst="rect">
@@ -21517,14 +21556,14 @@
       </p:sp>
       <p:sp>
         <p:nvSpPr>
-          <p:cNvPr id="27" name="Text 25"/>
-          <p:cNvSpPr/>
-          <p:nvPr/>
-        </p:nvSpPr>
-        <p:spPr>
-          <a:xfrm>
-            <a:off x="4645152" y="3364992"/>
-            <a:ext cx="1097280" cy="475488"/>
+          <p:cNvPr id="30" name="Text 28"/>
+          <p:cNvSpPr/>
+          <p:nvPr/>
+        </p:nvSpPr>
+        <p:spPr>
+          <a:xfrm>
+            <a:off x="3959352" y="3364992"/>
+            <a:ext cx="411480" cy="475488"/>
           </a:xfrm>
           <a:prstGeom prst="rect">
             <a:avLst/>
@@ -21556,13 +21595,13 @@
       </p:sp>
       <p:sp>
         <p:nvSpPr>
-          <p:cNvPr id="28" name="Shape 26"/>
-          <p:cNvSpPr/>
-          <p:nvPr/>
-        </p:nvSpPr>
-        <p:spPr>
-          <a:xfrm>
-            <a:off x="5742432" y="3364992"/>
+          <p:cNvPr id="31" name="Shape 29"/>
+          <p:cNvSpPr/>
+          <p:nvPr/>
+        </p:nvSpPr>
+        <p:spPr>
+          <a:xfrm>
+            <a:off x="4370832" y="3364992"/>
             <a:ext cx="1645920" cy="475488"/>
           </a:xfrm>
           <a:prstGeom prst="rect">
@@ -21583,13 +21622,13 @@
       </p:sp>
       <p:sp>
         <p:nvSpPr>
-          <p:cNvPr id="29" name="Text 27"/>
-          <p:cNvSpPr/>
-          <p:nvPr/>
-        </p:nvSpPr>
-        <p:spPr>
-          <a:xfrm>
-            <a:off x="5742432" y="3364992"/>
+          <p:cNvPr id="32" name="Text 30"/>
+          <p:cNvSpPr/>
+          <p:nvPr/>
+        </p:nvSpPr>
+        <p:spPr>
+          <a:xfrm>
+            <a:off x="4370832" y="3364992"/>
             <a:ext cx="1645920" cy="475488"/>
           </a:xfrm>
           <a:prstGeom prst="rect">
@@ -21614,7 +21653,7 @@
                 <a:ea typeface="Trebuchet MS" pitchFamily="34" charset="-122"/>
                 <a:cs typeface="Trebuchet MS" pitchFamily="34" charset="-120"/>
               </a:rPr>
-              <a:t>ly</a:t>
+              <a:t>en</a:t>
             </a:r>
             <a:endParaRPr lang="en-US" sz="1400" dirty="0"/>
           </a:p>
@@ -21622,7 +21661,112 @@
       </p:sp>
       <p:sp>
         <p:nvSpPr>
-          <p:cNvPr id="30" name="Shape 28"/>
+          <p:cNvPr id="33" name="Text 31"/>
+          <p:cNvSpPr/>
+          <p:nvPr/>
+        </p:nvSpPr>
+        <p:spPr>
+          <a:xfrm>
+            <a:off x="6016752" y="3364992"/>
+            <a:ext cx="411480" cy="475488"/>
+          </a:xfrm>
+          <a:prstGeom prst="rect">
+            <a:avLst/>
+          </a:prstGeom>
+          <a:noFill/>
+          <a:ln/>
+        </p:spPr>
+        <p:txBody>
+          <a:bodyPr wrap="square" lIns="0" tIns="0" rIns="0" bIns="0" rtlCol="0" anchor="ctr"/>
+          <a:lstStyle/>
+          <a:p>
+            <a:pPr algn="ctr" indent="0" marL="0">
+              <a:buNone/>
+            </a:pPr>
+            <a:r>
+              <a:rPr lang="en-US" sz="1600" b="1" dirty="0">
+                <a:solidFill>
+                  <a:srgbClr val="0D9488"/>
+                </a:solidFill>
+                <a:latin typeface="Trebuchet MS" pitchFamily="34" charset="0"/>
+                <a:ea typeface="Trebuchet MS" pitchFamily="34" charset="-122"/>
+                <a:cs typeface="Trebuchet MS" pitchFamily="34" charset="-120"/>
+              </a:rPr>
+              <a:t>·</a:t>
+            </a:r>
+            <a:endParaRPr lang="en-US" sz="1600" dirty="0"/>
+          </a:p>
+        </p:txBody>
+      </p:sp>
+      <p:sp>
+        <p:nvSpPr>
+          <p:cNvPr id="34" name="Shape 32"/>
+          <p:cNvSpPr/>
+          <p:nvPr/>
+        </p:nvSpPr>
+        <p:spPr>
+          <a:xfrm>
+            <a:off x="6428232" y="3364992"/>
+            <a:ext cx="1645920" cy="475488"/>
+          </a:xfrm>
+          <a:prstGeom prst="rect">
+            <a:avLst>
+              <a:gd name="adj" fmla="val 9615"/>
+            </a:avLst>
+          </a:prstGeom>
+          <a:solidFill>
+            <a:srgbClr val="FFFFFF"/>
+          </a:solidFill>
+          <a:ln w="12700">
+            <a:solidFill>
+              <a:srgbClr val="0D9488"/>
+            </a:solidFill>
+            <a:prstDash val="solid"/>
+          </a:ln>
+        </p:spPr>
+      </p:sp>
+      <p:sp>
+        <p:nvSpPr>
+          <p:cNvPr id="35" name="Text 33"/>
+          <p:cNvSpPr/>
+          <p:nvPr/>
+        </p:nvSpPr>
+        <p:spPr>
+          <a:xfrm>
+            <a:off x="6428232" y="3364992"/>
+            <a:ext cx="1645920" cy="475488"/>
+          </a:xfrm>
+          <a:prstGeom prst="rect">
+            <a:avLst/>
+          </a:prstGeom>
+          <a:noFill/>
+          <a:ln/>
+        </p:spPr>
+        <p:txBody>
+          <a:bodyPr wrap="square" lIns="0" tIns="0" rIns="0" bIns="0" rtlCol="0" anchor="ctr"/>
+          <a:lstStyle/>
+          <a:p>
+            <a:pPr algn="ctr" indent="0" marL="0">
+              <a:buNone/>
+            </a:pPr>
+            <a:r>
+              <a:rPr lang="en-US" sz="1400" b="1" dirty="0">
+                <a:solidFill>
+                  <a:srgbClr val="0D9488"/>
+                </a:solidFill>
+                <a:latin typeface="Trebuchet MS" pitchFamily="34" charset="0"/>
+                <a:ea typeface="Trebuchet MS" pitchFamily="34" charset="-122"/>
+                <a:cs typeface="Trebuchet MS" pitchFamily="34" charset="-120"/>
+              </a:rPr>
+              <a:t>er</a:t>
+            </a:r>
+            <a:endParaRPr lang="en-US" sz="1400" dirty="0"/>
+          </a:p>
+        </p:txBody>
+      </p:sp>
+      <p:sp>
+        <p:nvSpPr>
+          <p:cNvPr id="36" name="Shape 34"/>
           <p:cNvSpPr/>
           <p:nvPr/>
         </p:nvSpPr>
@@ -21649,7 +21793,7 @@
       </p:sp>
       <p:sp>
         <p:nvSpPr>
-          <p:cNvPr id="31" name="Text 29"/>
+          <p:cNvPr id="37" name="Text 35"/>
           <p:cNvSpPr/>
           <p:nvPr/>
         </p:nvSpPr>
@@ -21688,18 +21832,18 @@
       </p:sp>
       <p:sp>
         <p:nvSpPr>
-          <p:cNvPr id="32" name="Shape 30"/>
+          <p:cNvPr id="38" name="Shape 36"/>
           <p:cNvSpPr/>
           <p:nvPr/>
         </p:nvSpPr>
         <p:spPr>
           <a:xfrm>
             <a:off x="1874520" y="4096512"/>
-            <a:ext cx="6903720" cy="804672"/>
+            <a:ext cx="6903720" cy="658368"/>
           </a:xfrm>
           <a:prstGeom prst="rect">
             <a:avLst>
-              <a:gd name="adj" fmla="val 6818"/>
+              <a:gd name="adj" fmla="val 8333"/>
             </a:avLst>
           </a:prstGeom>
           <a:solidFill>
@@ -21715,18 +21859,18 @@
       </p:sp>
       <p:sp>
         <p:nvSpPr>
-          <p:cNvPr id="33" name="Shape 31"/>
-          <p:cNvSpPr/>
-          <p:nvPr/>
-        </p:nvSpPr>
-        <p:spPr>
-          <a:xfrm>
-            <a:off x="2427732" y="4169664"/>
-            <a:ext cx="685800" cy="384048"/>
+          <p:cNvPr id="39" name="Shape 37"/>
+          <p:cNvSpPr/>
+          <p:nvPr/>
+        </p:nvSpPr>
+        <p:spPr>
+          <a:xfrm>
+            <a:off x="2254649" y="4169664"/>
+            <a:ext cx="685800" cy="475488"/>
           </a:xfrm>
           <a:prstGeom prst="rect">
             <a:avLst>
-              <a:gd name="adj" fmla="val 9524"/>
+              <a:gd name="adj" fmla="val 7692"/>
             </a:avLst>
           </a:prstGeom>
           <a:solidFill>
@@ -21742,14 +21886,14 @@
       </p:sp>
       <p:sp>
         <p:nvSpPr>
-          <p:cNvPr id="34" name="Text 32"/>
-          <p:cNvSpPr/>
-          <p:nvPr/>
-        </p:nvSpPr>
-        <p:spPr>
-          <a:xfrm>
-            <a:off x="2427732" y="4169664"/>
-            <a:ext cx="685800" cy="384048"/>
+          <p:cNvPr id="40" name="Text 38"/>
+          <p:cNvSpPr/>
+          <p:nvPr/>
+        </p:nvSpPr>
+        <p:spPr>
+          <a:xfrm>
+            <a:off x="2254649" y="4169664"/>
+            <a:ext cx="685800" cy="475488"/>
           </a:xfrm>
           <a:prstGeom prst="rect">
             <a:avLst/>
@@ -21781,18 +21925,18 @@
       </p:sp>
       <p:sp>
         <p:nvSpPr>
-          <p:cNvPr id="35" name="Shape 33"/>
-          <p:cNvSpPr/>
-          <p:nvPr/>
-        </p:nvSpPr>
-        <p:spPr>
-          <a:xfrm>
-            <a:off x="3639312" y="4169664"/>
-            <a:ext cx="685800" cy="384048"/>
+          <p:cNvPr id="41" name="Shape 39"/>
+          <p:cNvSpPr/>
+          <p:nvPr/>
+        </p:nvSpPr>
+        <p:spPr>
+          <a:xfrm>
+            <a:off x="3293146" y="4169664"/>
+            <a:ext cx="685800" cy="475488"/>
           </a:xfrm>
           <a:prstGeom prst="rect">
             <a:avLst>
-              <a:gd name="adj" fmla="val 9524"/>
+              <a:gd name="adj" fmla="val 7692"/>
             </a:avLst>
           </a:prstGeom>
           <a:solidFill>
@@ -21808,14 +21952,14 @@
       </p:sp>
       <p:sp>
         <p:nvSpPr>
-          <p:cNvPr id="36" name="Text 34"/>
-          <p:cNvSpPr/>
-          <p:nvPr/>
-        </p:nvSpPr>
-        <p:spPr>
-          <a:xfrm>
-            <a:off x="3639312" y="4169664"/>
-            <a:ext cx="685800" cy="384048"/>
+          <p:cNvPr id="42" name="Text 40"/>
+          <p:cNvSpPr/>
+          <p:nvPr/>
+        </p:nvSpPr>
+        <p:spPr>
+          <a:xfrm>
+            <a:off x="3293146" y="4169664"/>
+            <a:ext cx="685800" cy="475488"/>
           </a:xfrm>
           <a:prstGeom prst="rect">
             <a:avLst/>
@@ -21847,18 +21991,18 @@
       </p:sp>
       <p:sp>
         <p:nvSpPr>
-          <p:cNvPr id="37" name="Shape 35"/>
-          <p:cNvSpPr/>
-          <p:nvPr/>
-        </p:nvSpPr>
-        <p:spPr>
-          <a:xfrm>
-            <a:off x="4850892" y="4169664"/>
-            <a:ext cx="685800" cy="384048"/>
+          <p:cNvPr id="43" name="Shape 41"/>
+          <p:cNvSpPr/>
+          <p:nvPr/>
+        </p:nvSpPr>
+        <p:spPr>
+          <a:xfrm>
+            <a:off x="4331643" y="4169664"/>
+            <a:ext cx="685800" cy="475488"/>
           </a:xfrm>
           <a:prstGeom prst="rect">
             <a:avLst>
-              <a:gd name="adj" fmla="val 9524"/>
+              <a:gd name="adj" fmla="val 7692"/>
             </a:avLst>
           </a:prstGeom>
           <a:solidFill>
@@ -21874,14 +22018,14 @@
       </p:sp>
       <p:sp>
         <p:nvSpPr>
-          <p:cNvPr id="38" name="Text 36"/>
-          <p:cNvSpPr/>
-          <p:nvPr/>
-        </p:nvSpPr>
-        <p:spPr>
-          <a:xfrm>
-            <a:off x="4850892" y="4169664"/>
-            <a:ext cx="685800" cy="384048"/>
+          <p:cNvPr id="44" name="Text 42"/>
+          <p:cNvSpPr/>
+          <p:nvPr/>
+        </p:nvSpPr>
+        <p:spPr>
+          <a:xfrm>
+            <a:off x="4331643" y="4169664"/>
+            <a:ext cx="685800" cy="475488"/>
           </a:xfrm>
           <a:prstGeom prst="rect">
             <a:avLst/>
@@ -21913,18 +22057,18 @@
       </p:sp>
       <p:sp>
         <p:nvSpPr>
-          <p:cNvPr id="39" name="Shape 37"/>
-          <p:cNvSpPr/>
-          <p:nvPr/>
-        </p:nvSpPr>
-        <p:spPr>
-          <a:xfrm>
-            <a:off x="6062472" y="4169664"/>
-            <a:ext cx="685800" cy="384048"/>
+          <p:cNvPr id="45" name="Shape 43"/>
+          <p:cNvSpPr/>
+          <p:nvPr/>
+        </p:nvSpPr>
+        <p:spPr>
+          <a:xfrm>
+            <a:off x="5370141" y="4169664"/>
+            <a:ext cx="685800" cy="475488"/>
           </a:xfrm>
           <a:prstGeom prst="rect">
             <a:avLst>
-              <a:gd name="adj" fmla="val 9524"/>
+              <a:gd name="adj" fmla="val 7692"/>
             </a:avLst>
           </a:prstGeom>
           <a:solidFill>
@@ -21940,14 +22084,14 @@
       </p:sp>
       <p:sp>
         <p:nvSpPr>
-          <p:cNvPr id="40" name="Text 38"/>
-          <p:cNvSpPr/>
-          <p:nvPr/>
-        </p:nvSpPr>
-        <p:spPr>
-          <a:xfrm>
-            <a:off x="6062472" y="4169664"/>
-            <a:ext cx="685800" cy="384048"/>
+          <p:cNvPr id="46" name="Text 44"/>
+          <p:cNvSpPr/>
+          <p:nvPr/>
+        </p:nvSpPr>
+        <p:spPr>
+          <a:xfrm>
+            <a:off x="5370141" y="4169664"/>
+            <a:ext cx="685800" cy="475488"/>
           </a:xfrm>
           <a:prstGeom prst="rect">
             <a:avLst/>
@@ -21971,7 +22115,7 @@
                 <a:ea typeface="Trebuchet MS" pitchFamily="34" charset="-122"/>
                 <a:cs typeface="Trebuchet MS" pitchFamily="34" charset="-120"/>
               </a:rPr>
-              <a:t>l</a:t>
+              <a:t>e</a:t>
             </a:r>
             <a:endParaRPr lang="en-US" sz="900" dirty="0"/>
           </a:p>
@@ -21979,18 +22123,18 @@
       </p:sp>
       <p:sp>
         <p:nvSpPr>
-          <p:cNvPr id="41" name="Shape 39"/>
-          <p:cNvSpPr/>
-          <p:nvPr/>
-        </p:nvSpPr>
-        <p:spPr>
-          <a:xfrm>
-            <a:off x="7274052" y="4169664"/>
-            <a:ext cx="685800" cy="384048"/>
+          <p:cNvPr id="47" name="Shape 45"/>
+          <p:cNvSpPr/>
+          <p:nvPr/>
+        </p:nvSpPr>
+        <p:spPr>
+          <a:xfrm>
+            <a:off x="6408638" y="4169664"/>
+            <a:ext cx="685800" cy="475488"/>
           </a:xfrm>
           <a:prstGeom prst="rect">
             <a:avLst>
-              <a:gd name="adj" fmla="val 9524"/>
+              <a:gd name="adj" fmla="val 7692"/>
             </a:avLst>
           </a:prstGeom>
           <a:solidFill>
@@ -22006,14 +22150,14 @@
       </p:sp>
       <p:sp>
         <p:nvSpPr>
-          <p:cNvPr id="42" name="Text 40"/>
-          <p:cNvSpPr/>
-          <p:nvPr/>
-        </p:nvSpPr>
-        <p:spPr>
-          <a:xfrm>
-            <a:off x="7274052" y="4169664"/>
-            <a:ext cx="685800" cy="384048"/>
+          <p:cNvPr id="48" name="Text 46"/>
+          <p:cNvSpPr/>
+          <p:nvPr/>
+        </p:nvSpPr>
+        <p:spPr>
+          <a:xfrm>
+            <a:off x="6408638" y="4169664"/>
+            <a:ext cx="685800" cy="475488"/>
           </a:xfrm>
           <a:prstGeom prst="rect">
             <a:avLst/>
@@ -22037,7 +22181,7 @@
                 <a:ea typeface="Trebuchet MS" pitchFamily="34" charset="-122"/>
                 <a:cs typeface="Trebuchet MS" pitchFamily="34" charset="-120"/>
               </a:rPr>
-              <a:t>ee</a:t>
+              <a:t>n</a:t>
             </a:r>
             <a:endParaRPr lang="en-US" sz="900" dirty="0"/>
           </a:p>
@@ -22045,40 +22189,67 @@
       </p:sp>
       <p:sp>
         <p:nvSpPr>
-          <p:cNvPr id="43" name="Text 41"/>
-          <p:cNvSpPr/>
-          <p:nvPr/>
-        </p:nvSpPr>
-        <p:spPr>
-          <a:xfrm>
-            <a:off x="7274052" y="4572000"/>
-            <a:ext cx="685800" cy="219456"/>
-          </a:xfrm>
-          <a:prstGeom prst="rect">
-            <a:avLst/>
-          </a:prstGeom>
-          <a:noFill/>
-          <a:ln/>
-        </p:spPr>
-        <p:txBody>
-          <a:bodyPr wrap="square" lIns="0" tIns="0" rIns="0" bIns="0" rtlCol="0" anchor="t"/>
-          <a:lstStyle/>
-          <a:p>
-            <a:pPr algn="ctr" indent="0" marL="0">
-              <a:buNone/>
-            </a:pPr>
-            <a:r>
-              <a:rPr lang="en-US" sz="750" i="1" dirty="0">
-                <a:solidFill>
-                  <a:srgbClr val="94A3B8"/>
-                </a:solidFill>
-                <a:latin typeface="Calibri" pitchFamily="34" charset="0"/>
-                <a:ea typeface="Calibri" pitchFamily="34" charset="-122"/>
-                <a:cs typeface="Calibri" pitchFamily="34" charset="-120"/>
-              </a:rPr>
-              <a:t>/ee/</a:t>
-            </a:r>
-            <a:endParaRPr lang="en-US" sz="750" dirty="0"/>
+          <p:cNvPr id="49" name="Shape 47"/>
+          <p:cNvSpPr/>
+          <p:nvPr/>
+        </p:nvSpPr>
+        <p:spPr>
+          <a:xfrm>
+            <a:off x="7447135" y="4169664"/>
+            <a:ext cx="685800" cy="475488"/>
+          </a:xfrm>
+          <a:prstGeom prst="rect">
+            <a:avLst>
+              <a:gd name="adj" fmla="val 7692"/>
+            </a:avLst>
+          </a:prstGeom>
+          <a:solidFill>
+            <a:srgbClr val="FFFFFF"/>
+          </a:solidFill>
+          <a:ln w="12700">
+            <a:solidFill>
+              <a:srgbClr val="DB2777"/>
+            </a:solidFill>
+            <a:prstDash val="solid"/>
+          </a:ln>
+        </p:spPr>
+      </p:sp>
+      <p:sp>
+        <p:nvSpPr>
+          <p:cNvPr id="50" name="Text 48"/>
+          <p:cNvSpPr/>
+          <p:nvPr/>
+        </p:nvSpPr>
+        <p:spPr>
+          <a:xfrm>
+            <a:off x="7447135" y="4169664"/>
+            <a:ext cx="685800" cy="475488"/>
+          </a:xfrm>
+          <a:prstGeom prst="rect">
+            <a:avLst/>
+          </a:prstGeom>
+          <a:noFill/>
+          <a:ln/>
+        </p:spPr>
+        <p:txBody>
+          <a:bodyPr wrap="square" lIns="0" tIns="0" rIns="0" bIns="0" rtlCol="0" anchor="ctr"/>
+          <a:lstStyle/>
+          <a:p>
+            <a:pPr algn="ctr" indent="0" marL="0">
+              <a:buNone/>
+            </a:pPr>
+            <a:r>
+              <a:rPr lang="en-US" sz="900" b="1" dirty="0">
+                <a:solidFill>
+                  <a:srgbClr val="9D174D"/>
+                </a:solidFill>
+                <a:latin typeface="Trebuchet MS" pitchFamily="34" charset="0"/>
+                <a:ea typeface="Trebuchet MS" pitchFamily="34" charset="-122"/>
+                <a:cs typeface="Trebuchet MS" pitchFamily="34" charset="-120"/>
+              </a:rPr>
+              <a:t>er</a:t>
+            </a:r>
+            <a:endParaRPr lang="en-US" sz="900" dirty="0"/>
           </a:p>
         </p:txBody>
       </p:sp>
@@ -22507,7 +22678,7 @@
                 <a:ea typeface="Trebuchet MS" pitchFamily="34" charset="-122"/>
                 <a:cs typeface="Trebuchet MS" pitchFamily="34" charset="-120"/>
               </a:rPr>
-              <a:t>sharpener</a:t>
+              <a:t>sharpened</a:t>
             </a:r>
             <a:endParaRPr lang="en-US" sz="2800" dirty="0"/>
           </a:p>
@@ -23334,7 +23505,7 @@
                 <a:ea typeface="Trebuchet MS" pitchFamily="34" charset="-122"/>
                 <a:cs typeface="Trebuchet MS" pitchFamily="34" charset="-120"/>
               </a:rPr>
-              <a:t>sharpener</a:t>
+              <a:t>sharpened</a:t>
             </a:r>
             <a:endParaRPr lang="en-US" sz="2800" dirty="0"/>
           </a:p>
@@ -23624,7 +23795,7 @@
                 <a:ea typeface="Calibri" pitchFamily="34" charset="-122"/>
                 <a:cs typeface="Calibri" pitchFamily="34" charset="-120"/>
               </a:rPr>
-              <a:t>to make or become</a:t>
+              <a:t>to cause or become</a:t>
             </a:r>
             <a:endParaRPr lang="en-US" sz="850" dirty="0"/>
           </a:p>
@@ -23697,7 +23868,7 @@
                 <a:ea typeface="Trebuchet MS" pitchFamily="34" charset="-122"/>
                 <a:cs typeface="Trebuchet MS" pitchFamily="34" charset="-120"/>
               </a:rPr>
-              <a:t>er</a:t>
+              <a:t>ed</a:t>
             </a:r>
             <a:endParaRPr lang="en-US" sz="1300" dirty="0"/>
           </a:p>
@@ -23736,7 +23907,7 @@
                 <a:ea typeface="Calibri" pitchFamily="34" charset="-122"/>
                 <a:cs typeface="Calibri" pitchFamily="34" charset="-120"/>
               </a:rPr>
-              <a:t>one who or that which</a:t>
+              <a:t>past tense</a:t>
             </a:r>
             <a:endParaRPr lang="en-US" sz="850" dirty="0"/>
           </a:p>
@@ -25150,7 +25321,7 @@
                 <a:ea typeface="Trebuchet MS" pitchFamily="34" charset="-122"/>
                 <a:cs typeface="Trebuchet MS" pitchFamily="34" charset="-120"/>
               </a:rPr>
-              <a:t>sharpener</a:t>
+              <a:t>sharpened</a:t>
             </a:r>
             <a:endParaRPr lang="en-US" sz="2800" dirty="0"/>
           </a:p>
@@ -25440,7 +25611,7 @@
                 <a:ea typeface="Calibri" pitchFamily="34" charset="-122"/>
                 <a:cs typeface="Calibri" pitchFamily="34" charset="-120"/>
               </a:rPr>
-              <a:t>to make or become</a:t>
+              <a:t>to cause or become</a:t>
             </a:r>
             <a:endParaRPr lang="en-US" sz="850" dirty="0"/>
           </a:p>
@@ -25513,7 +25684,7 @@
                 <a:ea typeface="Trebuchet MS" pitchFamily="34" charset="-122"/>
                 <a:cs typeface="Trebuchet MS" pitchFamily="34" charset="-120"/>
               </a:rPr>
-              <a:t>er</a:t>
+              <a:t>ed</a:t>
             </a:r>
             <a:endParaRPr lang="en-US" sz="1300" dirty="0"/>
           </a:p>
@@ -25552,7 +25723,7 @@
                 <a:ea typeface="Calibri" pitchFamily="34" charset="-122"/>
                 <a:cs typeface="Calibri" pitchFamily="34" charset="-120"/>
               </a:rPr>
-              <a:t>one who or that which</a:t>
+              <a:t>past tense</a:t>
             </a:r>
             <a:endParaRPr lang="en-US" sz="850" dirty="0"/>
           </a:p>
@@ -25659,7 +25830,7 @@
         </p:nvSpPr>
         <p:spPr>
           <a:xfrm>
-            <a:off x="2313432" y="3364992"/>
+            <a:off x="2999232" y="3364992"/>
             <a:ext cx="1645920" cy="475488"/>
           </a:xfrm>
           <a:prstGeom prst="rect">
@@ -25686,7 +25857,7 @@
         </p:nvSpPr>
         <p:spPr>
           <a:xfrm>
-            <a:off x="2313432" y="3364992"/>
+            <a:off x="2999232" y="3364992"/>
             <a:ext cx="1645920" cy="475488"/>
           </a:xfrm>
           <a:prstGeom prst="rect">
@@ -25725,8 +25896,8 @@
         </p:nvSpPr>
         <p:spPr>
           <a:xfrm>
-            <a:off x="3959352" y="3364992"/>
-            <a:ext cx="411480" cy="475488"/>
+            <a:off x="4645152" y="3364992"/>
+            <a:ext cx="1097280" cy="475488"/>
           </a:xfrm>
           <a:prstGeom prst="rect">
             <a:avLst/>
@@ -25764,7 +25935,7 @@
         </p:nvSpPr>
         <p:spPr>
           <a:xfrm>
-            <a:off x="4370832" y="3364992"/>
+            <a:off x="5742432" y="3364992"/>
             <a:ext cx="1645920" cy="475488"/>
           </a:xfrm>
           <a:prstGeom prst="rect">
@@ -25791,7 +25962,7 @@
         </p:nvSpPr>
         <p:spPr>
           <a:xfrm>
-            <a:off x="4370832" y="3364992"/>
+            <a:off x="5742432" y="3364992"/>
             <a:ext cx="1645920" cy="475488"/>
           </a:xfrm>
           <a:prstGeom prst="rect">
@@ -25816,7 +25987,7 @@
                 <a:ea typeface="Trebuchet MS" pitchFamily="34" charset="-122"/>
                 <a:cs typeface="Trebuchet MS" pitchFamily="34" charset="-120"/>
               </a:rPr>
-              <a:t>en</a:t>
+              <a:t>ened</a:t>
             </a:r>
             <a:endParaRPr lang="en-US" sz="1400" dirty="0"/>
           </a:p>
@@ -25824,14 +25995,41 @@
       </p:sp>
       <p:sp>
         <p:nvSpPr>
-          <p:cNvPr id="33" name="Text 31"/>
-          <p:cNvSpPr/>
-          <p:nvPr/>
-        </p:nvSpPr>
-        <p:spPr>
-          <a:xfrm>
-            <a:off x="6016752" y="3364992"/>
-            <a:ext cx="411480" cy="475488"/>
+          <p:cNvPr id="33" name="Shape 31"/>
+          <p:cNvSpPr/>
+          <p:nvPr/>
+        </p:nvSpPr>
+        <p:spPr>
+          <a:xfrm>
+            <a:off x="365760" y="4096512"/>
+            <a:ext cx="1371600" cy="804672"/>
+          </a:xfrm>
+          <a:prstGeom prst="rect">
+            <a:avLst>
+              <a:gd name="adj" fmla="val 6818"/>
+            </a:avLst>
+          </a:prstGeom>
+          <a:solidFill>
+            <a:srgbClr val="E2E8F0"/>
+          </a:solidFill>
+          <a:ln w="12700">
+            <a:solidFill>
+              <a:srgbClr val="E2E8F0"/>
+            </a:solidFill>
+            <a:prstDash val="solid"/>
+          </a:ln>
+        </p:spPr>
+      </p:sp>
+      <p:sp>
+        <p:nvSpPr>
+          <p:cNvPr id="34" name="Text 32"/>
+          <p:cNvSpPr/>
+          <p:nvPr/>
+        </p:nvSpPr>
+        <p:spPr>
+          <a:xfrm>
+            <a:off x="365760" y="4096512"/>
+            <a:ext cx="1371600" cy="804672"/>
           </a:xfrm>
           <a:prstGeom prst="rect">
             <a:avLst/>
@@ -25847,96 +26045,30 @@
               <a:buNone/>
             </a:pPr>
             <a:r>
-              <a:rPr lang="en-US" sz="1600" b="1" dirty="0">
-                <a:solidFill>
-                  <a:srgbClr val="0D9488"/>
+              <a:rPr lang="en-US" sz="1100" b="1" dirty="0">
+                <a:solidFill>
+                  <a:srgbClr val="475569"/>
                 </a:solidFill>
                 <a:latin typeface="Trebuchet MS" pitchFamily="34" charset="0"/>
                 <a:ea typeface="Trebuchet MS" pitchFamily="34" charset="-122"/>
                 <a:cs typeface="Trebuchet MS" pitchFamily="34" charset="-120"/>
               </a:rPr>
-              <a:t>·</a:t>
-            </a:r>
-            <a:endParaRPr lang="en-US" sz="1600" dirty="0"/>
-          </a:p>
-        </p:txBody>
-      </p:sp>
-      <p:sp>
-        <p:nvSpPr>
-          <p:cNvPr id="34" name="Shape 32"/>
-          <p:cNvSpPr/>
-          <p:nvPr/>
-        </p:nvSpPr>
-        <p:spPr>
-          <a:xfrm>
-            <a:off x="6428232" y="3364992"/>
-            <a:ext cx="1645920" cy="475488"/>
-          </a:xfrm>
-          <a:prstGeom prst="rect">
-            <a:avLst>
-              <a:gd name="adj" fmla="val 9615"/>
-            </a:avLst>
-          </a:prstGeom>
-          <a:solidFill>
-            <a:srgbClr val="FFFFFF"/>
-          </a:solidFill>
-          <a:ln w="12700">
-            <a:solidFill>
-              <a:srgbClr val="0D9488"/>
-            </a:solidFill>
-            <a:prstDash val="solid"/>
-          </a:ln>
-        </p:spPr>
-      </p:sp>
-      <p:sp>
-        <p:nvSpPr>
-          <p:cNvPr id="35" name="Text 33"/>
-          <p:cNvSpPr/>
-          <p:nvPr/>
-        </p:nvSpPr>
-        <p:spPr>
-          <a:xfrm>
-            <a:off x="6428232" y="3364992"/>
-            <a:ext cx="1645920" cy="475488"/>
-          </a:xfrm>
-          <a:prstGeom prst="rect">
-            <a:avLst/>
-          </a:prstGeom>
-          <a:noFill/>
-          <a:ln/>
-        </p:spPr>
-        <p:txBody>
-          <a:bodyPr wrap="square" lIns="0" tIns="0" rIns="0" bIns="0" rtlCol="0" anchor="ctr"/>
-          <a:lstStyle/>
-          <a:p>
-            <a:pPr algn="ctr" indent="0" marL="0">
-              <a:buNone/>
-            </a:pPr>
-            <a:r>
-              <a:rPr lang="en-US" sz="1400" b="1" dirty="0">
-                <a:solidFill>
-                  <a:srgbClr val="0D9488"/>
-                </a:solidFill>
-                <a:latin typeface="Trebuchet MS" pitchFamily="34" charset="0"/>
-                <a:ea typeface="Trebuchet MS" pitchFamily="34" charset="-122"/>
-                <a:cs typeface="Trebuchet MS" pitchFamily="34" charset="-120"/>
-              </a:rPr>
-              <a:t>er</a:t>
-            </a:r>
-            <a:endParaRPr lang="en-US" sz="1400" dirty="0"/>
-          </a:p>
-        </p:txBody>
-      </p:sp>
-      <p:sp>
-        <p:nvSpPr>
-          <p:cNvPr id="36" name="Shape 34"/>
-          <p:cNvSpPr/>
-          <p:nvPr/>
-        </p:nvSpPr>
-        <p:spPr>
-          <a:xfrm>
-            <a:off x="365760" y="4096512"/>
-            <a:ext cx="1371600" cy="804672"/>
+              <a:t>Phonemes</a:t>
+            </a:r>
+            <a:endParaRPr lang="en-US" sz="1100" dirty="0"/>
+          </a:p>
+        </p:txBody>
+      </p:sp>
+      <p:sp>
+        <p:nvSpPr>
+          <p:cNvPr id="35" name="Shape 33"/>
+          <p:cNvSpPr/>
+          <p:nvPr/>
+        </p:nvSpPr>
+        <p:spPr>
+          <a:xfrm>
+            <a:off x="1874520" y="4096512"/>
+            <a:ext cx="6903720" cy="804672"/>
           </a:xfrm>
           <a:prstGeom prst="rect">
             <a:avLst>
@@ -25944,85 +26076,19 @@
             </a:avLst>
           </a:prstGeom>
           <a:solidFill>
-            <a:srgbClr val="E2E8F0"/>
+            <a:srgbClr val="F8FAFC"/>
           </a:solidFill>
           <a:ln w="12700">
             <a:solidFill>
               <a:srgbClr val="E2E8F0"/>
             </a:solidFill>
-            <a:prstDash val="solid"/>
-          </a:ln>
-        </p:spPr>
-      </p:sp>
-      <p:sp>
-        <p:nvSpPr>
-          <p:cNvPr id="37" name="Text 35"/>
-          <p:cNvSpPr/>
-          <p:nvPr/>
-        </p:nvSpPr>
-        <p:spPr>
-          <a:xfrm>
-            <a:off x="365760" y="4096512"/>
-            <a:ext cx="1371600" cy="804672"/>
-          </a:xfrm>
-          <a:prstGeom prst="rect">
-            <a:avLst/>
-          </a:prstGeom>
-          <a:noFill/>
-          <a:ln/>
-        </p:spPr>
-        <p:txBody>
-          <a:bodyPr wrap="square" lIns="0" tIns="0" rIns="0" bIns="0" rtlCol="0" anchor="ctr"/>
-          <a:lstStyle/>
-          <a:p>
-            <a:pPr algn="ctr" indent="0" marL="0">
-              <a:buNone/>
-            </a:pPr>
-            <a:r>
-              <a:rPr lang="en-US" sz="1100" b="1" dirty="0">
-                <a:solidFill>
-                  <a:srgbClr val="475569"/>
-                </a:solidFill>
-                <a:latin typeface="Trebuchet MS" pitchFamily="34" charset="0"/>
-                <a:ea typeface="Trebuchet MS" pitchFamily="34" charset="-122"/>
-                <a:cs typeface="Trebuchet MS" pitchFamily="34" charset="-120"/>
-              </a:rPr>
-              <a:t>Phonemes</a:t>
-            </a:r>
-            <a:endParaRPr lang="en-US" sz="1100" dirty="0"/>
-          </a:p>
-        </p:txBody>
-      </p:sp>
-      <p:sp>
-        <p:nvSpPr>
-          <p:cNvPr id="38" name="Shape 36"/>
-          <p:cNvSpPr/>
-          <p:nvPr/>
-        </p:nvSpPr>
-        <p:spPr>
-          <a:xfrm>
-            <a:off x="1874520" y="4096512"/>
-            <a:ext cx="6903720" cy="804672"/>
-          </a:xfrm>
-          <a:prstGeom prst="rect">
-            <a:avLst>
-              <a:gd name="adj" fmla="val 6818"/>
-            </a:avLst>
-          </a:prstGeom>
-          <a:solidFill>
-            <a:srgbClr val="F8FAFC"/>
-          </a:solidFill>
-          <a:ln w="12700">
-            <a:solidFill>
-              <a:srgbClr val="E2E8F0"/>
-            </a:solidFill>
             <a:prstDash val="dash"/>
           </a:ln>
         </p:spPr>
       </p:sp>
       <p:sp>
         <p:nvSpPr>
-          <p:cNvPr id="39" name="Text 37"/>
+          <p:cNvPr id="36" name="Text 34"/>
           <p:cNvSpPr/>
           <p:nvPr/>
         </p:nvSpPr>
@@ -26484,7 +26550,7 @@
                 <a:ea typeface="Trebuchet MS" pitchFamily="34" charset="-122"/>
                 <a:cs typeface="Trebuchet MS" pitchFamily="34" charset="-120"/>
               </a:rPr>
-              <a:t>sharpener</a:t>
+              <a:t>sharpened</a:t>
             </a:r>
             <a:endParaRPr lang="en-US" sz="2800" dirty="0"/>
           </a:p>
@@ -26774,7 +26840,7 @@
                 <a:ea typeface="Calibri" pitchFamily="34" charset="-122"/>
                 <a:cs typeface="Calibri" pitchFamily="34" charset="-120"/>
               </a:rPr>
-              <a:t>to make or become</a:t>
+              <a:t>to cause or become</a:t>
             </a:r>
             <a:endParaRPr lang="en-US" sz="850" dirty="0"/>
           </a:p>
@@ -26847,7 +26913,7 @@
                 <a:ea typeface="Trebuchet MS" pitchFamily="34" charset="-122"/>
                 <a:cs typeface="Trebuchet MS" pitchFamily="34" charset="-120"/>
               </a:rPr>
-              <a:t>er</a:t>
+              <a:t>ed</a:t>
             </a:r>
             <a:endParaRPr lang="en-US" sz="1300" dirty="0"/>
           </a:p>
@@ -26886,7 +26952,7 @@
                 <a:ea typeface="Calibri" pitchFamily="34" charset="-122"/>
                 <a:cs typeface="Calibri" pitchFamily="34" charset="-120"/>
               </a:rPr>
-              <a:t>one who or that which</a:t>
+              <a:t>past tense</a:t>
             </a:r>
             <a:endParaRPr lang="en-US" sz="850" dirty="0"/>
           </a:p>
@@ -26993,7 +27059,7 @@
         </p:nvSpPr>
         <p:spPr>
           <a:xfrm>
-            <a:off x="2313432" y="3364992"/>
+            <a:off x="2999232" y="3364992"/>
             <a:ext cx="1645920" cy="475488"/>
           </a:xfrm>
           <a:prstGeom prst="rect">
@@ -27020,7 +27086,7 @@
         </p:nvSpPr>
         <p:spPr>
           <a:xfrm>
-            <a:off x="2313432" y="3364992"/>
+            <a:off x="2999232" y="3364992"/>
             <a:ext cx="1645920" cy="475488"/>
           </a:xfrm>
           <a:prstGeom prst="rect">
@@ -27059,8 +27125,8 @@
         </p:nvSpPr>
         <p:spPr>
           <a:xfrm>
-            <a:off x="3959352" y="3364992"/>
-            <a:ext cx="411480" cy="475488"/>
+            <a:off x="4645152" y="3364992"/>
+            <a:ext cx="1097280" cy="475488"/>
           </a:xfrm>
           <a:prstGeom prst="rect">
             <a:avLst/>
@@ -27098,7 +27164,7 @@
         </p:nvSpPr>
         <p:spPr>
           <a:xfrm>
-            <a:off x="4370832" y="3364992"/>
+            <a:off x="5742432" y="3364992"/>
             <a:ext cx="1645920" cy="475488"/>
           </a:xfrm>
           <a:prstGeom prst="rect">
@@ -27125,7 +27191,7 @@
         </p:nvSpPr>
         <p:spPr>
           <a:xfrm>
-            <a:off x="4370832" y="3364992"/>
+            <a:off x="5742432" y="3364992"/>
             <a:ext cx="1645920" cy="475488"/>
           </a:xfrm>
           <a:prstGeom prst="rect">
@@ -27150,7 +27216,7 @@
                 <a:ea typeface="Trebuchet MS" pitchFamily="34" charset="-122"/>
                 <a:cs typeface="Trebuchet MS" pitchFamily="34" charset="-120"/>
               </a:rPr>
-              <a:t>en</a:t>
+              <a:t>ened</a:t>
             </a:r>
             <a:endParaRPr lang="en-US" sz="1400" dirty="0"/>
           </a:p>
@@ -27158,14 +27224,41 @@
       </p:sp>
       <p:sp>
         <p:nvSpPr>
-          <p:cNvPr id="33" name="Text 31"/>
-          <p:cNvSpPr/>
-          <p:nvPr/>
-        </p:nvSpPr>
-        <p:spPr>
-          <a:xfrm>
-            <a:off x="6016752" y="3364992"/>
-            <a:ext cx="411480" cy="475488"/>
+          <p:cNvPr id="33" name="Shape 31"/>
+          <p:cNvSpPr/>
+          <p:nvPr/>
+        </p:nvSpPr>
+        <p:spPr>
+          <a:xfrm>
+            <a:off x="365760" y="4096512"/>
+            <a:ext cx="1371600" cy="804672"/>
+          </a:xfrm>
+          <a:prstGeom prst="rect">
+            <a:avLst>
+              <a:gd name="adj" fmla="val 6818"/>
+            </a:avLst>
+          </a:prstGeom>
+          <a:solidFill>
+            <a:srgbClr val="E2E8F0"/>
+          </a:solidFill>
+          <a:ln w="12700">
+            <a:solidFill>
+              <a:srgbClr val="E2E8F0"/>
+            </a:solidFill>
+            <a:prstDash val="solid"/>
+          </a:ln>
+        </p:spPr>
+      </p:sp>
+      <p:sp>
+        <p:nvSpPr>
+          <p:cNvPr id="34" name="Text 32"/>
+          <p:cNvSpPr/>
+          <p:nvPr/>
+        </p:nvSpPr>
+        <p:spPr>
+          <a:xfrm>
+            <a:off x="365760" y="4096512"/>
+            <a:ext cx="1371600" cy="804672"/>
           </a:xfrm>
           <a:prstGeom prst="rect">
             <a:avLst/>
@@ -27181,57 +27274,84 @@
               <a:buNone/>
             </a:pPr>
             <a:r>
-              <a:rPr lang="en-US" sz="1600" b="1" dirty="0">
-                <a:solidFill>
-                  <a:srgbClr val="0D9488"/>
+              <a:rPr lang="en-US" sz="1100" b="1" dirty="0">
+                <a:solidFill>
+                  <a:srgbClr val="475569"/>
                 </a:solidFill>
                 <a:latin typeface="Trebuchet MS" pitchFamily="34" charset="0"/>
                 <a:ea typeface="Trebuchet MS" pitchFamily="34" charset="-122"/>
                 <a:cs typeface="Trebuchet MS" pitchFamily="34" charset="-120"/>
               </a:rPr>
-              <a:t>·</a:t>
-            </a:r>
-            <a:endParaRPr lang="en-US" sz="1600" dirty="0"/>
-          </a:p>
-        </p:txBody>
-      </p:sp>
-      <p:sp>
-        <p:nvSpPr>
-          <p:cNvPr id="34" name="Shape 32"/>
-          <p:cNvSpPr/>
-          <p:nvPr/>
-        </p:nvSpPr>
-        <p:spPr>
-          <a:xfrm>
-            <a:off x="6428232" y="3364992"/>
-            <a:ext cx="1645920" cy="475488"/>
+              <a:t>Phonemes</a:t>
+            </a:r>
+            <a:endParaRPr lang="en-US" sz="1100" dirty="0"/>
+          </a:p>
+        </p:txBody>
+      </p:sp>
+      <p:sp>
+        <p:nvSpPr>
+          <p:cNvPr id="35" name="Shape 33"/>
+          <p:cNvSpPr/>
+          <p:nvPr/>
+        </p:nvSpPr>
+        <p:spPr>
+          <a:xfrm>
+            <a:off x="1874520" y="4096512"/>
+            <a:ext cx="6903720" cy="658368"/>
           </a:xfrm>
           <a:prstGeom prst="rect">
             <a:avLst>
-              <a:gd name="adj" fmla="val 9615"/>
+              <a:gd name="adj" fmla="val 8333"/>
             </a:avLst>
           </a:prstGeom>
           <a:solidFill>
+            <a:srgbClr val="FCE7F3"/>
+          </a:solidFill>
+          <a:ln w="12700">
+            <a:solidFill>
+              <a:srgbClr val="DB2777"/>
+            </a:solidFill>
+            <a:prstDash val="solid"/>
+          </a:ln>
+        </p:spPr>
+      </p:sp>
+      <p:sp>
+        <p:nvSpPr>
+          <p:cNvPr id="36" name="Shape 34"/>
+          <p:cNvSpPr/>
+          <p:nvPr/>
+        </p:nvSpPr>
+        <p:spPr>
+          <a:xfrm>
+            <a:off x="2254649" y="4169664"/>
+            <a:ext cx="685800" cy="475488"/>
+          </a:xfrm>
+          <a:prstGeom prst="rect">
+            <a:avLst>
+              <a:gd name="adj" fmla="val 7692"/>
+            </a:avLst>
+          </a:prstGeom>
+          <a:solidFill>
             <a:srgbClr val="FFFFFF"/>
           </a:solidFill>
           <a:ln w="12700">
             <a:solidFill>
-              <a:srgbClr val="0D9488"/>
-            </a:solidFill>
-            <a:prstDash val="solid"/>
-          </a:ln>
-        </p:spPr>
-      </p:sp>
-      <p:sp>
-        <p:nvSpPr>
-          <p:cNvPr id="35" name="Text 33"/>
-          <p:cNvSpPr/>
-          <p:nvPr/>
-        </p:nvSpPr>
-        <p:spPr>
-          <a:xfrm>
-            <a:off x="6428232" y="3364992"/>
-            <a:ext cx="1645920" cy="475488"/>
+              <a:srgbClr val="DB2777"/>
+            </a:solidFill>
+            <a:prstDash val="solid"/>
+          </a:ln>
+        </p:spPr>
+      </p:sp>
+      <p:sp>
+        <p:nvSpPr>
+          <p:cNvPr id="37" name="Text 35"/>
+          <p:cNvSpPr/>
+          <p:nvPr/>
+        </p:nvSpPr>
+        <p:spPr>
+          <a:xfrm>
+            <a:off x="2254649" y="4169664"/>
+            <a:ext cx="685800" cy="475488"/>
           </a:xfrm>
           <a:prstGeom prst="rect">
             <a:avLst/>
@@ -27247,57 +27367,57 @@
               <a:buNone/>
             </a:pPr>
             <a:r>
-              <a:rPr lang="en-US" sz="1400" b="1" dirty="0">
-                <a:solidFill>
-                  <a:srgbClr val="0D9488"/>
+              <a:rPr lang="en-US" sz="900" b="1" dirty="0">
+                <a:solidFill>
+                  <a:srgbClr val="9D174D"/>
                 </a:solidFill>
                 <a:latin typeface="Trebuchet MS" pitchFamily="34" charset="0"/>
                 <a:ea typeface="Trebuchet MS" pitchFamily="34" charset="-122"/>
                 <a:cs typeface="Trebuchet MS" pitchFamily="34" charset="-120"/>
               </a:rPr>
-              <a:t>er</a:t>
-            </a:r>
-            <a:endParaRPr lang="en-US" sz="1400" dirty="0"/>
-          </a:p>
-        </p:txBody>
-      </p:sp>
-      <p:sp>
-        <p:nvSpPr>
-          <p:cNvPr id="36" name="Shape 34"/>
-          <p:cNvSpPr/>
-          <p:nvPr/>
-        </p:nvSpPr>
-        <p:spPr>
-          <a:xfrm>
-            <a:off x="365760" y="4096512"/>
-            <a:ext cx="1371600" cy="804672"/>
+              <a:t>sh</a:t>
+            </a:r>
+            <a:endParaRPr lang="en-US" sz="900" dirty="0"/>
+          </a:p>
+        </p:txBody>
+      </p:sp>
+      <p:sp>
+        <p:nvSpPr>
+          <p:cNvPr id="38" name="Shape 36"/>
+          <p:cNvSpPr/>
+          <p:nvPr/>
+        </p:nvSpPr>
+        <p:spPr>
+          <a:xfrm>
+            <a:off x="3293146" y="4169664"/>
+            <a:ext cx="685800" cy="475488"/>
           </a:xfrm>
           <a:prstGeom prst="rect">
             <a:avLst>
-              <a:gd name="adj" fmla="val 6818"/>
+              <a:gd name="adj" fmla="val 7692"/>
             </a:avLst>
           </a:prstGeom>
           <a:solidFill>
-            <a:srgbClr val="E2E8F0"/>
-          </a:solidFill>
-          <a:ln w="12700">
-            <a:solidFill>
-              <a:srgbClr val="E2E8F0"/>
-            </a:solidFill>
-            <a:prstDash val="solid"/>
-          </a:ln>
-        </p:spPr>
-      </p:sp>
-      <p:sp>
-        <p:nvSpPr>
-          <p:cNvPr id="37" name="Text 35"/>
-          <p:cNvSpPr/>
-          <p:nvPr/>
-        </p:nvSpPr>
-        <p:spPr>
-          <a:xfrm>
-            <a:off x="365760" y="4096512"/>
-            <a:ext cx="1371600" cy="804672"/>
+            <a:srgbClr val="FFFFFF"/>
+          </a:solidFill>
+          <a:ln w="12700">
+            <a:solidFill>
+              <a:srgbClr val="DB2777"/>
+            </a:solidFill>
+            <a:prstDash val="solid"/>
+          </a:ln>
+        </p:spPr>
+      </p:sp>
+      <p:sp>
+        <p:nvSpPr>
+          <p:cNvPr id="39" name="Text 37"/>
+          <p:cNvSpPr/>
+          <p:nvPr/>
+        </p:nvSpPr>
+        <p:spPr>
+          <a:xfrm>
+            <a:off x="3293146" y="4169664"/>
+            <a:ext cx="685800" cy="475488"/>
           </a:xfrm>
           <a:prstGeom prst="rect">
             <a:avLst/>
@@ -27313,56 +27433,29 @@
               <a:buNone/>
             </a:pPr>
             <a:r>
-              <a:rPr lang="en-US" sz="1100" b="1" dirty="0">
-                <a:solidFill>
-                  <a:srgbClr val="475569"/>
+              <a:rPr lang="en-US" sz="900" b="1" dirty="0">
+                <a:solidFill>
+                  <a:srgbClr val="9D174D"/>
                 </a:solidFill>
                 <a:latin typeface="Trebuchet MS" pitchFamily="34" charset="0"/>
                 <a:ea typeface="Trebuchet MS" pitchFamily="34" charset="-122"/>
                 <a:cs typeface="Trebuchet MS" pitchFamily="34" charset="-120"/>
               </a:rPr>
-              <a:t>Phonemes</a:t>
-            </a:r>
-            <a:endParaRPr lang="en-US" sz="1100" dirty="0"/>
-          </a:p>
-        </p:txBody>
-      </p:sp>
-      <p:sp>
-        <p:nvSpPr>
-          <p:cNvPr id="38" name="Shape 36"/>
-          <p:cNvSpPr/>
-          <p:nvPr/>
-        </p:nvSpPr>
-        <p:spPr>
-          <a:xfrm>
-            <a:off x="1874520" y="4096512"/>
-            <a:ext cx="6903720" cy="658368"/>
-          </a:xfrm>
-          <a:prstGeom prst="rect">
-            <a:avLst>
-              <a:gd name="adj" fmla="val 8333"/>
-            </a:avLst>
-          </a:prstGeom>
-          <a:solidFill>
-            <a:srgbClr val="FCE7F3"/>
-          </a:solidFill>
-          <a:ln w="12700">
-            <a:solidFill>
-              <a:srgbClr val="DB2777"/>
-            </a:solidFill>
-            <a:prstDash val="solid"/>
-          </a:ln>
-        </p:spPr>
-      </p:sp>
-      <p:sp>
-        <p:nvSpPr>
-          <p:cNvPr id="39" name="Shape 37"/>
-          <p:cNvSpPr/>
-          <p:nvPr/>
-        </p:nvSpPr>
-        <p:spPr>
-          <a:xfrm>
-            <a:off x="2254649" y="4169664"/>
+              <a:t>ar</a:t>
+            </a:r>
+            <a:endParaRPr lang="en-US" sz="900" dirty="0"/>
+          </a:p>
+        </p:txBody>
+      </p:sp>
+      <p:sp>
+        <p:nvSpPr>
+          <p:cNvPr id="40" name="Shape 38"/>
+          <p:cNvSpPr/>
+          <p:nvPr/>
+        </p:nvSpPr>
+        <p:spPr>
+          <a:xfrm>
+            <a:off x="4331643" y="4169664"/>
             <a:ext cx="685800" cy="475488"/>
           </a:xfrm>
           <a:prstGeom prst="rect">
@@ -27383,13 +27476,13 @@
       </p:sp>
       <p:sp>
         <p:nvSpPr>
-          <p:cNvPr id="40" name="Text 38"/>
-          <p:cNvSpPr/>
-          <p:nvPr/>
-        </p:nvSpPr>
-        <p:spPr>
-          <a:xfrm>
-            <a:off x="2254649" y="4169664"/>
+          <p:cNvPr id="41" name="Text 39"/>
+          <p:cNvSpPr/>
+          <p:nvPr/>
+        </p:nvSpPr>
+        <p:spPr>
+          <a:xfrm>
+            <a:off x="4331643" y="4169664"/>
             <a:ext cx="685800" cy="475488"/>
           </a:xfrm>
           <a:prstGeom prst="rect">
@@ -27414,7 +27507,7 @@
                 <a:ea typeface="Trebuchet MS" pitchFamily="34" charset="-122"/>
                 <a:cs typeface="Trebuchet MS" pitchFamily="34" charset="-120"/>
               </a:rPr>
-              <a:t>sh</a:t>
+              <a:t>p</a:t>
             </a:r>
             <a:endParaRPr lang="en-US" sz="900" dirty="0"/>
           </a:p>
@@ -27422,13 +27515,13 @@
       </p:sp>
       <p:sp>
         <p:nvSpPr>
-          <p:cNvPr id="41" name="Shape 39"/>
-          <p:cNvSpPr/>
-          <p:nvPr/>
-        </p:nvSpPr>
-        <p:spPr>
-          <a:xfrm>
-            <a:off x="3293146" y="4169664"/>
+          <p:cNvPr id="42" name="Shape 40"/>
+          <p:cNvSpPr/>
+          <p:nvPr/>
+        </p:nvSpPr>
+        <p:spPr>
+          <a:xfrm>
+            <a:off x="5370141" y="4169664"/>
             <a:ext cx="685800" cy="475488"/>
           </a:xfrm>
           <a:prstGeom prst="rect">
@@ -27449,13 +27542,13 @@
       </p:sp>
       <p:sp>
         <p:nvSpPr>
-          <p:cNvPr id="42" name="Text 40"/>
-          <p:cNvSpPr/>
-          <p:nvPr/>
-        </p:nvSpPr>
-        <p:spPr>
-          <a:xfrm>
-            <a:off x="3293146" y="4169664"/>
+          <p:cNvPr id="43" name="Text 41"/>
+          <p:cNvSpPr/>
+          <p:nvPr/>
+        </p:nvSpPr>
+        <p:spPr>
+          <a:xfrm>
+            <a:off x="5370141" y="4169664"/>
             <a:ext cx="685800" cy="475488"/>
           </a:xfrm>
           <a:prstGeom prst="rect">
@@ -27480,7 +27573,7 @@
                 <a:ea typeface="Trebuchet MS" pitchFamily="34" charset="-122"/>
                 <a:cs typeface="Trebuchet MS" pitchFamily="34" charset="-120"/>
               </a:rPr>
-              <a:t>ar</a:t>
+              <a:t>e</a:t>
             </a:r>
             <a:endParaRPr lang="en-US" sz="900" dirty="0"/>
           </a:p>
@@ -27488,13 +27581,13 @@
       </p:sp>
       <p:sp>
         <p:nvSpPr>
-          <p:cNvPr id="43" name="Shape 41"/>
-          <p:cNvSpPr/>
-          <p:nvPr/>
-        </p:nvSpPr>
-        <p:spPr>
-          <a:xfrm>
-            <a:off x="4331643" y="4169664"/>
+          <p:cNvPr id="44" name="Shape 42"/>
+          <p:cNvSpPr/>
+          <p:nvPr/>
+        </p:nvSpPr>
+        <p:spPr>
+          <a:xfrm>
+            <a:off x="6408638" y="4169664"/>
             <a:ext cx="685800" cy="475488"/>
           </a:xfrm>
           <a:prstGeom prst="rect">
@@ -27515,13 +27608,13 @@
       </p:sp>
       <p:sp>
         <p:nvSpPr>
-          <p:cNvPr id="44" name="Text 42"/>
-          <p:cNvSpPr/>
-          <p:nvPr/>
-        </p:nvSpPr>
-        <p:spPr>
-          <a:xfrm>
-            <a:off x="4331643" y="4169664"/>
+          <p:cNvPr id="45" name="Text 43"/>
+          <p:cNvSpPr/>
+          <p:nvPr/>
+        </p:nvSpPr>
+        <p:spPr>
+          <a:xfrm>
+            <a:off x="6408638" y="4169664"/>
             <a:ext cx="685800" cy="475488"/>
           </a:xfrm>
           <a:prstGeom prst="rect">
@@ -27546,7 +27639,7 @@
                 <a:ea typeface="Trebuchet MS" pitchFamily="34" charset="-122"/>
                 <a:cs typeface="Trebuchet MS" pitchFamily="34" charset="-120"/>
               </a:rPr>
-              <a:t>p</a:t>
+              <a:t>n</a:t>
             </a:r>
             <a:endParaRPr lang="en-US" sz="900" dirty="0"/>
           </a:p>
@@ -27554,13 +27647,13 @@
       </p:sp>
       <p:sp>
         <p:nvSpPr>
-          <p:cNvPr id="45" name="Shape 43"/>
-          <p:cNvSpPr/>
-          <p:nvPr/>
-        </p:nvSpPr>
-        <p:spPr>
-          <a:xfrm>
-            <a:off x="5370141" y="4169664"/>
+          <p:cNvPr id="46" name="Shape 44"/>
+          <p:cNvSpPr/>
+          <p:nvPr/>
+        </p:nvSpPr>
+        <p:spPr>
+          <a:xfrm>
+            <a:off x="7447135" y="4169664"/>
             <a:ext cx="685800" cy="475488"/>
           </a:xfrm>
           <a:prstGeom prst="rect">
@@ -27581,13 +27674,13 @@
       </p:sp>
       <p:sp>
         <p:nvSpPr>
-          <p:cNvPr id="46" name="Text 44"/>
-          <p:cNvSpPr/>
-          <p:nvPr/>
-        </p:nvSpPr>
-        <p:spPr>
-          <a:xfrm>
-            <a:off x="5370141" y="4169664"/>
+          <p:cNvPr id="47" name="Text 45"/>
+          <p:cNvSpPr/>
+          <p:nvPr/>
+        </p:nvSpPr>
+        <p:spPr>
+          <a:xfrm>
+            <a:off x="7447135" y="4169664"/>
             <a:ext cx="685800" cy="475488"/>
           </a:xfrm>
           <a:prstGeom prst="rect">
@@ -27612,139 +27705,7 @@
                 <a:ea typeface="Trebuchet MS" pitchFamily="34" charset="-122"/>
                 <a:cs typeface="Trebuchet MS" pitchFamily="34" charset="-120"/>
               </a:rPr>
-              <a:t>e</a:t>
-            </a:r>
-            <a:endParaRPr lang="en-US" sz="900" dirty="0"/>
-          </a:p>
-        </p:txBody>
-      </p:sp>
-      <p:sp>
-        <p:nvSpPr>
-          <p:cNvPr id="47" name="Shape 45"/>
-          <p:cNvSpPr/>
-          <p:nvPr/>
-        </p:nvSpPr>
-        <p:spPr>
-          <a:xfrm>
-            <a:off x="6408638" y="4169664"/>
-            <a:ext cx="685800" cy="475488"/>
-          </a:xfrm>
-          <a:prstGeom prst="rect">
-            <a:avLst>
-              <a:gd name="adj" fmla="val 7692"/>
-            </a:avLst>
-          </a:prstGeom>
-          <a:solidFill>
-            <a:srgbClr val="FFFFFF"/>
-          </a:solidFill>
-          <a:ln w="12700">
-            <a:solidFill>
-              <a:srgbClr val="DB2777"/>
-            </a:solidFill>
-            <a:prstDash val="solid"/>
-          </a:ln>
-        </p:spPr>
-      </p:sp>
-      <p:sp>
-        <p:nvSpPr>
-          <p:cNvPr id="48" name="Text 46"/>
-          <p:cNvSpPr/>
-          <p:nvPr/>
-        </p:nvSpPr>
-        <p:spPr>
-          <a:xfrm>
-            <a:off x="6408638" y="4169664"/>
-            <a:ext cx="685800" cy="475488"/>
-          </a:xfrm>
-          <a:prstGeom prst="rect">
-            <a:avLst/>
-          </a:prstGeom>
-          <a:noFill/>
-          <a:ln/>
-        </p:spPr>
-        <p:txBody>
-          <a:bodyPr wrap="square" lIns="0" tIns="0" rIns="0" bIns="0" rtlCol="0" anchor="ctr"/>
-          <a:lstStyle/>
-          <a:p>
-            <a:pPr algn="ctr" indent="0" marL="0">
-              <a:buNone/>
-            </a:pPr>
-            <a:r>
-              <a:rPr lang="en-US" sz="900" b="1" dirty="0">
-                <a:solidFill>
-                  <a:srgbClr val="9D174D"/>
-                </a:solidFill>
-                <a:latin typeface="Trebuchet MS" pitchFamily="34" charset="0"/>
-                <a:ea typeface="Trebuchet MS" pitchFamily="34" charset="-122"/>
-                <a:cs typeface="Trebuchet MS" pitchFamily="34" charset="-120"/>
-              </a:rPr>
-              <a:t>n</a:t>
-            </a:r>
-            <a:endParaRPr lang="en-US" sz="900" dirty="0"/>
-          </a:p>
-        </p:txBody>
-      </p:sp>
-      <p:sp>
-        <p:nvSpPr>
-          <p:cNvPr id="49" name="Shape 47"/>
-          <p:cNvSpPr/>
-          <p:nvPr/>
-        </p:nvSpPr>
-        <p:spPr>
-          <a:xfrm>
-            <a:off x="7447135" y="4169664"/>
-            <a:ext cx="685800" cy="475488"/>
-          </a:xfrm>
-          <a:prstGeom prst="rect">
-            <a:avLst>
-              <a:gd name="adj" fmla="val 7692"/>
-            </a:avLst>
-          </a:prstGeom>
-          <a:solidFill>
-            <a:srgbClr val="FFFFFF"/>
-          </a:solidFill>
-          <a:ln w="12700">
-            <a:solidFill>
-              <a:srgbClr val="DB2777"/>
-            </a:solidFill>
-            <a:prstDash val="solid"/>
-          </a:ln>
-        </p:spPr>
-      </p:sp>
-      <p:sp>
-        <p:nvSpPr>
-          <p:cNvPr id="50" name="Text 48"/>
-          <p:cNvSpPr/>
-          <p:nvPr/>
-        </p:nvSpPr>
-        <p:spPr>
-          <a:xfrm>
-            <a:off x="7447135" y="4169664"/>
-            <a:ext cx="685800" cy="475488"/>
-          </a:xfrm>
-          <a:prstGeom prst="rect">
-            <a:avLst/>
-          </a:prstGeom>
-          <a:noFill/>
-          <a:ln/>
-        </p:spPr>
-        <p:txBody>
-          <a:bodyPr wrap="square" lIns="0" tIns="0" rIns="0" bIns="0" rtlCol="0" anchor="ctr"/>
-          <a:lstStyle/>
-          <a:p>
-            <a:pPr algn="ctr" indent="0" marL="0">
-              <a:buNone/>
-            </a:pPr>
-            <a:r>
-              <a:rPr lang="en-US" sz="900" b="1" dirty="0">
-                <a:solidFill>
-                  <a:srgbClr val="9D174D"/>
-                </a:solidFill>
-                <a:latin typeface="Trebuchet MS" pitchFamily="34" charset="0"/>
-                <a:ea typeface="Trebuchet MS" pitchFamily="34" charset="-122"/>
-                <a:cs typeface="Trebuchet MS" pitchFamily="34" charset="-120"/>
-              </a:rPr>
-              <a:t>er</a:t>
+              <a:t>ed</a:t>
             </a:r>
             <a:endParaRPr lang="en-US" sz="900" dirty="0"/>
           </a:p>
@@ -28175,7 +28136,7 @@
                 <a:ea typeface="Trebuchet MS" pitchFamily="34" charset="-122"/>
                 <a:cs typeface="Trebuchet MS" pitchFamily="34" charset="-120"/>
               </a:rPr>
-              <a:t>sharpen</a:t>
+              <a:t>sharpest</a:t>
             </a:r>
             <a:endParaRPr lang="en-US" sz="2800" dirty="0"/>
           </a:p>
@@ -29002,7 +28963,7 @@
                 <a:ea typeface="Trebuchet MS" pitchFamily="34" charset="-122"/>
                 <a:cs typeface="Trebuchet MS" pitchFamily="34" charset="-120"/>
               </a:rPr>
-              <a:t>sharpen</a:t>
+              <a:t>sharpest</a:t>
             </a:r>
             <a:endParaRPr lang="en-US" sz="2800" dirty="0"/>
           </a:p>
@@ -29253,7 +29214,7 @@
                 <a:ea typeface="Trebuchet MS" pitchFamily="34" charset="-122"/>
                 <a:cs typeface="Trebuchet MS" pitchFamily="34" charset="-120"/>
               </a:rPr>
-              <a:t>en</a:t>
+              <a:t>est</a:t>
             </a:r>
             <a:endParaRPr lang="en-US" sz="1300" dirty="0"/>
           </a:p>
@@ -29292,7 +29253,7 @@
                 <a:ea typeface="Calibri" pitchFamily="34" charset="-122"/>
                 <a:cs typeface="Calibri" pitchFamily="34" charset="-120"/>
               </a:rPr>
-              <a:t>to make or become</a:t>
+              <a:t>the most (superlative)</a:t>
             </a:r>
             <a:endParaRPr lang="en-US" sz="850" dirty="0"/>
           </a:p>
@@ -29987,7 +29948,7 @@
                 <a:ea typeface="Trebuchet MS" pitchFamily="34" charset="-122"/>
                 <a:cs typeface="Trebuchet MS" pitchFamily="34" charset="-120"/>
               </a:rPr>
-              <a:t>sharpen</a:t>
+              <a:t>sharpest</a:t>
             </a:r>
             <a:endParaRPr lang="en-US" sz="2800" dirty="0"/>
           </a:p>
@@ -30238,7 +30199,7 @@
                 <a:ea typeface="Trebuchet MS" pitchFamily="34" charset="-122"/>
                 <a:cs typeface="Trebuchet MS" pitchFamily="34" charset="-120"/>
               </a:rPr>
-              <a:t>en</a:t>
+              <a:t>est</a:t>
             </a:r>
             <a:endParaRPr lang="en-US" sz="1300" dirty="0"/>
           </a:p>
@@ -30277,7 +30238,7 @@
                 <a:ea typeface="Calibri" pitchFamily="34" charset="-122"/>
                 <a:cs typeface="Calibri" pitchFamily="34" charset="-120"/>
               </a:rPr>
-              <a:t>to make or become</a:t>
+              <a:t>the most (superlative)</a:t>
             </a:r>
             <a:endParaRPr lang="en-US" sz="850" dirty="0"/>
           </a:p>
@@ -30541,7 +30502,7 @@
                 <a:ea typeface="Trebuchet MS" pitchFamily="34" charset="-122"/>
                 <a:cs typeface="Trebuchet MS" pitchFamily="34" charset="-120"/>
               </a:rPr>
-              <a:t>en</a:t>
+              <a:t>est</a:t>
             </a:r>
             <a:endParaRPr lang="en-US" sz="1400" dirty="0"/>
           </a:p>
@@ -31104,7 +31065,7 @@
                 <a:ea typeface="Trebuchet MS" pitchFamily="34" charset="-122"/>
                 <a:cs typeface="Trebuchet MS" pitchFamily="34" charset="-120"/>
               </a:rPr>
-              <a:t>sharpen</a:t>
+              <a:t>sharpest</a:t>
             </a:r>
             <a:endParaRPr lang="en-US" sz="2800" dirty="0"/>
           </a:p>
@@ -31355,7 +31316,7 @@
                 <a:ea typeface="Trebuchet MS" pitchFamily="34" charset="-122"/>
                 <a:cs typeface="Trebuchet MS" pitchFamily="34" charset="-120"/>
               </a:rPr>
-              <a:t>en</a:t>
+              <a:t>est</a:t>
             </a:r>
             <a:endParaRPr lang="en-US" sz="1300" dirty="0"/>
           </a:p>
@@ -31394,7 +31355,7 @@
                 <a:ea typeface="Calibri" pitchFamily="34" charset="-122"/>
                 <a:cs typeface="Calibri" pitchFamily="34" charset="-120"/>
               </a:rPr>
-              <a:t>to make or become</a:t>
+              <a:t>the most (superlative)</a:t>
             </a:r>
             <a:endParaRPr lang="en-US" sz="850" dirty="0"/>
           </a:p>
@@ -31658,7 +31619,7 @@
                 <a:ea typeface="Trebuchet MS" pitchFamily="34" charset="-122"/>
                 <a:cs typeface="Trebuchet MS" pitchFamily="34" charset="-120"/>
               </a:rPr>
-              <a:t>en</a:t>
+              <a:t>est</a:t>
             </a:r>
             <a:endParaRPr lang="en-US" sz="1400" dirty="0"/>
           </a:p>
@@ -31765,7 +31726,7 @@
         </p:nvSpPr>
         <p:spPr>
           <a:xfrm>
-            <a:off x="2427732" y="4169664"/>
+            <a:off x="2254649" y="4169664"/>
             <a:ext cx="685800" cy="475488"/>
           </a:xfrm>
           <a:prstGeom prst="rect">
@@ -31792,7 +31753,7 @@
         </p:nvSpPr>
         <p:spPr>
           <a:xfrm>
-            <a:off x="2427732" y="4169664"/>
+            <a:off x="2254649" y="4169664"/>
             <a:ext cx="685800" cy="475488"/>
           </a:xfrm>
           <a:prstGeom prst="rect">
@@ -31831,7 +31792,7 @@
         </p:nvSpPr>
         <p:spPr>
           <a:xfrm>
-            <a:off x="3639312" y="4169664"/>
+            <a:off x="3293146" y="4169664"/>
             <a:ext cx="685800" cy="475488"/>
           </a:xfrm>
           <a:prstGeom prst="rect">
@@ -31858,7 +31819,7 @@
         </p:nvSpPr>
         <p:spPr>
           <a:xfrm>
-            <a:off x="3639312" y="4169664"/>
+            <a:off x="3293146" y="4169664"/>
             <a:ext cx="685800" cy="475488"/>
           </a:xfrm>
           <a:prstGeom prst="rect">
@@ -31897,7 +31858,7 @@
         </p:nvSpPr>
         <p:spPr>
           <a:xfrm>
-            <a:off x="4850892" y="4169664"/>
+            <a:off x="4331643" y="4169664"/>
             <a:ext cx="685800" cy="475488"/>
           </a:xfrm>
           <a:prstGeom prst="rect">
@@ -31924,7 +31885,7 @@
         </p:nvSpPr>
         <p:spPr>
           <a:xfrm>
-            <a:off x="4850892" y="4169664"/>
+            <a:off x="4331643" y="4169664"/>
             <a:ext cx="685800" cy="475488"/>
           </a:xfrm>
           <a:prstGeom prst="rect">
@@ -31963,7 +31924,7 @@
         </p:nvSpPr>
         <p:spPr>
           <a:xfrm>
-            <a:off x="6062472" y="4169664"/>
+            <a:off x="5370141" y="4169664"/>
             <a:ext cx="685800" cy="475488"/>
           </a:xfrm>
           <a:prstGeom prst="rect">
@@ -31990,7 +31951,7 @@
         </p:nvSpPr>
         <p:spPr>
           <a:xfrm>
-            <a:off x="6062472" y="4169664"/>
+            <a:off x="5370141" y="4169664"/>
             <a:ext cx="685800" cy="475488"/>
           </a:xfrm>
           <a:prstGeom prst="rect">
@@ -32029,7 +31990,7 @@
         </p:nvSpPr>
         <p:spPr>
           <a:xfrm>
-            <a:off x="7274052" y="4169664"/>
+            <a:off x="6408638" y="4169664"/>
             <a:ext cx="685800" cy="475488"/>
           </a:xfrm>
           <a:prstGeom prst="rect">
@@ -32056,7 +32017,7 @@
         </p:nvSpPr>
         <p:spPr>
           <a:xfrm>
-            <a:off x="7274052" y="4169664"/>
+            <a:off x="6408638" y="4169664"/>
             <a:ext cx="685800" cy="475488"/>
           </a:xfrm>
           <a:prstGeom prst="rect">
@@ -32081,7 +32042,73 @@
                 <a:ea typeface="Trebuchet MS" pitchFamily="34" charset="-122"/>
                 <a:cs typeface="Trebuchet MS" pitchFamily="34" charset="-120"/>
               </a:rPr>
-              <a:t>n</a:t>
+              <a:t>s</a:t>
+            </a:r>
+            <a:endParaRPr lang="en-US" sz="900" dirty="0"/>
+          </a:p>
+        </p:txBody>
+      </p:sp>
+      <p:sp>
+        <p:nvSpPr>
+          <p:cNvPr id="43" name="Shape 41"/>
+          <p:cNvSpPr/>
+          <p:nvPr/>
+        </p:nvSpPr>
+        <p:spPr>
+          <a:xfrm>
+            <a:off x="7447135" y="4169664"/>
+            <a:ext cx="685800" cy="475488"/>
+          </a:xfrm>
+          <a:prstGeom prst="rect">
+            <a:avLst>
+              <a:gd name="adj" fmla="val 7692"/>
+            </a:avLst>
+          </a:prstGeom>
+          <a:solidFill>
+            <a:srgbClr val="FFFFFF"/>
+          </a:solidFill>
+          <a:ln w="12700">
+            <a:solidFill>
+              <a:srgbClr val="DB2777"/>
+            </a:solidFill>
+            <a:prstDash val="solid"/>
+          </a:ln>
+        </p:spPr>
+      </p:sp>
+      <p:sp>
+        <p:nvSpPr>
+          <p:cNvPr id="44" name="Text 42"/>
+          <p:cNvSpPr/>
+          <p:nvPr/>
+        </p:nvSpPr>
+        <p:spPr>
+          <a:xfrm>
+            <a:off x="7447135" y="4169664"/>
+            <a:ext cx="685800" cy="475488"/>
+          </a:xfrm>
+          <a:prstGeom prst="rect">
+            <a:avLst/>
+          </a:prstGeom>
+          <a:noFill/>
+          <a:ln/>
+        </p:spPr>
+        <p:txBody>
+          <a:bodyPr wrap="square" lIns="0" tIns="0" rIns="0" bIns="0" rtlCol="0" anchor="ctr"/>
+          <a:lstStyle/>
+          <a:p>
+            <a:pPr algn="ctr" indent="0" marL="0">
+              <a:buNone/>
+            </a:pPr>
+            <a:r>
+              <a:rPr lang="en-US" sz="900" b="1" dirty="0">
+                <a:solidFill>
+                  <a:srgbClr val="9D174D"/>
+                </a:solidFill>
+                <a:latin typeface="Trebuchet MS" pitchFamily="34" charset="0"/>
+                <a:ea typeface="Trebuchet MS" pitchFamily="34" charset="-122"/>
+                <a:cs typeface="Trebuchet MS" pitchFamily="34" charset="-120"/>
+              </a:rPr>
+              <a:t>t</a:t>
             </a:r>
             <a:endParaRPr lang="en-US" sz="900" dirty="0"/>
           </a:p>
@@ -33971,7 +33998,7 @@
                 <a:ea typeface="Trebuchet MS" pitchFamily="34" charset="-122"/>
                 <a:cs typeface="Trebuchet MS" pitchFamily="34" charset="-120"/>
               </a:rPr>
-              <a:t>-ly</a:t>
+              <a:t>-en</a:t>
             </a:r>
             <a:endParaRPr lang="en-US" sz="1300" dirty="0"/>
           </a:p>
@@ -34035,7 +34062,7 @@
                 <a:ea typeface="Trebuchet MS" pitchFamily="34" charset="-122"/>
                 <a:cs typeface="Trebuchet MS" pitchFamily="34" charset="-120"/>
               </a:rPr>
-              <a:t>semi-</a:t>
+              <a:t>out-</a:t>
             </a:r>
             <a:endParaRPr lang="en-US" sz="1300" dirty="0"/>
           </a:p>
@@ -34124,7 +34151,7 @@
                 <a:ea typeface="Trebuchet MS" pitchFamily="34" charset="-122"/>
                 <a:cs typeface="Trebuchet MS" pitchFamily="34" charset="-120"/>
               </a:rPr>
-              <a:t>-ness</a:t>
+              <a:t>-er</a:t>
             </a:r>
             <a:endParaRPr lang="en-US" sz="1300" dirty="0"/>
           </a:p>
@@ -34277,7 +34304,7 @@
                 <a:ea typeface="Trebuchet MS" pitchFamily="34" charset="-122"/>
                 <a:cs typeface="Trebuchet MS" pitchFamily="34" charset="-120"/>
               </a:rPr>
-              <a:t>-er</a:t>
+              <a:t>-est</a:t>
             </a:r>
             <a:endParaRPr lang="en-US" sz="1300" dirty="0"/>
           </a:p>
@@ -34430,7 +34457,7 @@
                 <a:ea typeface="Trebuchet MS" pitchFamily="34" charset="-122"/>
                 <a:cs typeface="Trebuchet MS" pitchFamily="34" charset="-120"/>
               </a:rPr>
-              <a:t>-est</a:t>
+              <a:t>-ly</a:t>
             </a:r>
             <a:endParaRPr lang="en-US" sz="1300" dirty="0"/>
           </a:p>
@@ -34494,7 +34521,7 @@
                 <a:ea typeface="Trebuchet MS" pitchFamily="34" charset="-122"/>
                 <a:cs typeface="Trebuchet MS" pitchFamily="34" charset="-120"/>
               </a:rPr>
-              <a:t>ultra-</a:t>
+              <a:t>re-</a:t>
             </a:r>
             <a:endParaRPr lang="en-US" sz="1300" dirty="0"/>
           </a:p>
@@ -34583,7 +34610,7 @@
                 <a:ea typeface="Trebuchet MS" pitchFamily="34" charset="-122"/>
                 <a:cs typeface="Trebuchet MS" pitchFamily="34" charset="-120"/>
               </a:rPr>
-              <a:t>-en</a:t>
+              <a:t>-ness</a:t>
             </a:r>
             <a:endParaRPr lang="en-US" sz="1300" dirty="0"/>
           </a:p>
@@ -34688,7 +34715,7 @@
                 <a:ea typeface="Trebuchet MS" pitchFamily="34" charset="-122"/>
                 <a:cs typeface="Trebuchet MS" pitchFamily="34" charset="-120"/>
               </a:rPr>
-              <a:t>sharply</a:t>
+              <a:t>sharpen</a:t>
             </a:r>
             <a:endParaRPr lang="en-US" sz="1200" dirty="0"/>
           </a:p>
@@ -34754,7 +34781,7 @@
                 <a:ea typeface="Trebuchet MS" pitchFamily="34" charset="-122"/>
                 <a:cs typeface="Trebuchet MS" pitchFamily="34" charset="-120"/>
               </a:rPr>
-              <a:t>sharpness</a:t>
+              <a:t>sharper</a:t>
             </a:r>
             <a:endParaRPr lang="en-US" sz="1200" dirty="0"/>
           </a:p>
@@ -34820,7 +34847,7 @@
                 <a:ea typeface="Trebuchet MS" pitchFamily="34" charset="-122"/>
                 <a:cs typeface="Trebuchet MS" pitchFamily="34" charset="-120"/>
               </a:rPr>
-              <a:t>sharpen</a:t>
+              <a:t>sharpest</a:t>
             </a:r>
             <a:endParaRPr lang="en-US" sz="1200" dirty="0"/>
           </a:p>
@@ -34886,7 +34913,7 @@
                 <a:ea typeface="Trebuchet MS" pitchFamily="34" charset="-122"/>
                 <a:cs typeface="Trebuchet MS" pitchFamily="34" charset="-120"/>
               </a:rPr>
-              <a:t>sharper</a:t>
+              <a:t>sharply</a:t>
             </a:r>
             <a:endParaRPr lang="en-US" sz="1200" dirty="0"/>
           </a:p>
@@ -34952,7 +34979,7 @@
                 <a:ea typeface="Trebuchet MS" pitchFamily="34" charset="-122"/>
                 <a:cs typeface="Trebuchet MS" pitchFamily="34" charset="-120"/>
               </a:rPr>
-              <a:t>sharpest</a:t>
+              <a:t>sharpness</a:t>
             </a:r>
             <a:endParaRPr lang="en-US" sz="1200" dirty="0"/>
           </a:p>
@@ -35018,7 +35045,7 @@
                 <a:ea typeface="Trebuchet MS" pitchFamily="34" charset="-122"/>
                 <a:cs typeface="Trebuchet MS" pitchFamily="34" charset="-120"/>
               </a:rPr>
-              <a:t>unsharp</a:t>
+              <a:t>sharpener</a:t>
             </a:r>
             <a:endParaRPr lang="en-US" sz="1200" dirty="0"/>
           </a:p>
@@ -35084,7 +35111,7 @@
                 <a:ea typeface="Trebuchet MS" pitchFamily="34" charset="-122"/>
                 <a:cs typeface="Trebuchet MS" pitchFamily="34" charset="-120"/>
               </a:rPr>
-              <a:t>sharpener</a:t>
+              <a:t>unsharpened</a:t>
             </a:r>
             <a:endParaRPr lang="en-US" sz="1200" dirty="0"/>
           </a:p>
@@ -35150,7 +35177,7 @@
                 <a:ea typeface="Trebuchet MS" pitchFamily="34" charset="-122"/>
                 <a:cs typeface="Trebuchet MS" pitchFamily="34" charset="-120"/>
               </a:rPr>
-              <a:t>oversharp</a:t>
+              <a:t>outsharp</a:t>
             </a:r>
             <a:endParaRPr lang="en-US" sz="1200" dirty="0"/>
           </a:p>
@@ -36338,7 +36365,7 @@
                 <a:ea typeface="Calibri" pitchFamily="34" charset="-122"/>
                 <a:cs typeface="Calibri" pitchFamily="34" charset="-120"/>
               </a:rPr>
-              <a:t>1.  The word 'sharpen' contains the root 'sharp' plus the suffix '-en', meaning to make sharp.</a:t>
+              <a:t>1.  Adding '-ly' to 'sharp' makes an adverb that describes how something is done.</a:t>
             </a:r>
             <a:endParaRPr lang="en-US" sz="1300" dirty="0"/>
           </a:p>
@@ -36477,7 +36504,7 @@
                 <a:ea typeface="Calibri" pitchFamily="34" charset="-122"/>
                 <a:cs typeface="Calibri" pitchFamily="34" charset="-120"/>
               </a:rPr>
-              <a:t>2.  The word 'sharpness' means the same thing as 'sharply'.</a:t>
+              <a:t>2.  The root 'sharp' comes from a French word.</a:t>
             </a:r>
             <a:endParaRPr lang="en-US" sz="1300" dirty="0"/>
           </a:p>
@@ -36616,7 +36643,7 @@
                 <a:ea typeface="Calibri" pitchFamily="34" charset="-122"/>
                 <a:cs typeface="Calibri" pitchFamily="34" charset="-120"/>
               </a:rPr>
-              <a:t>3.  A sharpener is a tool that helps make something sharp.</a:t>
+              <a:t>3.  The word 'sharpen' is an adjective.</a:t>
             </a:r>
             <a:endParaRPr lang="en-US" sz="1300" dirty="0"/>
           </a:p>
@@ -36639,11 +36666,11 @@
             </a:avLst>
           </a:prstGeom>
           <a:solidFill>
-            <a:srgbClr val="DCFCE7"/>
-          </a:solidFill>
-          <a:ln w="12700">
-            <a:solidFill>
-              <a:srgbClr val="16A34A"/>
+            <a:srgbClr val="FEE2E2"/>
+          </a:solidFill>
+          <a:ln w="12700">
+            <a:solidFill>
+              <a:srgbClr val="DC2626"/>
             </a:solidFill>
             <a:prstDash val="solid"/>
           </a:ln>
@@ -36676,13 +36703,13 @@
             <a:r>
               <a:rPr lang="en-US" sz="1100" b="1" dirty="0">
                 <a:solidFill>
-                  <a:srgbClr val="16A34A"/>
+                  <a:srgbClr val="DC2626"/>
                 </a:solidFill>
                 <a:latin typeface="Trebuchet MS" pitchFamily="34" charset="0"/>
                 <a:ea typeface="Trebuchet MS" pitchFamily="34" charset="-122"/>
                 <a:cs typeface="Trebuchet MS" pitchFamily="34" charset="-120"/>
               </a:rPr>
-              <a:t>TRUE</a:t>
+              <a:t>FALSE</a:t>
             </a:r>
             <a:endParaRPr lang="en-US" sz="1100" dirty="0"/>
           </a:p>
@@ -36755,7 +36782,7 @@
                 <a:ea typeface="Calibri" pitchFamily="34" charset="-122"/>
                 <a:cs typeface="Calibri" pitchFamily="34" charset="-120"/>
               </a:rPr>
-              <a:t>4.  Adding '-ly' to 'sharp' creates an adverb that describes how something is done.</a:t>
+              <a:t>4.  The word 'sharpen' contains the root 'sharp' and the suffix '-en'.</a:t>
             </a:r>
             <a:endParaRPr lang="en-US" sz="1300" dirty="0"/>
           </a:p>
@@ -36894,7 +36921,7 @@
                 <a:ea typeface="Calibri" pitchFamily="34" charset="-122"/>
                 <a:cs typeface="Calibri" pitchFamily="34" charset="-120"/>
               </a:rPr>
-              <a:t>5.  The prefix 'un-' in 'unsharp' means 'very' or 'extremely'.</a:t>
+              <a:t>5.  The word 'sharpness' uses the suffix '-ness' to make a noun.</a:t>
             </a:r>
             <a:endParaRPr lang="en-US" sz="1300" dirty="0"/>
           </a:p>
@@ -36917,11 +36944,11 @@
             </a:avLst>
           </a:prstGeom>
           <a:solidFill>
-            <a:srgbClr val="FEE2E2"/>
-          </a:solidFill>
-          <a:ln w="12700">
-            <a:solidFill>
-              <a:srgbClr val="DC2626"/>
+            <a:srgbClr val="DCFCE7"/>
+          </a:solidFill>
+          <a:ln w="12700">
+            <a:solidFill>
+              <a:srgbClr val="16A34A"/>
             </a:solidFill>
             <a:prstDash val="solid"/>
           </a:ln>
@@ -36954,13 +36981,13 @@
             <a:r>
               <a:rPr lang="en-US" sz="1100" b="1" dirty="0">
                 <a:solidFill>
-                  <a:srgbClr val="DC2626"/>
+                  <a:srgbClr val="16A34A"/>
                 </a:solidFill>
                 <a:latin typeface="Trebuchet MS" pitchFamily="34" charset="0"/>
                 <a:ea typeface="Trebuchet MS" pitchFamily="34" charset="-122"/>
                 <a:cs typeface="Trebuchet MS" pitchFamily="34" charset="-120"/>
               </a:rPr>
-              <a:t>FALSE</a:t>
+              <a:t>TRUE</a:t>
             </a:r>
             <a:endParaRPr lang="en-US" sz="1100" dirty="0"/>
           </a:p>
@@ -37533,7 +37560,7 @@
                 <a:ea typeface="Trebuchet MS" pitchFamily="34" charset="-122"/>
                 <a:cs typeface="Trebuchet MS" pitchFamily="34" charset="-120"/>
               </a:rPr>
-              <a:t>sharply</a:t>
+              <a:t>sharpen</a:t>
             </a:r>
             <a:endParaRPr lang="en-US" sz="1300" dirty="0"/>
           </a:p>
@@ -37599,7 +37626,7 @@
                 <a:ea typeface="Trebuchet MS" pitchFamily="34" charset="-122"/>
                 <a:cs typeface="Trebuchet MS" pitchFamily="34" charset="-120"/>
               </a:rPr>
-              <a:t>sharpness</a:t>
+              <a:t>sharper</a:t>
             </a:r>
             <a:endParaRPr lang="en-US" sz="1300" dirty="0"/>
           </a:p>
@@ -37665,7 +37692,7 @@
                 <a:ea typeface="Trebuchet MS" pitchFamily="34" charset="-122"/>
                 <a:cs typeface="Trebuchet MS" pitchFamily="34" charset="-120"/>
               </a:rPr>
-              <a:t>sharpen</a:t>
+              <a:t>sharpest</a:t>
             </a:r>
             <a:endParaRPr lang="en-US" sz="1300" dirty="0"/>
           </a:p>
@@ -37731,7 +37758,7 @@
                 <a:ea typeface="Trebuchet MS" pitchFamily="34" charset="-122"/>
                 <a:cs typeface="Trebuchet MS" pitchFamily="34" charset="-120"/>
               </a:rPr>
-              <a:t>sharper</a:t>
+              <a:t>sharply</a:t>
             </a:r>
             <a:endParaRPr lang="en-US" sz="1300" dirty="0"/>
           </a:p>
@@ -37797,7 +37824,7 @@
                 <a:ea typeface="Trebuchet MS" pitchFamily="34" charset="-122"/>
                 <a:cs typeface="Trebuchet MS" pitchFamily="34" charset="-120"/>
               </a:rPr>
-              <a:t>sharpest</a:t>
+              <a:t>sharpness</a:t>
             </a:r>
             <a:endParaRPr lang="en-US" sz="1300" dirty="0"/>
           </a:p>
@@ -37863,7 +37890,7 @@
                 <a:ea typeface="Trebuchet MS" pitchFamily="34" charset="-122"/>
                 <a:cs typeface="Trebuchet MS" pitchFamily="34" charset="-120"/>
               </a:rPr>
-              <a:t>unsharp</a:t>
+              <a:t>sharpener</a:t>
             </a:r>
             <a:endParaRPr lang="en-US" sz="1300" dirty="0"/>
           </a:p>
@@ -37929,7 +37956,7 @@
                 <a:ea typeface="Trebuchet MS" pitchFamily="34" charset="-122"/>
                 <a:cs typeface="Trebuchet MS" pitchFamily="34" charset="-120"/>
               </a:rPr>
-              <a:t>sharpener</a:t>
+              <a:t>unsharpened</a:t>
             </a:r>
             <a:endParaRPr lang="en-US" sz="1300" dirty="0"/>
           </a:p>
@@ -38650,7 +38677,7 @@
                 <a:ea typeface="Trebuchet MS" pitchFamily="34" charset="-122"/>
                 <a:cs typeface="Trebuchet MS" pitchFamily="34" charset="-120"/>
               </a:rPr>
-              <a:t>-ly</a:t>
+              <a:t>-en</a:t>
             </a:r>
             <a:endParaRPr lang="en-US" sz="1300" dirty="0"/>
           </a:p>
@@ -38714,7 +38741,7 @@
                 <a:ea typeface="Trebuchet MS" pitchFamily="34" charset="-122"/>
                 <a:cs typeface="Trebuchet MS" pitchFamily="34" charset="-120"/>
               </a:rPr>
-              <a:t>semi-</a:t>
+              <a:t>out-</a:t>
             </a:r>
             <a:endParaRPr lang="en-US" sz="1300" dirty="0"/>
           </a:p>
@@ -38803,7 +38830,7 @@
                 <a:ea typeface="Trebuchet MS" pitchFamily="34" charset="-122"/>
                 <a:cs typeface="Trebuchet MS" pitchFamily="34" charset="-120"/>
               </a:rPr>
-              <a:t>-ness</a:t>
+              <a:t>-er</a:t>
             </a:r>
             <a:endParaRPr lang="en-US" sz="1300" dirty="0"/>
           </a:p>
@@ -38956,7 +38983,7 @@
                 <a:ea typeface="Trebuchet MS" pitchFamily="34" charset="-122"/>
                 <a:cs typeface="Trebuchet MS" pitchFamily="34" charset="-120"/>
               </a:rPr>
-              <a:t>-er</a:t>
+              <a:t>-est</a:t>
             </a:r>
             <a:endParaRPr lang="en-US" sz="1300" dirty="0"/>
           </a:p>
@@ -39109,7 +39136,7 @@
                 <a:ea typeface="Trebuchet MS" pitchFamily="34" charset="-122"/>
                 <a:cs typeface="Trebuchet MS" pitchFamily="34" charset="-120"/>
               </a:rPr>
-              <a:t>-est</a:t>
+              <a:t>-ly</a:t>
             </a:r>
             <a:endParaRPr lang="en-US" sz="1300" dirty="0"/>
           </a:p>
@@ -39173,7 +39200,7 @@
                 <a:ea typeface="Trebuchet MS" pitchFamily="34" charset="-122"/>
                 <a:cs typeface="Trebuchet MS" pitchFamily="34" charset="-120"/>
               </a:rPr>
-              <a:t>ultra-</a:t>
+              <a:t>re-</a:t>
             </a:r>
             <a:endParaRPr lang="en-US" sz="1300" dirty="0"/>
           </a:p>
@@ -39262,7 +39289,7 @@
                 <a:ea typeface="Trebuchet MS" pitchFamily="34" charset="-122"/>
                 <a:cs typeface="Trebuchet MS" pitchFamily="34" charset="-120"/>
               </a:rPr>
-              <a:t>-en</a:t>
+              <a:t>-ness</a:t>
             </a:r>
             <a:endParaRPr lang="en-US" sz="1300" dirty="0"/>
           </a:p>
@@ -39598,7 +39625,7 @@
                 <a:ea typeface="Trebuchet MS" pitchFamily="34" charset="-122"/>
                 <a:cs typeface="Trebuchet MS" pitchFamily="34" charset="-120"/>
               </a:rPr>
-              <a:t>-ly</a:t>
+              <a:t>-en</a:t>
             </a:r>
             <a:endParaRPr lang="en-US" sz="1300" dirty="0"/>
           </a:p>
@@ -39703,7 +39730,7 @@
                 <a:ea typeface="Trebuchet MS" pitchFamily="34" charset="-122"/>
                 <a:cs typeface="Trebuchet MS" pitchFamily="34" charset="-120"/>
               </a:rPr>
-              <a:t>sharply</a:t>
+              <a:t>sharpen</a:t>
             </a:r>
             <a:endParaRPr lang="en-US" sz="1400" dirty="0"/>
           </a:p>
@@ -40107,7 +40134,7 @@
                 <a:ea typeface="Trebuchet MS" pitchFamily="34" charset="-122"/>
                 <a:cs typeface="Trebuchet MS" pitchFamily="34" charset="-120"/>
               </a:rPr>
-              <a:t>sharply</a:t>
+              <a:t>sharpen</a:t>
             </a:r>
             <a:endParaRPr lang="en-US" sz="1200" dirty="0"/>
           </a:p>
@@ -40173,7 +40200,7 @@
                 <a:ea typeface="Calibri" pitchFamily="34" charset="-122"/>
                 <a:cs typeface="Calibri" pitchFamily="34" charset="-120"/>
               </a:rPr>
-              <a:t>A tool used to make pencils or blades sharp again.</a:t>
+              <a:t>Describes something that has not been made sharp yet, like an unsharpened pencil.</a:t>
             </a:r>
             <a:endParaRPr lang="en-US" sz="1200" dirty="0"/>
           </a:p>
@@ -40246,7 +40273,7 @@
                 <a:ea typeface="Trebuchet MS" pitchFamily="34" charset="-122"/>
                 <a:cs typeface="Trebuchet MS" pitchFamily="34" charset="-120"/>
               </a:rPr>
-              <a:t>sharpness</a:t>
+              <a:t>sharper</a:t>
             </a:r>
             <a:endParaRPr lang="en-US" sz="1200" dirty="0"/>
           </a:p>
@@ -40312,7 +40339,7 @@
                 <a:ea typeface="Calibri" pitchFamily="34" charset="-122"/>
                 <a:cs typeface="Calibri" pitchFamily="34" charset="-120"/>
               </a:rPr>
-              <a:t>The most sharp of all, like having the sharpest eyesight in the class.</a:t>
+              <a:t>The quality of being sharp, such as the sharpness of a knife blade.</a:t>
             </a:r>
             <a:endParaRPr lang="en-US" sz="1200" dirty="0"/>
           </a:p>
@@ -40385,7 +40412,7 @@
                 <a:ea typeface="Trebuchet MS" pitchFamily="34" charset="-122"/>
                 <a:cs typeface="Trebuchet MS" pitchFamily="34" charset="-120"/>
               </a:rPr>
-              <a:t>sharpen</a:t>
+              <a:t>sharpest</a:t>
             </a:r>
             <a:endParaRPr lang="en-US" sz="1200" dirty="0"/>
           </a:p>
@@ -40451,7 +40478,7 @@
                 <a:ea typeface="Calibri" pitchFamily="34" charset="-122"/>
                 <a:cs typeface="Calibri" pitchFamily="34" charset="-120"/>
               </a:rPr>
-              <a:t>More sharp or more clever than something else.</a:t>
+              <a:t>In a sudden or severe way, like turning sharply around a corner.</a:t>
             </a:r>
             <a:endParaRPr lang="en-US" sz="1200" dirty="0"/>
           </a:p>
@@ -40524,7 +40551,7 @@
                 <a:ea typeface="Trebuchet MS" pitchFamily="34" charset="-122"/>
                 <a:cs typeface="Trebuchet MS" pitchFamily="34" charset="-120"/>
               </a:rPr>
-              <a:t>sharper</a:t>
+              <a:t>sharply</a:t>
             </a:r>
             <a:endParaRPr lang="en-US" sz="1200" dirty="0"/>
           </a:p>
@@ -40590,7 +40617,7 @@
                 <a:ea typeface="Calibri" pitchFamily="34" charset="-122"/>
                 <a:cs typeface="Calibri" pitchFamily="34" charset="-120"/>
               </a:rPr>
-              <a:t>Not sharp; blurry or blunt, like an unsharp photo or an unsharp blade.</a:t>
+              <a:t>A tool used to make pencils or blades sharper and more pointed.</a:t>
             </a:r>
             <a:endParaRPr lang="en-US" sz="1200" dirty="0"/>
           </a:p>
@@ -40663,7 +40690,7 @@
                 <a:ea typeface="Trebuchet MS" pitchFamily="34" charset="-122"/>
                 <a:cs typeface="Trebuchet MS" pitchFamily="34" charset="-120"/>
               </a:rPr>
-              <a:t>sharpest</a:t>
+              <a:t>sharpness</a:t>
             </a:r>
             <a:endParaRPr lang="en-US" sz="1200" dirty="0"/>
           </a:p>
@@ -40729,7 +40756,7 @@
                 <a:ea typeface="Calibri" pitchFamily="34" charset="-122"/>
                 <a:cs typeface="Calibri" pitchFamily="34" charset="-120"/>
               </a:rPr>
-              <a:t>To make something sharp or more pointed, like sharpening a pencil.</a:t>
+              <a:t>The most sharp of all; having the finest point or edge.</a:t>
             </a:r>
             <a:endParaRPr lang="en-US" sz="1200" dirty="0"/>
           </a:p>
@@ -40802,7 +40829,7 @@
                 <a:ea typeface="Trebuchet MS" pitchFamily="34" charset="-122"/>
                 <a:cs typeface="Trebuchet MS" pitchFamily="34" charset="-120"/>
               </a:rPr>
-              <a:t>unsharp</a:t>
+              <a:t>sharpener</a:t>
             </a:r>
             <a:endParaRPr lang="en-US" sz="1200" dirty="0"/>
           </a:p>
@@ -40868,7 +40895,7 @@
                 <a:ea typeface="Calibri" pitchFamily="34" charset="-122"/>
                 <a:cs typeface="Calibri" pitchFamily="34" charset="-120"/>
               </a:rPr>
-              <a:t>In a quick, sudden, or cutting way, like turning sharply around a corner.</a:t>
+              <a:t>To make something have a finer point or edge, like sharpening a pencil.</a:t>
             </a:r>
             <a:endParaRPr lang="en-US" sz="1200" dirty="0"/>
           </a:p>
@@ -40941,7 +40968,7 @@
                 <a:ea typeface="Trebuchet MS" pitchFamily="34" charset="-122"/>
                 <a:cs typeface="Trebuchet MS" pitchFamily="34" charset="-120"/>
               </a:rPr>
-              <a:t>sharpener</a:t>
+              <a:t>unsharpened</a:t>
             </a:r>
             <a:endParaRPr lang="en-US" sz="1200" dirty="0"/>
           </a:p>
@@ -41007,7 +41034,7 @@
                 <a:ea typeface="Calibri" pitchFamily="34" charset="-122"/>
                 <a:cs typeface="Calibri" pitchFamily="34" charset="-120"/>
               </a:rPr>
-              <a:t>The quality of being sharp, like the sharpness of a knife's edge.</a:t>
+              <a:t>More sharp than something else; having a keener edge or point.</a:t>
             </a:r>
             <a:endParaRPr lang="en-US" sz="1200" dirty="0"/>
           </a:p>
@@ -41502,7 +41529,7 @@
                 <a:ea typeface="Calibri" pitchFamily="34" charset="-122"/>
                 <a:cs typeface="Calibri" pitchFamily="34" charset="-120"/>
               </a:rPr>
-              <a:t>The chef carefully sharpened her knife before slicing the vegetables.</a:t>
+              <a:t>The chef used a sharpener to make sure his kitchen knives were ready before cooking the meal.</a:t>
             </a:r>
             <a:endParaRPr lang="en-US" sz="1500" dirty="0"/>
           </a:p>
@@ -41666,7 +41693,7 @@
                 <a:ea typeface="Calibri" pitchFamily="34" charset="-122"/>
                 <a:cs typeface="Calibri" pitchFamily="34" charset="-120"/>
               </a:rPr>
-              <a:t>Mia turned sharply at the corner when she heard her name being called.</a:t>
+              <a:t>She turned sharply at the corner and nearly bumped into her friend coming the other way.</a:t>
             </a:r>
             <a:endParaRPr lang="en-US" sz="1500" dirty="0"/>
           </a:p>
@@ -41830,7 +41857,7 @@
                 <a:ea typeface="Calibri" pitchFamily="34" charset="-122"/>
                 <a:cs typeface="Calibri" pitchFamily="34" charset="-120"/>
               </a:rPr>
-              <a:t>The sharpness of the eagle's eyesight allows it to spot prey from high in the sky.</a:t>
+              <a:t>The sharpness of the new pencil made his drawing look neat and detailed.</a:t>
             </a:r>
             <a:endParaRPr lang="en-US" sz="1500" dirty="0"/>
           </a:p>

--- a/output/wordlabs-sharp-3day.pptx
+++ b/output/wordlabs-sharp-3day.pptx
@@ -4240,7 +4240,7 @@
                 <a:ea typeface="Calibri" pitchFamily="34" charset="-122"/>
                 <a:cs typeface="Calibri" pitchFamily="34" charset="-120"/>
               </a:rPr>
-              <a:t>"having a fine cutting edge"</a:t>
+              <a:t>"having a fine edge or point"</a:t>
             </a:r>
             <a:endParaRPr lang="en-US" sz="2200" dirty="0"/>
           </a:p>
@@ -4279,7 +4279,7 @@
                 <a:ea typeface="Calibri" pitchFamily="34" charset="-122"/>
                 <a:cs typeface="Calibri" pitchFamily="34" charset="-120"/>
               </a:rPr>
-              <a:t>Origin: Latin: scarpus</a:t>
+              <a:t>Origin: Anglo-Saxon (Old English) root</a:t>
             </a:r>
             <a:endParaRPr lang="en-US" sz="1300" dirty="0"/>
           </a:p>
@@ -5288,7 +5288,7 @@
                 <a:ea typeface="Calibri" pitchFamily="34" charset="-122"/>
                 <a:cs typeface="Calibri" pitchFamily="34" charset="-120"/>
               </a:rPr>
-              <a:t>Word Labs  •  wordlabs.app  •  Root: 'sharp' = having a fine cutting edge</a:t>
+              <a:t>Word Labs  •  wordlabs.app  •  Root: 'sharp' = having a fine edge or point</a:t>
             </a:r>
             <a:endParaRPr lang="en-US" sz="800" dirty="0"/>
           </a:p>
@@ -5622,7 +5622,7 @@
                 <a:ea typeface="Trebuchet MS" pitchFamily="34" charset="-122"/>
                 <a:cs typeface="Trebuchet MS" pitchFamily="34" charset="-120"/>
               </a:rPr>
-              <a:t>1</a:t>
+              <a:t>0</a:t>
             </a:r>
             <a:pPr algn="ctr" indent="0" marL="0">
               <a:buNone/>
@@ -5928,7 +5928,7 @@
                 <a:ea typeface="Calibri" pitchFamily="34" charset="-122"/>
                 <a:cs typeface="Calibri" pitchFamily="34" charset="-120"/>
               </a:rPr>
-              <a:t>Word Labs  •  wordlabs.app  •  Root: 'sharp' = having a fine cutting edge</a:t>
+              <a:t>Word Labs  •  wordlabs.app  •  Root: 'sharp' = having a fine edge or point</a:t>
             </a:r>
             <a:endParaRPr lang="en-US" sz="800" dirty="0"/>
           </a:p>
@@ -6040,7 +6040,7 @@
                 <a:ea typeface="Calibri" pitchFamily="34" charset="-122"/>
                 <a:cs typeface="Calibri" pitchFamily="34" charset="-120"/>
               </a:rPr>
-              <a:t>The teacher noticed how </a:t>
+              <a:t>This is the </a:t>
             </a:r>
             <a:pPr algn="l" indent="0" marL="0">
               <a:buNone/>
@@ -6057,7 +6057,7 @@
                 <a:ea typeface="Calibri" pitchFamily="34" charset="-122"/>
                 <a:cs typeface="Calibri" pitchFamily="34" charset="-120"/>
               </a:rPr>
-              <a:t>sharply</a:t>
+              <a:t>sharpest</a:t>
             </a:r>
             <a:pPr algn="l" indent="0" marL="0">
               <a:buNone/>
@@ -6071,7 +6071,7 @@
                 <a:ea typeface="Calibri" pitchFamily="34" charset="-122"/>
                 <a:cs typeface="Calibri" pitchFamily="34" charset="-120"/>
               </a:rPr>
-              <a:t> the student had written her letters, showing great </a:t>
+              <a:t> knife in the whole kitchen. She </a:t>
             </a:r>
             <a:pPr algn="l" indent="0" marL="0">
               <a:buNone/>
@@ -6088,7 +6088,7 @@
                 <a:ea typeface="Calibri" pitchFamily="34" charset="-122"/>
                 <a:cs typeface="Calibri" pitchFamily="34" charset="-120"/>
               </a:rPr>
-              <a:t>sharpness</a:t>
+              <a:t>sharpened</a:t>
             </a:r>
             <a:pPr algn="l" indent="0" marL="0">
               <a:buNone/>
@@ -6102,7 +6102,7 @@
                 <a:ea typeface="Calibri" pitchFamily="34" charset="-122"/>
                 <a:cs typeface="Calibri" pitchFamily="34" charset="-120"/>
               </a:rPr>
-              <a:t> in her work.</a:t>
+              <a:t> all the pencils before class began.</a:t>
             </a:r>
             <a:endParaRPr lang="en-US" sz="1800" dirty="0"/>
           </a:p>
@@ -6257,7 +6257,7 @@
                 <a:ea typeface="Trebuchet MS" pitchFamily="34" charset="-122"/>
                 <a:cs typeface="Trebuchet MS" pitchFamily="34" charset="-120"/>
               </a:rPr>
-              <a:t>sharply</a:t>
+              <a:t>sharpest</a:t>
             </a:r>
             <a:endParaRPr lang="en-US" sz="1400" dirty="0"/>
           </a:p>
@@ -6385,7 +6385,7 @@
                 <a:ea typeface="Trebuchet MS" pitchFamily="34" charset="-122"/>
                 <a:cs typeface="Trebuchet MS" pitchFamily="34" charset="-120"/>
               </a:rPr>
-              <a:t>sharpness</a:t>
+              <a:t>sharpened</a:t>
             </a:r>
             <a:endParaRPr lang="en-US" sz="1400" dirty="0"/>
           </a:p>
@@ -6716,7 +6716,7 @@
                 <a:ea typeface="Calibri" pitchFamily="34" charset="-122"/>
                 <a:cs typeface="Calibri" pitchFamily="34" charset="-120"/>
               </a:rPr>
-              <a:t>Word Labs  •  wordlabs.app  •  Root: 'sharp' = having a fine cutting edge</a:t>
+              <a:t>Word Labs  •  wordlabs.app  •  Root: 'sharp' = having a fine edge or point</a:t>
             </a:r>
             <a:endParaRPr lang="en-US" sz="800" dirty="0"/>
           </a:p>
@@ -6855,7 +6855,7 @@
                 <a:ea typeface="Trebuchet MS" pitchFamily="34" charset="-122"/>
                 <a:cs typeface="Trebuchet MS" pitchFamily="34" charset="-120"/>
               </a:rPr>
-              <a:t>sharply</a:t>
+              <a:t>sharpest</a:t>
             </a:r>
             <a:endParaRPr lang="en-US" sz="2800" dirty="0"/>
           </a:p>
@@ -7543,7 +7543,7 @@
                 <a:ea typeface="Calibri" pitchFamily="34" charset="-122"/>
                 <a:cs typeface="Calibri" pitchFamily="34" charset="-120"/>
               </a:rPr>
-              <a:t>Word Labs  •  wordlabs.app  •  Root: 'sharp' = having a fine cutting edge</a:t>
+              <a:t>Word Labs  •  wordlabs.app  •  Root: 'sharp' = having a fine edge or point</a:t>
             </a:r>
             <a:endParaRPr lang="en-US" sz="800" dirty="0"/>
           </a:p>
@@ -7682,7 +7682,7 @@
                 <a:ea typeface="Trebuchet MS" pitchFamily="34" charset="-122"/>
                 <a:cs typeface="Trebuchet MS" pitchFamily="34" charset="-120"/>
               </a:rPr>
-              <a:t>sharply</a:t>
+              <a:t>sharpest</a:t>
             </a:r>
             <a:endParaRPr lang="en-US" sz="2800" dirty="0"/>
           </a:p>
@@ -7860,7 +7860,7 @@
                 <a:ea typeface="Calibri" pitchFamily="34" charset="-122"/>
                 <a:cs typeface="Calibri" pitchFamily="34" charset="-120"/>
               </a:rPr>
-              <a:t>having a fine cutting edge</a:t>
+              <a:t>having a fine edge or point</a:t>
             </a:r>
             <a:endParaRPr lang="en-US" sz="850" dirty="0"/>
           </a:p>
@@ -7933,7 +7933,7 @@
                 <a:ea typeface="Trebuchet MS" pitchFamily="34" charset="-122"/>
                 <a:cs typeface="Trebuchet MS" pitchFamily="34" charset="-120"/>
               </a:rPr>
-              <a:t>ly</a:t>
+              <a:t>est</a:t>
             </a:r>
             <a:endParaRPr lang="en-US" sz="1300" dirty="0"/>
           </a:p>
@@ -7972,7 +7972,7 @@
                 <a:ea typeface="Calibri" pitchFamily="34" charset="-122"/>
                 <a:cs typeface="Calibri" pitchFamily="34" charset="-120"/>
               </a:rPr>
-              <a:t>in a particular way (adverb)</a:t>
+              <a:t>most</a:t>
             </a:r>
             <a:endParaRPr lang="en-US" sz="850" dirty="0"/>
           </a:p>
@@ -8528,7 +8528,7 @@
                 <a:ea typeface="Calibri" pitchFamily="34" charset="-122"/>
                 <a:cs typeface="Calibri" pitchFamily="34" charset="-120"/>
               </a:rPr>
-              <a:t>Word Labs  •  wordlabs.app  •  Root: 'sharp' = having a fine cutting edge</a:t>
+              <a:t>Word Labs  •  wordlabs.app  •  Root: 'sharp' = having a fine edge or point</a:t>
             </a:r>
             <a:endParaRPr lang="en-US" sz="800" dirty="0"/>
           </a:p>
@@ -8667,7 +8667,7 @@
                 <a:ea typeface="Trebuchet MS" pitchFamily="34" charset="-122"/>
                 <a:cs typeface="Trebuchet MS" pitchFamily="34" charset="-120"/>
               </a:rPr>
-              <a:t>sharply</a:t>
+              <a:t>sharpest</a:t>
             </a:r>
             <a:endParaRPr lang="en-US" sz="2800" dirty="0"/>
           </a:p>
@@ -8845,7 +8845,7 @@
                 <a:ea typeface="Calibri" pitchFamily="34" charset="-122"/>
                 <a:cs typeface="Calibri" pitchFamily="34" charset="-120"/>
               </a:rPr>
-              <a:t>having a fine cutting edge</a:t>
+              <a:t>having a fine edge or point</a:t>
             </a:r>
             <a:endParaRPr lang="en-US" sz="850" dirty="0"/>
           </a:p>
@@ -8918,7 +8918,7 @@
                 <a:ea typeface="Trebuchet MS" pitchFamily="34" charset="-122"/>
                 <a:cs typeface="Trebuchet MS" pitchFamily="34" charset="-120"/>
               </a:rPr>
-              <a:t>ly</a:t>
+              <a:t>est</a:t>
             </a:r>
             <a:endParaRPr lang="en-US" sz="1300" dirty="0"/>
           </a:p>
@@ -8957,7 +8957,7 @@
                 <a:ea typeface="Calibri" pitchFamily="34" charset="-122"/>
                 <a:cs typeface="Calibri" pitchFamily="34" charset="-120"/>
               </a:rPr>
-              <a:t>in a particular way (adverb)</a:t>
+              <a:t>most</a:t>
             </a:r>
             <a:endParaRPr lang="en-US" sz="850" dirty="0"/>
           </a:p>
@@ -9221,7 +9221,7 @@
                 <a:ea typeface="Trebuchet MS" pitchFamily="34" charset="-122"/>
                 <a:cs typeface="Trebuchet MS" pitchFamily="34" charset="-120"/>
               </a:rPr>
-              <a:t>ly</a:t>
+              <a:t>est</a:t>
             </a:r>
             <a:endParaRPr lang="en-US" sz="1400" dirty="0"/>
           </a:p>
@@ -9645,7 +9645,7 @@
                 <a:ea typeface="Calibri" pitchFamily="34" charset="-122"/>
                 <a:cs typeface="Calibri" pitchFamily="34" charset="-120"/>
               </a:rPr>
-              <a:t>Word Labs  •  wordlabs.app  •  Root: 'sharp' = having a fine cutting edge</a:t>
+              <a:t>Word Labs  •  wordlabs.app  •  Root: 'sharp' = having a fine edge or point</a:t>
             </a:r>
             <a:endParaRPr lang="en-US" sz="800" dirty="0"/>
           </a:p>
@@ -9784,7 +9784,7 @@
                 <a:ea typeface="Trebuchet MS" pitchFamily="34" charset="-122"/>
                 <a:cs typeface="Trebuchet MS" pitchFamily="34" charset="-120"/>
               </a:rPr>
-              <a:t>sharply</a:t>
+              <a:t>sharpest</a:t>
             </a:r>
             <a:endParaRPr lang="en-US" sz="2800" dirty="0"/>
           </a:p>
@@ -9962,7 +9962,7 @@
                 <a:ea typeface="Calibri" pitchFamily="34" charset="-122"/>
                 <a:cs typeface="Calibri" pitchFamily="34" charset="-120"/>
               </a:rPr>
-              <a:t>having a fine cutting edge</a:t>
+              <a:t>having a fine edge or point</a:t>
             </a:r>
             <a:endParaRPr lang="en-US" sz="850" dirty="0"/>
           </a:p>
@@ -10035,7 +10035,7 @@
                 <a:ea typeface="Trebuchet MS" pitchFamily="34" charset="-122"/>
                 <a:cs typeface="Trebuchet MS" pitchFamily="34" charset="-120"/>
               </a:rPr>
-              <a:t>ly</a:t>
+              <a:t>est</a:t>
             </a:r>
             <a:endParaRPr lang="en-US" sz="1300" dirty="0"/>
           </a:p>
@@ -10074,7 +10074,7 @@
                 <a:ea typeface="Calibri" pitchFamily="34" charset="-122"/>
                 <a:cs typeface="Calibri" pitchFamily="34" charset="-120"/>
               </a:rPr>
-              <a:t>in a particular way (adverb)</a:t>
+              <a:t>most</a:t>
             </a:r>
             <a:endParaRPr lang="en-US" sz="850" dirty="0"/>
           </a:p>
@@ -10338,7 +10338,7 @@
                 <a:ea typeface="Trebuchet MS" pitchFamily="34" charset="-122"/>
                 <a:cs typeface="Trebuchet MS" pitchFamily="34" charset="-120"/>
               </a:rPr>
-              <a:t>ly</a:t>
+              <a:t>est</a:t>
             </a:r>
             <a:endParaRPr lang="en-US" sz="1400" dirty="0"/>
           </a:p>
@@ -10445,7 +10445,7 @@
         </p:nvSpPr>
         <p:spPr>
           <a:xfrm>
-            <a:off x="2427732" y="4169664"/>
+            <a:off x="2254649" y="4169664"/>
             <a:ext cx="685800" cy="475488"/>
           </a:xfrm>
           <a:prstGeom prst="rect">
@@ -10472,7 +10472,7 @@
         </p:nvSpPr>
         <p:spPr>
           <a:xfrm>
-            <a:off x="2427732" y="4169664"/>
+            <a:off x="2254649" y="4169664"/>
             <a:ext cx="685800" cy="475488"/>
           </a:xfrm>
           <a:prstGeom prst="rect">
@@ -10511,7 +10511,7 @@
         </p:nvSpPr>
         <p:spPr>
           <a:xfrm>
-            <a:off x="3639312" y="4169664"/>
+            <a:off x="3293146" y="4169664"/>
             <a:ext cx="685800" cy="475488"/>
           </a:xfrm>
           <a:prstGeom prst="rect">
@@ -10538,7 +10538,7 @@
         </p:nvSpPr>
         <p:spPr>
           <a:xfrm>
-            <a:off x="3639312" y="4169664"/>
+            <a:off x="3293146" y="4169664"/>
             <a:ext cx="685800" cy="475488"/>
           </a:xfrm>
           <a:prstGeom prst="rect">
@@ -10577,7 +10577,7 @@
         </p:nvSpPr>
         <p:spPr>
           <a:xfrm>
-            <a:off x="4850892" y="4169664"/>
+            <a:off x="4331643" y="4169664"/>
             <a:ext cx="685800" cy="475488"/>
           </a:xfrm>
           <a:prstGeom prst="rect">
@@ -10604,7 +10604,7 @@
         </p:nvSpPr>
         <p:spPr>
           <a:xfrm>
-            <a:off x="4850892" y="4169664"/>
+            <a:off x="4331643" y="4169664"/>
             <a:ext cx="685800" cy="475488"/>
           </a:xfrm>
           <a:prstGeom prst="rect">
@@ -10643,7 +10643,7 @@
         </p:nvSpPr>
         <p:spPr>
           <a:xfrm>
-            <a:off x="6062472" y="4169664"/>
+            <a:off x="5370141" y="4169664"/>
             <a:ext cx="685800" cy="475488"/>
           </a:xfrm>
           <a:prstGeom prst="rect">
@@ -10670,7 +10670,7 @@
         </p:nvSpPr>
         <p:spPr>
           <a:xfrm>
-            <a:off x="6062472" y="4169664"/>
+            <a:off x="5370141" y="4169664"/>
             <a:ext cx="685800" cy="475488"/>
           </a:xfrm>
           <a:prstGeom prst="rect">
@@ -10695,7 +10695,7 @@
                 <a:ea typeface="Trebuchet MS" pitchFamily="34" charset="-122"/>
                 <a:cs typeface="Trebuchet MS" pitchFamily="34" charset="-120"/>
               </a:rPr>
-              <a:t>l</a:t>
+              <a:t>e</a:t>
             </a:r>
             <a:endParaRPr lang="en-US" sz="900" dirty="0"/>
           </a:p>
@@ -10709,7 +10709,7 @@
         </p:nvSpPr>
         <p:spPr>
           <a:xfrm>
-            <a:off x="7274052" y="4169664"/>
+            <a:off x="6408638" y="4169664"/>
             <a:ext cx="685800" cy="475488"/>
           </a:xfrm>
           <a:prstGeom prst="rect">
@@ -10736,7 +10736,7 @@
         </p:nvSpPr>
         <p:spPr>
           <a:xfrm>
-            <a:off x="7274052" y="4169664"/>
+            <a:off x="6408638" y="4169664"/>
             <a:ext cx="685800" cy="475488"/>
           </a:xfrm>
           <a:prstGeom prst="rect">
@@ -10761,7 +10761,73 @@
                 <a:ea typeface="Trebuchet MS" pitchFamily="34" charset="-122"/>
                 <a:cs typeface="Trebuchet MS" pitchFamily="34" charset="-120"/>
               </a:rPr>
-              <a:t>y</a:t>
+              <a:t>s</a:t>
+            </a:r>
+            <a:endParaRPr lang="en-US" sz="900" dirty="0"/>
+          </a:p>
+        </p:txBody>
+      </p:sp>
+      <p:sp>
+        <p:nvSpPr>
+          <p:cNvPr id="43" name="Shape 41"/>
+          <p:cNvSpPr/>
+          <p:nvPr/>
+        </p:nvSpPr>
+        <p:spPr>
+          <a:xfrm>
+            <a:off x="7447135" y="4169664"/>
+            <a:ext cx="685800" cy="475488"/>
+          </a:xfrm>
+          <a:prstGeom prst="rect">
+            <a:avLst>
+              <a:gd name="adj" fmla="val 7692"/>
+            </a:avLst>
+          </a:prstGeom>
+          <a:solidFill>
+            <a:srgbClr val="FFFFFF"/>
+          </a:solidFill>
+          <a:ln w="12700">
+            <a:solidFill>
+              <a:srgbClr val="DB2777"/>
+            </a:solidFill>
+            <a:prstDash val="solid"/>
+          </a:ln>
+        </p:spPr>
+      </p:sp>
+      <p:sp>
+        <p:nvSpPr>
+          <p:cNvPr id="44" name="Text 42"/>
+          <p:cNvSpPr/>
+          <p:nvPr/>
+        </p:nvSpPr>
+        <p:spPr>
+          <a:xfrm>
+            <a:off x="7447135" y="4169664"/>
+            <a:ext cx="685800" cy="475488"/>
+          </a:xfrm>
+          <a:prstGeom prst="rect">
+            <a:avLst/>
+          </a:prstGeom>
+          <a:noFill/>
+          <a:ln/>
+        </p:spPr>
+        <p:txBody>
+          <a:bodyPr wrap="square" lIns="0" tIns="0" rIns="0" bIns="0" rtlCol="0" anchor="ctr"/>
+          <a:lstStyle/>
+          <a:p>
+            <a:pPr algn="ctr" indent="0" marL="0">
+              <a:buNone/>
+            </a:pPr>
+            <a:r>
+              <a:rPr lang="en-US" sz="900" b="1" dirty="0">
+                <a:solidFill>
+                  <a:srgbClr val="9D174D"/>
+                </a:solidFill>
+                <a:latin typeface="Trebuchet MS" pitchFamily="34" charset="0"/>
+                <a:ea typeface="Trebuchet MS" pitchFamily="34" charset="-122"/>
+                <a:cs typeface="Trebuchet MS" pitchFamily="34" charset="-120"/>
+              </a:rPr>
+              <a:t>t</a:t>
             </a:r>
             <a:endParaRPr lang="en-US" sz="900" dirty="0"/>
           </a:p>
@@ -11053,7 +11119,7 @@
                 <a:ea typeface="Calibri" pitchFamily="34" charset="-122"/>
                 <a:cs typeface="Calibri" pitchFamily="34" charset="-120"/>
               </a:rPr>
-              <a:t>Word Labs  •  wordlabs.app  •  Root: 'sharp' = having a fine cutting edge</a:t>
+              <a:t>Word Labs  •  wordlabs.app  •  Root: 'sharp' = having a fine edge or point</a:t>
             </a:r>
             <a:endParaRPr lang="en-US" sz="800" dirty="0"/>
           </a:p>
@@ -11192,7 +11258,7 @@
                 <a:ea typeface="Trebuchet MS" pitchFamily="34" charset="-122"/>
                 <a:cs typeface="Trebuchet MS" pitchFamily="34" charset="-120"/>
               </a:rPr>
-              <a:t>sharpness</a:t>
+              <a:t>sharpened</a:t>
             </a:r>
             <a:endParaRPr lang="en-US" sz="2800" dirty="0"/>
           </a:p>
@@ -11880,7 +11946,7 @@
                 <a:ea typeface="Calibri" pitchFamily="34" charset="-122"/>
                 <a:cs typeface="Calibri" pitchFamily="34" charset="-120"/>
               </a:rPr>
-              <a:t>Word Labs  •  wordlabs.app  •  Root: 'sharp' = having a fine cutting edge</a:t>
+              <a:t>Word Labs  •  wordlabs.app  •  Root: 'sharp' = having a fine edge or point</a:t>
             </a:r>
             <a:endParaRPr lang="en-US" sz="800" dirty="0"/>
           </a:p>
@@ -12019,7 +12085,7 @@
                 <a:ea typeface="Trebuchet MS" pitchFamily="34" charset="-122"/>
                 <a:cs typeface="Trebuchet MS" pitchFamily="34" charset="-120"/>
               </a:rPr>
-              <a:t>sharpness</a:t>
+              <a:t>sharpened</a:t>
             </a:r>
             <a:endParaRPr lang="en-US" sz="2800" dirty="0"/>
           </a:p>
@@ -12099,7 +12165,7 @@
         </p:nvSpPr>
         <p:spPr>
           <a:xfrm>
-            <a:off x="2938272" y="2258568"/>
+            <a:off x="2221992" y="2258568"/>
             <a:ext cx="1828800" cy="292608"/>
           </a:xfrm>
           <a:prstGeom prst="rect">
@@ -12133,7 +12199,7 @@
         </p:nvSpPr>
         <p:spPr>
           <a:xfrm>
-            <a:off x="2938272" y="2258568"/>
+            <a:off x="2221992" y="2258568"/>
             <a:ext cx="1828800" cy="292608"/>
           </a:xfrm>
           <a:prstGeom prst="rect">
@@ -12172,7 +12238,7 @@
         </p:nvSpPr>
         <p:spPr>
           <a:xfrm>
-            <a:off x="2938272" y="2569464"/>
+            <a:off x="2221992" y="2569464"/>
             <a:ext cx="1828800" cy="201168"/>
           </a:xfrm>
           <a:prstGeom prst="rect">
@@ -12197,7 +12263,7 @@
                 <a:ea typeface="Calibri" pitchFamily="34" charset="-122"/>
                 <a:cs typeface="Calibri" pitchFamily="34" charset="-120"/>
               </a:rPr>
-              <a:t>having a fine cutting edge</a:t>
+              <a:t>having a fine edge or point</a:t>
             </a:r>
             <a:endParaRPr lang="en-US" sz="850" dirty="0"/>
           </a:p>
@@ -12211,7 +12277,7 @@
         </p:nvSpPr>
         <p:spPr>
           <a:xfrm>
-            <a:off x="5803392" y="2258568"/>
+            <a:off x="4370832" y="2258568"/>
             <a:ext cx="1828800" cy="292608"/>
           </a:xfrm>
           <a:prstGeom prst="rect">
@@ -12245,7 +12311,7 @@
         </p:nvSpPr>
         <p:spPr>
           <a:xfrm>
-            <a:off x="5803392" y="2258568"/>
+            <a:off x="4370832" y="2258568"/>
             <a:ext cx="1828800" cy="292608"/>
           </a:xfrm>
           <a:prstGeom prst="rect">
@@ -12270,7 +12336,7 @@
                 <a:ea typeface="Trebuchet MS" pitchFamily="34" charset="-122"/>
                 <a:cs typeface="Trebuchet MS" pitchFamily="34" charset="-120"/>
               </a:rPr>
-              <a:t>ness</a:t>
+              <a:t>en</a:t>
             </a:r>
             <a:endParaRPr lang="en-US" sz="1300" dirty="0"/>
           </a:p>
@@ -12284,7 +12350,7 @@
         </p:nvSpPr>
         <p:spPr>
           <a:xfrm>
-            <a:off x="5803392" y="2569464"/>
+            <a:off x="4370832" y="2569464"/>
             <a:ext cx="1828800" cy="201168"/>
           </a:xfrm>
           <a:prstGeom prst="rect">
@@ -12309,7 +12375,7 @@
                 <a:ea typeface="Calibri" pitchFamily="34" charset="-122"/>
                 <a:cs typeface="Calibri" pitchFamily="34" charset="-120"/>
               </a:rPr>
-              <a:t>the state or quality of</a:t>
+              <a:t>made of; to make</a:t>
             </a:r>
             <a:endParaRPr lang="en-US" sz="850" dirty="0"/>
           </a:p>
@@ -12318,6 +12384,118 @@
       <p:sp>
         <p:nvSpPr>
           <p:cNvPr id="22" name="Shape 20"/>
+          <p:cNvSpPr/>
+          <p:nvPr/>
+        </p:nvSpPr>
+        <p:spPr>
+          <a:xfrm>
+            <a:off x="6519672" y="2258568"/>
+            <a:ext cx="1828800" cy="292608"/>
+          </a:xfrm>
+          <a:prstGeom prst="rect">
+            <a:avLst>
+              <a:gd name="adj" fmla="val 25000"/>
+            </a:avLst>
+          </a:prstGeom>
+          <a:solidFill>
+            <a:srgbClr val="FCE7F3"/>
+          </a:solidFill>
+          <a:ln w="19050">
+            <a:solidFill>
+              <a:srgbClr val="DB2777"/>
+            </a:solidFill>
+            <a:prstDash val="solid"/>
+          </a:ln>
+          <a:effectLst>
+            <a:outerShdw sx="100000" sy="100000" kx="0" ky="0" algn="bl" rotWithShape="0" blurRad="101600" dist="38100" dir="8100000">
+              <a:srgbClr val="000000">
+                <a:alpha val="12000"/>
+              </a:srgbClr>
+            </a:outerShdw>
+          </a:effectLst>
+        </p:spPr>
+      </p:sp>
+      <p:sp>
+        <p:nvSpPr>
+          <p:cNvPr id="23" name="Text 21"/>
+          <p:cNvSpPr/>
+          <p:nvPr/>
+        </p:nvSpPr>
+        <p:spPr>
+          <a:xfrm>
+            <a:off x="6519672" y="2258568"/>
+            <a:ext cx="1828800" cy="292608"/>
+          </a:xfrm>
+          <a:prstGeom prst="rect">
+            <a:avLst/>
+          </a:prstGeom>
+          <a:noFill/>
+          <a:ln/>
+        </p:spPr>
+        <p:txBody>
+          <a:bodyPr wrap="square" lIns="0" tIns="0" rIns="0" bIns="0" rtlCol="0" anchor="ctr"/>
+          <a:lstStyle/>
+          <a:p>
+            <a:pPr algn="ctr" indent="0" marL="0">
+              <a:buNone/>
+            </a:pPr>
+            <a:r>
+              <a:rPr lang="en-US" sz="1300" b="1" dirty="0">
+                <a:solidFill>
+                  <a:srgbClr val="9D174D"/>
+                </a:solidFill>
+                <a:latin typeface="Trebuchet MS" pitchFamily="34" charset="0"/>
+                <a:ea typeface="Trebuchet MS" pitchFamily="34" charset="-122"/>
+                <a:cs typeface="Trebuchet MS" pitchFamily="34" charset="-120"/>
+              </a:rPr>
+              <a:t>ed</a:t>
+            </a:r>
+            <a:endParaRPr lang="en-US" sz="1300" dirty="0"/>
+          </a:p>
+        </p:txBody>
+      </p:sp>
+      <p:sp>
+        <p:nvSpPr>
+          <p:cNvPr id="24" name="Text 22"/>
+          <p:cNvSpPr/>
+          <p:nvPr/>
+        </p:nvSpPr>
+        <p:spPr>
+          <a:xfrm>
+            <a:off x="6519672" y="2569464"/>
+            <a:ext cx="1828800" cy="201168"/>
+          </a:xfrm>
+          <a:prstGeom prst="rect">
+            <a:avLst/>
+          </a:prstGeom>
+          <a:noFill/>
+          <a:ln/>
+        </p:spPr>
+        <p:txBody>
+          <a:bodyPr wrap="square" lIns="0" tIns="0" rIns="0" bIns="0" rtlCol="0" anchor="t"/>
+          <a:lstStyle/>
+          <a:p>
+            <a:pPr algn="ctr" indent="0" marL="0">
+              <a:buNone/>
+            </a:pPr>
+            <a:r>
+              <a:rPr lang="en-US" sz="850" dirty="0">
+                <a:solidFill>
+                  <a:srgbClr val="475569"/>
+                </a:solidFill>
+                <a:latin typeface="Calibri" pitchFamily="34" charset="0"/>
+                <a:ea typeface="Calibri" pitchFamily="34" charset="-122"/>
+                <a:cs typeface="Calibri" pitchFamily="34" charset="-120"/>
+              </a:rPr>
+              <a:t>past tense</a:t>
+            </a:r>
+            <a:endParaRPr lang="en-US" sz="850" dirty="0"/>
+          </a:p>
+        </p:txBody>
+      </p:sp>
+      <p:sp>
+        <p:nvSpPr>
+          <p:cNvPr id="25" name="Shape 23"/>
           <p:cNvSpPr/>
           <p:nvPr/>
         </p:nvSpPr>
@@ -12344,7 +12522,7 @@
       </p:sp>
       <p:sp>
         <p:nvSpPr>
-          <p:cNvPr id="23" name="Text 21"/>
+          <p:cNvPr id="26" name="Text 24"/>
           <p:cNvSpPr/>
           <p:nvPr/>
         </p:nvSpPr>
@@ -12383,7 +12561,7 @@
       </p:sp>
       <p:sp>
         <p:nvSpPr>
-          <p:cNvPr id="24" name="Shape 22"/>
+          <p:cNvPr id="27" name="Shape 25"/>
           <p:cNvSpPr/>
           <p:nvPr/>
         </p:nvSpPr>
@@ -12410,7 +12588,7 @@
       </p:sp>
       <p:sp>
         <p:nvSpPr>
-          <p:cNvPr id="25" name="Text 23"/>
+          <p:cNvPr id="28" name="Text 26"/>
           <p:cNvSpPr/>
           <p:nvPr/>
         </p:nvSpPr>
@@ -12449,7 +12627,7 @@
       </p:sp>
       <p:sp>
         <p:nvSpPr>
-          <p:cNvPr id="26" name="Shape 24"/>
+          <p:cNvPr id="29" name="Shape 27"/>
           <p:cNvSpPr/>
           <p:nvPr/>
         </p:nvSpPr>
@@ -12476,7 +12654,7 @@
       </p:sp>
       <p:sp>
         <p:nvSpPr>
-          <p:cNvPr id="27" name="Text 25"/>
+          <p:cNvPr id="30" name="Text 28"/>
           <p:cNvSpPr/>
           <p:nvPr/>
         </p:nvSpPr>
@@ -12515,7 +12693,7 @@
       </p:sp>
       <p:sp>
         <p:nvSpPr>
-          <p:cNvPr id="28" name="Shape 26"/>
+          <p:cNvPr id="31" name="Shape 29"/>
           <p:cNvSpPr/>
           <p:nvPr/>
         </p:nvSpPr>
@@ -12542,7 +12720,7 @@
       </p:sp>
       <p:sp>
         <p:nvSpPr>
-          <p:cNvPr id="29" name="Text 27"/>
+          <p:cNvPr id="32" name="Text 30"/>
           <p:cNvSpPr/>
           <p:nvPr/>
         </p:nvSpPr>
@@ -12865,7 +13043,7 @@
                 <a:ea typeface="Calibri" pitchFamily="34" charset="-122"/>
                 <a:cs typeface="Calibri" pitchFamily="34" charset="-120"/>
               </a:rPr>
-              <a:t>Word Labs  •  wordlabs.app  •  Root: 'sharp' = having a fine cutting edge</a:t>
+              <a:t>Word Labs  •  wordlabs.app  •  Root: 'sharp' = having a fine edge or point</a:t>
             </a:r>
             <a:endParaRPr lang="en-US" sz="800" dirty="0"/>
           </a:p>
@@ -13004,7 +13182,7 @@
                 <a:ea typeface="Trebuchet MS" pitchFamily="34" charset="-122"/>
                 <a:cs typeface="Trebuchet MS" pitchFamily="34" charset="-120"/>
               </a:rPr>
-              <a:t>sharpness</a:t>
+              <a:t>sharpened</a:t>
             </a:r>
             <a:endParaRPr lang="en-US" sz="2800" dirty="0"/>
           </a:p>
@@ -13084,7 +13262,7 @@
         </p:nvSpPr>
         <p:spPr>
           <a:xfrm>
-            <a:off x="2938272" y="2258568"/>
+            <a:off x="2221992" y="2258568"/>
             <a:ext cx="1828800" cy="292608"/>
           </a:xfrm>
           <a:prstGeom prst="rect">
@@ -13118,7 +13296,7 @@
         </p:nvSpPr>
         <p:spPr>
           <a:xfrm>
-            <a:off x="2938272" y="2258568"/>
+            <a:off x="2221992" y="2258568"/>
             <a:ext cx="1828800" cy="292608"/>
           </a:xfrm>
           <a:prstGeom prst="rect">
@@ -13157,7 +13335,7 @@
         </p:nvSpPr>
         <p:spPr>
           <a:xfrm>
-            <a:off x="2938272" y="2569464"/>
+            <a:off x="2221992" y="2569464"/>
             <a:ext cx="1828800" cy="201168"/>
           </a:xfrm>
           <a:prstGeom prst="rect">
@@ -13182,7 +13360,7 @@
                 <a:ea typeface="Calibri" pitchFamily="34" charset="-122"/>
                 <a:cs typeface="Calibri" pitchFamily="34" charset="-120"/>
               </a:rPr>
-              <a:t>having a fine cutting edge</a:t>
+              <a:t>having a fine edge or point</a:t>
             </a:r>
             <a:endParaRPr lang="en-US" sz="850" dirty="0"/>
           </a:p>
@@ -13196,7 +13374,7 @@
         </p:nvSpPr>
         <p:spPr>
           <a:xfrm>
-            <a:off x="5803392" y="2258568"/>
+            <a:off x="4370832" y="2258568"/>
             <a:ext cx="1828800" cy="292608"/>
           </a:xfrm>
           <a:prstGeom prst="rect">
@@ -13230,7 +13408,7 @@
         </p:nvSpPr>
         <p:spPr>
           <a:xfrm>
-            <a:off x="5803392" y="2258568"/>
+            <a:off x="4370832" y="2258568"/>
             <a:ext cx="1828800" cy="292608"/>
           </a:xfrm>
           <a:prstGeom prst="rect">
@@ -13255,7 +13433,7 @@
                 <a:ea typeface="Trebuchet MS" pitchFamily="34" charset="-122"/>
                 <a:cs typeface="Trebuchet MS" pitchFamily="34" charset="-120"/>
               </a:rPr>
-              <a:t>ness</a:t>
+              <a:t>en</a:t>
             </a:r>
             <a:endParaRPr lang="en-US" sz="1300" dirty="0"/>
           </a:p>
@@ -13269,7 +13447,7 @@
         </p:nvSpPr>
         <p:spPr>
           <a:xfrm>
-            <a:off x="5803392" y="2569464"/>
+            <a:off x="4370832" y="2569464"/>
             <a:ext cx="1828800" cy="201168"/>
           </a:xfrm>
           <a:prstGeom prst="rect">
@@ -13294,7 +13472,7 @@
                 <a:ea typeface="Calibri" pitchFamily="34" charset="-122"/>
                 <a:cs typeface="Calibri" pitchFamily="34" charset="-120"/>
               </a:rPr>
-              <a:t>the state or quality of</a:t>
+              <a:t>made of; to make</a:t>
             </a:r>
             <a:endParaRPr lang="en-US" sz="850" dirty="0"/>
           </a:p>
@@ -13303,6 +13481,118 @@
       <p:sp>
         <p:nvSpPr>
           <p:cNvPr id="22" name="Shape 20"/>
+          <p:cNvSpPr/>
+          <p:nvPr/>
+        </p:nvSpPr>
+        <p:spPr>
+          <a:xfrm>
+            <a:off x="6519672" y="2258568"/>
+            <a:ext cx="1828800" cy="292608"/>
+          </a:xfrm>
+          <a:prstGeom prst="rect">
+            <a:avLst>
+              <a:gd name="adj" fmla="val 25000"/>
+            </a:avLst>
+          </a:prstGeom>
+          <a:solidFill>
+            <a:srgbClr val="FCE7F3"/>
+          </a:solidFill>
+          <a:ln w="19050">
+            <a:solidFill>
+              <a:srgbClr val="DB2777"/>
+            </a:solidFill>
+            <a:prstDash val="solid"/>
+          </a:ln>
+          <a:effectLst>
+            <a:outerShdw sx="100000" sy="100000" kx="0" ky="0" algn="bl" rotWithShape="0" blurRad="101600" dist="38100" dir="8100000">
+              <a:srgbClr val="000000">
+                <a:alpha val="12000"/>
+              </a:srgbClr>
+            </a:outerShdw>
+          </a:effectLst>
+        </p:spPr>
+      </p:sp>
+      <p:sp>
+        <p:nvSpPr>
+          <p:cNvPr id="23" name="Text 21"/>
+          <p:cNvSpPr/>
+          <p:nvPr/>
+        </p:nvSpPr>
+        <p:spPr>
+          <a:xfrm>
+            <a:off x="6519672" y="2258568"/>
+            <a:ext cx="1828800" cy="292608"/>
+          </a:xfrm>
+          <a:prstGeom prst="rect">
+            <a:avLst/>
+          </a:prstGeom>
+          <a:noFill/>
+          <a:ln/>
+        </p:spPr>
+        <p:txBody>
+          <a:bodyPr wrap="square" lIns="0" tIns="0" rIns="0" bIns="0" rtlCol="0" anchor="ctr"/>
+          <a:lstStyle/>
+          <a:p>
+            <a:pPr algn="ctr" indent="0" marL="0">
+              <a:buNone/>
+            </a:pPr>
+            <a:r>
+              <a:rPr lang="en-US" sz="1300" b="1" dirty="0">
+                <a:solidFill>
+                  <a:srgbClr val="9D174D"/>
+                </a:solidFill>
+                <a:latin typeface="Trebuchet MS" pitchFamily="34" charset="0"/>
+                <a:ea typeface="Trebuchet MS" pitchFamily="34" charset="-122"/>
+                <a:cs typeface="Trebuchet MS" pitchFamily="34" charset="-120"/>
+              </a:rPr>
+              <a:t>ed</a:t>
+            </a:r>
+            <a:endParaRPr lang="en-US" sz="1300" dirty="0"/>
+          </a:p>
+        </p:txBody>
+      </p:sp>
+      <p:sp>
+        <p:nvSpPr>
+          <p:cNvPr id="24" name="Text 22"/>
+          <p:cNvSpPr/>
+          <p:nvPr/>
+        </p:nvSpPr>
+        <p:spPr>
+          <a:xfrm>
+            <a:off x="6519672" y="2569464"/>
+            <a:ext cx="1828800" cy="201168"/>
+          </a:xfrm>
+          <a:prstGeom prst="rect">
+            <a:avLst/>
+          </a:prstGeom>
+          <a:noFill/>
+          <a:ln/>
+        </p:spPr>
+        <p:txBody>
+          <a:bodyPr wrap="square" lIns="0" tIns="0" rIns="0" bIns="0" rtlCol="0" anchor="t"/>
+          <a:lstStyle/>
+          <a:p>
+            <a:pPr algn="ctr" indent="0" marL="0">
+              <a:buNone/>
+            </a:pPr>
+            <a:r>
+              <a:rPr lang="en-US" sz="850" dirty="0">
+                <a:solidFill>
+                  <a:srgbClr val="475569"/>
+                </a:solidFill>
+                <a:latin typeface="Calibri" pitchFamily="34" charset="0"/>
+                <a:ea typeface="Calibri" pitchFamily="34" charset="-122"/>
+                <a:cs typeface="Calibri" pitchFamily="34" charset="-120"/>
+              </a:rPr>
+              <a:t>past tense</a:t>
+            </a:r>
+            <a:endParaRPr lang="en-US" sz="850" dirty="0"/>
+          </a:p>
+        </p:txBody>
+      </p:sp>
+      <p:sp>
+        <p:nvSpPr>
+          <p:cNvPr id="25" name="Shape 23"/>
           <p:cNvSpPr/>
           <p:nvPr/>
         </p:nvSpPr>
@@ -13329,7 +13619,7 @@
       </p:sp>
       <p:sp>
         <p:nvSpPr>
-          <p:cNvPr id="23" name="Text 21"/>
+          <p:cNvPr id="26" name="Text 24"/>
           <p:cNvSpPr/>
           <p:nvPr/>
         </p:nvSpPr>
@@ -13368,7 +13658,7 @@
       </p:sp>
       <p:sp>
         <p:nvSpPr>
-          <p:cNvPr id="24" name="Shape 22"/>
+          <p:cNvPr id="27" name="Shape 25"/>
           <p:cNvSpPr/>
           <p:nvPr/>
         </p:nvSpPr>
@@ -13395,7 +13685,7 @@
       </p:sp>
       <p:sp>
         <p:nvSpPr>
-          <p:cNvPr id="25" name="Shape 23"/>
+          <p:cNvPr id="28" name="Shape 26"/>
           <p:cNvSpPr/>
           <p:nvPr/>
         </p:nvSpPr>
@@ -13422,7 +13712,7 @@
       </p:sp>
       <p:sp>
         <p:nvSpPr>
-          <p:cNvPr id="26" name="Text 24"/>
+          <p:cNvPr id="29" name="Text 27"/>
           <p:cNvSpPr/>
           <p:nvPr/>
         </p:nvSpPr>
@@ -13461,7 +13751,7 @@
       </p:sp>
       <p:sp>
         <p:nvSpPr>
-          <p:cNvPr id="27" name="Text 25"/>
+          <p:cNvPr id="30" name="Text 28"/>
           <p:cNvSpPr/>
           <p:nvPr/>
         </p:nvSpPr>
@@ -13500,7 +13790,7 @@
       </p:sp>
       <p:sp>
         <p:nvSpPr>
-          <p:cNvPr id="28" name="Shape 26"/>
+          <p:cNvPr id="31" name="Shape 29"/>
           <p:cNvSpPr/>
           <p:nvPr/>
         </p:nvSpPr>
@@ -13527,7 +13817,7 @@
       </p:sp>
       <p:sp>
         <p:nvSpPr>
-          <p:cNvPr id="29" name="Text 27"/>
+          <p:cNvPr id="32" name="Text 30"/>
           <p:cNvSpPr/>
           <p:nvPr/>
         </p:nvSpPr>
@@ -13558,7 +13848,7 @@
                 <a:ea typeface="Trebuchet MS" pitchFamily="34" charset="-122"/>
                 <a:cs typeface="Trebuchet MS" pitchFamily="34" charset="-120"/>
               </a:rPr>
-              <a:t>ness</a:t>
+              <a:t>ened</a:t>
             </a:r>
             <a:endParaRPr lang="en-US" sz="1400" dirty="0"/>
           </a:p>
@@ -13566,7 +13856,7 @@
       </p:sp>
       <p:sp>
         <p:nvSpPr>
-          <p:cNvPr id="30" name="Shape 28"/>
+          <p:cNvPr id="33" name="Shape 31"/>
           <p:cNvSpPr/>
           <p:nvPr/>
         </p:nvSpPr>
@@ -13593,7 +13883,7 @@
       </p:sp>
       <p:sp>
         <p:nvSpPr>
-          <p:cNvPr id="31" name="Text 29"/>
+          <p:cNvPr id="34" name="Text 32"/>
           <p:cNvSpPr/>
           <p:nvPr/>
         </p:nvSpPr>
@@ -13632,7 +13922,7 @@
       </p:sp>
       <p:sp>
         <p:nvSpPr>
-          <p:cNvPr id="32" name="Shape 30"/>
+          <p:cNvPr id="35" name="Shape 33"/>
           <p:cNvSpPr/>
           <p:nvPr/>
         </p:nvSpPr>
@@ -13659,7 +13949,7 @@
       </p:sp>
       <p:sp>
         <p:nvSpPr>
-          <p:cNvPr id="33" name="Text 31"/>
+          <p:cNvPr id="36" name="Text 34"/>
           <p:cNvSpPr/>
           <p:nvPr/>
         </p:nvSpPr>
@@ -13891,7 +14181,7 @@
                 <a:ea typeface="Calibri" pitchFamily="34" charset="-122"/>
                 <a:cs typeface="Calibri" pitchFamily="34" charset="-120"/>
               </a:rPr>
-              <a:t>Root 'sharp' — having a fine cutting edge</a:t>
+              <a:t>Root 'sharp' — having a fine edge or point</a:t>
             </a:r>
             <a:endParaRPr lang="en-US" sz="1600" dirty="0"/>
           </a:p>
@@ -14247,7 +14537,7 @@
                 <a:ea typeface="Calibri" pitchFamily="34" charset="-122"/>
                 <a:cs typeface="Calibri" pitchFamily="34" charset="-120"/>
               </a:rPr>
-              <a:t>Word Labs  •  wordlabs.app  •  Root: 'sharp' = having a fine cutting edge</a:t>
+              <a:t>Word Labs  •  wordlabs.app  •  Root: 'sharp' = having a fine edge or point</a:t>
             </a:r>
             <a:endParaRPr lang="en-US" sz="800" dirty="0"/>
           </a:p>
@@ -14386,7 +14676,7 @@
                 <a:ea typeface="Trebuchet MS" pitchFamily="34" charset="-122"/>
                 <a:cs typeface="Trebuchet MS" pitchFamily="34" charset="-120"/>
               </a:rPr>
-              <a:t>sharpness</a:t>
+              <a:t>sharpened</a:t>
             </a:r>
             <a:endParaRPr lang="en-US" sz="2800" dirty="0"/>
           </a:p>
@@ -14466,7 +14756,7 @@
         </p:nvSpPr>
         <p:spPr>
           <a:xfrm>
-            <a:off x="2938272" y="2258568"/>
+            <a:off x="2221992" y="2258568"/>
             <a:ext cx="1828800" cy="292608"/>
           </a:xfrm>
           <a:prstGeom prst="rect">
@@ -14500,7 +14790,7 @@
         </p:nvSpPr>
         <p:spPr>
           <a:xfrm>
-            <a:off x="2938272" y="2258568"/>
+            <a:off x="2221992" y="2258568"/>
             <a:ext cx="1828800" cy="292608"/>
           </a:xfrm>
           <a:prstGeom prst="rect">
@@ -14539,7 +14829,7 @@
         </p:nvSpPr>
         <p:spPr>
           <a:xfrm>
-            <a:off x="2938272" y="2569464"/>
+            <a:off x="2221992" y="2569464"/>
             <a:ext cx="1828800" cy="201168"/>
           </a:xfrm>
           <a:prstGeom prst="rect">
@@ -14564,7 +14854,7 @@
                 <a:ea typeface="Calibri" pitchFamily="34" charset="-122"/>
                 <a:cs typeface="Calibri" pitchFamily="34" charset="-120"/>
               </a:rPr>
-              <a:t>having a fine cutting edge</a:t>
+              <a:t>having a fine edge or point</a:t>
             </a:r>
             <a:endParaRPr lang="en-US" sz="850" dirty="0"/>
           </a:p>
@@ -14578,7 +14868,7 @@
         </p:nvSpPr>
         <p:spPr>
           <a:xfrm>
-            <a:off x="5803392" y="2258568"/>
+            <a:off x="4370832" y="2258568"/>
             <a:ext cx="1828800" cy="292608"/>
           </a:xfrm>
           <a:prstGeom prst="rect">
@@ -14612,7 +14902,7 @@
         </p:nvSpPr>
         <p:spPr>
           <a:xfrm>
-            <a:off x="5803392" y="2258568"/>
+            <a:off x="4370832" y="2258568"/>
             <a:ext cx="1828800" cy="292608"/>
           </a:xfrm>
           <a:prstGeom prst="rect">
@@ -14637,7 +14927,7 @@
                 <a:ea typeface="Trebuchet MS" pitchFamily="34" charset="-122"/>
                 <a:cs typeface="Trebuchet MS" pitchFamily="34" charset="-120"/>
               </a:rPr>
-              <a:t>ness</a:t>
+              <a:t>en</a:t>
             </a:r>
             <a:endParaRPr lang="en-US" sz="1300" dirty="0"/>
           </a:p>
@@ -14651,7 +14941,7 @@
         </p:nvSpPr>
         <p:spPr>
           <a:xfrm>
-            <a:off x="5803392" y="2569464"/>
+            <a:off x="4370832" y="2569464"/>
             <a:ext cx="1828800" cy="201168"/>
           </a:xfrm>
           <a:prstGeom prst="rect">
@@ -14676,7 +14966,7 @@
                 <a:ea typeface="Calibri" pitchFamily="34" charset="-122"/>
                 <a:cs typeface="Calibri" pitchFamily="34" charset="-120"/>
               </a:rPr>
-              <a:t>the state or quality of</a:t>
+              <a:t>made of; to make</a:t>
             </a:r>
             <a:endParaRPr lang="en-US" sz="850" dirty="0"/>
           </a:p>
@@ -14685,6 +14975,118 @@
       <p:sp>
         <p:nvSpPr>
           <p:cNvPr id="22" name="Shape 20"/>
+          <p:cNvSpPr/>
+          <p:nvPr/>
+        </p:nvSpPr>
+        <p:spPr>
+          <a:xfrm>
+            <a:off x="6519672" y="2258568"/>
+            <a:ext cx="1828800" cy="292608"/>
+          </a:xfrm>
+          <a:prstGeom prst="rect">
+            <a:avLst>
+              <a:gd name="adj" fmla="val 25000"/>
+            </a:avLst>
+          </a:prstGeom>
+          <a:solidFill>
+            <a:srgbClr val="FCE7F3"/>
+          </a:solidFill>
+          <a:ln w="19050">
+            <a:solidFill>
+              <a:srgbClr val="DB2777"/>
+            </a:solidFill>
+            <a:prstDash val="solid"/>
+          </a:ln>
+          <a:effectLst>
+            <a:outerShdw sx="100000" sy="100000" kx="0" ky="0" algn="bl" rotWithShape="0" blurRad="101600" dist="38100" dir="8100000">
+              <a:srgbClr val="000000">
+                <a:alpha val="12000"/>
+              </a:srgbClr>
+            </a:outerShdw>
+          </a:effectLst>
+        </p:spPr>
+      </p:sp>
+      <p:sp>
+        <p:nvSpPr>
+          <p:cNvPr id="23" name="Text 21"/>
+          <p:cNvSpPr/>
+          <p:nvPr/>
+        </p:nvSpPr>
+        <p:spPr>
+          <a:xfrm>
+            <a:off x="6519672" y="2258568"/>
+            <a:ext cx="1828800" cy="292608"/>
+          </a:xfrm>
+          <a:prstGeom prst="rect">
+            <a:avLst/>
+          </a:prstGeom>
+          <a:noFill/>
+          <a:ln/>
+        </p:spPr>
+        <p:txBody>
+          <a:bodyPr wrap="square" lIns="0" tIns="0" rIns="0" bIns="0" rtlCol="0" anchor="ctr"/>
+          <a:lstStyle/>
+          <a:p>
+            <a:pPr algn="ctr" indent="0" marL="0">
+              <a:buNone/>
+            </a:pPr>
+            <a:r>
+              <a:rPr lang="en-US" sz="1300" b="1" dirty="0">
+                <a:solidFill>
+                  <a:srgbClr val="9D174D"/>
+                </a:solidFill>
+                <a:latin typeface="Trebuchet MS" pitchFamily="34" charset="0"/>
+                <a:ea typeface="Trebuchet MS" pitchFamily="34" charset="-122"/>
+                <a:cs typeface="Trebuchet MS" pitchFamily="34" charset="-120"/>
+              </a:rPr>
+              <a:t>ed</a:t>
+            </a:r>
+            <a:endParaRPr lang="en-US" sz="1300" dirty="0"/>
+          </a:p>
+        </p:txBody>
+      </p:sp>
+      <p:sp>
+        <p:nvSpPr>
+          <p:cNvPr id="24" name="Text 22"/>
+          <p:cNvSpPr/>
+          <p:nvPr/>
+        </p:nvSpPr>
+        <p:spPr>
+          <a:xfrm>
+            <a:off x="6519672" y="2569464"/>
+            <a:ext cx="1828800" cy="201168"/>
+          </a:xfrm>
+          <a:prstGeom prst="rect">
+            <a:avLst/>
+          </a:prstGeom>
+          <a:noFill/>
+          <a:ln/>
+        </p:spPr>
+        <p:txBody>
+          <a:bodyPr wrap="square" lIns="0" tIns="0" rIns="0" bIns="0" rtlCol="0" anchor="t"/>
+          <a:lstStyle/>
+          <a:p>
+            <a:pPr algn="ctr" indent="0" marL="0">
+              <a:buNone/>
+            </a:pPr>
+            <a:r>
+              <a:rPr lang="en-US" sz="850" dirty="0">
+                <a:solidFill>
+                  <a:srgbClr val="475569"/>
+                </a:solidFill>
+                <a:latin typeface="Calibri" pitchFamily="34" charset="0"/>
+                <a:ea typeface="Calibri" pitchFamily="34" charset="-122"/>
+                <a:cs typeface="Calibri" pitchFamily="34" charset="-120"/>
+              </a:rPr>
+              <a:t>past tense</a:t>
+            </a:r>
+            <a:endParaRPr lang="en-US" sz="850" dirty="0"/>
+          </a:p>
+        </p:txBody>
+      </p:sp>
+      <p:sp>
+        <p:nvSpPr>
+          <p:cNvPr id="25" name="Shape 23"/>
           <p:cNvSpPr/>
           <p:nvPr/>
         </p:nvSpPr>
@@ -14711,7 +15113,7 @@
       </p:sp>
       <p:sp>
         <p:nvSpPr>
-          <p:cNvPr id="23" name="Text 21"/>
+          <p:cNvPr id="26" name="Text 24"/>
           <p:cNvSpPr/>
           <p:nvPr/>
         </p:nvSpPr>
@@ -14750,7 +15152,7 @@
       </p:sp>
       <p:sp>
         <p:nvSpPr>
-          <p:cNvPr id="24" name="Shape 22"/>
+          <p:cNvPr id="27" name="Shape 25"/>
           <p:cNvSpPr/>
           <p:nvPr/>
         </p:nvSpPr>
@@ -14777,7 +15179,7 @@
       </p:sp>
       <p:sp>
         <p:nvSpPr>
-          <p:cNvPr id="25" name="Shape 23"/>
+          <p:cNvPr id="28" name="Shape 26"/>
           <p:cNvSpPr/>
           <p:nvPr/>
         </p:nvSpPr>
@@ -14804,7 +15206,7 @@
       </p:sp>
       <p:sp>
         <p:nvSpPr>
-          <p:cNvPr id="26" name="Text 24"/>
+          <p:cNvPr id="29" name="Text 27"/>
           <p:cNvSpPr/>
           <p:nvPr/>
         </p:nvSpPr>
@@ -14843,7 +15245,7 @@
       </p:sp>
       <p:sp>
         <p:nvSpPr>
-          <p:cNvPr id="27" name="Text 25"/>
+          <p:cNvPr id="30" name="Text 28"/>
           <p:cNvSpPr/>
           <p:nvPr/>
         </p:nvSpPr>
@@ -14882,7 +15284,7 @@
       </p:sp>
       <p:sp>
         <p:nvSpPr>
-          <p:cNvPr id="28" name="Shape 26"/>
+          <p:cNvPr id="31" name="Shape 29"/>
           <p:cNvSpPr/>
           <p:nvPr/>
         </p:nvSpPr>
@@ -14909,7 +15311,7 @@
       </p:sp>
       <p:sp>
         <p:nvSpPr>
-          <p:cNvPr id="29" name="Text 27"/>
+          <p:cNvPr id="32" name="Text 30"/>
           <p:cNvSpPr/>
           <p:nvPr/>
         </p:nvSpPr>
@@ -14940,7 +15342,7 @@
                 <a:ea typeface="Trebuchet MS" pitchFamily="34" charset="-122"/>
                 <a:cs typeface="Trebuchet MS" pitchFamily="34" charset="-120"/>
               </a:rPr>
-              <a:t>ness</a:t>
+              <a:t>ened</a:t>
             </a:r>
             <a:endParaRPr lang="en-US" sz="1400" dirty="0"/>
           </a:p>
@@ -14948,7 +15350,7 @@
       </p:sp>
       <p:sp>
         <p:nvSpPr>
-          <p:cNvPr id="30" name="Shape 28"/>
+          <p:cNvPr id="33" name="Shape 31"/>
           <p:cNvSpPr/>
           <p:nvPr/>
         </p:nvSpPr>
@@ -14975,7 +15377,7 @@
       </p:sp>
       <p:sp>
         <p:nvSpPr>
-          <p:cNvPr id="31" name="Text 29"/>
+          <p:cNvPr id="34" name="Text 32"/>
           <p:cNvSpPr/>
           <p:nvPr/>
         </p:nvSpPr>
@@ -15014,7 +15416,7 @@
       </p:sp>
       <p:sp>
         <p:nvSpPr>
-          <p:cNvPr id="32" name="Shape 30"/>
+          <p:cNvPr id="35" name="Shape 33"/>
           <p:cNvSpPr/>
           <p:nvPr/>
         </p:nvSpPr>
@@ -15041,7 +15443,7 @@
       </p:sp>
       <p:sp>
         <p:nvSpPr>
-          <p:cNvPr id="33" name="Shape 31"/>
+          <p:cNvPr id="36" name="Shape 34"/>
           <p:cNvSpPr/>
           <p:nvPr/>
         </p:nvSpPr>
@@ -15068,7 +15470,7 @@
       </p:sp>
       <p:sp>
         <p:nvSpPr>
-          <p:cNvPr id="34" name="Text 32"/>
+          <p:cNvPr id="37" name="Text 35"/>
           <p:cNvSpPr/>
           <p:nvPr/>
         </p:nvSpPr>
@@ -15107,7 +15509,7 @@
       </p:sp>
       <p:sp>
         <p:nvSpPr>
-          <p:cNvPr id="35" name="Shape 33"/>
+          <p:cNvPr id="38" name="Shape 36"/>
           <p:cNvSpPr/>
           <p:nvPr/>
         </p:nvSpPr>
@@ -15134,7 +15536,7 @@
       </p:sp>
       <p:sp>
         <p:nvSpPr>
-          <p:cNvPr id="36" name="Text 34"/>
+          <p:cNvPr id="39" name="Text 37"/>
           <p:cNvSpPr/>
           <p:nvPr/>
         </p:nvSpPr>
@@ -15173,7 +15575,7 @@
       </p:sp>
       <p:sp>
         <p:nvSpPr>
-          <p:cNvPr id="37" name="Shape 35"/>
+          <p:cNvPr id="40" name="Shape 38"/>
           <p:cNvSpPr/>
           <p:nvPr/>
         </p:nvSpPr>
@@ -15200,7 +15602,7 @@
       </p:sp>
       <p:sp>
         <p:nvSpPr>
-          <p:cNvPr id="38" name="Text 36"/>
+          <p:cNvPr id="41" name="Text 39"/>
           <p:cNvSpPr/>
           <p:nvPr/>
         </p:nvSpPr>
@@ -15239,7 +15641,7 @@
       </p:sp>
       <p:sp>
         <p:nvSpPr>
-          <p:cNvPr id="39" name="Shape 37"/>
+          <p:cNvPr id="42" name="Shape 40"/>
           <p:cNvSpPr/>
           <p:nvPr/>
         </p:nvSpPr>
@@ -15266,7 +15668,7 @@
       </p:sp>
       <p:sp>
         <p:nvSpPr>
-          <p:cNvPr id="40" name="Text 38"/>
+          <p:cNvPr id="43" name="Text 41"/>
           <p:cNvSpPr/>
           <p:nvPr/>
         </p:nvSpPr>
@@ -15297,7 +15699,7 @@
                 <a:ea typeface="Trebuchet MS" pitchFamily="34" charset="-122"/>
                 <a:cs typeface="Trebuchet MS" pitchFamily="34" charset="-120"/>
               </a:rPr>
-              <a:t>n</a:t>
+              <a:t>e</a:t>
             </a:r>
             <a:endParaRPr lang="en-US" sz="900" dirty="0"/>
           </a:p>
@@ -15305,7 +15707,7 @@
       </p:sp>
       <p:sp>
         <p:nvSpPr>
-          <p:cNvPr id="41" name="Shape 39"/>
+          <p:cNvPr id="44" name="Shape 42"/>
           <p:cNvSpPr/>
           <p:nvPr/>
         </p:nvSpPr>
@@ -15332,7 +15734,7 @@
       </p:sp>
       <p:sp>
         <p:nvSpPr>
-          <p:cNvPr id="42" name="Text 40"/>
+          <p:cNvPr id="45" name="Text 43"/>
           <p:cNvSpPr/>
           <p:nvPr/>
         </p:nvSpPr>
@@ -15363,7 +15765,7 @@
                 <a:ea typeface="Trebuchet MS" pitchFamily="34" charset="-122"/>
                 <a:cs typeface="Trebuchet MS" pitchFamily="34" charset="-120"/>
               </a:rPr>
-              <a:t>e</a:t>
+              <a:t>n</a:t>
             </a:r>
             <a:endParaRPr lang="en-US" sz="900" dirty="0"/>
           </a:p>
@@ -15371,7 +15773,7 @@
       </p:sp>
       <p:sp>
         <p:nvSpPr>
-          <p:cNvPr id="43" name="Shape 41"/>
+          <p:cNvPr id="46" name="Shape 44"/>
           <p:cNvSpPr/>
           <p:nvPr/>
         </p:nvSpPr>
@@ -15398,7 +15800,7 @@
       </p:sp>
       <p:sp>
         <p:nvSpPr>
-          <p:cNvPr id="44" name="Text 42"/>
+          <p:cNvPr id="47" name="Text 45"/>
           <p:cNvSpPr/>
           <p:nvPr/>
         </p:nvSpPr>
@@ -15429,7 +15831,7 @@
                 <a:ea typeface="Trebuchet MS" pitchFamily="34" charset="-122"/>
                 <a:cs typeface="Trebuchet MS" pitchFamily="34" charset="-120"/>
               </a:rPr>
-              <a:t>ss</a:t>
+              <a:t>ed</a:t>
             </a:r>
             <a:endParaRPr lang="en-US" sz="900" dirty="0"/>
           </a:p>
@@ -16003,7 +16405,7 @@
                 <a:ea typeface="Calibri" pitchFamily="34" charset="-122"/>
                 <a:cs typeface="Calibri" pitchFamily="34" charset="-120"/>
               </a:rPr>
-              <a:t>Word Labs  •  wordlabs.app  •  Root: 'sharp' = having a fine cutting edge</a:t>
+              <a:t>Word Labs  •  wordlabs.app  •  Root: 'sharp' = having a fine edge or point</a:t>
             </a:r>
             <a:endParaRPr lang="en-US" sz="800" dirty="0"/>
           </a:p>
@@ -16337,7 +16739,7 @@
                 <a:ea typeface="Trebuchet MS" pitchFamily="34" charset="-122"/>
                 <a:cs typeface="Trebuchet MS" pitchFamily="34" charset="-120"/>
               </a:rPr>
-              <a:t>2</a:t>
+              <a:t>0</a:t>
             </a:r>
             <a:pPr algn="ctr" indent="0" marL="0">
               <a:buNone/>
@@ -16351,7 +16753,7 @@
                 <a:ea typeface="Trebuchet MS" pitchFamily="34" charset="-122"/>
                 <a:cs typeface="Trebuchet MS" pitchFamily="34" charset="-120"/>
               </a:rPr>
-              <a:t>  punctuation marks</a:t>
+              <a:t>  punctuation mark</a:t>
             </a:r>
             <a:endParaRPr lang="en-US" sz="2800" dirty="0"/>
           </a:p>
@@ -16643,7 +17045,7 @@
                 <a:ea typeface="Calibri" pitchFamily="34" charset="-122"/>
                 <a:cs typeface="Calibri" pitchFamily="34" charset="-120"/>
               </a:rPr>
-              <a:t>Word Labs  •  wordlabs.app  •  Root: 'sharp' = having a fine cutting edge</a:t>
+              <a:t>Word Labs  •  wordlabs.app  •  Root: 'sharp' = having a fine edge or point</a:t>
             </a:r>
             <a:endParaRPr lang="en-US" sz="800" dirty="0"/>
           </a:p>
@@ -16755,7 +17157,7 @@
                 <a:ea typeface="Calibri" pitchFamily="34" charset="-122"/>
                 <a:cs typeface="Calibri" pitchFamily="34" charset="-120"/>
               </a:rPr>
-              <a:t>She used the </a:t>
+              <a:t>Can I borrow your </a:t>
             </a:r>
             <a:pPr algn="l" indent="0" marL="0">
               <a:buNone/>
@@ -16786,7 +17188,7 @@
                 <a:ea typeface="Calibri" pitchFamily="34" charset="-122"/>
                 <a:cs typeface="Calibri" pitchFamily="34" charset="-120"/>
               </a:rPr>
-              <a:t> carefully, then </a:t>
+              <a:t> to fix my pencil point? The </a:t>
             </a:r>
             <a:pPr algn="l" indent="0" marL="0">
               <a:buNone/>
@@ -16803,7 +17205,7 @@
                 <a:ea typeface="Calibri" pitchFamily="34" charset="-122"/>
                 <a:cs typeface="Calibri" pitchFamily="34" charset="-120"/>
               </a:rPr>
-              <a:t>sharpened</a:t>
+              <a:t>sharpness</a:t>
             </a:r>
             <a:pPr algn="l" indent="0" marL="0">
               <a:buNone/>
@@ -16817,7 +17219,7 @@
                 <a:ea typeface="Calibri" pitchFamily="34" charset="-122"/>
                 <a:cs typeface="Calibri" pitchFamily="34" charset="-120"/>
               </a:rPr>
-              <a:t> her pencil until it was the </a:t>
+              <a:t> of the blade made it easy to cut through the rope. He was </a:t>
             </a:r>
             <a:pPr algn="l" indent="0" marL="0">
               <a:buNone/>
@@ -16834,7 +17236,7 @@
                 <a:ea typeface="Calibri" pitchFamily="34" charset="-122"/>
                 <a:cs typeface="Calibri" pitchFamily="34" charset="-120"/>
               </a:rPr>
-              <a:t>sharpest</a:t>
+              <a:t>sharpening</a:t>
             </a:r>
             <a:pPr algn="l" indent="0" marL="0">
               <a:buNone/>
@@ -16848,7 +17250,7 @@
                 <a:ea typeface="Calibri" pitchFamily="34" charset="-122"/>
                 <a:cs typeface="Calibri" pitchFamily="34" charset="-120"/>
               </a:rPr>
-              <a:t> one in the classroom.</a:t>
+              <a:t> his skates before the game.</a:t>
             </a:r>
             <a:endParaRPr lang="en-US" sz="1800" dirty="0"/>
           </a:p>
@@ -17131,7 +17533,7 @@
                 <a:ea typeface="Trebuchet MS" pitchFamily="34" charset="-122"/>
                 <a:cs typeface="Trebuchet MS" pitchFamily="34" charset="-120"/>
               </a:rPr>
-              <a:t>sharpened</a:t>
+              <a:t>sharpness</a:t>
             </a:r>
             <a:endParaRPr lang="en-US" sz="1400" dirty="0"/>
           </a:p>
@@ -17259,7 +17661,7 @@
                 <a:ea typeface="Trebuchet MS" pitchFamily="34" charset="-122"/>
                 <a:cs typeface="Trebuchet MS" pitchFamily="34" charset="-120"/>
               </a:rPr>
-              <a:t>sharpest</a:t>
+              <a:t>sharpening</a:t>
             </a:r>
             <a:endParaRPr lang="en-US" sz="1400" dirty="0"/>
           </a:p>
@@ -17590,7 +17992,7 @@
                 <a:ea typeface="Calibri" pitchFamily="34" charset="-122"/>
                 <a:cs typeface="Calibri" pitchFamily="34" charset="-120"/>
               </a:rPr>
-              <a:t>Word Labs  •  wordlabs.app  •  Root: 'sharp' = having a fine cutting edge</a:t>
+              <a:t>Word Labs  •  wordlabs.app  •  Root: 'sharp' = having a fine edge or point</a:t>
             </a:r>
             <a:endParaRPr lang="en-US" sz="800" dirty="0"/>
           </a:p>
@@ -18417,7 +18819,7 @@
                 <a:ea typeface="Calibri" pitchFamily="34" charset="-122"/>
                 <a:cs typeface="Calibri" pitchFamily="34" charset="-120"/>
               </a:rPr>
-              <a:t>Word Labs  •  wordlabs.app  •  Root: 'sharp' = having a fine cutting edge</a:t>
+              <a:t>Word Labs  •  wordlabs.app  •  Root: 'sharp' = having a fine edge or point</a:t>
             </a:r>
             <a:endParaRPr lang="en-US" sz="800" dirty="0"/>
           </a:p>
@@ -18734,7 +19136,7 @@
                 <a:ea typeface="Calibri" pitchFamily="34" charset="-122"/>
                 <a:cs typeface="Calibri" pitchFamily="34" charset="-120"/>
               </a:rPr>
-              <a:t>having a fine cutting edge</a:t>
+              <a:t>having a fine edge or point</a:t>
             </a:r>
             <a:endParaRPr lang="en-US" sz="850" dirty="0"/>
           </a:p>
@@ -18846,7 +19248,7 @@
                 <a:ea typeface="Calibri" pitchFamily="34" charset="-122"/>
                 <a:cs typeface="Calibri" pitchFamily="34" charset="-120"/>
               </a:rPr>
-              <a:t>to cause or become</a:t>
+              <a:t>made of; to make</a:t>
             </a:r>
             <a:endParaRPr lang="en-US" sz="850" dirty="0"/>
           </a:p>
@@ -18958,7 +19360,7 @@
                 <a:ea typeface="Calibri" pitchFamily="34" charset="-122"/>
                 <a:cs typeface="Calibri" pitchFamily="34" charset="-120"/>
               </a:rPr>
-              <a:t>a person or thing that does something</a:t>
+              <a:t>person who; more</a:t>
             </a:r>
             <a:endParaRPr lang="en-US" sz="850" dirty="0"/>
           </a:p>
@@ -19514,7 +19916,7 @@
                 <a:ea typeface="Calibri" pitchFamily="34" charset="-122"/>
                 <a:cs typeface="Calibri" pitchFamily="34" charset="-120"/>
               </a:rPr>
-              <a:t>Word Labs  •  wordlabs.app  •  Root: 'sharp' = having a fine cutting edge</a:t>
+              <a:t>Word Labs  •  wordlabs.app  •  Root: 'sharp' = having a fine edge or point</a:t>
             </a:r>
             <a:endParaRPr lang="en-US" sz="800" dirty="0"/>
           </a:p>
@@ -19831,7 +20233,7 @@
                 <a:ea typeface="Calibri" pitchFamily="34" charset="-122"/>
                 <a:cs typeface="Calibri" pitchFamily="34" charset="-120"/>
               </a:rPr>
-              <a:t>having a fine cutting edge</a:t>
+              <a:t>having a fine edge or point</a:t>
             </a:r>
             <a:endParaRPr lang="en-US" sz="850" dirty="0"/>
           </a:p>
@@ -19943,7 +20345,7 @@
                 <a:ea typeface="Calibri" pitchFamily="34" charset="-122"/>
                 <a:cs typeface="Calibri" pitchFamily="34" charset="-120"/>
               </a:rPr>
-              <a:t>to cause or become</a:t>
+              <a:t>made of; to make</a:t>
             </a:r>
             <a:endParaRPr lang="en-US" sz="850" dirty="0"/>
           </a:p>
@@ -20055,7 +20457,7 @@
                 <a:ea typeface="Calibri" pitchFamily="34" charset="-122"/>
                 <a:cs typeface="Calibri" pitchFamily="34" charset="-120"/>
               </a:rPr>
-              <a:t>a person or thing that does something</a:t>
+              <a:t>person who; more</a:t>
             </a:r>
             <a:endParaRPr lang="en-US" sz="850" dirty="0"/>
           </a:p>
@@ -20848,7 +21250,7 @@
                 <a:ea typeface="Calibri" pitchFamily="34" charset="-122"/>
                 <a:cs typeface="Calibri" pitchFamily="34" charset="-120"/>
               </a:rPr>
-              <a:t>Word Labs  •  wordlabs.app  •  Root: 'sharp' = having a fine cutting edge</a:t>
+              <a:t>Word Labs  •  wordlabs.app  •  Root: 'sharp' = having a fine edge or point</a:t>
             </a:r>
             <a:endParaRPr lang="en-US" sz="800" dirty="0"/>
           </a:p>
@@ -21165,7 +21567,7 @@
                 <a:ea typeface="Calibri" pitchFamily="34" charset="-122"/>
                 <a:cs typeface="Calibri" pitchFamily="34" charset="-120"/>
               </a:rPr>
-              <a:t>having a fine cutting edge</a:t>
+              <a:t>having a fine edge or point</a:t>
             </a:r>
             <a:endParaRPr lang="en-US" sz="850" dirty="0"/>
           </a:p>
@@ -21277,7 +21679,7 @@
                 <a:ea typeface="Calibri" pitchFamily="34" charset="-122"/>
                 <a:cs typeface="Calibri" pitchFamily="34" charset="-120"/>
               </a:rPr>
-              <a:t>to cause or become</a:t>
+              <a:t>made of; to make</a:t>
             </a:r>
             <a:endParaRPr lang="en-US" sz="850" dirty="0"/>
           </a:p>
@@ -21389,7 +21791,7 @@
                 <a:ea typeface="Calibri" pitchFamily="34" charset="-122"/>
                 <a:cs typeface="Calibri" pitchFamily="34" charset="-120"/>
               </a:rPr>
-              <a:t>a person or thing that does something</a:t>
+              <a:t>person who; more</a:t>
             </a:r>
             <a:endParaRPr lang="en-US" sz="850" dirty="0"/>
           </a:p>
@@ -22539,7 +22941,7 @@
                 <a:ea typeface="Calibri" pitchFamily="34" charset="-122"/>
                 <a:cs typeface="Calibri" pitchFamily="34" charset="-120"/>
               </a:rPr>
-              <a:t>Word Labs  •  wordlabs.app  •  Root: 'sharp' = having a fine cutting edge</a:t>
+              <a:t>Word Labs  •  wordlabs.app  •  Root: 'sharp' = having a fine edge or point</a:t>
             </a:r>
             <a:endParaRPr lang="en-US" sz="800" dirty="0"/>
           </a:p>
@@ -22678,7 +23080,7 @@
                 <a:ea typeface="Trebuchet MS" pitchFamily="34" charset="-122"/>
                 <a:cs typeface="Trebuchet MS" pitchFamily="34" charset="-120"/>
               </a:rPr>
-              <a:t>sharpened</a:t>
+              <a:t>sharpness</a:t>
             </a:r>
             <a:endParaRPr lang="en-US" sz="2800" dirty="0"/>
           </a:p>
@@ -23366,7 +23768,7 @@
                 <a:ea typeface="Calibri" pitchFamily="34" charset="-122"/>
                 <a:cs typeface="Calibri" pitchFamily="34" charset="-120"/>
               </a:rPr>
-              <a:t>Word Labs  •  wordlabs.app  •  Root: 'sharp' = having a fine cutting edge</a:t>
+              <a:t>Word Labs  •  wordlabs.app  •  Root: 'sharp' = having a fine edge or point</a:t>
             </a:r>
             <a:endParaRPr lang="en-US" sz="800" dirty="0"/>
           </a:p>
@@ -23505,7 +23907,7 @@
                 <a:ea typeface="Trebuchet MS" pitchFamily="34" charset="-122"/>
                 <a:cs typeface="Trebuchet MS" pitchFamily="34" charset="-120"/>
               </a:rPr>
-              <a:t>sharpened</a:t>
+              <a:t>sharpness</a:t>
             </a:r>
             <a:endParaRPr lang="en-US" sz="2800" dirty="0"/>
           </a:p>
@@ -23585,7 +23987,7 @@
         </p:nvSpPr>
         <p:spPr>
           <a:xfrm>
-            <a:off x="2221992" y="2258568"/>
+            <a:off x="2938272" y="2258568"/>
             <a:ext cx="1828800" cy="292608"/>
           </a:xfrm>
           <a:prstGeom prst="rect">
@@ -23619,7 +24021,7 @@
         </p:nvSpPr>
         <p:spPr>
           <a:xfrm>
-            <a:off x="2221992" y="2258568"/>
+            <a:off x="2938272" y="2258568"/>
             <a:ext cx="1828800" cy="292608"/>
           </a:xfrm>
           <a:prstGeom prst="rect">
@@ -23658,7 +24060,7 @@
         </p:nvSpPr>
         <p:spPr>
           <a:xfrm>
-            <a:off x="2221992" y="2569464"/>
+            <a:off x="2938272" y="2569464"/>
             <a:ext cx="1828800" cy="201168"/>
           </a:xfrm>
           <a:prstGeom prst="rect">
@@ -23683,7 +24085,7 @@
                 <a:ea typeface="Calibri" pitchFamily="34" charset="-122"/>
                 <a:cs typeface="Calibri" pitchFamily="34" charset="-120"/>
               </a:rPr>
-              <a:t>having a fine cutting edge</a:t>
+              <a:t>having a fine edge or point</a:t>
             </a:r>
             <a:endParaRPr lang="en-US" sz="850" dirty="0"/>
           </a:p>
@@ -23697,7 +24099,7 @@
         </p:nvSpPr>
         <p:spPr>
           <a:xfrm>
-            <a:off x="4370832" y="2258568"/>
+            <a:off x="5803392" y="2258568"/>
             <a:ext cx="1828800" cy="292608"/>
           </a:xfrm>
           <a:prstGeom prst="rect">
@@ -23731,7 +24133,7 @@
         </p:nvSpPr>
         <p:spPr>
           <a:xfrm>
-            <a:off x="4370832" y="2258568"/>
+            <a:off x="5803392" y="2258568"/>
             <a:ext cx="1828800" cy="292608"/>
           </a:xfrm>
           <a:prstGeom prst="rect">
@@ -23756,7 +24158,7 @@
                 <a:ea typeface="Trebuchet MS" pitchFamily="34" charset="-122"/>
                 <a:cs typeface="Trebuchet MS" pitchFamily="34" charset="-120"/>
               </a:rPr>
-              <a:t>en</a:t>
+              <a:t>ness</a:t>
             </a:r>
             <a:endParaRPr lang="en-US" sz="1300" dirty="0"/>
           </a:p>
@@ -23770,7 +24172,7 @@
         </p:nvSpPr>
         <p:spPr>
           <a:xfrm>
-            <a:off x="4370832" y="2569464"/>
+            <a:off x="5803392" y="2569464"/>
             <a:ext cx="1828800" cy="201168"/>
           </a:xfrm>
           <a:prstGeom prst="rect">
@@ -23795,7 +24197,7 @@
                 <a:ea typeface="Calibri" pitchFamily="34" charset="-122"/>
                 <a:cs typeface="Calibri" pitchFamily="34" charset="-120"/>
               </a:rPr>
-              <a:t>to cause or become</a:t>
+              <a:t>state of</a:t>
             </a:r>
             <a:endParaRPr lang="en-US" sz="850" dirty="0"/>
           </a:p>
@@ -23809,30 +24211,23 @@
         </p:nvSpPr>
         <p:spPr>
           <a:xfrm>
-            <a:off x="6519672" y="2258568"/>
-            <a:ext cx="1828800" cy="292608"/>
+            <a:off x="365760" y="3273552"/>
+            <a:ext cx="1371600" cy="658368"/>
           </a:xfrm>
           <a:prstGeom prst="rect">
             <a:avLst>
-              <a:gd name="adj" fmla="val 25000"/>
+              <a:gd name="adj" fmla="val 8333"/>
             </a:avLst>
           </a:prstGeom>
           <a:solidFill>
-            <a:srgbClr val="FCE7F3"/>
-          </a:solidFill>
-          <a:ln w="19050">
-            <a:solidFill>
-              <a:srgbClr val="DB2777"/>
-            </a:solidFill>
-            <a:prstDash val="solid"/>
-          </a:ln>
-          <a:effectLst>
-            <a:outerShdw sx="100000" sy="100000" kx="0" ky="0" algn="bl" rotWithShape="0" blurRad="101600" dist="38100" dir="8100000">
-              <a:srgbClr val="000000">
-                <a:alpha val="12000"/>
-              </a:srgbClr>
-            </a:outerShdw>
-          </a:effectLst>
+            <a:srgbClr val="E2E8F0"/>
+          </a:solidFill>
+          <a:ln w="12700">
+            <a:solidFill>
+              <a:srgbClr val="E2E8F0"/>
+            </a:solidFill>
+            <a:prstDash val="solid"/>
+          </a:ln>
         </p:spPr>
       </p:sp>
       <p:sp>
@@ -23843,8 +24238,8 @@
         </p:nvSpPr>
         <p:spPr>
           <a:xfrm>
-            <a:off x="6519672" y="2258568"/>
-            <a:ext cx="1828800" cy="292608"/>
+            <a:off x="365760" y="3273552"/>
+            <a:ext cx="1371600" cy="658368"/>
           </a:xfrm>
           <a:prstGeom prst="rect">
             <a:avLst/>
@@ -23860,73 +24255,100 @@
               <a:buNone/>
             </a:pPr>
             <a:r>
-              <a:rPr lang="en-US" sz="1300" b="1" dirty="0">
-                <a:solidFill>
-                  <a:srgbClr val="9D174D"/>
+              <a:rPr lang="en-US" sz="1100" b="1" dirty="0">
+                <a:solidFill>
+                  <a:srgbClr val="475569"/>
                 </a:solidFill>
                 <a:latin typeface="Trebuchet MS" pitchFamily="34" charset="0"/>
                 <a:ea typeface="Trebuchet MS" pitchFamily="34" charset="-122"/>
                 <a:cs typeface="Trebuchet MS" pitchFamily="34" charset="-120"/>
               </a:rPr>
-              <a:t>ed</a:t>
-            </a:r>
-            <a:endParaRPr lang="en-US" sz="1300" dirty="0"/>
-          </a:p>
-        </p:txBody>
-      </p:sp>
-      <p:sp>
-        <p:nvSpPr>
-          <p:cNvPr id="24" name="Text 22"/>
-          <p:cNvSpPr/>
-          <p:nvPr/>
-        </p:nvSpPr>
-        <p:spPr>
-          <a:xfrm>
-            <a:off x="6519672" y="2569464"/>
-            <a:ext cx="1828800" cy="201168"/>
-          </a:xfrm>
-          <a:prstGeom prst="rect">
-            <a:avLst/>
-          </a:prstGeom>
-          <a:noFill/>
-          <a:ln/>
-        </p:spPr>
-        <p:txBody>
-          <a:bodyPr wrap="square" lIns="0" tIns="0" rIns="0" bIns="0" rtlCol="0" anchor="t"/>
-          <a:lstStyle/>
-          <a:p>
-            <a:pPr algn="ctr" indent="0" marL="0">
-              <a:buNone/>
-            </a:pPr>
-            <a:r>
-              <a:rPr lang="en-US" sz="850" dirty="0">
-                <a:solidFill>
-                  <a:srgbClr val="475569"/>
+              <a:t>Syllables</a:t>
+            </a:r>
+            <a:endParaRPr lang="en-US" sz="1100" dirty="0"/>
+          </a:p>
+        </p:txBody>
+      </p:sp>
+      <p:sp>
+        <p:nvSpPr>
+          <p:cNvPr id="24" name="Shape 22"/>
+          <p:cNvSpPr/>
+          <p:nvPr/>
+        </p:nvSpPr>
+        <p:spPr>
+          <a:xfrm>
+            <a:off x="1874520" y="3273552"/>
+            <a:ext cx="6903720" cy="658368"/>
+          </a:xfrm>
+          <a:prstGeom prst="rect">
+            <a:avLst>
+              <a:gd name="adj" fmla="val 8333"/>
+            </a:avLst>
+          </a:prstGeom>
+          <a:solidFill>
+            <a:srgbClr val="F8FAFC"/>
+          </a:solidFill>
+          <a:ln w="12700">
+            <a:solidFill>
+              <a:srgbClr val="E2E8F0"/>
+            </a:solidFill>
+            <a:prstDash val="dash"/>
+          </a:ln>
+        </p:spPr>
+      </p:sp>
+      <p:sp>
+        <p:nvSpPr>
+          <p:cNvPr id="25" name="Text 23"/>
+          <p:cNvSpPr/>
+          <p:nvPr/>
+        </p:nvSpPr>
+        <p:spPr>
+          <a:xfrm>
+            <a:off x="1874520" y="3273552"/>
+            <a:ext cx="6903720" cy="658368"/>
+          </a:xfrm>
+          <a:prstGeom prst="rect">
+            <a:avLst/>
+          </a:prstGeom>
+          <a:noFill/>
+          <a:ln/>
+        </p:spPr>
+        <p:txBody>
+          <a:bodyPr wrap="square" rtlCol="0" anchor="ctr"/>
+          <a:lstStyle/>
+          <a:p>
+            <a:pPr algn="ctr" indent="0" marL="0">
+              <a:buNone/>
+            </a:pPr>
+            <a:r>
+              <a:rPr lang="en-US" sz="1100" i="1" dirty="0">
+                <a:solidFill>
+                  <a:srgbClr val="CBD5E1"/>
                 </a:solidFill>
                 <a:latin typeface="Calibri" pitchFamily="34" charset="0"/>
                 <a:ea typeface="Calibri" pitchFamily="34" charset="-122"/>
                 <a:cs typeface="Calibri" pitchFamily="34" charset="-120"/>
               </a:rPr>
-              <a:t>past tense</a:t>
-            </a:r>
-            <a:endParaRPr lang="en-US" sz="850" dirty="0"/>
-          </a:p>
-        </p:txBody>
-      </p:sp>
-      <p:sp>
-        <p:nvSpPr>
-          <p:cNvPr id="25" name="Shape 23"/>
-          <p:cNvSpPr/>
-          <p:nvPr/>
-        </p:nvSpPr>
-        <p:spPr>
-          <a:xfrm>
-            <a:off x="365760" y="3273552"/>
-            <a:ext cx="1371600" cy="658368"/>
+              <a:t>Write here...</a:t>
+            </a:r>
+            <a:endParaRPr lang="en-US" sz="1100" dirty="0"/>
+          </a:p>
+        </p:txBody>
+      </p:sp>
+      <p:sp>
+        <p:nvSpPr>
+          <p:cNvPr id="26" name="Shape 24"/>
+          <p:cNvSpPr/>
+          <p:nvPr/>
+        </p:nvSpPr>
+        <p:spPr>
+          <a:xfrm>
+            <a:off x="365760" y="4096512"/>
+            <a:ext cx="1371600" cy="804672"/>
           </a:xfrm>
           <a:prstGeom prst="rect">
             <a:avLst>
-              <a:gd name="adj" fmla="val 8333"/>
+              <a:gd name="adj" fmla="val 6818"/>
             </a:avLst>
           </a:prstGeom>
           <a:solidFill>
@@ -23942,14 +24364,14 @@
       </p:sp>
       <p:sp>
         <p:nvSpPr>
-          <p:cNvPr id="26" name="Text 24"/>
-          <p:cNvSpPr/>
-          <p:nvPr/>
-        </p:nvSpPr>
-        <p:spPr>
-          <a:xfrm>
-            <a:off x="365760" y="3273552"/>
-            <a:ext cx="1371600" cy="658368"/>
+          <p:cNvPr id="27" name="Text 25"/>
+          <p:cNvSpPr/>
+          <p:nvPr/>
+        </p:nvSpPr>
+        <p:spPr>
+          <a:xfrm>
+            <a:off x="365760" y="4096512"/>
+            <a:ext cx="1371600" cy="804672"/>
           </a:xfrm>
           <a:prstGeom prst="rect">
             <a:avLst/>
@@ -23973,7 +24395,7 @@
                 <a:ea typeface="Trebuchet MS" pitchFamily="34" charset="-122"/>
                 <a:cs typeface="Trebuchet MS" pitchFamily="34" charset="-120"/>
               </a:rPr>
-              <a:t>Syllables</a:t>
+              <a:t>Phonemes</a:t>
             </a:r>
             <a:endParaRPr lang="en-US" sz="1100" dirty="0"/>
           </a:p>
@@ -23981,80 +24403,14 @@
       </p:sp>
       <p:sp>
         <p:nvSpPr>
-          <p:cNvPr id="27" name="Shape 25"/>
-          <p:cNvSpPr/>
-          <p:nvPr/>
-        </p:nvSpPr>
-        <p:spPr>
-          <a:xfrm>
-            <a:off x="1874520" y="3273552"/>
-            <a:ext cx="6903720" cy="658368"/>
-          </a:xfrm>
-          <a:prstGeom prst="rect">
-            <a:avLst>
-              <a:gd name="adj" fmla="val 8333"/>
-            </a:avLst>
-          </a:prstGeom>
-          <a:solidFill>
-            <a:srgbClr val="F8FAFC"/>
-          </a:solidFill>
-          <a:ln w="12700">
-            <a:solidFill>
-              <a:srgbClr val="E2E8F0"/>
-            </a:solidFill>
-            <a:prstDash val="dash"/>
-          </a:ln>
-        </p:spPr>
-      </p:sp>
-      <p:sp>
-        <p:nvSpPr>
-          <p:cNvPr id="28" name="Text 26"/>
-          <p:cNvSpPr/>
-          <p:nvPr/>
-        </p:nvSpPr>
-        <p:spPr>
-          <a:xfrm>
-            <a:off x="1874520" y="3273552"/>
-            <a:ext cx="6903720" cy="658368"/>
-          </a:xfrm>
-          <a:prstGeom prst="rect">
-            <a:avLst/>
-          </a:prstGeom>
-          <a:noFill/>
-          <a:ln/>
-        </p:spPr>
-        <p:txBody>
-          <a:bodyPr wrap="square" rtlCol="0" anchor="ctr"/>
-          <a:lstStyle/>
-          <a:p>
-            <a:pPr algn="ctr" indent="0" marL="0">
-              <a:buNone/>
-            </a:pPr>
-            <a:r>
-              <a:rPr lang="en-US" sz="1100" i="1" dirty="0">
-                <a:solidFill>
-                  <a:srgbClr val="CBD5E1"/>
-                </a:solidFill>
-                <a:latin typeface="Calibri" pitchFamily="34" charset="0"/>
-                <a:ea typeface="Calibri" pitchFamily="34" charset="-122"/>
-                <a:cs typeface="Calibri" pitchFamily="34" charset="-120"/>
-              </a:rPr>
-              <a:t>Write here...</a:t>
-            </a:r>
-            <a:endParaRPr lang="en-US" sz="1100" dirty="0"/>
-          </a:p>
-        </p:txBody>
-      </p:sp>
-      <p:sp>
-        <p:nvSpPr>
-          <p:cNvPr id="29" name="Shape 27"/>
-          <p:cNvSpPr/>
-          <p:nvPr/>
-        </p:nvSpPr>
-        <p:spPr>
-          <a:xfrm>
-            <a:off x="365760" y="4096512"/>
-            <a:ext cx="1371600" cy="804672"/>
+          <p:cNvPr id="28" name="Shape 26"/>
+          <p:cNvSpPr/>
+          <p:nvPr/>
+        </p:nvSpPr>
+        <p:spPr>
+          <a:xfrm>
+            <a:off x="1874520" y="4096512"/>
+            <a:ext cx="6903720" cy="804672"/>
           </a:xfrm>
           <a:prstGeom prst="rect">
             <a:avLst>
@@ -24062,85 +24418,19 @@
             </a:avLst>
           </a:prstGeom>
           <a:solidFill>
-            <a:srgbClr val="E2E8F0"/>
+            <a:srgbClr val="F8FAFC"/>
           </a:solidFill>
           <a:ln w="12700">
             <a:solidFill>
               <a:srgbClr val="E2E8F0"/>
             </a:solidFill>
-            <a:prstDash val="solid"/>
-          </a:ln>
-        </p:spPr>
-      </p:sp>
-      <p:sp>
-        <p:nvSpPr>
-          <p:cNvPr id="30" name="Text 28"/>
-          <p:cNvSpPr/>
-          <p:nvPr/>
-        </p:nvSpPr>
-        <p:spPr>
-          <a:xfrm>
-            <a:off x="365760" y="4096512"/>
-            <a:ext cx="1371600" cy="804672"/>
-          </a:xfrm>
-          <a:prstGeom prst="rect">
-            <a:avLst/>
-          </a:prstGeom>
-          <a:noFill/>
-          <a:ln/>
-        </p:spPr>
-        <p:txBody>
-          <a:bodyPr wrap="square" lIns="0" tIns="0" rIns="0" bIns="0" rtlCol="0" anchor="ctr"/>
-          <a:lstStyle/>
-          <a:p>
-            <a:pPr algn="ctr" indent="0" marL="0">
-              <a:buNone/>
-            </a:pPr>
-            <a:r>
-              <a:rPr lang="en-US" sz="1100" b="1" dirty="0">
-                <a:solidFill>
-                  <a:srgbClr val="475569"/>
-                </a:solidFill>
-                <a:latin typeface="Trebuchet MS" pitchFamily="34" charset="0"/>
-                <a:ea typeface="Trebuchet MS" pitchFamily="34" charset="-122"/>
-                <a:cs typeface="Trebuchet MS" pitchFamily="34" charset="-120"/>
-              </a:rPr>
-              <a:t>Phonemes</a:t>
-            </a:r>
-            <a:endParaRPr lang="en-US" sz="1100" dirty="0"/>
-          </a:p>
-        </p:txBody>
-      </p:sp>
-      <p:sp>
-        <p:nvSpPr>
-          <p:cNvPr id="31" name="Shape 29"/>
-          <p:cNvSpPr/>
-          <p:nvPr/>
-        </p:nvSpPr>
-        <p:spPr>
-          <a:xfrm>
-            <a:off x="1874520" y="4096512"/>
-            <a:ext cx="6903720" cy="804672"/>
-          </a:xfrm>
-          <a:prstGeom prst="rect">
-            <a:avLst>
-              <a:gd name="adj" fmla="val 6818"/>
-            </a:avLst>
-          </a:prstGeom>
-          <a:solidFill>
-            <a:srgbClr val="F8FAFC"/>
-          </a:solidFill>
-          <a:ln w="12700">
-            <a:solidFill>
-              <a:srgbClr val="E2E8F0"/>
-            </a:solidFill>
             <a:prstDash val="dash"/>
           </a:ln>
         </p:spPr>
       </p:sp>
       <p:sp>
         <p:nvSpPr>
-          <p:cNvPr id="32" name="Text 30"/>
+          <p:cNvPr id="29" name="Text 27"/>
           <p:cNvSpPr/>
           <p:nvPr/>
         </p:nvSpPr>
@@ -24463,7 +24753,7 @@
                 <a:ea typeface="Calibri" pitchFamily="34" charset="-122"/>
                 <a:cs typeface="Calibri" pitchFamily="34" charset="-120"/>
               </a:rPr>
-              <a:t>Word Labs  •  wordlabs.app  •  Root: 'sharp' = having a fine cutting edge</a:t>
+              <a:t>Word Labs  •  wordlabs.app  •  Root: 'sharp' = having a fine edge or point</a:t>
             </a:r>
             <a:endParaRPr lang="en-US" sz="800" dirty="0"/>
           </a:p>
@@ -24536,7 +24826,7 @@
                 <a:ea typeface="Trebuchet MS" pitchFamily="34" charset="-122"/>
                 <a:cs typeface="Trebuchet MS" pitchFamily="34" charset="-120"/>
               </a:rPr>
-              <a:t>We are learning that the root 'sharp' means 'having a fine cutting edge'.</a:t>
+              <a:t>We are learning that the root 'sharp' means 'having a fine edge or point'.</a:t>
             </a:r>
             <a:endParaRPr lang="en-US" sz="2000" dirty="0"/>
           </a:p>
@@ -25182,7 +25472,7 @@
                 <a:ea typeface="Calibri" pitchFamily="34" charset="-122"/>
                 <a:cs typeface="Calibri" pitchFamily="34" charset="-120"/>
               </a:rPr>
-              <a:t>Word Labs  •  wordlabs.app  •  Root: 'sharp' = having a fine cutting edge</a:t>
+              <a:t>Word Labs  •  wordlabs.app  •  Root: 'sharp' = having a fine edge or point</a:t>
             </a:r>
             <a:endParaRPr lang="en-US" sz="800" dirty="0"/>
           </a:p>
@@ -25321,7 +25611,7 @@
                 <a:ea typeface="Trebuchet MS" pitchFamily="34" charset="-122"/>
                 <a:cs typeface="Trebuchet MS" pitchFamily="34" charset="-120"/>
               </a:rPr>
-              <a:t>sharpened</a:t>
+              <a:t>sharpness</a:t>
             </a:r>
             <a:endParaRPr lang="en-US" sz="2800" dirty="0"/>
           </a:p>
@@ -25401,7 +25691,7 @@
         </p:nvSpPr>
         <p:spPr>
           <a:xfrm>
-            <a:off x="2221992" y="2258568"/>
+            <a:off x="2938272" y="2258568"/>
             <a:ext cx="1828800" cy="292608"/>
           </a:xfrm>
           <a:prstGeom prst="rect">
@@ -25435,7 +25725,7 @@
         </p:nvSpPr>
         <p:spPr>
           <a:xfrm>
-            <a:off x="2221992" y="2258568"/>
+            <a:off x="2938272" y="2258568"/>
             <a:ext cx="1828800" cy="292608"/>
           </a:xfrm>
           <a:prstGeom prst="rect">
@@ -25474,7 +25764,7 @@
         </p:nvSpPr>
         <p:spPr>
           <a:xfrm>
-            <a:off x="2221992" y="2569464"/>
+            <a:off x="2938272" y="2569464"/>
             <a:ext cx="1828800" cy="201168"/>
           </a:xfrm>
           <a:prstGeom prst="rect">
@@ -25499,7 +25789,7 @@
                 <a:ea typeface="Calibri" pitchFamily="34" charset="-122"/>
                 <a:cs typeface="Calibri" pitchFamily="34" charset="-120"/>
               </a:rPr>
-              <a:t>having a fine cutting edge</a:t>
+              <a:t>having a fine edge or point</a:t>
             </a:r>
             <a:endParaRPr lang="en-US" sz="850" dirty="0"/>
           </a:p>
@@ -25513,7 +25803,7 @@
         </p:nvSpPr>
         <p:spPr>
           <a:xfrm>
-            <a:off x="4370832" y="2258568"/>
+            <a:off x="5803392" y="2258568"/>
             <a:ext cx="1828800" cy="292608"/>
           </a:xfrm>
           <a:prstGeom prst="rect">
@@ -25547,7 +25837,7 @@
         </p:nvSpPr>
         <p:spPr>
           <a:xfrm>
-            <a:off x="4370832" y="2258568"/>
+            <a:off x="5803392" y="2258568"/>
             <a:ext cx="1828800" cy="292608"/>
           </a:xfrm>
           <a:prstGeom prst="rect">
@@ -25572,7 +25862,7 @@
                 <a:ea typeface="Trebuchet MS" pitchFamily="34" charset="-122"/>
                 <a:cs typeface="Trebuchet MS" pitchFamily="34" charset="-120"/>
               </a:rPr>
-              <a:t>en</a:t>
+              <a:t>ness</a:t>
             </a:r>
             <a:endParaRPr lang="en-US" sz="1300" dirty="0"/>
           </a:p>
@@ -25586,7 +25876,7 @@
         </p:nvSpPr>
         <p:spPr>
           <a:xfrm>
-            <a:off x="4370832" y="2569464"/>
+            <a:off x="5803392" y="2569464"/>
             <a:ext cx="1828800" cy="201168"/>
           </a:xfrm>
           <a:prstGeom prst="rect">
@@ -25611,7 +25901,7 @@
                 <a:ea typeface="Calibri" pitchFamily="34" charset="-122"/>
                 <a:cs typeface="Calibri" pitchFamily="34" charset="-120"/>
               </a:rPr>
-              <a:t>to cause or become</a:t>
+              <a:t>state of</a:t>
             </a:r>
             <a:endParaRPr lang="en-US" sz="850" dirty="0"/>
           </a:p>
@@ -25625,30 +25915,23 @@
         </p:nvSpPr>
         <p:spPr>
           <a:xfrm>
-            <a:off x="6519672" y="2258568"/>
-            <a:ext cx="1828800" cy="292608"/>
+            <a:off x="365760" y="3273552"/>
+            <a:ext cx="1371600" cy="658368"/>
           </a:xfrm>
           <a:prstGeom prst="rect">
             <a:avLst>
-              <a:gd name="adj" fmla="val 25000"/>
+              <a:gd name="adj" fmla="val 8333"/>
             </a:avLst>
           </a:prstGeom>
           <a:solidFill>
-            <a:srgbClr val="FCE7F3"/>
-          </a:solidFill>
-          <a:ln w="19050">
-            <a:solidFill>
-              <a:srgbClr val="DB2777"/>
-            </a:solidFill>
-            <a:prstDash val="solid"/>
-          </a:ln>
-          <a:effectLst>
-            <a:outerShdw sx="100000" sy="100000" kx="0" ky="0" algn="bl" rotWithShape="0" blurRad="101600" dist="38100" dir="8100000">
-              <a:srgbClr val="000000">
-                <a:alpha val="12000"/>
-              </a:srgbClr>
-            </a:outerShdw>
-          </a:effectLst>
+            <a:srgbClr val="E2E8F0"/>
+          </a:solidFill>
+          <a:ln w="12700">
+            <a:solidFill>
+              <a:srgbClr val="E2E8F0"/>
+            </a:solidFill>
+            <a:prstDash val="solid"/>
+          </a:ln>
         </p:spPr>
       </p:sp>
       <p:sp>
@@ -25659,8 +25942,8 @@
         </p:nvSpPr>
         <p:spPr>
           <a:xfrm>
-            <a:off x="6519672" y="2258568"/>
-            <a:ext cx="1828800" cy="292608"/>
+            <a:off x="365760" y="3273552"/>
+            <a:ext cx="1371600" cy="658368"/>
           </a:xfrm>
           <a:prstGeom prst="rect">
             <a:avLst/>
@@ -25676,69 +25959,30 @@
               <a:buNone/>
             </a:pPr>
             <a:r>
-              <a:rPr lang="en-US" sz="1300" b="1" dirty="0">
-                <a:solidFill>
-                  <a:srgbClr val="9D174D"/>
+              <a:rPr lang="en-US" sz="1100" b="1" dirty="0">
+                <a:solidFill>
+                  <a:srgbClr val="475569"/>
                 </a:solidFill>
                 <a:latin typeface="Trebuchet MS" pitchFamily="34" charset="0"/>
                 <a:ea typeface="Trebuchet MS" pitchFamily="34" charset="-122"/>
                 <a:cs typeface="Trebuchet MS" pitchFamily="34" charset="-120"/>
               </a:rPr>
-              <a:t>ed</a:t>
-            </a:r>
-            <a:endParaRPr lang="en-US" sz="1300" dirty="0"/>
-          </a:p>
-        </p:txBody>
-      </p:sp>
-      <p:sp>
-        <p:nvSpPr>
-          <p:cNvPr id="24" name="Text 22"/>
-          <p:cNvSpPr/>
-          <p:nvPr/>
-        </p:nvSpPr>
-        <p:spPr>
-          <a:xfrm>
-            <a:off x="6519672" y="2569464"/>
-            <a:ext cx="1828800" cy="201168"/>
-          </a:xfrm>
-          <a:prstGeom prst="rect">
-            <a:avLst/>
-          </a:prstGeom>
-          <a:noFill/>
-          <a:ln/>
-        </p:spPr>
-        <p:txBody>
-          <a:bodyPr wrap="square" lIns="0" tIns="0" rIns="0" bIns="0" rtlCol="0" anchor="t"/>
-          <a:lstStyle/>
-          <a:p>
-            <a:pPr algn="ctr" indent="0" marL="0">
-              <a:buNone/>
-            </a:pPr>
-            <a:r>
-              <a:rPr lang="en-US" sz="850" dirty="0">
-                <a:solidFill>
-                  <a:srgbClr val="475569"/>
-                </a:solidFill>
-                <a:latin typeface="Calibri" pitchFamily="34" charset="0"/>
-                <a:ea typeface="Calibri" pitchFamily="34" charset="-122"/>
-                <a:cs typeface="Calibri" pitchFamily="34" charset="-120"/>
-              </a:rPr>
-              <a:t>past tense</a:t>
-            </a:r>
-            <a:endParaRPr lang="en-US" sz="850" dirty="0"/>
-          </a:p>
-        </p:txBody>
-      </p:sp>
-      <p:sp>
-        <p:nvSpPr>
-          <p:cNvPr id="25" name="Shape 23"/>
-          <p:cNvSpPr/>
-          <p:nvPr/>
-        </p:nvSpPr>
-        <p:spPr>
-          <a:xfrm>
-            <a:off x="365760" y="3273552"/>
-            <a:ext cx="1371600" cy="658368"/>
+              <a:t>Syllables</a:t>
+            </a:r>
+            <a:endParaRPr lang="en-US" sz="1100" dirty="0"/>
+          </a:p>
+        </p:txBody>
+      </p:sp>
+      <p:sp>
+        <p:nvSpPr>
+          <p:cNvPr id="24" name="Shape 22"/>
+          <p:cNvSpPr/>
+          <p:nvPr/>
+        </p:nvSpPr>
+        <p:spPr>
+          <a:xfrm>
+            <a:off x="1874520" y="3273552"/>
+            <a:ext cx="6903720" cy="658368"/>
           </a:xfrm>
           <a:prstGeom prst="rect">
             <a:avLst>
@@ -25746,11 +25990,38 @@
             </a:avLst>
           </a:prstGeom>
           <a:solidFill>
-            <a:srgbClr val="E2E8F0"/>
-          </a:solidFill>
-          <a:ln w="12700">
-            <a:solidFill>
-              <a:srgbClr val="E2E8F0"/>
+            <a:srgbClr val="CCFBF1"/>
+          </a:solidFill>
+          <a:ln w="12700">
+            <a:solidFill>
+              <a:srgbClr val="0D9488"/>
+            </a:solidFill>
+            <a:prstDash val="solid"/>
+          </a:ln>
+        </p:spPr>
+      </p:sp>
+      <p:sp>
+        <p:nvSpPr>
+          <p:cNvPr id="25" name="Shape 23"/>
+          <p:cNvSpPr/>
+          <p:nvPr/>
+        </p:nvSpPr>
+        <p:spPr>
+          <a:xfrm>
+            <a:off x="2999232" y="3364992"/>
+            <a:ext cx="1645920" cy="475488"/>
+          </a:xfrm>
+          <a:prstGeom prst="rect">
+            <a:avLst>
+              <a:gd name="adj" fmla="val 9615"/>
+            </a:avLst>
+          </a:prstGeom>
+          <a:solidFill>
+            <a:srgbClr val="FFFFFF"/>
+          </a:solidFill>
+          <a:ln w="12700">
+            <a:solidFill>
+              <a:srgbClr val="0D9488"/>
             </a:solidFill>
             <a:prstDash val="solid"/>
           </a:ln>
@@ -25764,8 +26035,8 @@
         </p:nvSpPr>
         <p:spPr>
           <a:xfrm>
-            <a:off x="365760" y="3273552"/>
-            <a:ext cx="1371600" cy="658368"/>
+            <a:off x="2999232" y="3364992"/>
+            <a:ext cx="1645920" cy="475488"/>
           </a:xfrm>
           <a:prstGeom prst="rect">
             <a:avLst/>
@@ -25781,46 +26052,58 @@
               <a:buNone/>
             </a:pPr>
             <a:r>
-              <a:rPr lang="en-US" sz="1100" b="1" dirty="0">
-                <a:solidFill>
-                  <a:srgbClr val="475569"/>
+              <a:rPr lang="en-US" sz="1400" b="1" dirty="0">
+                <a:solidFill>
+                  <a:srgbClr val="0D9488"/>
                 </a:solidFill>
                 <a:latin typeface="Trebuchet MS" pitchFamily="34" charset="0"/>
                 <a:ea typeface="Trebuchet MS" pitchFamily="34" charset="-122"/>
                 <a:cs typeface="Trebuchet MS" pitchFamily="34" charset="-120"/>
               </a:rPr>
-              <a:t>Syllables</a:t>
-            </a:r>
-            <a:endParaRPr lang="en-US" sz="1100" dirty="0"/>
-          </a:p>
-        </p:txBody>
-      </p:sp>
-      <p:sp>
-        <p:nvSpPr>
-          <p:cNvPr id="27" name="Shape 25"/>
-          <p:cNvSpPr/>
-          <p:nvPr/>
-        </p:nvSpPr>
-        <p:spPr>
-          <a:xfrm>
-            <a:off x="1874520" y="3273552"/>
-            <a:ext cx="6903720" cy="658368"/>
-          </a:xfrm>
-          <a:prstGeom prst="rect">
-            <a:avLst>
-              <a:gd name="adj" fmla="val 8333"/>
-            </a:avLst>
-          </a:prstGeom>
-          <a:solidFill>
-            <a:srgbClr val="CCFBF1"/>
-          </a:solidFill>
-          <a:ln w="12700">
-            <a:solidFill>
-              <a:srgbClr val="0D9488"/>
-            </a:solidFill>
-            <a:prstDash val="solid"/>
-          </a:ln>
-        </p:spPr>
+              <a:t>sharp</a:t>
+            </a:r>
+            <a:endParaRPr lang="en-US" sz="1400" dirty="0"/>
+          </a:p>
+        </p:txBody>
+      </p:sp>
+      <p:sp>
+        <p:nvSpPr>
+          <p:cNvPr id="27" name="Text 25"/>
+          <p:cNvSpPr/>
+          <p:nvPr/>
+        </p:nvSpPr>
+        <p:spPr>
+          <a:xfrm>
+            <a:off x="4645152" y="3364992"/>
+            <a:ext cx="1097280" cy="475488"/>
+          </a:xfrm>
+          <a:prstGeom prst="rect">
+            <a:avLst/>
+          </a:prstGeom>
+          <a:noFill/>
+          <a:ln/>
+        </p:spPr>
+        <p:txBody>
+          <a:bodyPr wrap="square" lIns="0" tIns="0" rIns="0" bIns="0" rtlCol="0" anchor="ctr"/>
+          <a:lstStyle/>
+          <a:p>
+            <a:pPr algn="ctr" indent="0" marL="0">
+              <a:buNone/>
+            </a:pPr>
+            <a:r>
+              <a:rPr lang="en-US" sz="1600" b="1" dirty="0">
+                <a:solidFill>
+                  <a:srgbClr val="0D9488"/>
+                </a:solidFill>
+                <a:latin typeface="Trebuchet MS" pitchFamily="34" charset="0"/>
+                <a:ea typeface="Trebuchet MS" pitchFamily="34" charset="-122"/>
+                <a:cs typeface="Trebuchet MS" pitchFamily="34" charset="-120"/>
+              </a:rPr>
+              <a:t>·</a:t>
+            </a:r>
+            <a:endParaRPr lang="en-US" sz="1600" dirty="0"/>
+          </a:p>
+        </p:txBody>
       </p:sp>
       <p:sp>
         <p:nvSpPr>
@@ -25830,7 +26113,7 @@
         </p:nvSpPr>
         <p:spPr>
           <a:xfrm>
-            <a:off x="2999232" y="3364992"/>
+            <a:off x="5742432" y="3364992"/>
             <a:ext cx="1645920" cy="475488"/>
           </a:xfrm>
           <a:prstGeom prst="rect">
@@ -25857,7 +26140,7 @@
         </p:nvSpPr>
         <p:spPr>
           <a:xfrm>
-            <a:off x="2999232" y="3364992"/>
+            <a:off x="5742432" y="3364992"/>
             <a:ext cx="1645920" cy="475488"/>
           </a:xfrm>
           <a:prstGeom prst="rect">
@@ -25882,7 +26165,7 @@
                 <a:ea typeface="Trebuchet MS" pitchFamily="34" charset="-122"/>
                 <a:cs typeface="Trebuchet MS" pitchFamily="34" charset="-120"/>
               </a:rPr>
-              <a:t>sharp</a:t>
+              <a:t>ness</a:t>
             </a:r>
             <a:endParaRPr lang="en-US" sz="1400" dirty="0"/>
           </a:p>
@@ -25890,14 +26173,41 @@
       </p:sp>
       <p:sp>
         <p:nvSpPr>
-          <p:cNvPr id="30" name="Text 28"/>
-          <p:cNvSpPr/>
-          <p:nvPr/>
-        </p:nvSpPr>
-        <p:spPr>
-          <a:xfrm>
-            <a:off x="4645152" y="3364992"/>
-            <a:ext cx="1097280" cy="475488"/>
+          <p:cNvPr id="30" name="Shape 28"/>
+          <p:cNvSpPr/>
+          <p:nvPr/>
+        </p:nvSpPr>
+        <p:spPr>
+          <a:xfrm>
+            <a:off x="365760" y="4096512"/>
+            <a:ext cx="1371600" cy="804672"/>
+          </a:xfrm>
+          <a:prstGeom prst="rect">
+            <a:avLst>
+              <a:gd name="adj" fmla="val 6818"/>
+            </a:avLst>
+          </a:prstGeom>
+          <a:solidFill>
+            <a:srgbClr val="E2E8F0"/>
+          </a:solidFill>
+          <a:ln w="12700">
+            <a:solidFill>
+              <a:srgbClr val="E2E8F0"/>
+            </a:solidFill>
+            <a:prstDash val="solid"/>
+          </a:ln>
+        </p:spPr>
+      </p:sp>
+      <p:sp>
+        <p:nvSpPr>
+          <p:cNvPr id="31" name="Text 29"/>
+          <p:cNvSpPr/>
+          <p:nvPr/>
+        </p:nvSpPr>
+        <p:spPr>
+          <a:xfrm>
+            <a:off x="365760" y="4096512"/>
+            <a:ext cx="1371600" cy="804672"/>
           </a:xfrm>
           <a:prstGeom prst="rect">
             <a:avLst/>
@@ -25913,96 +26223,30 @@
               <a:buNone/>
             </a:pPr>
             <a:r>
-              <a:rPr lang="en-US" sz="1600" b="1" dirty="0">
-                <a:solidFill>
-                  <a:srgbClr val="0D9488"/>
+              <a:rPr lang="en-US" sz="1100" b="1" dirty="0">
+                <a:solidFill>
+                  <a:srgbClr val="475569"/>
                 </a:solidFill>
                 <a:latin typeface="Trebuchet MS" pitchFamily="34" charset="0"/>
                 <a:ea typeface="Trebuchet MS" pitchFamily="34" charset="-122"/>
                 <a:cs typeface="Trebuchet MS" pitchFamily="34" charset="-120"/>
               </a:rPr>
-              <a:t>·</a:t>
-            </a:r>
-            <a:endParaRPr lang="en-US" sz="1600" dirty="0"/>
-          </a:p>
-        </p:txBody>
-      </p:sp>
-      <p:sp>
-        <p:nvSpPr>
-          <p:cNvPr id="31" name="Shape 29"/>
-          <p:cNvSpPr/>
-          <p:nvPr/>
-        </p:nvSpPr>
-        <p:spPr>
-          <a:xfrm>
-            <a:off x="5742432" y="3364992"/>
-            <a:ext cx="1645920" cy="475488"/>
-          </a:xfrm>
-          <a:prstGeom prst="rect">
-            <a:avLst>
-              <a:gd name="adj" fmla="val 9615"/>
-            </a:avLst>
-          </a:prstGeom>
-          <a:solidFill>
-            <a:srgbClr val="FFFFFF"/>
-          </a:solidFill>
-          <a:ln w="12700">
-            <a:solidFill>
-              <a:srgbClr val="0D9488"/>
-            </a:solidFill>
-            <a:prstDash val="solid"/>
-          </a:ln>
-        </p:spPr>
-      </p:sp>
-      <p:sp>
-        <p:nvSpPr>
-          <p:cNvPr id="32" name="Text 30"/>
-          <p:cNvSpPr/>
-          <p:nvPr/>
-        </p:nvSpPr>
-        <p:spPr>
-          <a:xfrm>
-            <a:off x="5742432" y="3364992"/>
-            <a:ext cx="1645920" cy="475488"/>
-          </a:xfrm>
-          <a:prstGeom prst="rect">
-            <a:avLst/>
-          </a:prstGeom>
-          <a:noFill/>
-          <a:ln/>
-        </p:spPr>
-        <p:txBody>
-          <a:bodyPr wrap="square" lIns="0" tIns="0" rIns="0" bIns="0" rtlCol="0" anchor="ctr"/>
-          <a:lstStyle/>
-          <a:p>
-            <a:pPr algn="ctr" indent="0" marL="0">
-              <a:buNone/>
-            </a:pPr>
-            <a:r>
-              <a:rPr lang="en-US" sz="1400" b="1" dirty="0">
-                <a:solidFill>
-                  <a:srgbClr val="0D9488"/>
-                </a:solidFill>
-                <a:latin typeface="Trebuchet MS" pitchFamily="34" charset="0"/>
-                <a:ea typeface="Trebuchet MS" pitchFamily="34" charset="-122"/>
-                <a:cs typeface="Trebuchet MS" pitchFamily="34" charset="-120"/>
-              </a:rPr>
-              <a:t>ened</a:t>
-            </a:r>
-            <a:endParaRPr lang="en-US" sz="1400" dirty="0"/>
-          </a:p>
-        </p:txBody>
-      </p:sp>
-      <p:sp>
-        <p:nvSpPr>
-          <p:cNvPr id="33" name="Shape 31"/>
-          <p:cNvSpPr/>
-          <p:nvPr/>
-        </p:nvSpPr>
-        <p:spPr>
-          <a:xfrm>
-            <a:off x="365760" y="4096512"/>
-            <a:ext cx="1371600" cy="804672"/>
+              <a:t>Phonemes</a:t>
+            </a:r>
+            <a:endParaRPr lang="en-US" sz="1100" dirty="0"/>
+          </a:p>
+        </p:txBody>
+      </p:sp>
+      <p:sp>
+        <p:nvSpPr>
+          <p:cNvPr id="32" name="Shape 30"/>
+          <p:cNvSpPr/>
+          <p:nvPr/>
+        </p:nvSpPr>
+        <p:spPr>
+          <a:xfrm>
+            <a:off x="1874520" y="4096512"/>
+            <a:ext cx="6903720" cy="804672"/>
           </a:xfrm>
           <a:prstGeom prst="rect">
             <a:avLst>
@@ -26010,85 +26254,19 @@
             </a:avLst>
           </a:prstGeom>
           <a:solidFill>
-            <a:srgbClr val="E2E8F0"/>
+            <a:srgbClr val="F8FAFC"/>
           </a:solidFill>
           <a:ln w="12700">
             <a:solidFill>
               <a:srgbClr val="E2E8F0"/>
             </a:solidFill>
-            <a:prstDash val="solid"/>
-          </a:ln>
-        </p:spPr>
-      </p:sp>
-      <p:sp>
-        <p:nvSpPr>
-          <p:cNvPr id="34" name="Text 32"/>
-          <p:cNvSpPr/>
-          <p:nvPr/>
-        </p:nvSpPr>
-        <p:spPr>
-          <a:xfrm>
-            <a:off x="365760" y="4096512"/>
-            <a:ext cx="1371600" cy="804672"/>
-          </a:xfrm>
-          <a:prstGeom prst="rect">
-            <a:avLst/>
-          </a:prstGeom>
-          <a:noFill/>
-          <a:ln/>
-        </p:spPr>
-        <p:txBody>
-          <a:bodyPr wrap="square" lIns="0" tIns="0" rIns="0" bIns="0" rtlCol="0" anchor="ctr"/>
-          <a:lstStyle/>
-          <a:p>
-            <a:pPr algn="ctr" indent="0" marL="0">
-              <a:buNone/>
-            </a:pPr>
-            <a:r>
-              <a:rPr lang="en-US" sz="1100" b="1" dirty="0">
-                <a:solidFill>
-                  <a:srgbClr val="475569"/>
-                </a:solidFill>
-                <a:latin typeface="Trebuchet MS" pitchFamily="34" charset="0"/>
-                <a:ea typeface="Trebuchet MS" pitchFamily="34" charset="-122"/>
-                <a:cs typeface="Trebuchet MS" pitchFamily="34" charset="-120"/>
-              </a:rPr>
-              <a:t>Phonemes</a:t>
-            </a:r>
-            <a:endParaRPr lang="en-US" sz="1100" dirty="0"/>
-          </a:p>
-        </p:txBody>
-      </p:sp>
-      <p:sp>
-        <p:nvSpPr>
-          <p:cNvPr id="35" name="Shape 33"/>
-          <p:cNvSpPr/>
-          <p:nvPr/>
-        </p:nvSpPr>
-        <p:spPr>
-          <a:xfrm>
-            <a:off x="1874520" y="4096512"/>
-            <a:ext cx="6903720" cy="804672"/>
-          </a:xfrm>
-          <a:prstGeom prst="rect">
-            <a:avLst>
-              <a:gd name="adj" fmla="val 6818"/>
-            </a:avLst>
-          </a:prstGeom>
-          <a:solidFill>
-            <a:srgbClr val="F8FAFC"/>
-          </a:solidFill>
-          <a:ln w="12700">
-            <a:solidFill>
-              <a:srgbClr val="E2E8F0"/>
-            </a:solidFill>
             <a:prstDash val="dash"/>
           </a:ln>
         </p:spPr>
       </p:sp>
       <p:sp>
         <p:nvSpPr>
-          <p:cNvPr id="36" name="Text 34"/>
+          <p:cNvPr id="33" name="Text 31"/>
           <p:cNvSpPr/>
           <p:nvPr/>
         </p:nvSpPr>
@@ -26411,7 +26589,7 @@
                 <a:ea typeface="Calibri" pitchFamily="34" charset="-122"/>
                 <a:cs typeface="Calibri" pitchFamily="34" charset="-120"/>
               </a:rPr>
-              <a:t>Word Labs  •  wordlabs.app  •  Root: 'sharp' = having a fine cutting edge</a:t>
+              <a:t>Word Labs  •  wordlabs.app  •  Root: 'sharp' = having a fine edge or point</a:t>
             </a:r>
             <a:endParaRPr lang="en-US" sz="800" dirty="0"/>
           </a:p>
@@ -26550,7 +26728,7 @@
                 <a:ea typeface="Trebuchet MS" pitchFamily="34" charset="-122"/>
                 <a:cs typeface="Trebuchet MS" pitchFamily="34" charset="-120"/>
               </a:rPr>
-              <a:t>sharpened</a:t>
+              <a:t>sharpness</a:t>
             </a:r>
             <a:endParaRPr lang="en-US" sz="2800" dirty="0"/>
           </a:p>
@@ -26630,7 +26808,7 @@
         </p:nvSpPr>
         <p:spPr>
           <a:xfrm>
-            <a:off x="2221992" y="2258568"/>
+            <a:off x="2938272" y="2258568"/>
             <a:ext cx="1828800" cy="292608"/>
           </a:xfrm>
           <a:prstGeom prst="rect">
@@ -26664,7 +26842,7 @@
         </p:nvSpPr>
         <p:spPr>
           <a:xfrm>
-            <a:off x="2221992" y="2258568"/>
+            <a:off x="2938272" y="2258568"/>
             <a:ext cx="1828800" cy="292608"/>
           </a:xfrm>
           <a:prstGeom prst="rect">
@@ -26703,7 +26881,7 @@
         </p:nvSpPr>
         <p:spPr>
           <a:xfrm>
-            <a:off x="2221992" y="2569464"/>
+            <a:off x="2938272" y="2569464"/>
             <a:ext cx="1828800" cy="201168"/>
           </a:xfrm>
           <a:prstGeom prst="rect">
@@ -26728,7 +26906,7 @@
                 <a:ea typeface="Calibri" pitchFamily="34" charset="-122"/>
                 <a:cs typeface="Calibri" pitchFamily="34" charset="-120"/>
               </a:rPr>
-              <a:t>having a fine cutting edge</a:t>
+              <a:t>having a fine edge or point</a:t>
             </a:r>
             <a:endParaRPr lang="en-US" sz="850" dirty="0"/>
           </a:p>
@@ -26742,7 +26920,7 @@
         </p:nvSpPr>
         <p:spPr>
           <a:xfrm>
-            <a:off x="4370832" y="2258568"/>
+            <a:off x="5803392" y="2258568"/>
             <a:ext cx="1828800" cy="292608"/>
           </a:xfrm>
           <a:prstGeom prst="rect">
@@ -26776,7 +26954,7 @@
         </p:nvSpPr>
         <p:spPr>
           <a:xfrm>
-            <a:off x="4370832" y="2258568"/>
+            <a:off x="5803392" y="2258568"/>
             <a:ext cx="1828800" cy="292608"/>
           </a:xfrm>
           <a:prstGeom prst="rect">
@@ -26801,7 +26979,7 @@
                 <a:ea typeface="Trebuchet MS" pitchFamily="34" charset="-122"/>
                 <a:cs typeface="Trebuchet MS" pitchFamily="34" charset="-120"/>
               </a:rPr>
-              <a:t>en</a:t>
+              <a:t>ness</a:t>
             </a:r>
             <a:endParaRPr lang="en-US" sz="1300" dirty="0"/>
           </a:p>
@@ -26815,7 +26993,7 @@
         </p:nvSpPr>
         <p:spPr>
           <a:xfrm>
-            <a:off x="4370832" y="2569464"/>
+            <a:off x="5803392" y="2569464"/>
             <a:ext cx="1828800" cy="201168"/>
           </a:xfrm>
           <a:prstGeom prst="rect">
@@ -26840,7 +27018,7 @@
                 <a:ea typeface="Calibri" pitchFamily="34" charset="-122"/>
                 <a:cs typeface="Calibri" pitchFamily="34" charset="-120"/>
               </a:rPr>
-              <a:t>to cause or become</a:t>
+              <a:t>state of</a:t>
             </a:r>
             <a:endParaRPr lang="en-US" sz="850" dirty="0"/>
           </a:p>
@@ -26854,30 +27032,23 @@
         </p:nvSpPr>
         <p:spPr>
           <a:xfrm>
-            <a:off x="6519672" y="2258568"/>
-            <a:ext cx="1828800" cy="292608"/>
+            <a:off x="365760" y="3273552"/>
+            <a:ext cx="1371600" cy="658368"/>
           </a:xfrm>
           <a:prstGeom prst="rect">
             <a:avLst>
-              <a:gd name="adj" fmla="val 25000"/>
+              <a:gd name="adj" fmla="val 8333"/>
             </a:avLst>
           </a:prstGeom>
           <a:solidFill>
-            <a:srgbClr val="FCE7F3"/>
-          </a:solidFill>
-          <a:ln w="19050">
-            <a:solidFill>
-              <a:srgbClr val="DB2777"/>
-            </a:solidFill>
-            <a:prstDash val="solid"/>
-          </a:ln>
-          <a:effectLst>
-            <a:outerShdw sx="100000" sy="100000" kx="0" ky="0" algn="bl" rotWithShape="0" blurRad="101600" dist="38100" dir="8100000">
-              <a:srgbClr val="000000">
-                <a:alpha val="12000"/>
-              </a:srgbClr>
-            </a:outerShdw>
-          </a:effectLst>
+            <a:srgbClr val="E2E8F0"/>
+          </a:solidFill>
+          <a:ln w="12700">
+            <a:solidFill>
+              <a:srgbClr val="E2E8F0"/>
+            </a:solidFill>
+            <a:prstDash val="solid"/>
+          </a:ln>
         </p:spPr>
       </p:sp>
       <p:sp>
@@ -26888,8 +27059,8 @@
         </p:nvSpPr>
         <p:spPr>
           <a:xfrm>
-            <a:off x="6519672" y="2258568"/>
-            <a:ext cx="1828800" cy="292608"/>
+            <a:off x="365760" y="3273552"/>
+            <a:ext cx="1371600" cy="658368"/>
           </a:xfrm>
           <a:prstGeom prst="rect">
             <a:avLst/>
@@ -26905,69 +27076,30 @@
               <a:buNone/>
             </a:pPr>
             <a:r>
-              <a:rPr lang="en-US" sz="1300" b="1" dirty="0">
-                <a:solidFill>
-                  <a:srgbClr val="9D174D"/>
+              <a:rPr lang="en-US" sz="1100" b="1" dirty="0">
+                <a:solidFill>
+                  <a:srgbClr val="475569"/>
                 </a:solidFill>
                 <a:latin typeface="Trebuchet MS" pitchFamily="34" charset="0"/>
                 <a:ea typeface="Trebuchet MS" pitchFamily="34" charset="-122"/>
                 <a:cs typeface="Trebuchet MS" pitchFamily="34" charset="-120"/>
               </a:rPr>
-              <a:t>ed</a:t>
-            </a:r>
-            <a:endParaRPr lang="en-US" sz="1300" dirty="0"/>
-          </a:p>
-        </p:txBody>
-      </p:sp>
-      <p:sp>
-        <p:nvSpPr>
-          <p:cNvPr id="24" name="Text 22"/>
-          <p:cNvSpPr/>
-          <p:nvPr/>
-        </p:nvSpPr>
-        <p:spPr>
-          <a:xfrm>
-            <a:off x="6519672" y="2569464"/>
-            <a:ext cx="1828800" cy="201168"/>
-          </a:xfrm>
-          <a:prstGeom prst="rect">
-            <a:avLst/>
-          </a:prstGeom>
-          <a:noFill/>
-          <a:ln/>
-        </p:spPr>
-        <p:txBody>
-          <a:bodyPr wrap="square" lIns="0" tIns="0" rIns="0" bIns="0" rtlCol="0" anchor="t"/>
-          <a:lstStyle/>
-          <a:p>
-            <a:pPr algn="ctr" indent="0" marL="0">
-              <a:buNone/>
-            </a:pPr>
-            <a:r>
-              <a:rPr lang="en-US" sz="850" dirty="0">
-                <a:solidFill>
-                  <a:srgbClr val="475569"/>
-                </a:solidFill>
-                <a:latin typeface="Calibri" pitchFamily="34" charset="0"/>
-                <a:ea typeface="Calibri" pitchFamily="34" charset="-122"/>
-                <a:cs typeface="Calibri" pitchFamily="34" charset="-120"/>
-              </a:rPr>
-              <a:t>past tense</a:t>
-            </a:r>
-            <a:endParaRPr lang="en-US" sz="850" dirty="0"/>
-          </a:p>
-        </p:txBody>
-      </p:sp>
-      <p:sp>
-        <p:nvSpPr>
-          <p:cNvPr id="25" name="Shape 23"/>
-          <p:cNvSpPr/>
-          <p:nvPr/>
-        </p:nvSpPr>
-        <p:spPr>
-          <a:xfrm>
-            <a:off x="365760" y="3273552"/>
-            <a:ext cx="1371600" cy="658368"/>
+              <a:t>Syllables</a:t>
+            </a:r>
+            <a:endParaRPr lang="en-US" sz="1100" dirty="0"/>
+          </a:p>
+        </p:txBody>
+      </p:sp>
+      <p:sp>
+        <p:nvSpPr>
+          <p:cNvPr id="24" name="Shape 22"/>
+          <p:cNvSpPr/>
+          <p:nvPr/>
+        </p:nvSpPr>
+        <p:spPr>
+          <a:xfrm>
+            <a:off x="1874520" y="3273552"/>
+            <a:ext cx="6903720" cy="658368"/>
           </a:xfrm>
           <a:prstGeom prst="rect">
             <a:avLst>
@@ -26975,11 +27107,38 @@
             </a:avLst>
           </a:prstGeom>
           <a:solidFill>
-            <a:srgbClr val="E2E8F0"/>
-          </a:solidFill>
-          <a:ln w="12700">
-            <a:solidFill>
-              <a:srgbClr val="E2E8F0"/>
+            <a:srgbClr val="CCFBF1"/>
+          </a:solidFill>
+          <a:ln w="12700">
+            <a:solidFill>
+              <a:srgbClr val="0D9488"/>
+            </a:solidFill>
+            <a:prstDash val="solid"/>
+          </a:ln>
+        </p:spPr>
+      </p:sp>
+      <p:sp>
+        <p:nvSpPr>
+          <p:cNvPr id="25" name="Shape 23"/>
+          <p:cNvSpPr/>
+          <p:nvPr/>
+        </p:nvSpPr>
+        <p:spPr>
+          <a:xfrm>
+            <a:off x="2999232" y="3364992"/>
+            <a:ext cx="1645920" cy="475488"/>
+          </a:xfrm>
+          <a:prstGeom prst="rect">
+            <a:avLst>
+              <a:gd name="adj" fmla="val 9615"/>
+            </a:avLst>
+          </a:prstGeom>
+          <a:solidFill>
+            <a:srgbClr val="FFFFFF"/>
+          </a:solidFill>
+          <a:ln w="12700">
+            <a:solidFill>
+              <a:srgbClr val="0D9488"/>
             </a:solidFill>
             <a:prstDash val="solid"/>
           </a:ln>
@@ -26993,8 +27152,8 @@
         </p:nvSpPr>
         <p:spPr>
           <a:xfrm>
-            <a:off x="365760" y="3273552"/>
-            <a:ext cx="1371600" cy="658368"/>
+            <a:off x="2999232" y="3364992"/>
+            <a:ext cx="1645920" cy="475488"/>
           </a:xfrm>
           <a:prstGeom prst="rect">
             <a:avLst/>
@@ -27010,15 +27169,186 @@
               <a:buNone/>
             </a:pPr>
             <a:r>
-              <a:rPr lang="en-US" sz="1100" b="1" dirty="0">
-                <a:solidFill>
-                  <a:srgbClr val="475569"/>
+              <a:rPr lang="en-US" sz="1400" b="1" dirty="0">
+                <a:solidFill>
+                  <a:srgbClr val="0D9488"/>
                 </a:solidFill>
                 <a:latin typeface="Trebuchet MS" pitchFamily="34" charset="0"/>
                 <a:ea typeface="Trebuchet MS" pitchFamily="34" charset="-122"/>
                 <a:cs typeface="Trebuchet MS" pitchFamily="34" charset="-120"/>
               </a:rPr>
-              <a:t>Syllables</a:t>
+              <a:t>sharp</a:t>
+            </a:r>
+            <a:endParaRPr lang="en-US" sz="1400" dirty="0"/>
+          </a:p>
+        </p:txBody>
+      </p:sp>
+      <p:sp>
+        <p:nvSpPr>
+          <p:cNvPr id="27" name="Text 25"/>
+          <p:cNvSpPr/>
+          <p:nvPr/>
+        </p:nvSpPr>
+        <p:spPr>
+          <a:xfrm>
+            <a:off x="4645152" y="3364992"/>
+            <a:ext cx="1097280" cy="475488"/>
+          </a:xfrm>
+          <a:prstGeom prst="rect">
+            <a:avLst/>
+          </a:prstGeom>
+          <a:noFill/>
+          <a:ln/>
+        </p:spPr>
+        <p:txBody>
+          <a:bodyPr wrap="square" lIns="0" tIns="0" rIns="0" bIns="0" rtlCol="0" anchor="ctr"/>
+          <a:lstStyle/>
+          <a:p>
+            <a:pPr algn="ctr" indent="0" marL="0">
+              <a:buNone/>
+            </a:pPr>
+            <a:r>
+              <a:rPr lang="en-US" sz="1600" b="1" dirty="0">
+                <a:solidFill>
+                  <a:srgbClr val="0D9488"/>
+                </a:solidFill>
+                <a:latin typeface="Trebuchet MS" pitchFamily="34" charset="0"/>
+                <a:ea typeface="Trebuchet MS" pitchFamily="34" charset="-122"/>
+                <a:cs typeface="Trebuchet MS" pitchFamily="34" charset="-120"/>
+              </a:rPr>
+              <a:t>·</a:t>
+            </a:r>
+            <a:endParaRPr lang="en-US" sz="1600" dirty="0"/>
+          </a:p>
+        </p:txBody>
+      </p:sp>
+      <p:sp>
+        <p:nvSpPr>
+          <p:cNvPr id="28" name="Shape 26"/>
+          <p:cNvSpPr/>
+          <p:nvPr/>
+        </p:nvSpPr>
+        <p:spPr>
+          <a:xfrm>
+            <a:off x="5742432" y="3364992"/>
+            <a:ext cx="1645920" cy="475488"/>
+          </a:xfrm>
+          <a:prstGeom prst="rect">
+            <a:avLst>
+              <a:gd name="adj" fmla="val 9615"/>
+            </a:avLst>
+          </a:prstGeom>
+          <a:solidFill>
+            <a:srgbClr val="FFFFFF"/>
+          </a:solidFill>
+          <a:ln w="12700">
+            <a:solidFill>
+              <a:srgbClr val="0D9488"/>
+            </a:solidFill>
+            <a:prstDash val="solid"/>
+          </a:ln>
+        </p:spPr>
+      </p:sp>
+      <p:sp>
+        <p:nvSpPr>
+          <p:cNvPr id="29" name="Text 27"/>
+          <p:cNvSpPr/>
+          <p:nvPr/>
+        </p:nvSpPr>
+        <p:spPr>
+          <a:xfrm>
+            <a:off x="5742432" y="3364992"/>
+            <a:ext cx="1645920" cy="475488"/>
+          </a:xfrm>
+          <a:prstGeom prst="rect">
+            <a:avLst/>
+          </a:prstGeom>
+          <a:noFill/>
+          <a:ln/>
+        </p:spPr>
+        <p:txBody>
+          <a:bodyPr wrap="square" lIns="0" tIns="0" rIns="0" bIns="0" rtlCol="0" anchor="ctr"/>
+          <a:lstStyle/>
+          <a:p>
+            <a:pPr algn="ctr" indent="0" marL="0">
+              <a:buNone/>
+            </a:pPr>
+            <a:r>
+              <a:rPr lang="en-US" sz="1400" b="1" dirty="0">
+                <a:solidFill>
+                  <a:srgbClr val="0D9488"/>
+                </a:solidFill>
+                <a:latin typeface="Trebuchet MS" pitchFamily="34" charset="0"/>
+                <a:ea typeface="Trebuchet MS" pitchFamily="34" charset="-122"/>
+                <a:cs typeface="Trebuchet MS" pitchFamily="34" charset="-120"/>
+              </a:rPr>
+              <a:t>ness</a:t>
+            </a:r>
+            <a:endParaRPr lang="en-US" sz="1400" dirty="0"/>
+          </a:p>
+        </p:txBody>
+      </p:sp>
+      <p:sp>
+        <p:nvSpPr>
+          <p:cNvPr id="30" name="Shape 28"/>
+          <p:cNvSpPr/>
+          <p:nvPr/>
+        </p:nvSpPr>
+        <p:spPr>
+          <a:xfrm>
+            <a:off x="365760" y="4096512"/>
+            <a:ext cx="1371600" cy="804672"/>
+          </a:xfrm>
+          <a:prstGeom prst="rect">
+            <a:avLst>
+              <a:gd name="adj" fmla="val 6818"/>
+            </a:avLst>
+          </a:prstGeom>
+          <a:solidFill>
+            <a:srgbClr val="E2E8F0"/>
+          </a:solidFill>
+          <a:ln w="12700">
+            <a:solidFill>
+              <a:srgbClr val="E2E8F0"/>
+            </a:solidFill>
+            <a:prstDash val="solid"/>
+          </a:ln>
+        </p:spPr>
+      </p:sp>
+      <p:sp>
+        <p:nvSpPr>
+          <p:cNvPr id="31" name="Text 29"/>
+          <p:cNvSpPr/>
+          <p:nvPr/>
+        </p:nvSpPr>
+        <p:spPr>
+          <a:xfrm>
+            <a:off x="365760" y="4096512"/>
+            <a:ext cx="1371600" cy="804672"/>
+          </a:xfrm>
+          <a:prstGeom prst="rect">
+            <a:avLst/>
+          </a:prstGeom>
+          <a:noFill/>
+          <a:ln/>
+        </p:spPr>
+        <p:txBody>
+          <a:bodyPr wrap="square" lIns="0" tIns="0" rIns="0" bIns="0" rtlCol="0" anchor="ctr"/>
+          <a:lstStyle/>
+          <a:p>
+            <a:pPr algn="ctr" indent="0" marL="0">
+              <a:buNone/>
+            </a:pPr>
+            <a:r>
+              <a:rPr lang="en-US" sz="1100" b="1" dirty="0">
+                <a:solidFill>
+                  <a:srgbClr val="475569"/>
+                </a:solidFill>
+                <a:latin typeface="Trebuchet MS" pitchFamily="34" charset="0"/>
+                <a:ea typeface="Trebuchet MS" pitchFamily="34" charset="-122"/>
+                <a:cs typeface="Trebuchet MS" pitchFamily="34" charset="-120"/>
+              </a:rPr>
+              <a:t>Phonemes</a:t>
             </a:r>
             <a:endParaRPr lang="en-US" sz="1100" dirty="0"/>
           </a:p>
@@ -27026,13 +27356,13 @@
       </p:sp>
       <p:sp>
         <p:nvSpPr>
-          <p:cNvPr id="27" name="Shape 25"/>
-          <p:cNvSpPr/>
-          <p:nvPr/>
-        </p:nvSpPr>
-        <p:spPr>
-          <a:xfrm>
-            <a:off x="1874520" y="3273552"/>
+          <p:cNvPr id="32" name="Shape 30"/>
+          <p:cNvSpPr/>
+          <p:nvPr/>
+        </p:nvSpPr>
+        <p:spPr>
+          <a:xfrm>
+            <a:off x="1874520" y="4096512"/>
             <a:ext cx="6903720" cy="658368"/>
           </a:xfrm>
           <a:prstGeom prst="rect">
@@ -27041,30 +27371,30 @@
             </a:avLst>
           </a:prstGeom>
           <a:solidFill>
-            <a:srgbClr val="CCFBF1"/>
-          </a:solidFill>
-          <a:ln w="12700">
-            <a:solidFill>
-              <a:srgbClr val="0D9488"/>
-            </a:solidFill>
-            <a:prstDash val="solid"/>
-          </a:ln>
-        </p:spPr>
-      </p:sp>
-      <p:sp>
-        <p:nvSpPr>
-          <p:cNvPr id="28" name="Shape 26"/>
-          <p:cNvSpPr/>
-          <p:nvPr/>
-        </p:nvSpPr>
-        <p:spPr>
-          <a:xfrm>
-            <a:off x="2999232" y="3364992"/>
-            <a:ext cx="1645920" cy="475488"/>
+            <a:srgbClr val="FCE7F3"/>
+          </a:solidFill>
+          <a:ln w="12700">
+            <a:solidFill>
+              <a:srgbClr val="DB2777"/>
+            </a:solidFill>
+            <a:prstDash val="solid"/>
+          </a:ln>
+        </p:spPr>
+      </p:sp>
+      <p:sp>
+        <p:nvSpPr>
+          <p:cNvPr id="33" name="Shape 31"/>
+          <p:cNvSpPr/>
+          <p:nvPr/>
+        </p:nvSpPr>
+        <p:spPr>
+          <a:xfrm>
+            <a:off x="2124837" y="4169664"/>
+            <a:ext cx="685800" cy="475488"/>
           </a:xfrm>
           <a:prstGeom prst="rect">
             <a:avLst>
-              <a:gd name="adj" fmla="val 9615"/>
+              <a:gd name="adj" fmla="val 7692"/>
             </a:avLst>
           </a:prstGeom>
           <a:solidFill>
@@ -27072,22 +27402,22 @@
           </a:solidFill>
           <a:ln w="12700">
             <a:solidFill>
-              <a:srgbClr val="0D9488"/>
-            </a:solidFill>
-            <a:prstDash val="solid"/>
-          </a:ln>
-        </p:spPr>
-      </p:sp>
-      <p:sp>
-        <p:nvSpPr>
-          <p:cNvPr id="29" name="Text 27"/>
-          <p:cNvSpPr/>
-          <p:nvPr/>
-        </p:nvSpPr>
-        <p:spPr>
-          <a:xfrm>
-            <a:off x="2999232" y="3364992"/>
-            <a:ext cx="1645920" cy="475488"/>
+              <a:srgbClr val="DB2777"/>
+            </a:solidFill>
+            <a:prstDash val="solid"/>
+          </a:ln>
+        </p:spPr>
+      </p:sp>
+      <p:sp>
+        <p:nvSpPr>
+          <p:cNvPr id="34" name="Text 32"/>
+          <p:cNvSpPr/>
+          <p:nvPr/>
+        </p:nvSpPr>
+        <p:spPr>
+          <a:xfrm>
+            <a:off x="2124837" y="4169664"/>
+            <a:ext cx="685800" cy="475488"/>
           </a:xfrm>
           <a:prstGeom prst="rect">
             <a:avLst/>
@@ -27103,30 +27433,57 @@
               <a:buNone/>
             </a:pPr>
             <a:r>
-              <a:rPr lang="en-US" sz="1400" b="1" dirty="0">
-                <a:solidFill>
-                  <a:srgbClr val="0D9488"/>
+              <a:rPr lang="en-US" sz="900" b="1" dirty="0">
+                <a:solidFill>
+                  <a:srgbClr val="9D174D"/>
                 </a:solidFill>
                 <a:latin typeface="Trebuchet MS" pitchFamily="34" charset="0"/>
                 <a:ea typeface="Trebuchet MS" pitchFamily="34" charset="-122"/>
                 <a:cs typeface="Trebuchet MS" pitchFamily="34" charset="-120"/>
               </a:rPr>
-              <a:t>sharp</a:t>
-            </a:r>
-            <a:endParaRPr lang="en-US" sz="1400" dirty="0"/>
-          </a:p>
-        </p:txBody>
-      </p:sp>
-      <p:sp>
-        <p:nvSpPr>
-          <p:cNvPr id="30" name="Text 28"/>
-          <p:cNvSpPr/>
-          <p:nvPr/>
-        </p:nvSpPr>
-        <p:spPr>
-          <a:xfrm>
-            <a:off x="4645152" y="3364992"/>
-            <a:ext cx="1097280" cy="475488"/>
+              <a:t>sh</a:t>
+            </a:r>
+            <a:endParaRPr lang="en-US" sz="900" dirty="0"/>
+          </a:p>
+        </p:txBody>
+      </p:sp>
+      <p:sp>
+        <p:nvSpPr>
+          <p:cNvPr id="35" name="Shape 33"/>
+          <p:cNvSpPr/>
+          <p:nvPr/>
+        </p:nvSpPr>
+        <p:spPr>
+          <a:xfrm>
+            <a:off x="3033522" y="4169664"/>
+            <a:ext cx="685800" cy="475488"/>
+          </a:xfrm>
+          <a:prstGeom prst="rect">
+            <a:avLst>
+              <a:gd name="adj" fmla="val 7692"/>
+            </a:avLst>
+          </a:prstGeom>
+          <a:solidFill>
+            <a:srgbClr val="FFFFFF"/>
+          </a:solidFill>
+          <a:ln w="12700">
+            <a:solidFill>
+              <a:srgbClr val="DB2777"/>
+            </a:solidFill>
+            <a:prstDash val="solid"/>
+          </a:ln>
+        </p:spPr>
+      </p:sp>
+      <p:sp>
+        <p:nvSpPr>
+          <p:cNvPr id="36" name="Text 34"/>
+          <p:cNvSpPr/>
+          <p:nvPr/>
+        </p:nvSpPr>
+        <p:spPr>
+          <a:xfrm>
+            <a:off x="3033522" y="4169664"/>
+            <a:ext cx="685800" cy="475488"/>
           </a:xfrm>
           <a:prstGeom prst="rect">
             <a:avLst/>
@@ -27142,34 +27499,34 @@
               <a:buNone/>
             </a:pPr>
             <a:r>
-              <a:rPr lang="en-US" sz="1600" b="1" dirty="0">
-                <a:solidFill>
-                  <a:srgbClr val="0D9488"/>
+              <a:rPr lang="en-US" sz="900" b="1" dirty="0">
+                <a:solidFill>
+                  <a:srgbClr val="9D174D"/>
                 </a:solidFill>
                 <a:latin typeface="Trebuchet MS" pitchFamily="34" charset="0"/>
                 <a:ea typeface="Trebuchet MS" pitchFamily="34" charset="-122"/>
                 <a:cs typeface="Trebuchet MS" pitchFamily="34" charset="-120"/>
               </a:rPr>
-              <a:t>·</a:t>
-            </a:r>
-            <a:endParaRPr lang="en-US" sz="1600" dirty="0"/>
-          </a:p>
-        </p:txBody>
-      </p:sp>
-      <p:sp>
-        <p:nvSpPr>
-          <p:cNvPr id="31" name="Shape 29"/>
-          <p:cNvSpPr/>
-          <p:nvPr/>
-        </p:nvSpPr>
-        <p:spPr>
-          <a:xfrm>
-            <a:off x="5742432" y="3364992"/>
-            <a:ext cx="1645920" cy="475488"/>
+              <a:t>ar</a:t>
+            </a:r>
+            <a:endParaRPr lang="en-US" sz="900" dirty="0"/>
+          </a:p>
+        </p:txBody>
+      </p:sp>
+      <p:sp>
+        <p:nvSpPr>
+          <p:cNvPr id="37" name="Shape 35"/>
+          <p:cNvSpPr/>
+          <p:nvPr/>
+        </p:nvSpPr>
+        <p:spPr>
+          <a:xfrm>
+            <a:off x="3942207" y="4169664"/>
+            <a:ext cx="685800" cy="475488"/>
           </a:xfrm>
           <a:prstGeom prst="rect">
             <a:avLst>
-              <a:gd name="adj" fmla="val 9615"/>
+              <a:gd name="adj" fmla="val 7692"/>
             </a:avLst>
           </a:prstGeom>
           <a:solidFill>
@@ -27177,22 +27534,22 @@
           </a:solidFill>
           <a:ln w="12700">
             <a:solidFill>
-              <a:srgbClr val="0D9488"/>
-            </a:solidFill>
-            <a:prstDash val="solid"/>
-          </a:ln>
-        </p:spPr>
-      </p:sp>
-      <p:sp>
-        <p:nvSpPr>
-          <p:cNvPr id="32" name="Text 30"/>
-          <p:cNvSpPr/>
-          <p:nvPr/>
-        </p:nvSpPr>
-        <p:spPr>
-          <a:xfrm>
-            <a:off x="5742432" y="3364992"/>
-            <a:ext cx="1645920" cy="475488"/>
+              <a:srgbClr val="DB2777"/>
+            </a:solidFill>
+            <a:prstDash val="solid"/>
+          </a:ln>
+        </p:spPr>
+      </p:sp>
+      <p:sp>
+        <p:nvSpPr>
+          <p:cNvPr id="38" name="Text 36"/>
+          <p:cNvSpPr/>
+          <p:nvPr/>
+        </p:nvSpPr>
+        <p:spPr>
+          <a:xfrm>
+            <a:off x="3942207" y="4169664"/>
+            <a:ext cx="685800" cy="475488"/>
           </a:xfrm>
           <a:prstGeom prst="rect">
             <a:avLst/>
@@ -27208,57 +27565,57 @@
               <a:buNone/>
             </a:pPr>
             <a:r>
-              <a:rPr lang="en-US" sz="1400" b="1" dirty="0">
-                <a:solidFill>
-                  <a:srgbClr val="0D9488"/>
+              <a:rPr lang="en-US" sz="900" b="1" dirty="0">
+                <a:solidFill>
+                  <a:srgbClr val="9D174D"/>
                 </a:solidFill>
                 <a:latin typeface="Trebuchet MS" pitchFamily="34" charset="0"/>
                 <a:ea typeface="Trebuchet MS" pitchFamily="34" charset="-122"/>
                 <a:cs typeface="Trebuchet MS" pitchFamily="34" charset="-120"/>
               </a:rPr>
-              <a:t>ened</a:t>
-            </a:r>
-            <a:endParaRPr lang="en-US" sz="1400" dirty="0"/>
-          </a:p>
-        </p:txBody>
-      </p:sp>
-      <p:sp>
-        <p:nvSpPr>
-          <p:cNvPr id="33" name="Shape 31"/>
-          <p:cNvSpPr/>
-          <p:nvPr/>
-        </p:nvSpPr>
-        <p:spPr>
-          <a:xfrm>
-            <a:off x="365760" y="4096512"/>
-            <a:ext cx="1371600" cy="804672"/>
+              <a:t>p</a:t>
+            </a:r>
+            <a:endParaRPr lang="en-US" sz="900" dirty="0"/>
+          </a:p>
+        </p:txBody>
+      </p:sp>
+      <p:sp>
+        <p:nvSpPr>
+          <p:cNvPr id="39" name="Shape 37"/>
+          <p:cNvSpPr/>
+          <p:nvPr/>
+        </p:nvSpPr>
+        <p:spPr>
+          <a:xfrm>
+            <a:off x="4850892" y="4169664"/>
+            <a:ext cx="685800" cy="475488"/>
           </a:xfrm>
           <a:prstGeom prst="rect">
             <a:avLst>
-              <a:gd name="adj" fmla="val 6818"/>
+              <a:gd name="adj" fmla="val 7692"/>
             </a:avLst>
           </a:prstGeom>
           <a:solidFill>
-            <a:srgbClr val="E2E8F0"/>
-          </a:solidFill>
-          <a:ln w="12700">
-            <a:solidFill>
-              <a:srgbClr val="E2E8F0"/>
-            </a:solidFill>
-            <a:prstDash val="solid"/>
-          </a:ln>
-        </p:spPr>
-      </p:sp>
-      <p:sp>
-        <p:nvSpPr>
-          <p:cNvPr id="34" name="Text 32"/>
-          <p:cNvSpPr/>
-          <p:nvPr/>
-        </p:nvSpPr>
-        <p:spPr>
-          <a:xfrm>
-            <a:off x="365760" y="4096512"/>
-            <a:ext cx="1371600" cy="804672"/>
+            <a:srgbClr val="FFFFFF"/>
+          </a:solidFill>
+          <a:ln w="12700">
+            <a:solidFill>
+              <a:srgbClr val="DB2777"/>
+            </a:solidFill>
+            <a:prstDash val="solid"/>
+          </a:ln>
+        </p:spPr>
+      </p:sp>
+      <p:sp>
+        <p:nvSpPr>
+          <p:cNvPr id="40" name="Text 38"/>
+          <p:cNvSpPr/>
+          <p:nvPr/>
+        </p:nvSpPr>
+        <p:spPr>
+          <a:xfrm>
+            <a:off x="4850892" y="4169664"/>
+            <a:ext cx="685800" cy="475488"/>
           </a:xfrm>
           <a:prstGeom prst="rect">
             <a:avLst/>
@@ -27274,56 +27631,29 @@
               <a:buNone/>
             </a:pPr>
             <a:r>
-              <a:rPr lang="en-US" sz="1100" b="1" dirty="0">
-                <a:solidFill>
-                  <a:srgbClr val="475569"/>
+              <a:rPr lang="en-US" sz="900" b="1" dirty="0">
+                <a:solidFill>
+                  <a:srgbClr val="9D174D"/>
                 </a:solidFill>
                 <a:latin typeface="Trebuchet MS" pitchFamily="34" charset="0"/>
                 <a:ea typeface="Trebuchet MS" pitchFamily="34" charset="-122"/>
                 <a:cs typeface="Trebuchet MS" pitchFamily="34" charset="-120"/>
               </a:rPr>
-              <a:t>Phonemes</a:t>
-            </a:r>
-            <a:endParaRPr lang="en-US" sz="1100" dirty="0"/>
-          </a:p>
-        </p:txBody>
-      </p:sp>
-      <p:sp>
-        <p:nvSpPr>
-          <p:cNvPr id="35" name="Shape 33"/>
-          <p:cNvSpPr/>
-          <p:nvPr/>
-        </p:nvSpPr>
-        <p:spPr>
-          <a:xfrm>
-            <a:off x="1874520" y="4096512"/>
-            <a:ext cx="6903720" cy="658368"/>
-          </a:xfrm>
-          <a:prstGeom prst="rect">
-            <a:avLst>
-              <a:gd name="adj" fmla="val 8333"/>
-            </a:avLst>
-          </a:prstGeom>
-          <a:solidFill>
-            <a:srgbClr val="FCE7F3"/>
-          </a:solidFill>
-          <a:ln w="12700">
-            <a:solidFill>
-              <a:srgbClr val="DB2777"/>
-            </a:solidFill>
-            <a:prstDash val="solid"/>
-          </a:ln>
-        </p:spPr>
-      </p:sp>
-      <p:sp>
-        <p:nvSpPr>
-          <p:cNvPr id="36" name="Shape 34"/>
-          <p:cNvSpPr/>
-          <p:nvPr/>
-        </p:nvSpPr>
-        <p:spPr>
-          <a:xfrm>
-            <a:off x="2254649" y="4169664"/>
+              <a:t>n</a:t>
+            </a:r>
+            <a:endParaRPr lang="en-US" sz="900" dirty="0"/>
+          </a:p>
+        </p:txBody>
+      </p:sp>
+      <p:sp>
+        <p:nvSpPr>
+          <p:cNvPr id="41" name="Shape 39"/>
+          <p:cNvSpPr/>
+          <p:nvPr/>
+        </p:nvSpPr>
+        <p:spPr>
+          <a:xfrm>
+            <a:off x="5759577" y="4169664"/>
             <a:ext cx="685800" cy="475488"/>
           </a:xfrm>
           <a:prstGeom prst="rect">
@@ -27344,13 +27674,13 @@
       </p:sp>
       <p:sp>
         <p:nvSpPr>
-          <p:cNvPr id="37" name="Text 35"/>
-          <p:cNvSpPr/>
-          <p:nvPr/>
-        </p:nvSpPr>
-        <p:spPr>
-          <a:xfrm>
-            <a:off x="2254649" y="4169664"/>
+          <p:cNvPr id="42" name="Text 40"/>
+          <p:cNvSpPr/>
+          <p:nvPr/>
+        </p:nvSpPr>
+        <p:spPr>
+          <a:xfrm>
+            <a:off x="5759577" y="4169664"/>
             <a:ext cx="685800" cy="475488"/>
           </a:xfrm>
           <a:prstGeom prst="rect">
@@ -27375,7 +27705,7 @@
                 <a:ea typeface="Trebuchet MS" pitchFamily="34" charset="-122"/>
                 <a:cs typeface="Trebuchet MS" pitchFamily="34" charset="-120"/>
               </a:rPr>
-              <a:t>sh</a:t>
+              <a:t>e</a:t>
             </a:r>
             <a:endParaRPr lang="en-US" sz="900" dirty="0"/>
           </a:p>
@@ -27383,13 +27713,13 @@
       </p:sp>
       <p:sp>
         <p:nvSpPr>
-          <p:cNvPr id="38" name="Shape 36"/>
-          <p:cNvSpPr/>
-          <p:nvPr/>
-        </p:nvSpPr>
-        <p:spPr>
-          <a:xfrm>
-            <a:off x="3293146" y="4169664"/>
+          <p:cNvPr id="43" name="Shape 41"/>
+          <p:cNvSpPr/>
+          <p:nvPr/>
+        </p:nvSpPr>
+        <p:spPr>
+          <a:xfrm>
+            <a:off x="6668262" y="4169664"/>
             <a:ext cx="685800" cy="475488"/>
           </a:xfrm>
           <a:prstGeom prst="rect">
@@ -27410,13 +27740,13 @@
       </p:sp>
       <p:sp>
         <p:nvSpPr>
-          <p:cNvPr id="39" name="Text 37"/>
-          <p:cNvSpPr/>
-          <p:nvPr/>
-        </p:nvSpPr>
-        <p:spPr>
-          <a:xfrm>
-            <a:off x="3293146" y="4169664"/>
+          <p:cNvPr id="44" name="Text 42"/>
+          <p:cNvSpPr/>
+          <p:nvPr/>
+        </p:nvSpPr>
+        <p:spPr>
+          <a:xfrm>
+            <a:off x="6668262" y="4169664"/>
             <a:ext cx="685800" cy="475488"/>
           </a:xfrm>
           <a:prstGeom prst="rect">
@@ -27441,7 +27771,7 @@
                 <a:ea typeface="Trebuchet MS" pitchFamily="34" charset="-122"/>
                 <a:cs typeface="Trebuchet MS" pitchFamily="34" charset="-120"/>
               </a:rPr>
-              <a:t>ar</a:t>
+              <a:t>s</a:t>
             </a:r>
             <a:endParaRPr lang="en-US" sz="900" dirty="0"/>
           </a:p>
@@ -27449,13 +27779,13 @@
       </p:sp>
       <p:sp>
         <p:nvSpPr>
-          <p:cNvPr id="40" name="Shape 38"/>
-          <p:cNvSpPr/>
-          <p:nvPr/>
-        </p:nvSpPr>
-        <p:spPr>
-          <a:xfrm>
-            <a:off x="4331643" y="4169664"/>
+          <p:cNvPr id="45" name="Shape 43"/>
+          <p:cNvSpPr/>
+          <p:nvPr/>
+        </p:nvSpPr>
+        <p:spPr>
+          <a:xfrm>
+            <a:off x="7576947" y="4169664"/>
             <a:ext cx="685800" cy="475488"/>
           </a:xfrm>
           <a:prstGeom prst="rect">
@@ -27476,13 +27806,13 @@
       </p:sp>
       <p:sp>
         <p:nvSpPr>
-          <p:cNvPr id="41" name="Text 39"/>
-          <p:cNvSpPr/>
-          <p:nvPr/>
-        </p:nvSpPr>
-        <p:spPr>
-          <a:xfrm>
-            <a:off x="4331643" y="4169664"/>
+          <p:cNvPr id="46" name="Text 44"/>
+          <p:cNvSpPr/>
+          <p:nvPr/>
+        </p:nvSpPr>
+        <p:spPr>
+          <a:xfrm>
+            <a:off x="7576947" y="4169664"/>
             <a:ext cx="685800" cy="475488"/>
           </a:xfrm>
           <a:prstGeom prst="rect">
@@ -27507,205 +27837,7 @@
                 <a:ea typeface="Trebuchet MS" pitchFamily="34" charset="-122"/>
                 <a:cs typeface="Trebuchet MS" pitchFamily="34" charset="-120"/>
               </a:rPr>
-              <a:t>p</a:t>
-            </a:r>
-            <a:endParaRPr lang="en-US" sz="900" dirty="0"/>
-          </a:p>
-        </p:txBody>
-      </p:sp>
-      <p:sp>
-        <p:nvSpPr>
-          <p:cNvPr id="42" name="Shape 40"/>
-          <p:cNvSpPr/>
-          <p:nvPr/>
-        </p:nvSpPr>
-        <p:spPr>
-          <a:xfrm>
-            <a:off x="5370141" y="4169664"/>
-            <a:ext cx="685800" cy="475488"/>
-          </a:xfrm>
-          <a:prstGeom prst="rect">
-            <a:avLst>
-              <a:gd name="adj" fmla="val 7692"/>
-            </a:avLst>
-          </a:prstGeom>
-          <a:solidFill>
-            <a:srgbClr val="FFFFFF"/>
-          </a:solidFill>
-          <a:ln w="12700">
-            <a:solidFill>
-              <a:srgbClr val="DB2777"/>
-            </a:solidFill>
-            <a:prstDash val="solid"/>
-          </a:ln>
-        </p:spPr>
-      </p:sp>
-      <p:sp>
-        <p:nvSpPr>
-          <p:cNvPr id="43" name="Text 41"/>
-          <p:cNvSpPr/>
-          <p:nvPr/>
-        </p:nvSpPr>
-        <p:spPr>
-          <a:xfrm>
-            <a:off x="5370141" y="4169664"/>
-            <a:ext cx="685800" cy="475488"/>
-          </a:xfrm>
-          <a:prstGeom prst="rect">
-            <a:avLst/>
-          </a:prstGeom>
-          <a:noFill/>
-          <a:ln/>
-        </p:spPr>
-        <p:txBody>
-          <a:bodyPr wrap="square" lIns="0" tIns="0" rIns="0" bIns="0" rtlCol="0" anchor="ctr"/>
-          <a:lstStyle/>
-          <a:p>
-            <a:pPr algn="ctr" indent="0" marL="0">
-              <a:buNone/>
-            </a:pPr>
-            <a:r>
-              <a:rPr lang="en-US" sz="900" b="1" dirty="0">
-                <a:solidFill>
-                  <a:srgbClr val="9D174D"/>
-                </a:solidFill>
-                <a:latin typeface="Trebuchet MS" pitchFamily="34" charset="0"/>
-                <a:ea typeface="Trebuchet MS" pitchFamily="34" charset="-122"/>
-                <a:cs typeface="Trebuchet MS" pitchFamily="34" charset="-120"/>
-              </a:rPr>
-              <a:t>e</a:t>
-            </a:r>
-            <a:endParaRPr lang="en-US" sz="900" dirty="0"/>
-          </a:p>
-        </p:txBody>
-      </p:sp>
-      <p:sp>
-        <p:nvSpPr>
-          <p:cNvPr id="44" name="Shape 42"/>
-          <p:cNvSpPr/>
-          <p:nvPr/>
-        </p:nvSpPr>
-        <p:spPr>
-          <a:xfrm>
-            <a:off x="6408638" y="4169664"/>
-            <a:ext cx="685800" cy="475488"/>
-          </a:xfrm>
-          <a:prstGeom prst="rect">
-            <a:avLst>
-              <a:gd name="adj" fmla="val 7692"/>
-            </a:avLst>
-          </a:prstGeom>
-          <a:solidFill>
-            <a:srgbClr val="FFFFFF"/>
-          </a:solidFill>
-          <a:ln w="12700">
-            <a:solidFill>
-              <a:srgbClr val="DB2777"/>
-            </a:solidFill>
-            <a:prstDash val="solid"/>
-          </a:ln>
-        </p:spPr>
-      </p:sp>
-      <p:sp>
-        <p:nvSpPr>
-          <p:cNvPr id="45" name="Text 43"/>
-          <p:cNvSpPr/>
-          <p:nvPr/>
-        </p:nvSpPr>
-        <p:spPr>
-          <a:xfrm>
-            <a:off x="6408638" y="4169664"/>
-            <a:ext cx="685800" cy="475488"/>
-          </a:xfrm>
-          <a:prstGeom prst="rect">
-            <a:avLst/>
-          </a:prstGeom>
-          <a:noFill/>
-          <a:ln/>
-        </p:spPr>
-        <p:txBody>
-          <a:bodyPr wrap="square" lIns="0" tIns="0" rIns="0" bIns="0" rtlCol="0" anchor="ctr"/>
-          <a:lstStyle/>
-          <a:p>
-            <a:pPr algn="ctr" indent="0" marL="0">
-              <a:buNone/>
-            </a:pPr>
-            <a:r>
-              <a:rPr lang="en-US" sz="900" b="1" dirty="0">
-                <a:solidFill>
-                  <a:srgbClr val="9D174D"/>
-                </a:solidFill>
-                <a:latin typeface="Trebuchet MS" pitchFamily="34" charset="0"/>
-                <a:ea typeface="Trebuchet MS" pitchFamily="34" charset="-122"/>
-                <a:cs typeface="Trebuchet MS" pitchFamily="34" charset="-120"/>
-              </a:rPr>
-              <a:t>n</a:t>
-            </a:r>
-            <a:endParaRPr lang="en-US" sz="900" dirty="0"/>
-          </a:p>
-        </p:txBody>
-      </p:sp>
-      <p:sp>
-        <p:nvSpPr>
-          <p:cNvPr id="46" name="Shape 44"/>
-          <p:cNvSpPr/>
-          <p:nvPr/>
-        </p:nvSpPr>
-        <p:spPr>
-          <a:xfrm>
-            <a:off x="7447135" y="4169664"/>
-            <a:ext cx="685800" cy="475488"/>
-          </a:xfrm>
-          <a:prstGeom prst="rect">
-            <a:avLst>
-              <a:gd name="adj" fmla="val 7692"/>
-            </a:avLst>
-          </a:prstGeom>
-          <a:solidFill>
-            <a:srgbClr val="FFFFFF"/>
-          </a:solidFill>
-          <a:ln w="12700">
-            <a:solidFill>
-              <a:srgbClr val="DB2777"/>
-            </a:solidFill>
-            <a:prstDash val="solid"/>
-          </a:ln>
-        </p:spPr>
-      </p:sp>
-      <p:sp>
-        <p:nvSpPr>
-          <p:cNvPr id="47" name="Text 45"/>
-          <p:cNvSpPr/>
-          <p:nvPr/>
-        </p:nvSpPr>
-        <p:spPr>
-          <a:xfrm>
-            <a:off x="7447135" y="4169664"/>
-            <a:ext cx="685800" cy="475488"/>
-          </a:xfrm>
-          <a:prstGeom prst="rect">
-            <a:avLst/>
-          </a:prstGeom>
-          <a:noFill/>
-          <a:ln/>
-        </p:spPr>
-        <p:txBody>
-          <a:bodyPr wrap="square" lIns="0" tIns="0" rIns="0" bIns="0" rtlCol="0" anchor="ctr"/>
-          <a:lstStyle/>
-          <a:p>
-            <a:pPr algn="ctr" indent="0" marL="0">
-              <a:buNone/>
-            </a:pPr>
-            <a:r>
-              <a:rPr lang="en-US" sz="900" b="1" dirty="0">
-                <a:solidFill>
-                  <a:srgbClr val="9D174D"/>
-                </a:solidFill>
-                <a:latin typeface="Trebuchet MS" pitchFamily="34" charset="0"/>
-                <a:ea typeface="Trebuchet MS" pitchFamily="34" charset="-122"/>
-                <a:cs typeface="Trebuchet MS" pitchFamily="34" charset="-120"/>
-              </a:rPr>
-              <a:t>ed</a:t>
+              <a:t>s</a:t>
             </a:r>
             <a:endParaRPr lang="en-US" sz="900" dirty="0"/>
           </a:p>
@@ -27997,7 +28129,7 @@
                 <a:ea typeface="Calibri" pitchFamily="34" charset="-122"/>
                 <a:cs typeface="Calibri" pitchFamily="34" charset="-120"/>
               </a:rPr>
-              <a:t>Word Labs  •  wordlabs.app  •  Root: 'sharp' = having a fine cutting edge</a:t>
+              <a:t>Word Labs  •  wordlabs.app  •  Root: 'sharp' = having a fine edge or point</a:t>
             </a:r>
             <a:endParaRPr lang="en-US" sz="800" dirty="0"/>
           </a:p>
@@ -28136,7 +28268,7 @@
                 <a:ea typeface="Trebuchet MS" pitchFamily="34" charset="-122"/>
                 <a:cs typeface="Trebuchet MS" pitchFamily="34" charset="-120"/>
               </a:rPr>
-              <a:t>sharpest</a:t>
+              <a:t>sharpening</a:t>
             </a:r>
             <a:endParaRPr lang="en-US" sz="2800" dirty="0"/>
           </a:p>
@@ -28824,7 +28956,7 @@
                 <a:ea typeface="Calibri" pitchFamily="34" charset="-122"/>
                 <a:cs typeface="Calibri" pitchFamily="34" charset="-120"/>
               </a:rPr>
-              <a:t>Word Labs  •  wordlabs.app  •  Root: 'sharp' = having a fine cutting edge</a:t>
+              <a:t>Word Labs  •  wordlabs.app  •  Root: 'sharp' = having a fine edge or point</a:t>
             </a:r>
             <a:endParaRPr lang="en-US" sz="800" dirty="0"/>
           </a:p>
@@ -28963,7 +29095,7 @@
                 <a:ea typeface="Trebuchet MS" pitchFamily="34" charset="-122"/>
                 <a:cs typeface="Trebuchet MS" pitchFamily="34" charset="-120"/>
               </a:rPr>
-              <a:t>sharpest</a:t>
+              <a:t>sharpening</a:t>
             </a:r>
             <a:endParaRPr lang="en-US" sz="2800" dirty="0"/>
           </a:p>
@@ -29043,7 +29175,7 @@
         </p:nvSpPr>
         <p:spPr>
           <a:xfrm>
-            <a:off x="2938272" y="2258568"/>
+            <a:off x="2221992" y="2258568"/>
             <a:ext cx="1828800" cy="292608"/>
           </a:xfrm>
           <a:prstGeom prst="rect">
@@ -29077,7 +29209,7 @@
         </p:nvSpPr>
         <p:spPr>
           <a:xfrm>
-            <a:off x="2938272" y="2258568"/>
+            <a:off x="2221992" y="2258568"/>
             <a:ext cx="1828800" cy="292608"/>
           </a:xfrm>
           <a:prstGeom prst="rect">
@@ -29116,7 +29248,7 @@
         </p:nvSpPr>
         <p:spPr>
           <a:xfrm>
-            <a:off x="2938272" y="2569464"/>
+            <a:off x="2221992" y="2569464"/>
             <a:ext cx="1828800" cy="201168"/>
           </a:xfrm>
           <a:prstGeom prst="rect">
@@ -29141,7 +29273,7 @@
                 <a:ea typeface="Calibri" pitchFamily="34" charset="-122"/>
                 <a:cs typeface="Calibri" pitchFamily="34" charset="-120"/>
               </a:rPr>
-              <a:t>having a fine cutting edge</a:t>
+              <a:t>having a fine edge or point</a:t>
             </a:r>
             <a:endParaRPr lang="en-US" sz="850" dirty="0"/>
           </a:p>
@@ -29155,7 +29287,7 @@
         </p:nvSpPr>
         <p:spPr>
           <a:xfrm>
-            <a:off x="5803392" y="2258568"/>
+            <a:off x="4370832" y="2258568"/>
             <a:ext cx="1828800" cy="292608"/>
           </a:xfrm>
           <a:prstGeom prst="rect">
@@ -29189,7 +29321,7 @@
         </p:nvSpPr>
         <p:spPr>
           <a:xfrm>
-            <a:off x="5803392" y="2258568"/>
+            <a:off x="4370832" y="2258568"/>
             <a:ext cx="1828800" cy="292608"/>
           </a:xfrm>
           <a:prstGeom prst="rect">
@@ -29214,7 +29346,7 @@
                 <a:ea typeface="Trebuchet MS" pitchFamily="34" charset="-122"/>
                 <a:cs typeface="Trebuchet MS" pitchFamily="34" charset="-120"/>
               </a:rPr>
-              <a:t>est</a:t>
+              <a:t>en</a:t>
             </a:r>
             <a:endParaRPr lang="en-US" sz="1300" dirty="0"/>
           </a:p>
@@ -29228,7 +29360,7 @@
         </p:nvSpPr>
         <p:spPr>
           <a:xfrm>
-            <a:off x="5803392" y="2569464"/>
+            <a:off x="4370832" y="2569464"/>
             <a:ext cx="1828800" cy="201168"/>
           </a:xfrm>
           <a:prstGeom prst="rect">
@@ -29253,7 +29385,7 @@
                 <a:ea typeface="Calibri" pitchFamily="34" charset="-122"/>
                 <a:cs typeface="Calibri" pitchFamily="34" charset="-120"/>
               </a:rPr>
-              <a:t>the most (superlative)</a:t>
+              <a:t>made of; to make</a:t>
             </a:r>
             <a:endParaRPr lang="en-US" sz="850" dirty="0"/>
           </a:p>
@@ -29262,6 +29394,118 @@
       <p:sp>
         <p:nvSpPr>
           <p:cNvPr id="22" name="Shape 20"/>
+          <p:cNvSpPr/>
+          <p:nvPr/>
+        </p:nvSpPr>
+        <p:spPr>
+          <a:xfrm>
+            <a:off x="6519672" y="2258568"/>
+            <a:ext cx="1828800" cy="292608"/>
+          </a:xfrm>
+          <a:prstGeom prst="rect">
+            <a:avLst>
+              <a:gd name="adj" fmla="val 25000"/>
+            </a:avLst>
+          </a:prstGeom>
+          <a:solidFill>
+            <a:srgbClr val="FCE7F3"/>
+          </a:solidFill>
+          <a:ln w="19050">
+            <a:solidFill>
+              <a:srgbClr val="DB2777"/>
+            </a:solidFill>
+            <a:prstDash val="solid"/>
+          </a:ln>
+          <a:effectLst>
+            <a:outerShdw sx="100000" sy="100000" kx="0" ky="0" algn="bl" rotWithShape="0" blurRad="101600" dist="38100" dir="8100000">
+              <a:srgbClr val="000000">
+                <a:alpha val="12000"/>
+              </a:srgbClr>
+            </a:outerShdw>
+          </a:effectLst>
+        </p:spPr>
+      </p:sp>
+      <p:sp>
+        <p:nvSpPr>
+          <p:cNvPr id="23" name="Text 21"/>
+          <p:cNvSpPr/>
+          <p:nvPr/>
+        </p:nvSpPr>
+        <p:spPr>
+          <a:xfrm>
+            <a:off x="6519672" y="2258568"/>
+            <a:ext cx="1828800" cy="292608"/>
+          </a:xfrm>
+          <a:prstGeom prst="rect">
+            <a:avLst/>
+          </a:prstGeom>
+          <a:noFill/>
+          <a:ln/>
+        </p:spPr>
+        <p:txBody>
+          <a:bodyPr wrap="square" lIns="0" tIns="0" rIns="0" bIns="0" rtlCol="0" anchor="ctr"/>
+          <a:lstStyle/>
+          <a:p>
+            <a:pPr algn="ctr" indent="0" marL="0">
+              <a:buNone/>
+            </a:pPr>
+            <a:r>
+              <a:rPr lang="en-US" sz="1300" b="1" dirty="0">
+                <a:solidFill>
+                  <a:srgbClr val="9D174D"/>
+                </a:solidFill>
+                <a:latin typeface="Trebuchet MS" pitchFamily="34" charset="0"/>
+                <a:ea typeface="Trebuchet MS" pitchFamily="34" charset="-122"/>
+                <a:cs typeface="Trebuchet MS" pitchFamily="34" charset="-120"/>
+              </a:rPr>
+              <a:t>ing</a:t>
+            </a:r>
+            <a:endParaRPr lang="en-US" sz="1300" dirty="0"/>
+          </a:p>
+        </p:txBody>
+      </p:sp>
+      <p:sp>
+        <p:nvSpPr>
+          <p:cNvPr id="24" name="Text 22"/>
+          <p:cNvSpPr/>
+          <p:nvPr/>
+        </p:nvSpPr>
+        <p:spPr>
+          <a:xfrm>
+            <a:off x="6519672" y="2569464"/>
+            <a:ext cx="1828800" cy="201168"/>
+          </a:xfrm>
+          <a:prstGeom prst="rect">
+            <a:avLst/>
+          </a:prstGeom>
+          <a:noFill/>
+          <a:ln/>
+        </p:spPr>
+        <p:txBody>
+          <a:bodyPr wrap="square" lIns="0" tIns="0" rIns="0" bIns="0" rtlCol="0" anchor="t"/>
+          <a:lstStyle/>
+          <a:p>
+            <a:pPr algn="ctr" indent="0" marL="0">
+              <a:buNone/>
+            </a:pPr>
+            <a:r>
+              <a:rPr lang="en-US" sz="850" dirty="0">
+                <a:solidFill>
+                  <a:srgbClr val="475569"/>
+                </a:solidFill>
+                <a:latin typeface="Calibri" pitchFamily="34" charset="0"/>
+                <a:ea typeface="Calibri" pitchFamily="34" charset="-122"/>
+                <a:cs typeface="Calibri" pitchFamily="34" charset="-120"/>
+              </a:rPr>
+              <a:t>happening now</a:t>
+            </a:r>
+            <a:endParaRPr lang="en-US" sz="850" dirty="0"/>
+          </a:p>
+        </p:txBody>
+      </p:sp>
+      <p:sp>
+        <p:nvSpPr>
+          <p:cNvPr id="25" name="Shape 23"/>
           <p:cNvSpPr/>
           <p:nvPr/>
         </p:nvSpPr>
@@ -29288,7 +29532,7 @@
       </p:sp>
       <p:sp>
         <p:nvSpPr>
-          <p:cNvPr id="23" name="Text 21"/>
+          <p:cNvPr id="26" name="Text 24"/>
           <p:cNvSpPr/>
           <p:nvPr/>
         </p:nvSpPr>
@@ -29327,7 +29571,7 @@
       </p:sp>
       <p:sp>
         <p:nvSpPr>
-          <p:cNvPr id="24" name="Shape 22"/>
+          <p:cNvPr id="27" name="Shape 25"/>
           <p:cNvSpPr/>
           <p:nvPr/>
         </p:nvSpPr>
@@ -29354,7 +29598,7 @@
       </p:sp>
       <p:sp>
         <p:nvSpPr>
-          <p:cNvPr id="25" name="Text 23"/>
+          <p:cNvPr id="28" name="Text 26"/>
           <p:cNvSpPr/>
           <p:nvPr/>
         </p:nvSpPr>
@@ -29393,7 +29637,7 @@
       </p:sp>
       <p:sp>
         <p:nvSpPr>
-          <p:cNvPr id="26" name="Shape 24"/>
+          <p:cNvPr id="29" name="Shape 27"/>
           <p:cNvSpPr/>
           <p:nvPr/>
         </p:nvSpPr>
@@ -29420,7 +29664,7 @@
       </p:sp>
       <p:sp>
         <p:nvSpPr>
-          <p:cNvPr id="27" name="Text 25"/>
+          <p:cNvPr id="30" name="Text 28"/>
           <p:cNvSpPr/>
           <p:nvPr/>
         </p:nvSpPr>
@@ -29459,7 +29703,7 @@
       </p:sp>
       <p:sp>
         <p:nvSpPr>
-          <p:cNvPr id="28" name="Shape 26"/>
+          <p:cNvPr id="31" name="Shape 29"/>
           <p:cNvSpPr/>
           <p:nvPr/>
         </p:nvSpPr>
@@ -29486,7 +29730,7 @@
       </p:sp>
       <p:sp>
         <p:nvSpPr>
-          <p:cNvPr id="29" name="Text 27"/>
+          <p:cNvPr id="32" name="Text 30"/>
           <p:cNvSpPr/>
           <p:nvPr/>
         </p:nvSpPr>
@@ -29809,7 +30053,7 @@
                 <a:ea typeface="Calibri" pitchFamily="34" charset="-122"/>
                 <a:cs typeface="Calibri" pitchFamily="34" charset="-120"/>
               </a:rPr>
-              <a:t>Word Labs  •  wordlabs.app  •  Root: 'sharp' = having a fine cutting edge</a:t>
+              <a:t>Word Labs  •  wordlabs.app  •  Root: 'sharp' = having a fine edge or point</a:t>
             </a:r>
             <a:endParaRPr lang="en-US" sz="800" dirty="0"/>
           </a:p>
@@ -29948,7 +30192,7 @@
                 <a:ea typeface="Trebuchet MS" pitchFamily="34" charset="-122"/>
                 <a:cs typeface="Trebuchet MS" pitchFamily="34" charset="-120"/>
               </a:rPr>
-              <a:t>sharpest</a:t>
+              <a:t>sharpening</a:t>
             </a:r>
             <a:endParaRPr lang="en-US" sz="2800" dirty="0"/>
           </a:p>
@@ -30028,7 +30272,7 @@
         </p:nvSpPr>
         <p:spPr>
           <a:xfrm>
-            <a:off x="2938272" y="2258568"/>
+            <a:off x="2221992" y="2258568"/>
             <a:ext cx="1828800" cy="292608"/>
           </a:xfrm>
           <a:prstGeom prst="rect">
@@ -30062,7 +30306,7 @@
         </p:nvSpPr>
         <p:spPr>
           <a:xfrm>
-            <a:off x="2938272" y="2258568"/>
+            <a:off x="2221992" y="2258568"/>
             <a:ext cx="1828800" cy="292608"/>
           </a:xfrm>
           <a:prstGeom prst="rect">
@@ -30101,7 +30345,7 @@
         </p:nvSpPr>
         <p:spPr>
           <a:xfrm>
-            <a:off x="2938272" y="2569464"/>
+            <a:off x="2221992" y="2569464"/>
             <a:ext cx="1828800" cy="201168"/>
           </a:xfrm>
           <a:prstGeom prst="rect">
@@ -30126,7 +30370,7 @@
                 <a:ea typeface="Calibri" pitchFamily="34" charset="-122"/>
                 <a:cs typeface="Calibri" pitchFamily="34" charset="-120"/>
               </a:rPr>
-              <a:t>having a fine cutting edge</a:t>
+              <a:t>having a fine edge or point</a:t>
             </a:r>
             <a:endParaRPr lang="en-US" sz="850" dirty="0"/>
           </a:p>
@@ -30140,7 +30384,7 @@
         </p:nvSpPr>
         <p:spPr>
           <a:xfrm>
-            <a:off x="5803392" y="2258568"/>
+            <a:off x="4370832" y="2258568"/>
             <a:ext cx="1828800" cy="292608"/>
           </a:xfrm>
           <a:prstGeom prst="rect">
@@ -30174,7 +30418,7 @@
         </p:nvSpPr>
         <p:spPr>
           <a:xfrm>
-            <a:off x="5803392" y="2258568"/>
+            <a:off x="4370832" y="2258568"/>
             <a:ext cx="1828800" cy="292608"/>
           </a:xfrm>
           <a:prstGeom prst="rect">
@@ -30199,7 +30443,7 @@
                 <a:ea typeface="Trebuchet MS" pitchFamily="34" charset="-122"/>
                 <a:cs typeface="Trebuchet MS" pitchFamily="34" charset="-120"/>
               </a:rPr>
-              <a:t>est</a:t>
+              <a:t>en</a:t>
             </a:r>
             <a:endParaRPr lang="en-US" sz="1300" dirty="0"/>
           </a:p>
@@ -30213,7 +30457,7 @@
         </p:nvSpPr>
         <p:spPr>
           <a:xfrm>
-            <a:off x="5803392" y="2569464"/>
+            <a:off x="4370832" y="2569464"/>
             <a:ext cx="1828800" cy="201168"/>
           </a:xfrm>
           <a:prstGeom prst="rect">
@@ -30238,7 +30482,7 @@
                 <a:ea typeface="Calibri" pitchFamily="34" charset="-122"/>
                 <a:cs typeface="Calibri" pitchFamily="34" charset="-120"/>
               </a:rPr>
-              <a:t>the most (superlative)</a:t>
+              <a:t>made of; to make</a:t>
             </a:r>
             <a:endParaRPr lang="en-US" sz="850" dirty="0"/>
           </a:p>
@@ -30247,6 +30491,118 @@
       <p:sp>
         <p:nvSpPr>
           <p:cNvPr id="22" name="Shape 20"/>
+          <p:cNvSpPr/>
+          <p:nvPr/>
+        </p:nvSpPr>
+        <p:spPr>
+          <a:xfrm>
+            <a:off x="6519672" y="2258568"/>
+            <a:ext cx="1828800" cy="292608"/>
+          </a:xfrm>
+          <a:prstGeom prst="rect">
+            <a:avLst>
+              <a:gd name="adj" fmla="val 25000"/>
+            </a:avLst>
+          </a:prstGeom>
+          <a:solidFill>
+            <a:srgbClr val="FCE7F3"/>
+          </a:solidFill>
+          <a:ln w="19050">
+            <a:solidFill>
+              <a:srgbClr val="DB2777"/>
+            </a:solidFill>
+            <a:prstDash val="solid"/>
+          </a:ln>
+          <a:effectLst>
+            <a:outerShdw sx="100000" sy="100000" kx="0" ky="0" algn="bl" rotWithShape="0" blurRad="101600" dist="38100" dir="8100000">
+              <a:srgbClr val="000000">
+                <a:alpha val="12000"/>
+              </a:srgbClr>
+            </a:outerShdw>
+          </a:effectLst>
+        </p:spPr>
+      </p:sp>
+      <p:sp>
+        <p:nvSpPr>
+          <p:cNvPr id="23" name="Text 21"/>
+          <p:cNvSpPr/>
+          <p:nvPr/>
+        </p:nvSpPr>
+        <p:spPr>
+          <a:xfrm>
+            <a:off x="6519672" y="2258568"/>
+            <a:ext cx="1828800" cy="292608"/>
+          </a:xfrm>
+          <a:prstGeom prst="rect">
+            <a:avLst/>
+          </a:prstGeom>
+          <a:noFill/>
+          <a:ln/>
+        </p:spPr>
+        <p:txBody>
+          <a:bodyPr wrap="square" lIns="0" tIns="0" rIns="0" bIns="0" rtlCol="0" anchor="ctr"/>
+          <a:lstStyle/>
+          <a:p>
+            <a:pPr algn="ctr" indent="0" marL="0">
+              <a:buNone/>
+            </a:pPr>
+            <a:r>
+              <a:rPr lang="en-US" sz="1300" b="1" dirty="0">
+                <a:solidFill>
+                  <a:srgbClr val="9D174D"/>
+                </a:solidFill>
+                <a:latin typeface="Trebuchet MS" pitchFamily="34" charset="0"/>
+                <a:ea typeface="Trebuchet MS" pitchFamily="34" charset="-122"/>
+                <a:cs typeface="Trebuchet MS" pitchFamily="34" charset="-120"/>
+              </a:rPr>
+              <a:t>ing</a:t>
+            </a:r>
+            <a:endParaRPr lang="en-US" sz="1300" dirty="0"/>
+          </a:p>
+        </p:txBody>
+      </p:sp>
+      <p:sp>
+        <p:nvSpPr>
+          <p:cNvPr id="24" name="Text 22"/>
+          <p:cNvSpPr/>
+          <p:nvPr/>
+        </p:nvSpPr>
+        <p:spPr>
+          <a:xfrm>
+            <a:off x="6519672" y="2569464"/>
+            <a:ext cx="1828800" cy="201168"/>
+          </a:xfrm>
+          <a:prstGeom prst="rect">
+            <a:avLst/>
+          </a:prstGeom>
+          <a:noFill/>
+          <a:ln/>
+        </p:spPr>
+        <p:txBody>
+          <a:bodyPr wrap="square" lIns="0" tIns="0" rIns="0" bIns="0" rtlCol="0" anchor="t"/>
+          <a:lstStyle/>
+          <a:p>
+            <a:pPr algn="ctr" indent="0" marL="0">
+              <a:buNone/>
+            </a:pPr>
+            <a:r>
+              <a:rPr lang="en-US" sz="850" dirty="0">
+                <a:solidFill>
+                  <a:srgbClr val="475569"/>
+                </a:solidFill>
+                <a:latin typeface="Calibri" pitchFamily="34" charset="0"/>
+                <a:ea typeface="Calibri" pitchFamily="34" charset="-122"/>
+                <a:cs typeface="Calibri" pitchFamily="34" charset="-120"/>
+              </a:rPr>
+              <a:t>happening now</a:t>
+            </a:r>
+            <a:endParaRPr lang="en-US" sz="850" dirty="0"/>
+          </a:p>
+        </p:txBody>
+      </p:sp>
+      <p:sp>
+        <p:nvSpPr>
+          <p:cNvPr id="25" name="Shape 23"/>
           <p:cNvSpPr/>
           <p:nvPr/>
         </p:nvSpPr>
@@ -30273,7 +30629,7 @@
       </p:sp>
       <p:sp>
         <p:nvSpPr>
-          <p:cNvPr id="23" name="Text 21"/>
+          <p:cNvPr id="26" name="Text 24"/>
           <p:cNvSpPr/>
           <p:nvPr/>
         </p:nvSpPr>
@@ -30312,7 +30668,7 @@
       </p:sp>
       <p:sp>
         <p:nvSpPr>
-          <p:cNvPr id="24" name="Shape 22"/>
+          <p:cNvPr id="27" name="Shape 25"/>
           <p:cNvSpPr/>
           <p:nvPr/>
         </p:nvSpPr>
@@ -30339,13 +30695,13 @@
       </p:sp>
       <p:sp>
         <p:nvSpPr>
-          <p:cNvPr id="25" name="Shape 23"/>
-          <p:cNvSpPr/>
-          <p:nvPr/>
-        </p:nvSpPr>
-        <p:spPr>
-          <a:xfrm>
-            <a:off x="2999232" y="3364992"/>
+          <p:cNvPr id="28" name="Shape 26"/>
+          <p:cNvSpPr/>
+          <p:nvPr/>
+        </p:nvSpPr>
+        <p:spPr>
+          <a:xfrm>
+            <a:off x="2313432" y="3364992"/>
             <a:ext cx="1645920" cy="475488"/>
           </a:xfrm>
           <a:prstGeom prst="rect">
@@ -30366,13 +30722,13 @@
       </p:sp>
       <p:sp>
         <p:nvSpPr>
-          <p:cNvPr id="26" name="Text 24"/>
-          <p:cNvSpPr/>
-          <p:nvPr/>
-        </p:nvSpPr>
-        <p:spPr>
-          <a:xfrm>
-            <a:off x="2999232" y="3364992"/>
+          <p:cNvPr id="29" name="Text 27"/>
+          <p:cNvSpPr/>
+          <p:nvPr/>
+        </p:nvSpPr>
+        <p:spPr>
+          <a:xfrm>
+            <a:off x="2313432" y="3364992"/>
             <a:ext cx="1645920" cy="475488"/>
           </a:xfrm>
           <a:prstGeom prst="rect">
@@ -30405,14 +30761,14 @@
       </p:sp>
       <p:sp>
         <p:nvSpPr>
-          <p:cNvPr id="27" name="Text 25"/>
-          <p:cNvSpPr/>
-          <p:nvPr/>
-        </p:nvSpPr>
-        <p:spPr>
-          <a:xfrm>
-            <a:off x="4645152" y="3364992"/>
-            <a:ext cx="1097280" cy="475488"/>
+          <p:cNvPr id="30" name="Text 28"/>
+          <p:cNvSpPr/>
+          <p:nvPr/>
+        </p:nvSpPr>
+        <p:spPr>
+          <a:xfrm>
+            <a:off x="3959352" y="3364992"/>
+            <a:ext cx="411480" cy="475488"/>
           </a:xfrm>
           <a:prstGeom prst="rect">
             <a:avLst/>
@@ -30444,13 +30800,13 @@
       </p:sp>
       <p:sp>
         <p:nvSpPr>
-          <p:cNvPr id="28" name="Shape 26"/>
-          <p:cNvSpPr/>
-          <p:nvPr/>
-        </p:nvSpPr>
-        <p:spPr>
-          <a:xfrm>
-            <a:off x="5742432" y="3364992"/>
+          <p:cNvPr id="31" name="Shape 29"/>
+          <p:cNvSpPr/>
+          <p:nvPr/>
+        </p:nvSpPr>
+        <p:spPr>
+          <a:xfrm>
+            <a:off x="4370832" y="3364992"/>
             <a:ext cx="1645920" cy="475488"/>
           </a:xfrm>
           <a:prstGeom prst="rect">
@@ -30471,13 +30827,13 @@
       </p:sp>
       <p:sp>
         <p:nvSpPr>
-          <p:cNvPr id="29" name="Text 27"/>
-          <p:cNvSpPr/>
-          <p:nvPr/>
-        </p:nvSpPr>
-        <p:spPr>
-          <a:xfrm>
-            <a:off x="5742432" y="3364992"/>
+          <p:cNvPr id="32" name="Text 30"/>
+          <p:cNvSpPr/>
+          <p:nvPr/>
+        </p:nvSpPr>
+        <p:spPr>
+          <a:xfrm>
+            <a:off x="4370832" y="3364992"/>
             <a:ext cx="1645920" cy="475488"/>
           </a:xfrm>
           <a:prstGeom prst="rect">
@@ -30502,7 +30858,7 @@
                 <a:ea typeface="Trebuchet MS" pitchFamily="34" charset="-122"/>
                 <a:cs typeface="Trebuchet MS" pitchFamily="34" charset="-120"/>
               </a:rPr>
-              <a:t>est</a:t>
+              <a:t>en</a:t>
             </a:r>
             <a:endParaRPr lang="en-US" sz="1400" dirty="0"/>
           </a:p>
@@ -30510,7 +30866,112 @@
       </p:sp>
       <p:sp>
         <p:nvSpPr>
-          <p:cNvPr id="30" name="Shape 28"/>
+          <p:cNvPr id="33" name="Text 31"/>
+          <p:cNvSpPr/>
+          <p:nvPr/>
+        </p:nvSpPr>
+        <p:spPr>
+          <a:xfrm>
+            <a:off x="6016752" y="3364992"/>
+            <a:ext cx="411480" cy="475488"/>
+          </a:xfrm>
+          <a:prstGeom prst="rect">
+            <a:avLst/>
+          </a:prstGeom>
+          <a:noFill/>
+          <a:ln/>
+        </p:spPr>
+        <p:txBody>
+          <a:bodyPr wrap="square" lIns="0" tIns="0" rIns="0" bIns="0" rtlCol="0" anchor="ctr"/>
+          <a:lstStyle/>
+          <a:p>
+            <a:pPr algn="ctr" indent="0" marL="0">
+              <a:buNone/>
+            </a:pPr>
+            <a:r>
+              <a:rPr lang="en-US" sz="1600" b="1" dirty="0">
+                <a:solidFill>
+                  <a:srgbClr val="0D9488"/>
+                </a:solidFill>
+                <a:latin typeface="Trebuchet MS" pitchFamily="34" charset="0"/>
+                <a:ea typeface="Trebuchet MS" pitchFamily="34" charset="-122"/>
+                <a:cs typeface="Trebuchet MS" pitchFamily="34" charset="-120"/>
+              </a:rPr>
+              <a:t>·</a:t>
+            </a:r>
+            <a:endParaRPr lang="en-US" sz="1600" dirty="0"/>
+          </a:p>
+        </p:txBody>
+      </p:sp>
+      <p:sp>
+        <p:nvSpPr>
+          <p:cNvPr id="34" name="Shape 32"/>
+          <p:cNvSpPr/>
+          <p:nvPr/>
+        </p:nvSpPr>
+        <p:spPr>
+          <a:xfrm>
+            <a:off x="6428232" y="3364992"/>
+            <a:ext cx="1645920" cy="475488"/>
+          </a:xfrm>
+          <a:prstGeom prst="rect">
+            <a:avLst>
+              <a:gd name="adj" fmla="val 9615"/>
+            </a:avLst>
+          </a:prstGeom>
+          <a:solidFill>
+            <a:srgbClr val="FFFFFF"/>
+          </a:solidFill>
+          <a:ln w="12700">
+            <a:solidFill>
+              <a:srgbClr val="0D9488"/>
+            </a:solidFill>
+            <a:prstDash val="solid"/>
+          </a:ln>
+        </p:spPr>
+      </p:sp>
+      <p:sp>
+        <p:nvSpPr>
+          <p:cNvPr id="35" name="Text 33"/>
+          <p:cNvSpPr/>
+          <p:nvPr/>
+        </p:nvSpPr>
+        <p:spPr>
+          <a:xfrm>
+            <a:off x="6428232" y="3364992"/>
+            <a:ext cx="1645920" cy="475488"/>
+          </a:xfrm>
+          <a:prstGeom prst="rect">
+            <a:avLst/>
+          </a:prstGeom>
+          <a:noFill/>
+          <a:ln/>
+        </p:spPr>
+        <p:txBody>
+          <a:bodyPr wrap="square" lIns="0" tIns="0" rIns="0" bIns="0" rtlCol="0" anchor="ctr"/>
+          <a:lstStyle/>
+          <a:p>
+            <a:pPr algn="ctr" indent="0" marL="0">
+              <a:buNone/>
+            </a:pPr>
+            <a:r>
+              <a:rPr lang="en-US" sz="1400" b="1" dirty="0">
+                <a:solidFill>
+                  <a:srgbClr val="0D9488"/>
+                </a:solidFill>
+                <a:latin typeface="Trebuchet MS" pitchFamily="34" charset="0"/>
+                <a:ea typeface="Trebuchet MS" pitchFamily="34" charset="-122"/>
+                <a:cs typeface="Trebuchet MS" pitchFamily="34" charset="-120"/>
+              </a:rPr>
+              <a:t>ing</a:t>
+            </a:r>
+            <a:endParaRPr lang="en-US" sz="1400" dirty="0"/>
+          </a:p>
+        </p:txBody>
+      </p:sp>
+      <p:sp>
+        <p:nvSpPr>
+          <p:cNvPr id="36" name="Shape 34"/>
           <p:cNvSpPr/>
           <p:nvPr/>
         </p:nvSpPr>
@@ -30537,7 +30998,7 @@
       </p:sp>
       <p:sp>
         <p:nvSpPr>
-          <p:cNvPr id="31" name="Text 29"/>
+          <p:cNvPr id="37" name="Text 35"/>
           <p:cNvSpPr/>
           <p:nvPr/>
         </p:nvSpPr>
@@ -30576,7 +31037,7 @@
       </p:sp>
       <p:sp>
         <p:nvSpPr>
-          <p:cNvPr id="32" name="Shape 30"/>
+          <p:cNvPr id="38" name="Shape 36"/>
           <p:cNvSpPr/>
           <p:nvPr/>
         </p:nvSpPr>
@@ -30603,7 +31064,7 @@
       </p:sp>
       <p:sp>
         <p:nvSpPr>
-          <p:cNvPr id="33" name="Text 31"/>
+          <p:cNvPr id="39" name="Text 37"/>
           <p:cNvSpPr/>
           <p:nvPr/>
         </p:nvSpPr>
@@ -30926,7 +31387,7 @@
                 <a:ea typeface="Calibri" pitchFamily="34" charset="-122"/>
                 <a:cs typeface="Calibri" pitchFamily="34" charset="-120"/>
               </a:rPr>
-              <a:t>Word Labs  •  wordlabs.app  •  Root: 'sharp' = having a fine cutting edge</a:t>
+              <a:t>Word Labs  •  wordlabs.app  •  Root: 'sharp' = having a fine edge or point</a:t>
             </a:r>
             <a:endParaRPr lang="en-US" sz="800" dirty="0"/>
           </a:p>
@@ -31065,7 +31526,7 @@
                 <a:ea typeface="Trebuchet MS" pitchFamily="34" charset="-122"/>
                 <a:cs typeface="Trebuchet MS" pitchFamily="34" charset="-120"/>
               </a:rPr>
-              <a:t>sharpest</a:t>
+              <a:t>sharpening</a:t>
             </a:r>
             <a:endParaRPr lang="en-US" sz="2800" dirty="0"/>
           </a:p>
@@ -31145,7 +31606,7 @@
         </p:nvSpPr>
         <p:spPr>
           <a:xfrm>
-            <a:off x="2938272" y="2258568"/>
+            <a:off x="2221992" y="2258568"/>
             <a:ext cx="1828800" cy="292608"/>
           </a:xfrm>
           <a:prstGeom prst="rect">
@@ -31179,7 +31640,7 @@
         </p:nvSpPr>
         <p:spPr>
           <a:xfrm>
-            <a:off x="2938272" y="2258568"/>
+            <a:off x="2221992" y="2258568"/>
             <a:ext cx="1828800" cy="292608"/>
           </a:xfrm>
           <a:prstGeom prst="rect">
@@ -31218,7 +31679,7 @@
         </p:nvSpPr>
         <p:spPr>
           <a:xfrm>
-            <a:off x="2938272" y="2569464"/>
+            <a:off x="2221992" y="2569464"/>
             <a:ext cx="1828800" cy="201168"/>
           </a:xfrm>
           <a:prstGeom prst="rect">
@@ -31243,7 +31704,7 @@
                 <a:ea typeface="Calibri" pitchFamily="34" charset="-122"/>
                 <a:cs typeface="Calibri" pitchFamily="34" charset="-120"/>
               </a:rPr>
-              <a:t>having a fine cutting edge</a:t>
+              <a:t>having a fine edge or point</a:t>
             </a:r>
             <a:endParaRPr lang="en-US" sz="850" dirty="0"/>
           </a:p>
@@ -31257,7 +31718,7 @@
         </p:nvSpPr>
         <p:spPr>
           <a:xfrm>
-            <a:off x="5803392" y="2258568"/>
+            <a:off x="4370832" y="2258568"/>
             <a:ext cx="1828800" cy="292608"/>
           </a:xfrm>
           <a:prstGeom prst="rect">
@@ -31291,7 +31752,7 @@
         </p:nvSpPr>
         <p:spPr>
           <a:xfrm>
-            <a:off x="5803392" y="2258568"/>
+            <a:off x="4370832" y="2258568"/>
             <a:ext cx="1828800" cy="292608"/>
           </a:xfrm>
           <a:prstGeom prst="rect">
@@ -31316,7 +31777,7 @@
                 <a:ea typeface="Trebuchet MS" pitchFamily="34" charset="-122"/>
                 <a:cs typeface="Trebuchet MS" pitchFamily="34" charset="-120"/>
               </a:rPr>
-              <a:t>est</a:t>
+              <a:t>en</a:t>
             </a:r>
             <a:endParaRPr lang="en-US" sz="1300" dirty="0"/>
           </a:p>
@@ -31330,7 +31791,7 @@
         </p:nvSpPr>
         <p:spPr>
           <a:xfrm>
-            <a:off x="5803392" y="2569464"/>
+            <a:off x="4370832" y="2569464"/>
             <a:ext cx="1828800" cy="201168"/>
           </a:xfrm>
           <a:prstGeom prst="rect">
@@ -31355,7 +31816,7 @@
                 <a:ea typeface="Calibri" pitchFamily="34" charset="-122"/>
                 <a:cs typeface="Calibri" pitchFamily="34" charset="-120"/>
               </a:rPr>
-              <a:t>the most (superlative)</a:t>
+              <a:t>made of; to make</a:t>
             </a:r>
             <a:endParaRPr lang="en-US" sz="850" dirty="0"/>
           </a:p>
@@ -31364,6 +31825,118 @@
       <p:sp>
         <p:nvSpPr>
           <p:cNvPr id="22" name="Shape 20"/>
+          <p:cNvSpPr/>
+          <p:nvPr/>
+        </p:nvSpPr>
+        <p:spPr>
+          <a:xfrm>
+            <a:off x="6519672" y="2258568"/>
+            <a:ext cx="1828800" cy="292608"/>
+          </a:xfrm>
+          <a:prstGeom prst="rect">
+            <a:avLst>
+              <a:gd name="adj" fmla="val 25000"/>
+            </a:avLst>
+          </a:prstGeom>
+          <a:solidFill>
+            <a:srgbClr val="FCE7F3"/>
+          </a:solidFill>
+          <a:ln w="19050">
+            <a:solidFill>
+              <a:srgbClr val="DB2777"/>
+            </a:solidFill>
+            <a:prstDash val="solid"/>
+          </a:ln>
+          <a:effectLst>
+            <a:outerShdw sx="100000" sy="100000" kx="0" ky="0" algn="bl" rotWithShape="0" blurRad="101600" dist="38100" dir="8100000">
+              <a:srgbClr val="000000">
+                <a:alpha val="12000"/>
+              </a:srgbClr>
+            </a:outerShdw>
+          </a:effectLst>
+        </p:spPr>
+      </p:sp>
+      <p:sp>
+        <p:nvSpPr>
+          <p:cNvPr id="23" name="Text 21"/>
+          <p:cNvSpPr/>
+          <p:nvPr/>
+        </p:nvSpPr>
+        <p:spPr>
+          <a:xfrm>
+            <a:off x="6519672" y="2258568"/>
+            <a:ext cx="1828800" cy="292608"/>
+          </a:xfrm>
+          <a:prstGeom prst="rect">
+            <a:avLst/>
+          </a:prstGeom>
+          <a:noFill/>
+          <a:ln/>
+        </p:spPr>
+        <p:txBody>
+          <a:bodyPr wrap="square" lIns="0" tIns="0" rIns="0" bIns="0" rtlCol="0" anchor="ctr"/>
+          <a:lstStyle/>
+          <a:p>
+            <a:pPr algn="ctr" indent="0" marL="0">
+              <a:buNone/>
+            </a:pPr>
+            <a:r>
+              <a:rPr lang="en-US" sz="1300" b="1" dirty="0">
+                <a:solidFill>
+                  <a:srgbClr val="9D174D"/>
+                </a:solidFill>
+                <a:latin typeface="Trebuchet MS" pitchFamily="34" charset="0"/>
+                <a:ea typeface="Trebuchet MS" pitchFamily="34" charset="-122"/>
+                <a:cs typeface="Trebuchet MS" pitchFamily="34" charset="-120"/>
+              </a:rPr>
+              <a:t>ing</a:t>
+            </a:r>
+            <a:endParaRPr lang="en-US" sz="1300" dirty="0"/>
+          </a:p>
+        </p:txBody>
+      </p:sp>
+      <p:sp>
+        <p:nvSpPr>
+          <p:cNvPr id="24" name="Text 22"/>
+          <p:cNvSpPr/>
+          <p:nvPr/>
+        </p:nvSpPr>
+        <p:spPr>
+          <a:xfrm>
+            <a:off x="6519672" y="2569464"/>
+            <a:ext cx="1828800" cy="201168"/>
+          </a:xfrm>
+          <a:prstGeom prst="rect">
+            <a:avLst/>
+          </a:prstGeom>
+          <a:noFill/>
+          <a:ln/>
+        </p:spPr>
+        <p:txBody>
+          <a:bodyPr wrap="square" lIns="0" tIns="0" rIns="0" bIns="0" rtlCol="0" anchor="t"/>
+          <a:lstStyle/>
+          <a:p>
+            <a:pPr algn="ctr" indent="0" marL="0">
+              <a:buNone/>
+            </a:pPr>
+            <a:r>
+              <a:rPr lang="en-US" sz="850" dirty="0">
+                <a:solidFill>
+                  <a:srgbClr val="475569"/>
+                </a:solidFill>
+                <a:latin typeface="Calibri" pitchFamily="34" charset="0"/>
+                <a:ea typeface="Calibri" pitchFamily="34" charset="-122"/>
+                <a:cs typeface="Calibri" pitchFamily="34" charset="-120"/>
+              </a:rPr>
+              <a:t>happening now</a:t>
+            </a:r>
+            <a:endParaRPr lang="en-US" sz="850" dirty="0"/>
+          </a:p>
+        </p:txBody>
+      </p:sp>
+      <p:sp>
+        <p:nvSpPr>
+          <p:cNvPr id="25" name="Shape 23"/>
           <p:cNvSpPr/>
           <p:nvPr/>
         </p:nvSpPr>
@@ -31390,7 +31963,7 @@
       </p:sp>
       <p:sp>
         <p:nvSpPr>
-          <p:cNvPr id="23" name="Text 21"/>
+          <p:cNvPr id="26" name="Text 24"/>
           <p:cNvSpPr/>
           <p:nvPr/>
         </p:nvSpPr>
@@ -31429,7 +32002,7 @@
       </p:sp>
       <p:sp>
         <p:nvSpPr>
-          <p:cNvPr id="24" name="Shape 22"/>
+          <p:cNvPr id="27" name="Shape 25"/>
           <p:cNvSpPr/>
           <p:nvPr/>
         </p:nvSpPr>
@@ -31456,13 +32029,13 @@
       </p:sp>
       <p:sp>
         <p:nvSpPr>
-          <p:cNvPr id="25" name="Shape 23"/>
-          <p:cNvSpPr/>
-          <p:nvPr/>
-        </p:nvSpPr>
-        <p:spPr>
-          <a:xfrm>
-            <a:off x="2999232" y="3364992"/>
+          <p:cNvPr id="28" name="Shape 26"/>
+          <p:cNvSpPr/>
+          <p:nvPr/>
+        </p:nvSpPr>
+        <p:spPr>
+          <a:xfrm>
+            <a:off x="2313432" y="3364992"/>
             <a:ext cx="1645920" cy="475488"/>
           </a:xfrm>
           <a:prstGeom prst="rect">
@@ -31483,13 +32056,13 @@
       </p:sp>
       <p:sp>
         <p:nvSpPr>
-          <p:cNvPr id="26" name="Text 24"/>
-          <p:cNvSpPr/>
-          <p:nvPr/>
-        </p:nvSpPr>
-        <p:spPr>
-          <a:xfrm>
-            <a:off x="2999232" y="3364992"/>
+          <p:cNvPr id="29" name="Text 27"/>
+          <p:cNvSpPr/>
+          <p:nvPr/>
+        </p:nvSpPr>
+        <p:spPr>
+          <a:xfrm>
+            <a:off x="2313432" y="3364992"/>
             <a:ext cx="1645920" cy="475488"/>
           </a:xfrm>
           <a:prstGeom prst="rect">
@@ -31522,14 +32095,14 @@
       </p:sp>
       <p:sp>
         <p:nvSpPr>
-          <p:cNvPr id="27" name="Text 25"/>
-          <p:cNvSpPr/>
-          <p:nvPr/>
-        </p:nvSpPr>
-        <p:spPr>
-          <a:xfrm>
-            <a:off x="4645152" y="3364992"/>
-            <a:ext cx="1097280" cy="475488"/>
+          <p:cNvPr id="30" name="Text 28"/>
+          <p:cNvSpPr/>
+          <p:nvPr/>
+        </p:nvSpPr>
+        <p:spPr>
+          <a:xfrm>
+            <a:off x="3959352" y="3364992"/>
+            <a:ext cx="411480" cy="475488"/>
           </a:xfrm>
           <a:prstGeom prst="rect">
             <a:avLst/>
@@ -31561,13 +32134,13 @@
       </p:sp>
       <p:sp>
         <p:nvSpPr>
-          <p:cNvPr id="28" name="Shape 26"/>
-          <p:cNvSpPr/>
-          <p:nvPr/>
-        </p:nvSpPr>
-        <p:spPr>
-          <a:xfrm>
-            <a:off x="5742432" y="3364992"/>
+          <p:cNvPr id="31" name="Shape 29"/>
+          <p:cNvSpPr/>
+          <p:nvPr/>
+        </p:nvSpPr>
+        <p:spPr>
+          <a:xfrm>
+            <a:off x="4370832" y="3364992"/>
             <a:ext cx="1645920" cy="475488"/>
           </a:xfrm>
           <a:prstGeom prst="rect">
@@ -31588,13 +32161,13 @@
       </p:sp>
       <p:sp>
         <p:nvSpPr>
-          <p:cNvPr id="29" name="Text 27"/>
-          <p:cNvSpPr/>
-          <p:nvPr/>
-        </p:nvSpPr>
-        <p:spPr>
-          <a:xfrm>
-            <a:off x="5742432" y="3364992"/>
+          <p:cNvPr id="32" name="Text 30"/>
+          <p:cNvSpPr/>
+          <p:nvPr/>
+        </p:nvSpPr>
+        <p:spPr>
+          <a:xfrm>
+            <a:off x="4370832" y="3364992"/>
             <a:ext cx="1645920" cy="475488"/>
           </a:xfrm>
           <a:prstGeom prst="rect">
@@ -31619,7 +32192,7 @@
                 <a:ea typeface="Trebuchet MS" pitchFamily="34" charset="-122"/>
                 <a:cs typeface="Trebuchet MS" pitchFamily="34" charset="-120"/>
               </a:rPr>
-              <a:t>est</a:t>
+              <a:t>en</a:t>
             </a:r>
             <a:endParaRPr lang="en-US" sz="1400" dirty="0"/>
           </a:p>
@@ -31627,7 +32200,112 @@
       </p:sp>
       <p:sp>
         <p:nvSpPr>
-          <p:cNvPr id="30" name="Shape 28"/>
+          <p:cNvPr id="33" name="Text 31"/>
+          <p:cNvSpPr/>
+          <p:nvPr/>
+        </p:nvSpPr>
+        <p:spPr>
+          <a:xfrm>
+            <a:off x="6016752" y="3364992"/>
+            <a:ext cx="411480" cy="475488"/>
+          </a:xfrm>
+          <a:prstGeom prst="rect">
+            <a:avLst/>
+          </a:prstGeom>
+          <a:noFill/>
+          <a:ln/>
+        </p:spPr>
+        <p:txBody>
+          <a:bodyPr wrap="square" lIns="0" tIns="0" rIns="0" bIns="0" rtlCol="0" anchor="ctr"/>
+          <a:lstStyle/>
+          <a:p>
+            <a:pPr algn="ctr" indent="0" marL="0">
+              <a:buNone/>
+            </a:pPr>
+            <a:r>
+              <a:rPr lang="en-US" sz="1600" b="1" dirty="0">
+                <a:solidFill>
+                  <a:srgbClr val="0D9488"/>
+                </a:solidFill>
+                <a:latin typeface="Trebuchet MS" pitchFamily="34" charset="0"/>
+                <a:ea typeface="Trebuchet MS" pitchFamily="34" charset="-122"/>
+                <a:cs typeface="Trebuchet MS" pitchFamily="34" charset="-120"/>
+              </a:rPr>
+              <a:t>·</a:t>
+            </a:r>
+            <a:endParaRPr lang="en-US" sz="1600" dirty="0"/>
+          </a:p>
+        </p:txBody>
+      </p:sp>
+      <p:sp>
+        <p:nvSpPr>
+          <p:cNvPr id="34" name="Shape 32"/>
+          <p:cNvSpPr/>
+          <p:nvPr/>
+        </p:nvSpPr>
+        <p:spPr>
+          <a:xfrm>
+            <a:off x="6428232" y="3364992"/>
+            <a:ext cx="1645920" cy="475488"/>
+          </a:xfrm>
+          <a:prstGeom prst="rect">
+            <a:avLst>
+              <a:gd name="adj" fmla="val 9615"/>
+            </a:avLst>
+          </a:prstGeom>
+          <a:solidFill>
+            <a:srgbClr val="FFFFFF"/>
+          </a:solidFill>
+          <a:ln w="12700">
+            <a:solidFill>
+              <a:srgbClr val="0D9488"/>
+            </a:solidFill>
+            <a:prstDash val="solid"/>
+          </a:ln>
+        </p:spPr>
+      </p:sp>
+      <p:sp>
+        <p:nvSpPr>
+          <p:cNvPr id="35" name="Text 33"/>
+          <p:cNvSpPr/>
+          <p:nvPr/>
+        </p:nvSpPr>
+        <p:spPr>
+          <a:xfrm>
+            <a:off x="6428232" y="3364992"/>
+            <a:ext cx="1645920" cy="475488"/>
+          </a:xfrm>
+          <a:prstGeom prst="rect">
+            <a:avLst/>
+          </a:prstGeom>
+          <a:noFill/>
+          <a:ln/>
+        </p:spPr>
+        <p:txBody>
+          <a:bodyPr wrap="square" lIns="0" tIns="0" rIns="0" bIns="0" rtlCol="0" anchor="ctr"/>
+          <a:lstStyle/>
+          <a:p>
+            <a:pPr algn="ctr" indent="0" marL="0">
+              <a:buNone/>
+            </a:pPr>
+            <a:r>
+              <a:rPr lang="en-US" sz="1400" b="1" dirty="0">
+                <a:solidFill>
+                  <a:srgbClr val="0D9488"/>
+                </a:solidFill>
+                <a:latin typeface="Trebuchet MS" pitchFamily="34" charset="0"/>
+                <a:ea typeface="Trebuchet MS" pitchFamily="34" charset="-122"/>
+                <a:cs typeface="Trebuchet MS" pitchFamily="34" charset="-120"/>
+              </a:rPr>
+              <a:t>ing</a:t>
+            </a:r>
+            <a:endParaRPr lang="en-US" sz="1400" dirty="0"/>
+          </a:p>
+        </p:txBody>
+      </p:sp>
+      <p:sp>
+        <p:nvSpPr>
+          <p:cNvPr id="36" name="Shape 34"/>
           <p:cNvSpPr/>
           <p:nvPr/>
         </p:nvSpPr>
@@ -31654,7 +32332,7 @@
       </p:sp>
       <p:sp>
         <p:nvSpPr>
-          <p:cNvPr id="31" name="Text 29"/>
+          <p:cNvPr id="37" name="Text 35"/>
           <p:cNvSpPr/>
           <p:nvPr/>
         </p:nvSpPr>
@@ -31693,7 +32371,7 @@
       </p:sp>
       <p:sp>
         <p:nvSpPr>
-          <p:cNvPr id="32" name="Shape 30"/>
+          <p:cNvPr id="38" name="Shape 36"/>
           <p:cNvSpPr/>
           <p:nvPr/>
         </p:nvSpPr>
@@ -31720,13 +32398,13 @@
       </p:sp>
       <p:sp>
         <p:nvSpPr>
-          <p:cNvPr id="33" name="Shape 31"/>
-          <p:cNvSpPr/>
-          <p:nvPr/>
-        </p:nvSpPr>
-        <p:spPr>
-          <a:xfrm>
-            <a:off x="2254649" y="4169664"/>
+          <p:cNvPr id="39" name="Shape 37"/>
+          <p:cNvSpPr/>
+          <p:nvPr/>
+        </p:nvSpPr>
+        <p:spPr>
+          <a:xfrm>
+            <a:off x="2124837" y="4169664"/>
             <a:ext cx="685800" cy="475488"/>
           </a:xfrm>
           <a:prstGeom prst="rect">
@@ -31747,13 +32425,13 @@
       </p:sp>
       <p:sp>
         <p:nvSpPr>
-          <p:cNvPr id="34" name="Text 32"/>
-          <p:cNvSpPr/>
-          <p:nvPr/>
-        </p:nvSpPr>
-        <p:spPr>
-          <a:xfrm>
-            <a:off x="2254649" y="4169664"/>
+          <p:cNvPr id="40" name="Text 38"/>
+          <p:cNvSpPr/>
+          <p:nvPr/>
+        </p:nvSpPr>
+        <p:spPr>
+          <a:xfrm>
+            <a:off x="2124837" y="4169664"/>
             <a:ext cx="685800" cy="475488"/>
           </a:xfrm>
           <a:prstGeom prst="rect">
@@ -31786,13 +32464,13 @@
       </p:sp>
       <p:sp>
         <p:nvSpPr>
-          <p:cNvPr id="35" name="Shape 33"/>
-          <p:cNvSpPr/>
-          <p:nvPr/>
-        </p:nvSpPr>
-        <p:spPr>
-          <a:xfrm>
-            <a:off x="3293146" y="4169664"/>
+          <p:cNvPr id="41" name="Shape 39"/>
+          <p:cNvSpPr/>
+          <p:nvPr/>
+        </p:nvSpPr>
+        <p:spPr>
+          <a:xfrm>
+            <a:off x="3033522" y="4169664"/>
             <a:ext cx="685800" cy="475488"/>
           </a:xfrm>
           <a:prstGeom prst="rect">
@@ -31813,13 +32491,13 @@
       </p:sp>
       <p:sp>
         <p:nvSpPr>
-          <p:cNvPr id="36" name="Text 34"/>
-          <p:cNvSpPr/>
-          <p:nvPr/>
-        </p:nvSpPr>
-        <p:spPr>
-          <a:xfrm>
-            <a:off x="3293146" y="4169664"/>
+          <p:cNvPr id="42" name="Text 40"/>
+          <p:cNvSpPr/>
+          <p:nvPr/>
+        </p:nvSpPr>
+        <p:spPr>
+          <a:xfrm>
+            <a:off x="3033522" y="4169664"/>
             <a:ext cx="685800" cy="475488"/>
           </a:xfrm>
           <a:prstGeom prst="rect">
@@ -31852,13 +32530,13 @@
       </p:sp>
       <p:sp>
         <p:nvSpPr>
-          <p:cNvPr id="37" name="Shape 35"/>
-          <p:cNvSpPr/>
-          <p:nvPr/>
-        </p:nvSpPr>
-        <p:spPr>
-          <a:xfrm>
-            <a:off x="4331643" y="4169664"/>
+          <p:cNvPr id="43" name="Shape 41"/>
+          <p:cNvSpPr/>
+          <p:nvPr/>
+        </p:nvSpPr>
+        <p:spPr>
+          <a:xfrm>
+            <a:off x="3942207" y="4169664"/>
             <a:ext cx="685800" cy="475488"/>
           </a:xfrm>
           <a:prstGeom prst="rect">
@@ -31879,13 +32557,13 @@
       </p:sp>
       <p:sp>
         <p:nvSpPr>
-          <p:cNvPr id="38" name="Text 36"/>
-          <p:cNvSpPr/>
-          <p:nvPr/>
-        </p:nvSpPr>
-        <p:spPr>
-          <a:xfrm>
-            <a:off x="4331643" y="4169664"/>
+          <p:cNvPr id="44" name="Text 42"/>
+          <p:cNvSpPr/>
+          <p:nvPr/>
+        </p:nvSpPr>
+        <p:spPr>
+          <a:xfrm>
+            <a:off x="3942207" y="4169664"/>
             <a:ext cx="685800" cy="475488"/>
           </a:xfrm>
           <a:prstGeom prst="rect">
@@ -31918,13 +32596,13 @@
       </p:sp>
       <p:sp>
         <p:nvSpPr>
-          <p:cNvPr id="39" name="Shape 37"/>
-          <p:cNvSpPr/>
-          <p:nvPr/>
-        </p:nvSpPr>
-        <p:spPr>
-          <a:xfrm>
-            <a:off x="5370141" y="4169664"/>
+          <p:cNvPr id="45" name="Shape 43"/>
+          <p:cNvSpPr/>
+          <p:nvPr/>
+        </p:nvSpPr>
+        <p:spPr>
+          <a:xfrm>
+            <a:off x="4850892" y="4169664"/>
             <a:ext cx="685800" cy="475488"/>
           </a:xfrm>
           <a:prstGeom prst="rect">
@@ -31945,13 +32623,13 @@
       </p:sp>
       <p:sp>
         <p:nvSpPr>
-          <p:cNvPr id="40" name="Text 38"/>
-          <p:cNvSpPr/>
-          <p:nvPr/>
-        </p:nvSpPr>
-        <p:spPr>
-          <a:xfrm>
-            <a:off x="5370141" y="4169664"/>
+          <p:cNvPr id="46" name="Text 44"/>
+          <p:cNvSpPr/>
+          <p:nvPr/>
+        </p:nvSpPr>
+        <p:spPr>
+          <a:xfrm>
+            <a:off x="4850892" y="4169664"/>
             <a:ext cx="685800" cy="475488"/>
           </a:xfrm>
           <a:prstGeom prst="rect">
@@ -31984,13 +32662,13 @@
       </p:sp>
       <p:sp>
         <p:nvSpPr>
-          <p:cNvPr id="41" name="Shape 39"/>
-          <p:cNvSpPr/>
-          <p:nvPr/>
-        </p:nvSpPr>
-        <p:spPr>
-          <a:xfrm>
-            <a:off x="6408638" y="4169664"/>
+          <p:cNvPr id="47" name="Shape 45"/>
+          <p:cNvSpPr/>
+          <p:nvPr/>
+        </p:nvSpPr>
+        <p:spPr>
+          <a:xfrm>
+            <a:off x="5759577" y="4169664"/>
             <a:ext cx="685800" cy="475488"/>
           </a:xfrm>
           <a:prstGeom prst="rect">
@@ -32011,13 +32689,13 @@
       </p:sp>
       <p:sp>
         <p:nvSpPr>
-          <p:cNvPr id="42" name="Text 40"/>
-          <p:cNvSpPr/>
-          <p:nvPr/>
-        </p:nvSpPr>
-        <p:spPr>
-          <a:xfrm>
-            <a:off x="6408638" y="4169664"/>
+          <p:cNvPr id="48" name="Text 46"/>
+          <p:cNvSpPr/>
+          <p:nvPr/>
+        </p:nvSpPr>
+        <p:spPr>
+          <a:xfrm>
+            <a:off x="5759577" y="4169664"/>
             <a:ext cx="685800" cy="475488"/>
           </a:xfrm>
           <a:prstGeom prst="rect">
@@ -32042,7 +32720,7 @@
                 <a:ea typeface="Trebuchet MS" pitchFamily="34" charset="-122"/>
                 <a:cs typeface="Trebuchet MS" pitchFamily="34" charset="-120"/>
               </a:rPr>
-              <a:t>s</a:t>
+              <a:t>n</a:t>
             </a:r>
             <a:endParaRPr lang="en-US" sz="900" dirty="0"/>
           </a:p>
@@ -32050,13 +32728,13 @@
       </p:sp>
       <p:sp>
         <p:nvSpPr>
-          <p:cNvPr id="43" name="Shape 41"/>
-          <p:cNvSpPr/>
-          <p:nvPr/>
-        </p:nvSpPr>
-        <p:spPr>
-          <a:xfrm>
-            <a:off x="7447135" y="4169664"/>
+          <p:cNvPr id="49" name="Shape 47"/>
+          <p:cNvSpPr/>
+          <p:nvPr/>
+        </p:nvSpPr>
+        <p:spPr>
+          <a:xfrm>
+            <a:off x="6668262" y="4169664"/>
             <a:ext cx="685800" cy="475488"/>
           </a:xfrm>
           <a:prstGeom prst="rect">
@@ -32077,13 +32755,13 @@
       </p:sp>
       <p:sp>
         <p:nvSpPr>
-          <p:cNvPr id="44" name="Text 42"/>
-          <p:cNvSpPr/>
-          <p:nvPr/>
-        </p:nvSpPr>
-        <p:spPr>
-          <a:xfrm>
-            <a:off x="7447135" y="4169664"/>
+          <p:cNvPr id="50" name="Text 48"/>
+          <p:cNvSpPr/>
+          <p:nvPr/>
+        </p:nvSpPr>
+        <p:spPr>
+          <a:xfrm>
+            <a:off x="6668262" y="4169664"/>
             <a:ext cx="685800" cy="475488"/>
           </a:xfrm>
           <a:prstGeom prst="rect">
@@ -32108,7 +32786,73 @@
                 <a:ea typeface="Trebuchet MS" pitchFamily="34" charset="-122"/>
                 <a:cs typeface="Trebuchet MS" pitchFamily="34" charset="-120"/>
               </a:rPr>
-              <a:t>t</a:t>
+              <a:t>i</a:t>
+            </a:r>
+            <a:endParaRPr lang="en-US" sz="900" dirty="0"/>
+          </a:p>
+        </p:txBody>
+      </p:sp>
+      <p:sp>
+        <p:nvSpPr>
+          <p:cNvPr id="51" name="Shape 49"/>
+          <p:cNvSpPr/>
+          <p:nvPr/>
+        </p:nvSpPr>
+        <p:spPr>
+          <a:xfrm>
+            <a:off x="7576947" y="4169664"/>
+            <a:ext cx="685800" cy="475488"/>
+          </a:xfrm>
+          <a:prstGeom prst="rect">
+            <a:avLst>
+              <a:gd name="adj" fmla="val 7692"/>
+            </a:avLst>
+          </a:prstGeom>
+          <a:solidFill>
+            <a:srgbClr val="FFFFFF"/>
+          </a:solidFill>
+          <a:ln w="12700">
+            <a:solidFill>
+              <a:srgbClr val="DB2777"/>
+            </a:solidFill>
+            <a:prstDash val="solid"/>
+          </a:ln>
+        </p:spPr>
+      </p:sp>
+      <p:sp>
+        <p:nvSpPr>
+          <p:cNvPr id="52" name="Text 50"/>
+          <p:cNvSpPr/>
+          <p:nvPr/>
+        </p:nvSpPr>
+        <p:spPr>
+          <a:xfrm>
+            <a:off x="7576947" y="4169664"/>
+            <a:ext cx="685800" cy="475488"/>
+          </a:xfrm>
+          <a:prstGeom prst="rect">
+            <a:avLst/>
+          </a:prstGeom>
+          <a:noFill/>
+          <a:ln/>
+        </p:spPr>
+        <p:txBody>
+          <a:bodyPr wrap="square" lIns="0" tIns="0" rIns="0" bIns="0" rtlCol="0" anchor="ctr"/>
+          <a:lstStyle/>
+          <a:p>
+            <a:pPr algn="ctr" indent="0" marL="0">
+              <a:buNone/>
+            </a:pPr>
+            <a:r>
+              <a:rPr lang="en-US" sz="900" b="1" dirty="0">
+                <a:solidFill>
+                  <a:srgbClr val="9D174D"/>
+                </a:solidFill>
+                <a:latin typeface="Trebuchet MS" pitchFamily="34" charset="0"/>
+                <a:ea typeface="Trebuchet MS" pitchFamily="34" charset="-122"/>
+                <a:cs typeface="Trebuchet MS" pitchFamily="34" charset="-120"/>
+              </a:rPr>
+              <a:t>ng</a:t>
             </a:r>
             <a:endParaRPr lang="en-US" sz="900" dirty="0"/>
           </a:p>
@@ -32400,7 +33144,7 @@
                 <a:ea typeface="Calibri" pitchFamily="34" charset="-122"/>
                 <a:cs typeface="Calibri" pitchFamily="34" charset="-120"/>
               </a:rPr>
-              <a:t>Word Labs  •  wordlabs.app  •  Root: 'sharp' = having a fine cutting edge</a:t>
+              <a:t>Word Labs  •  wordlabs.app  •  Root: 'sharp' = having a fine edge or point</a:t>
             </a:r>
             <a:endParaRPr lang="en-US" sz="800" dirty="0"/>
           </a:p>
@@ -33569,7 +34313,7 @@
                 <a:ea typeface="Calibri" pitchFamily="34" charset="-122"/>
                 <a:cs typeface="Calibri" pitchFamily="34" charset="-120"/>
               </a:rPr>
-              <a:t>Word Labs  •  wordlabs.app  •  Root: 'sharp' = having a fine cutting edge</a:t>
+              <a:t>Word Labs  •  wordlabs.app  •  Root: 'sharp' = having a fine edge or point</a:t>
             </a:r>
             <a:endParaRPr lang="en-US" sz="800" dirty="0"/>
           </a:p>
@@ -33827,7 +34571,7 @@
             <a:avLst/>
           </a:prstGeom>
           <a:solidFill>
-            <a:srgbClr val="DDD6FE"/>
+            <a:srgbClr val="F8FAFC"/>
           </a:solidFill>
           <a:ln w="12700">
             <a:solidFill>
@@ -33839,14 +34583,39 @@
       </p:sp>
       <p:sp>
         <p:nvSpPr>
-          <p:cNvPr id="18" name="Text 16"/>
-          <p:cNvSpPr/>
-          <p:nvPr/>
-        </p:nvSpPr>
-        <p:spPr>
-          <a:xfrm>
-            <a:off x="365760" y="1563624"/>
-            <a:ext cx="2468880" cy="402336"/>
+          <p:cNvPr id="18" name="Shape 16"/>
+          <p:cNvSpPr/>
+          <p:nvPr/>
+        </p:nvSpPr>
+        <p:spPr>
+          <a:xfrm>
+            <a:off x="2971800" y="1563624"/>
+            <a:ext cx="2834640" cy="402336"/>
+          </a:xfrm>
+          <a:prstGeom prst="rect">
+            <a:avLst/>
+          </a:prstGeom>
+          <a:solidFill>
+            <a:srgbClr val="CCFBF1"/>
+          </a:solidFill>
+          <a:ln w="12700">
+            <a:solidFill>
+              <a:srgbClr val="E2E8F0"/>
+            </a:solidFill>
+            <a:prstDash val="solid"/>
+          </a:ln>
+        </p:spPr>
+      </p:sp>
+      <p:sp>
+        <p:nvSpPr>
+          <p:cNvPr id="19" name="Text 17"/>
+          <p:cNvSpPr/>
+          <p:nvPr/>
+        </p:nvSpPr>
+        <p:spPr>
+          <a:xfrm>
+            <a:off x="2971800" y="1563624"/>
+            <a:ext cx="2834640" cy="402336"/>
           </a:xfrm>
           <a:prstGeom prst="rect">
             <a:avLst/>
@@ -33864,13 +34633,13 @@
             <a:r>
               <a:rPr lang="en-US" sz="1300" b="1" dirty="0">
                 <a:solidFill>
-                  <a:srgbClr val="4C1D95"/>
+                  <a:srgbClr val="0F766E"/>
                 </a:solidFill>
                 <a:latin typeface="Trebuchet MS" pitchFamily="34" charset="0"/>
                 <a:ea typeface="Trebuchet MS" pitchFamily="34" charset="-122"/>
                 <a:cs typeface="Trebuchet MS" pitchFamily="34" charset="-120"/>
               </a:rPr>
-              <a:t>un-</a:t>
+              <a:t>sharp</a:t>
             </a:r>
             <a:endParaRPr lang="en-US" sz="1300" dirty="0"/>
           </a:p>
@@ -33878,20 +34647,20 @@
       </p:sp>
       <p:sp>
         <p:nvSpPr>
-          <p:cNvPr id="19" name="Shape 17"/>
-          <p:cNvSpPr/>
-          <p:nvPr/>
-        </p:nvSpPr>
-        <p:spPr>
-          <a:xfrm>
-            <a:off x="2971800" y="1563624"/>
+          <p:cNvPr id="20" name="Shape 18"/>
+          <p:cNvSpPr/>
+          <p:nvPr/>
+        </p:nvSpPr>
+        <p:spPr>
+          <a:xfrm>
+            <a:off x="5943600" y="1563624"/>
             <a:ext cx="2834640" cy="402336"/>
           </a:xfrm>
           <a:prstGeom prst="rect">
             <a:avLst/>
           </a:prstGeom>
           <a:solidFill>
-            <a:srgbClr val="CCFBF1"/>
+            <a:srgbClr val="FCE7F3"/>
           </a:solidFill>
           <a:ln w="12700">
             <a:solidFill>
@@ -33903,13 +34672,13 @@
       </p:sp>
       <p:sp>
         <p:nvSpPr>
-          <p:cNvPr id="20" name="Text 18"/>
-          <p:cNvSpPr/>
-          <p:nvPr/>
-        </p:nvSpPr>
-        <p:spPr>
-          <a:xfrm>
-            <a:off x="2971800" y="1563624"/>
+          <p:cNvPr id="21" name="Text 19"/>
+          <p:cNvSpPr/>
+          <p:nvPr/>
+        </p:nvSpPr>
+        <p:spPr>
+          <a:xfrm>
+            <a:off x="5943600" y="1563624"/>
             <a:ext cx="2834640" cy="402336"/>
           </a:xfrm>
           <a:prstGeom prst="rect">
@@ -33928,13 +34697,13 @@
             <a:r>
               <a:rPr lang="en-US" sz="1300" b="1" dirty="0">
                 <a:solidFill>
-                  <a:srgbClr val="0F766E"/>
+                  <a:srgbClr val="9D174D"/>
                 </a:solidFill>
                 <a:latin typeface="Trebuchet MS" pitchFamily="34" charset="0"/>
                 <a:ea typeface="Trebuchet MS" pitchFamily="34" charset="-122"/>
                 <a:cs typeface="Trebuchet MS" pitchFamily="34" charset="-120"/>
               </a:rPr>
-              <a:t>sharp</a:t>
+              <a:t>-en</a:t>
             </a:r>
             <a:endParaRPr lang="en-US" sz="1300" dirty="0"/>
           </a:p>
@@ -33942,19 +34711,69 @@
       </p:sp>
       <p:sp>
         <p:nvSpPr>
-          <p:cNvPr id="21" name="Shape 19"/>
-          <p:cNvSpPr/>
-          <p:nvPr/>
-        </p:nvSpPr>
-        <p:spPr>
-          <a:xfrm>
-            <a:off x="5943600" y="1563624"/>
+          <p:cNvPr id="22" name="Shape 20"/>
+          <p:cNvSpPr/>
+          <p:nvPr/>
+        </p:nvSpPr>
+        <p:spPr>
+          <a:xfrm>
+            <a:off x="365760" y="1984248"/>
+            <a:ext cx="2468880" cy="402336"/>
+          </a:xfrm>
+          <a:prstGeom prst="rect">
+            <a:avLst/>
+          </a:prstGeom>
+          <a:solidFill>
+            <a:srgbClr val="F1F5F9"/>
+          </a:solidFill>
+          <a:ln w="12700">
+            <a:solidFill>
+              <a:srgbClr val="E2E8F0"/>
+            </a:solidFill>
+            <a:prstDash val="solid"/>
+          </a:ln>
+        </p:spPr>
+      </p:sp>
+      <p:sp>
+        <p:nvSpPr>
+          <p:cNvPr id="23" name="Shape 21"/>
+          <p:cNvSpPr/>
+          <p:nvPr/>
+        </p:nvSpPr>
+        <p:spPr>
+          <a:xfrm>
+            <a:off x="2971800" y="1984248"/>
             <a:ext cx="2834640" cy="402336"/>
           </a:xfrm>
           <a:prstGeom prst="rect">
             <a:avLst/>
           </a:prstGeom>
           <a:solidFill>
+            <a:srgbClr val="F1F5F9"/>
+          </a:solidFill>
+          <a:ln w="12700">
+            <a:solidFill>
+              <a:srgbClr val="E2E8F0"/>
+            </a:solidFill>
+            <a:prstDash val="solid"/>
+          </a:ln>
+        </p:spPr>
+      </p:sp>
+      <p:sp>
+        <p:nvSpPr>
+          <p:cNvPr id="24" name="Shape 22"/>
+          <p:cNvSpPr/>
+          <p:nvPr/>
+        </p:nvSpPr>
+        <p:spPr>
+          <a:xfrm>
+            <a:off x="5943600" y="1984248"/>
+            <a:ext cx="2834640" cy="402336"/>
+          </a:xfrm>
+          <a:prstGeom prst="rect">
+            <a:avLst/>
+          </a:prstGeom>
+          <a:solidFill>
             <a:srgbClr val="FCE7F3"/>
           </a:solidFill>
           <a:ln w="12700">
@@ -33967,13 +34786,13 @@
       </p:sp>
       <p:sp>
         <p:nvSpPr>
-          <p:cNvPr id="22" name="Text 20"/>
-          <p:cNvSpPr/>
-          <p:nvPr/>
-        </p:nvSpPr>
-        <p:spPr>
-          <a:xfrm>
-            <a:off x="5943600" y="1563624"/>
+          <p:cNvPr id="25" name="Text 23"/>
+          <p:cNvSpPr/>
+          <p:nvPr/>
+        </p:nvSpPr>
+        <p:spPr>
+          <a:xfrm>
+            <a:off x="5943600" y="1984248"/>
             <a:ext cx="2834640" cy="402336"/>
           </a:xfrm>
           <a:prstGeom prst="rect">
@@ -33998,7 +34817,7 @@
                 <a:ea typeface="Trebuchet MS" pitchFamily="34" charset="-122"/>
                 <a:cs typeface="Trebuchet MS" pitchFamily="34" charset="-120"/>
               </a:rPr>
-              <a:t>-en</a:t>
+              <a:t>-er</a:t>
             </a:r>
             <a:endParaRPr lang="en-US" sz="1300" dirty="0"/>
           </a:p>
@@ -34006,20 +34825,20 @@
       </p:sp>
       <p:sp>
         <p:nvSpPr>
-          <p:cNvPr id="23" name="Shape 21"/>
-          <p:cNvSpPr/>
-          <p:nvPr/>
-        </p:nvSpPr>
-        <p:spPr>
-          <a:xfrm>
-            <a:off x="365760" y="1984248"/>
+          <p:cNvPr id="26" name="Shape 24"/>
+          <p:cNvSpPr/>
+          <p:nvPr/>
+        </p:nvSpPr>
+        <p:spPr>
+          <a:xfrm>
+            <a:off x="365760" y="2404872"/>
             <a:ext cx="2468880" cy="402336"/>
           </a:xfrm>
           <a:prstGeom prst="rect">
             <a:avLst/>
           </a:prstGeom>
           <a:solidFill>
-            <a:srgbClr val="DDD6FE"/>
+            <a:srgbClr val="F8FAFC"/>
           </a:solidFill>
           <a:ln w="12700">
             <a:solidFill>
@@ -34031,14 +34850,64 @@
       </p:sp>
       <p:sp>
         <p:nvSpPr>
-          <p:cNvPr id="24" name="Text 22"/>
-          <p:cNvSpPr/>
-          <p:nvPr/>
-        </p:nvSpPr>
-        <p:spPr>
-          <a:xfrm>
-            <a:off x="365760" y="1984248"/>
-            <a:ext cx="2468880" cy="402336"/>
+          <p:cNvPr id="27" name="Shape 25"/>
+          <p:cNvSpPr/>
+          <p:nvPr/>
+        </p:nvSpPr>
+        <p:spPr>
+          <a:xfrm>
+            <a:off x="2971800" y="2404872"/>
+            <a:ext cx="2834640" cy="402336"/>
+          </a:xfrm>
+          <a:prstGeom prst="rect">
+            <a:avLst/>
+          </a:prstGeom>
+          <a:solidFill>
+            <a:srgbClr val="F8FAFC"/>
+          </a:solidFill>
+          <a:ln w="12700">
+            <a:solidFill>
+              <a:srgbClr val="E2E8F0"/>
+            </a:solidFill>
+            <a:prstDash val="solid"/>
+          </a:ln>
+        </p:spPr>
+      </p:sp>
+      <p:sp>
+        <p:nvSpPr>
+          <p:cNvPr id="28" name="Shape 26"/>
+          <p:cNvSpPr/>
+          <p:nvPr/>
+        </p:nvSpPr>
+        <p:spPr>
+          <a:xfrm>
+            <a:off x="5943600" y="2404872"/>
+            <a:ext cx="2834640" cy="402336"/>
+          </a:xfrm>
+          <a:prstGeom prst="rect">
+            <a:avLst/>
+          </a:prstGeom>
+          <a:solidFill>
+            <a:srgbClr val="FCE7F3"/>
+          </a:solidFill>
+          <a:ln w="12700">
+            <a:solidFill>
+              <a:srgbClr val="E2E8F0"/>
+            </a:solidFill>
+            <a:prstDash val="solid"/>
+          </a:ln>
+        </p:spPr>
+      </p:sp>
+      <p:sp>
+        <p:nvSpPr>
+          <p:cNvPr id="29" name="Text 27"/>
+          <p:cNvSpPr/>
+          <p:nvPr/>
+        </p:nvSpPr>
+        <p:spPr>
+          <a:xfrm>
+            <a:off x="5943600" y="2404872"/>
+            <a:ext cx="2834640" cy="402336"/>
           </a:xfrm>
           <a:prstGeom prst="rect">
             <a:avLst/>
@@ -34056,13 +34925,13 @@
             <a:r>
               <a:rPr lang="en-US" sz="1300" b="1" dirty="0">
                 <a:solidFill>
-                  <a:srgbClr val="4C1D95"/>
+                  <a:srgbClr val="9D174D"/>
                 </a:solidFill>
                 <a:latin typeface="Trebuchet MS" pitchFamily="34" charset="0"/>
                 <a:ea typeface="Trebuchet MS" pitchFamily="34" charset="-122"/>
                 <a:cs typeface="Trebuchet MS" pitchFamily="34" charset="-120"/>
               </a:rPr>
-              <a:t>out-</a:t>
+              <a:t>-est</a:t>
             </a:r>
             <a:endParaRPr lang="en-US" sz="1300" dirty="0"/>
           </a:p>
@@ -34070,13 +34939,38 @@
       </p:sp>
       <p:sp>
         <p:nvSpPr>
-          <p:cNvPr id="25" name="Shape 23"/>
-          <p:cNvSpPr/>
-          <p:nvPr/>
-        </p:nvSpPr>
-        <p:spPr>
-          <a:xfrm>
-            <a:off x="2971800" y="1984248"/>
+          <p:cNvPr id="30" name="Shape 28"/>
+          <p:cNvSpPr/>
+          <p:nvPr/>
+        </p:nvSpPr>
+        <p:spPr>
+          <a:xfrm>
+            <a:off x="365760" y="2825496"/>
+            <a:ext cx="2468880" cy="402336"/>
+          </a:xfrm>
+          <a:prstGeom prst="rect">
+            <a:avLst/>
+          </a:prstGeom>
+          <a:solidFill>
+            <a:srgbClr val="F1F5F9"/>
+          </a:solidFill>
+          <a:ln w="12700">
+            <a:solidFill>
+              <a:srgbClr val="E2E8F0"/>
+            </a:solidFill>
+            <a:prstDash val="solid"/>
+          </a:ln>
+        </p:spPr>
+      </p:sp>
+      <p:sp>
+        <p:nvSpPr>
+          <p:cNvPr id="31" name="Shape 29"/>
+          <p:cNvSpPr/>
+          <p:nvPr/>
+        </p:nvSpPr>
+        <p:spPr>
+          <a:xfrm>
+            <a:off x="2971800" y="2825496"/>
             <a:ext cx="2834640" cy="402336"/>
           </a:xfrm>
           <a:prstGeom prst="rect">
@@ -34095,13 +34989,13 @@
       </p:sp>
       <p:sp>
         <p:nvSpPr>
-          <p:cNvPr id="26" name="Shape 24"/>
-          <p:cNvSpPr/>
-          <p:nvPr/>
-        </p:nvSpPr>
-        <p:spPr>
-          <a:xfrm>
-            <a:off x="5943600" y="1984248"/>
+          <p:cNvPr id="32" name="Shape 30"/>
+          <p:cNvSpPr/>
+          <p:nvPr/>
+        </p:nvSpPr>
+        <p:spPr>
+          <a:xfrm>
+            <a:off x="5943600" y="2825496"/>
             <a:ext cx="2834640" cy="402336"/>
           </a:xfrm>
           <a:prstGeom prst="rect">
@@ -34120,13 +35014,13 @@
       </p:sp>
       <p:sp>
         <p:nvSpPr>
-          <p:cNvPr id="27" name="Text 25"/>
-          <p:cNvSpPr/>
-          <p:nvPr/>
-        </p:nvSpPr>
-        <p:spPr>
-          <a:xfrm>
-            <a:off x="5943600" y="1984248"/>
+          <p:cNvPr id="33" name="Text 31"/>
+          <p:cNvSpPr/>
+          <p:nvPr/>
+        </p:nvSpPr>
+        <p:spPr>
+          <a:xfrm>
+            <a:off x="5943600" y="2825496"/>
             <a:ext cx="2834640" cy="402336"/>
           </a:xfrm>
           <a:prstGeom prst="rect">
@@ -34151,7 +35045,7 @@
                 <a:ea typeface="Trebuchet MS" pitchFamily="34" charset="-122"/>
                 <a:cs typeface="Trebuchet MS" pitchFamily="34" charset="-120"/>
               </a:rPr>
-              <a:t>-er</a:t>
+              <a:t>-ly</a:t>
             </a:r>
             <a:endParaRPr lang="en-US" sz="1300" dirty="0"/>
           </a:p>
@@ -34159,20 +35053,20 @@
       </p:sp>
       <p:sp>
         <p:nvSpPr>
-          <p:cNvPr id="28" name="Shape 26"/>
-          <p:cNvSpPr/>
-          <p:nvPr/>
-        </p:nvSpPr>
-        <p:spPr>
-          <a:xfrm>
-            <a:off x="365760" y="2404872"/>
+          <p:cNvPr id="34" name="Shape 32"/>
+          <p:cNvSpPr/>
+          <p:nvPr/>
+        </p:nvSpPr>
+        <p:spPr>
+          <a:xfrm>
+            <a:off x="365760" y="3246120"/>
             <a:ext cx="2468880" cy="402336"/>
           </a:xfrm>
           <a:prstGeom prst="rect">
             <a:avLst/>
           </a:prstGeom>
           <a:solidFill>
-            <a:srgbClr val="DDD6FE"/>
+            <a:srgbClr val="F8FAFC"/>
           </a:solidFill>
           <a:ln w="12700">
             <a:solidFill>
@@ -34184,14 +35078,64 @@
       </p:sp>
       <p:sp>
         <p:nvSpPr>
-          <p:cNvPr id="29" name="Text 27"/>
-          <p:cNvSpPr/>
-          <p:nvPr/>
-        </p:nvSpPr>
-        <p:spPr>
-          <a:xfrm>
-            <a:off x="365760" y="2404872"/>
-            <a:ext cx="2468880" cy="402336"/>
+          <p:cNvPr id="35" name="Shape 33"/>
+          <p:cNvSpPr/>
+          <p:nvPr/>
+        </p:nvSpPr>
+        <p:spPr>
+          <a:xfrm>
+            <a:off x="2971800" y="3246120"/>
+            <a:ext cx="2834640" cy="402336"/>
+          </a:xfrm>
+          <a:prstGeom prst="rect">
+            <a:avLst/>
+          </a:prstGeom>
+          <a:solidFill>
+            <a:srgbClr val="F8FAFC"/>
+          </a:solidFill>
+          <a:ln w="12700">
+            <a:solidFill>
+              <a:srgbClr val="E2E8F0"/>
+            </a:solidFill>
+            <a:prstDash val="solid"/>
+          </a:ln>
+        </p:spPr>
+      </p:sp>
+      <p:sp>
+        <p:nvSpPr>
+          <p:cNvPr id="36" name="Shape 34"/>
+          <p:cNvSpPr/>
+          <p:nvPr/>
+        </p:nvSpPr>
+        <p:spPr>
+          <a:xfrm>
+            <a:off x="5943600" y="3246120"/>
+            <a:ext cx="2834640" cy="402336"/>
+          </a:xfrm>
+          <a:prstGeom prst="rect">
+            <a:avLst/>
+          </a:prstGeom>
+          <a:solidFill>
+            <a:srgbClr val="FCE7F3"/>
+          </a:solidFill>
+          <a:ln w="12700">
+            <a:solidFill>
+              <a:srgbClr val="E2E8F0"/>
+            </a:solidFill>
+            <a:prstDash val="solid"/>
+          </a:ln>
+        </p:spPr>
+      </p:sp>
+      <p:sp>
+        <p:nvSpPr>
+          <p:cNvPr id="37" name="Text 35"/>
+          <p:cNvSpPr/>
+          <p:nvPr/>
+        </p:nvSpPr>
+        <p:spPr>
+          <a:xfrm>
+            <a:off x="5943600" y="3246120"/>
+            <a:ext cx="2834640" cy="402336"/>
           </a:xfrm>
           <a:prstGeom prst="rect">
             <a:avLst/>
@@ -34209,13 +35153,13 @@
             <a:r>
               <a:rPr lang="en-US" sz="1300" b="1" dirty="0">
                 <a:solidFill>
-                  <a:srgbClr val="4C1D95"/>
+                  <a:srgbClr val="9D174D"/>
                 </a:solidFill>
                 <a:latin typeface="Trebuchet MS" pitchFamily="34" charset="0"/>
                 <a:ea typeface="Trebuchet MS" pitchFamily="34" charset="-122"/>
                 <a:cs typeface="Trebuchet MS" pitchFamily="34" charset="-120"/>
               </a:rPr>
-              <a:t>over-</a:t>
+              <a:t>-ness</a:t>
             </a:r>
             <a:endParaRPr lang="en-US" sz="1300" dirty="0"/>
           </a:p>
@@ -34223,64 +35167,14 @@
       </p:sp>
       <p:sp>
         <p:nvSpPr>
-          <p:cNvPr id="30" name="Shape 28"/>
-          <p:cNvSpPr/>
-          <p:nvPr/>
-        </p:nvSpPr>
-        <p:spPr>
-          <a:xfrm>
-            <a:off x="2971800" y="2404872"/>
-            <a:ext cx="2834640" cy="402336"/>
-          </a:xfrm>
-          <a:prstGeom prst="rect">
-            <a:avLst/>
-          </a:prstGeom>
-          <a:solidFill>
-            <a:srgbClr val="F8FAFC"/>
-          </a:solidFill>
-          <a:ln w="12700">
-            <a:solidFill>
-              <a:srgbClr val="E2E8F0"/>
-            </a:solidFill>
-            <a:prstDash val="solid"/>
-          </a:ln>
-        </p:spPr>
-      </p:sp>
-      <p:sp>
-        <p:nvSpPr>
-          <p:cNvPr id="31" name="Shape 29"/>
-          <p:cNvSpPr/>
-          <p:nvPr/>
-        </p:nvSpPr>
-        <p:spPr>
-          <a:xfrm>
-            <a:off x="5943600" y="2404872"/>
-            <a:ext cx="2834640" cy="402336"/>
-          </a:xfrm>
-          <a:prstGeom prst="rect">
-            <a:avLst/>
-          </a:prstGeom>
-          <a:solidFill>
-            <a:srgbClr val="FCE7F3"/>
-          </a:solidFill>
-          <a:ln w="12700">
-            <a:solidFill>
-              <a:srgbClr val="E2E8F0"/>
-            </a:solidFill>
-            <a:prstDash val="solid"/>
-          </a:ln>
-        </p:spPr>
-      </p:sp>
-      <p:sp>
-        <p:nvSpPr>
-          <p:cNvPr id="32" name="Text 30"/>
-          <p:cNvSpPr/>
-          <p:nvPr/>
-        </p:nvSpPr>
-        <p:spPr>
-          <a:xfrm>
-            <a:off x="5943600" y="2404872"/>
-            <a:ext cx="2834640" cy="402336"/>
+          <p:cNvPr id="38" name="Text 36"/>
+          <p:cNvSpPr/>
+          <p:nvPr/>
+        </p:nvSpPr>
+        <p:spPr>
+          <a:xfrm>
+            <a:off x="365760" y="3611880"/>
+            <a:ext cx="1828800" cy="347472"/>
           </a:xfrm>
           <a:prstGeom prst="rect">
             <a:avLst/>
@@ -34292,59 +35186,61 @@
           <a:bodyPr wrap="square" lIns="0" tIns="0" rIns="0" bIns="0" rtlCol="0" anchor="ctr"/>
           <a:lstStyle/>
           <a:p>
-            <a:pPr algn="ctr" indent="0" marL="0">
-              <a:buNone/>
-            </a:pPr>
-            <a:r>
-              <a:rPr lang="en-US" sz="1300" b="1" dirty="0">
-                <a:solidFill>
-                  <a:srgbClr val="9D174D"/>
+            <a:pPr algn="l" indent="0" marL="0">
+              <a:buNone/>
+            </a:pPr>
+            <a:r>
+              <a:rPr lang="en-US" sz="1200" b="1" dirty="0">
+                <a:solidFill>
+                  <a:srgbClr val="0F172A"/>
                 </a:solidFill>
                 <a:latin typeface="Trebuchet MS" pitchFamily="34" charset="0"/>
                 <a:ea typeface="Trebuchet MS" pitchFamily="34" charset="-122"/>
                 <a:cs typeface="Trebuchet MS" pitchFamily="34" charset="-120"/>
               </a:rPr>
-              <a:t>-est</a:t>
-            </a:r>
-            <a:endParaRPr lang="en-US" sz="1300" dirty="0"/>
-          </a:p>
-        </p:txBody>
-      </p:sp>
-      <p:sp>
-        <p:nvSpPr>
-          <p:cNvPr id="33" name="Shape 31"/>
-          <p:cNvSpPr/>
-          <p:nvPr/>
-        </p:nvSpPr>
-        <p:spPr>
-          <a:xfrm>
-            <a:off x="365760" y="2825496"/>
-            <a:ext cx="2468880" cy="402336"/>
-          </a:xfrm>
-          <a:prstGeom prst="rect">
-            <a:avLst/>
-          </a:prstGeom>
-          <a:solidFill>
-            <a:srgbClr val="DDD6FE"/>
-          </a:solidFill>
-          <a:ln w="12700">
-            <a:solidFill>
-              <a:srgbClr val="E2E8F0"/>
-            </a:solidFill>
-            <a:prstDash val="solid"/>
-          </a:ln>
-        </p:spPr>
-      </p:sp>
-      <p:sp>
-        <p:nvSpPr>
-          <p:cNvPr id="34" name="Text 32"/>
-          <p:cNvSpPr/>
-          <p:nvPr/>
-        </p:nvSpPr>
-        <p:spPr>
-          <a:xfrm>
-            <a:off x="365760" y="2825496"/>
-            <a:ext cx="2468880" cy="402336"/>
+              <a:t>Sample words:</a:t>
+            </a:r>
+            <a:endParaRPr lang="en-US" sz="1200" dirty="0"/>
+          </a:p>
+        </p:txBody>
+      </p:sp>
+      <p:sp>
+        <p:nvSpPr>
+          <p:cNvPr id="39" name="Shape 37"/>
+          <p:cNvSpPr/>
+          <p:nvPr/>
+        </p:nvSpPr>
+        <p:spPr>
+          <a:xfrm>
+            <a:off x="365760" y="4023360"/>
+            <a:ext cx="2011680" cy="402336"/>
+          </a:xfrm>
+          <a:prstGeom prst="rect">
+            <a:avLst>
+              <a:gd name="adj" fmla="val 13636"/>
+            </a:avLst>
+          </a:prstGeom>
+          <a:solidFill>
+            <a:srgbClr val="EEF2FF"/>
+          </a:solidFill>
+          <a:ln w="12700">
+            <a:solidFill>
+              <a:srgbClr val="6366F1"/>
+            </a:solidFill>
+            <a:prstDash val="solid"/>
+          </a:ln>
+        </p:spPr>
+      </p:sp>
+      <p:sp>
+        <p:nvSpPr>
+          <p:cNvPr id="40" name="Text 38"/>
+          <p:cNvSpPr/>
+          <p:nvPr/>
+        </p:nvSpPr>
+        <p:spPr>
+          <a:xfrm>
+            <a:off x="365760" y="4023360"/>
+            <a:ext cx="2011680" cy="402336"/>
           </a:xfrm>
           <a:prstGeom prst="rect">
             <a:avLst/>
@@ -34360,80 +35256,57 @@
               <a:buNone/>
             </a:pPr>
             <a:r>
-              <a:rPr lang="en-US" sz="1300" b="1" dirty="0">
-                <a:solidFill>
-                  <a:srgbClr val="4C1D95"/>
+              <a:rPr lang="en-US" sz="1200" b="1" dirty="0">
+                <a:solidFill>
+                  <a:srgbClr val="4338CA"/>
                 </a:solidFill>
                 <a:latin typeface="Trebuchet MS" pitchFamily="34" charset="0"/>
                 <a:ea typeface="Trebuchet MS" pitchFamily="34" charset="-122"/>
                 <a:cs typeface="Trebuchet MS" pitchFamily="34" charset="-120"/>
               </a:rPr>
-              <a:t>super-</a:t>
-            </a:r>
-            <a:endParaRPr lang="en-US" sz="1300" dirty="0"/>
-          </a:p>
-        </p:txBody>
-      </p:sp>
-      <p:sp>
-        <p:nvSpPr>
-          <p:cNvPr id="35" name="Shape 33"/>
-          <p:cNvSpPr/>
-          <p:nvPr/>
-        </p:nvSpPr>
-        <p:spPr>
-          <a:xfrm>
-            <a:off x="2971800" y="2825496"/>
-            <a:ext cx="2834640" cy="402336"/>
-          </a:xfrm>
-          <a:prstGeom prst="rect">
-            <a:avLst/>
-          </a:prstGeom>
-          <a:solidFill>
-            <a:srgbClr val="F1F5F9"/>
-          </a:solidFill>
-          <a:ln w="12700">
-            <a:solidFill>
-              <a:srgbClr val="E2E8F0"/>
-            </a:solidFill>
-            <a:prstDash val="solid"/>
-          </a:ln>
-        </p:spPr>
-      </p:sp>
-      <p:sp>
-        <p:nvSpPr>
-          <p:cNvPr id="36" name="Shape 34"/>
-          <p:cNvSpPr/>
-          <p:nvPr/>
-        </p:nvSpPr>
-        <p:spPr>
-          <a:xfrm>
-            <a:off x="5943600" y="2825496"/>
-            <a:ext cx="2834640" cy="402336"/>
-          </a:xfrm>
-          <a:prstGeom prst="rect">
-            <a:avLst/>
-          </a:prstGeom>
-          <a:solidFill>
-            <a:srgbClr val="FCE7F3"/>
-          </a:solidFill>
-          <a:ln w="12700">
-            <a:solidFill>
-              <a:srgbClr val="E2E8F0"/>
-            </a:solidFill>
-            <a:prstDash val="solid"/>
-          </a:ln>
-        </p:spPr>
-      </p:sp>
-      <p:sp>
-        <p:nvSpPr>
-          <p:cNvPr id="37" name="Text 35"/>
-          <p:cNvSpPr/>
-          <p:nvPr/>
-        </p:nvSpPr>
-        <p:spPr>
-          <a:xfrm>
-            <a:off x="5943600" y="2825496"/>
-            <a:ext cx="2834640" cy="402336"/>
+              <a:t>sharp</a:t>
+            </a:r>
+            <a:endParaRPr lang="en-US" sz="1200" dirty="0"/>
+          </a:p>
+        </p:txBody>
+      </p:sp>
+      <p:sp>
+        <p:nvSpPr>
+          <p:cNvPr id="41" name="Shape 39"/>
+          <p:cNvSpPr/>
+          <p:nvPr/>
+        </p:nvSpPr>
+        <p:spPr>
+          <a:xfrm>
+            <a:off x="2542032" y="4023360"/>
+            <a:ext cx="2011680" cy="402336"/>
+          </a:xfrm>
+          <a:prstGeom prst="rect">
+            <a:avLst>
+              <a:gd name="adj" fmla="val 13636"/>
+            </a:avLst>
+          </a:prstGeom>
+          <a:solidFill>
+            <a:srgbClr val="EEF2FF"/>
+          </a:solidFill>
+          <a:ln w="12700">
+            <a:solidFill>
+              <a:srgbClr val="6366F1"/>
+            </a:solidFill>
+            <a:prstDash val="solid"/>
+          </a:ln>
+        </p:spPr>
+      </p:sp>
+      <p:sp>
+        <p:nvSpPr>
+          <p:cNvPr id="42" name="Text 40"/>
+          <p:cNvSpPr/>
+          <p:nvPr/>
+        </p:nvSpPr>
+        <p:spPr>
+          <a:xfrm>
+            <a:off x="2542032" y="4023360"/>
+            <a:ext cx="2011680" cy="402336"/>
           </a:xfrm>
           <a:prstGeom prst="rect">
             <a:avLst/>
@@ -34449,55 +35322,57 @@
               <a:buNone/>
             </a:pPr>
             <a:r>
-              <a:rPr lang="en-US" sz="1300" b="1" dirty="0">
-                <a:solidFill>
-                  <a:srgbClr val="9D174D"/>
+              <a:rPr lang="en-US" sz="1200" b="1" dirty="0">
+                <a:solidFill>
+                  <a:srgbClr val="4338CA"/>
                 </a:solidFill>
                 <a:latin typeface="Trebuchet MS" pitchFamily="34" charset="0"/>
                 <a:ea typeface="Trebuchet MS" pitchFamily="34" charset="-122"/>
                 <a:cs typeface="Trebuchet MS" pitchFamily="34" charset="-120"/>
               </a:rPr>
-              <a:t>-ly</a:t>
-            </a:r>
-            <a:endParaRPr lang="en-US" sz="1300" dirty="0"/>
-          </a:p>
-        </p:txBody>
-      </p:sp>
-      <p:sp>
-        <p:nvSpPr>
-          <p:cNvPr id="38" name="Shape 36"/>
-          <p:cNvSpPr/>
-          <p:nvPr/>
-        </p:nvSpPr>
-        <p:spPr>
-          <a:xfrm>
-            <a:off x="365760" y="3246120"/>
-            <a:ext cx="2468880" cy="402336"/>
-          </a:xfrm>
-          <a:prstGeom prst="rect">
-            <a:avLst/>
-          </a:prstGeom>
-          <a:solidFill>
-            <a:srgbClr val="DDD6FE"/>
-          </a:solidFill>
-          <a:ln w="12700">
-            <a:solidFill>
-              <a:srgbClr val="E2E8F0"/>
-            </a:solidFill>
-            <a:prstDash val="solid"/>
-          </a:ln>
-        </p:spPr>
-      </p:sp>
-      <p:sp>
-        <p:nvSpPr>
-          <p:cNvPr id="39" name="Text 37"/>
-          <p:cNvSpPr/>
-          <p:nvPr/>
-        </p:nvSpPr>
-        <p:spPr>
-          <a:xfrm>
-            <a:off x="365760" y="3246120"/>
-            <a:ext cx="2468880" cy="402336"/>
+              <a:t>sharpen</a:t>
+            </a:r>
+            <a:endParaRPr lang="en-US" sz="1200" dirty="0"/>
+          </a:p>
+        </p:txBody>
+      </p:sp>
+      <p:sp>
+        <p:nvSpPr>
+          <p:cNvPr id="43" name="Shape 41"/>
+          <p:cNvSpPr/>
+          <p:nvPr/>
+        </p:nvSpPr>
+        <p:spPr>
+          <a:xfrm>
+            <a:off x="4718304" y="4023360"/>
+            <a:ext cx="2011680" cy="402336"/>
+          </a:xfrm>
+          <a:prstGeom prst="rect">
+            <a:avLst>
+              <a:gd name="adj" fmla="val 13636"/>
+            </a:avLst>
+          </a:prstGeom>
+          <a:solidFill>
+            <a:srgbClr val="EEF2FF"/>
+          </a:solidFill>
+          <a:ln w="12700">
+            <a:solidFill>
+              <a:srgbClr val="6366F1"/>
+            </a:solidFill>
+            <a:prstDash val="solid"/>
+          </a:ln>
+        </p:spPr>
+      </p:sp>
+      <p:sp>
+        <p:nvSpPr>
+          <p:cNvPr id="44" name="Text 42"/>
+          <p:cNvSpPr/>
+          <p:nvPr/>
+        </p:nvSpPr>
+        <p:spPr>
+          <a:xfrm>
+            <a:off x="4718304" y="4023360"/>
+            <a:ext cx="2011680" cy="402336"/>
           </a:xfrm>
           <a:prstGeom prst="rect">
             <a:avLst/>
@@ -34513,80 +35388,57 @@
               <a:buNone/>
             </a:pPr>
             <a:r>
-              <a:rPr lang="en-US" sz="1300" b="1" dirty="0">
-                <a:solidFill>
-                  <a:srgbClr val="4C1D95"/>
+              <a:rPr lang="en-US" sz="1200" b="1" dirty="0">
+                <a:solidFill>
+                  <a:srgbClr val="4338CA"/>
                 </a:solidFill>
                 <a:latin typeface="Trebuchet MS" pitchFamily="34" charset="0"/>
                 <a:ea typeface="Trebuchet MS" pitchFamily="34" charset="-122"/>
                 <a:cs typeface="Trebuchet MS" pitchFamily="34" charset="-120"/>
               </a:rPr>
-              <a:t>re-</a:t>
-            </a:r>
-            <a:endParaRPr lang="en-US" sz="1300" dirty="0"/>
-          </a:p>
-        </p:txBody>
-      </p:sp>
-      <p:sp>
-        <p:nvSpPr>
-          <p:cNvPr id="40" name="Shape 38"/>
-          <p:cNvSpPr/>
-          <p:nvPr/>
-        </p:nvSpPr>
-        <p:spPr>
-          <a:xfrm>
-            <a:off x="2971800" y="3246120"/>
-            <a:ext cx="2834640" cy="402336"/>
-          </a:xfrm>
-          <a:prstGeom prst="rect">
-            <a:avLst/>
-          </a:prstGeom>
-          <a:solidFill>
-            <a:srgbClr val="F8FAFC"/>
-          </a:solidFill>
-          <a:ln w="12700">
-            <a:solidFill>
-              <a:srgbClr val="E2E8F0"/>
-            </a:solidFill>
-            <a:prstDash val="solid"/>
-          </a:ln>
-        </p:spPr>
-      </p:sp>
-      <p:sp>
-        <p:nvSpPr>
-          <p:cNvPr id="41" name="Shape 39"/>
-          <p:cNvSpPr/>
-          <p:nvPr/>
-        </p:nvSpPr>
-        <p:spPr>
-          <a:xfrm>
-            <a:off x="5943600" y="3246120"/>
-            <a:ext cx="2834640" cy="402336"/>
-          </a:xfrm>
-          <a:prstGeom prst="rect">
-            <a:avLst/>
-          </a:prstGeom>
-          <a:solidFill>
-            <a:srgbClr val="FCE7F3"/>
-          </a:solidFill>
-          <a:ln w="12700">
-            <a:solidFill>
-              <a:srgbClr val="E2E8F0"/>
-            </a:solidFill>
-            <a:prstDash val="solid"/>
-          </a:ln>
-        </p:spPr>
-      </p:sp>
-      <p:sp>
-        <p:nvSpPr>
-          <p:cNvPr id="42" name="Text 40"/>
-          <p:cNvSpPr/>
-          <p:nvPr/>
-        </p:nvSpPr>
-        <p:spPr>
-          <a:xfrm>
-            <a:off x="5943600" y="3246120"/>
-            <a:ext cx="2834640" cy="402336"/>
+              <a:t>sharper</a:t>
+            </a:r>
+            <a:endParaRPr lang="en-US" sz="1200" dirty="0"/>
+          </a:p>
+        </p:txBody>
+      </p:sp>
+      <p:sp>
+        <p:nvSpPr>
+          <p:cNvPr id="45" name="Shape 43"/>
+          <p:cNvSpPr/>
+          <p:nvPr/>
+        </p:nvSpPr>
+        <p:spPr>
+          <a:xfrm>
+            <a:off x="6894576" y="4023360"/>
+            <a:ext cx="2011680" cy="402336"/>
+          </a:xfrm>
+          <a:prstGeom prst="rect">
+            <a:avLst>
+              <a:gd name="adj" fmla="val 13636"/>
+            </a:avLst>
+          </a:prstGeom>
+          <a:solidFill>
+            <a:srgbClr val="EEF2FF"/>
+          </a:solidFill>
+          <a:ln w="12700">
+            <a:solidFill>
+              <a:srgbClr val="6366F1"/>
+            </a:solidFill>
+            <a:prstDash val="solid"/>
+          </a:ln>
+        </p:spPr>
+      </p:sp>
+      <p:sp>
+        <p:nvSpPr>
+          <p:cNvPr id="46" name="Text 44"/>
+          <p:cNvSpPr/>
+          <p:nvPr/>
+        </p:nvSpPr>
+        <p:spPr>
+          <a:xfrm>
+            <a:off x="6894576" y="4023360"/>
+            <a:ext cx="2011680" cy="402336"/>
           </a:xfrm>
           <a:prstGeom prst="rect">
             <a:avLst/>
@@ -34602,582 +35454,15 @@
               <a:buNone/>
             </a:pPr>
             <a:r>
-              <a:rPr lang="en-US" sz="1300" b="1" dirty="0">
-                <a:solidFill>
-                  <a:srgbClr val="9D174D"/>
+              <a:rPr lang="en-US" sz="1200" b="1" dirty="0">
+                <a:solidFill>
+                  <a:srgbClr val="4338CA"/>
                 </a:solidFill>
                 <a:latin typeface="Trebuchet MS" pitchFamily="34" charset="0"/>
                 <a:ea typeface="Trebuchet MS" pitchFamily="34" charset="-122"/>
                 <a:cs typeface="Trebuchet MS" pitchFamily="34" charset="-120"/>
               </a:rPr>
-              <a:t>-ness</a:t>
-            </a:r>
-            <a:endParaRPr lang="en-US" sz="1300" dirty="0"/>
-          </a:p>
-        </p:txBody>
-      </p:sp>
-      <p:sp>
-        <p:nvSpPr>
-          <p:cNvPr id="43" name="Text 41"/>
-          <p:cNvSpPr/>
-          <p:nvPr/>
-        </p:nvSpPr>
-        <p:spPr>
-          <a:xfrm>
-            <a:off x="365760" y="3611880"/>
-            <a:ext cx="1828800" cy="347472"/>
-          </a:xfrm>
-          <a:prstGeom prst="rect">
-            <a:avLst/>
-          </a:prstGeom>
-          <a:noFill/>
-          <a:ln/>
-        </p:spPr>
-        <p:txBody>
-          <a:bodyPr wrap="square" lIns="0" tIns="0" rIns="0" bIns="0" rtlCol="0" anchor="ctr"/>
-          <a:lstStyle/>
-          <a:p>
-            <a:pPr algn="l" indent="0" marL="0">
-              <a:buNone/>
-            </a:pPr>
-            <a:r>
-              <a:rPr lang="en-US" sz="1200" b="1" dirty="0">
-                <a:solidFill>
-                  <a:srgbClr val="0F172A"/>
-                </a:solidFill>
-                <a:latin typeface="Trebuchet MS" pitchFamily="34" charset="0"/>
-                <a:ea typeface="Trebuchet MS" pitchFamily="34" charset="-122"/>
-                <a:cs typeface="Trebuchet MS" pitchFamily="34" charset="-120"/>
-              </a:rPr>
-              <a:t>Sample words:</a:t>
-            </a:r>
-            <a:endParaRPr lang="en-US" sz="1200" dirty="0"/>
-          </a:p>
-        </p:txBody>
-      </p:sp>
-      <p:sp>
-        <p:nvSpPr>
-          <p:cNvPr id="44" name="Shape 42"/>
-          <p:cNvSpPr/>
-          <p:nvPr/>
-        </p:nvSpPr>
-        <p:spPr>
-          <a:xfrm>
-            <a:off x="365760" y="4023360"/>
-            <a:ext cx="2011680" cy="402336"/>
-          </a:xfrm>
-          <a:prstGeom prst="rect">
-            <a:avLst>
-              <a:gd name="adj" fmla="val 13636"/>
-            </a:avLst>
-          </a:prstGeom>
-          <a:solidFill>
-            <a:srgbClr val="EEF2FF"/>
-          </a:solidFill>
-          <a:ln w="12700">
-            <a:solidFill>
-              <a:srgbClr val="6366F1"/>
-            </a:solidFill>
-            <a:prstDash val="solid"/>
-          </a:ln>
-        </p:spPr>
-      </p:sp>
-      <p:sp>
-        <p:nvSpPr>
-          <p:cNvPr id="45" name="Text 43"/>
-          <p:cNvSpPr/>
-          <p:nvPr/>
-        </p:nvSpPr>
-        <p:spPr>
-          <a:xfrm>
-            <a:off x="365760" y="4023360"/>
-            <a:ext cx="2011680" cy="402336"/>
-          </a:xfrm>
-          <a:prstGeom prst="rect">
-            <a:avLst/>
-          </a:prstGeom>
-          <a:noFill/>
-          <a:ln/>
-        </p:spPr>
-        <p:txBody>
-          <a:bodyPr wrap="square" lIns="0" tIns="0" rIns="0" bIns="0" rtlCol="0" anchor="ctr"/>
-          <a:lstStyle/>
-          <a:p>
-            <a:pPr algn="ctr" indent="0" marL="0">
-              <a:buNone/>
-            </a:pPr>
-            <a:r>
-              <a:rPr lang="en-US" sz="1200" b="1" dirty="0">
-                <a:solidFill>
-                  <a:srgbClr val="4338CA"/>
-                </a:solidFill>
-                <a:latin typeface="Trebuchet MS" pitchFamily="34" charset="0"/>
-                <a:ea typeface="Trebuchet MS" pitchFamily="34" charset="-122"/>
-                <a:cs typeface="Trebuchet MS" pitchFamily="34" charset="-120"/>
-              </a:rPr>
-              <a:t>sharpen</a:t>
-            </a:r>
-            <a:endParaRPr lang="en-US" sz="1200" dirty="0"/>
-          </a:p>
-        </p:txBody>
-      </p:sp>
-      <p:sp>
-        <p:nvSpPr>
-          <p:cNvPr id="46" name="Shape 44"/>
-          <p:cNvSpPr/>
-          <p:nvPr/>
-        </p:nvSpPr>
-        <p:spPr>
-          <a:xfrm>
-            <a:off x="2542032" y="4023360"/>
-            <a:ext cx="2011680" cy="402336"/>
-          </a:xfrm>
-          <a:prstGeom prst="rect">
-            <a:avLst>
-              <a:gd name="adj" fmla="val 13636"/>
-            </a:avLst>
-          </a:prstGeom>
-          <a:solidFill>
-            <a:srgbClr val="EEF2FF"/>
-          </a:solidFill>
-          <a:ln w="12700">
-            <a:solidFill>
-              <a:srgbClr val="6366F1"/>
-            </a:solidFill>
-            <a:prstDash val="solid"/>
-          </a:ln>
-        </p:spPr>
-      </p:sp>
-      <p:sp>
-        <p:nvSpPr>
-          <p:cNvPr id="47" name="Text 45"/>
-          <p:cNvSpPr/>
-          <p:nvPr/>
-        </p:nvSpPr>
-        <p:spPr>
-          <a:xfrm>
-            <a:off x="2542032" y="4023360"/>
-            <a:ext cx="2011680" cy="402336"/>
-          </a:xfrm>
-          <a:prstGeom prst="rect">
-            <a:avLst/>
-          </a:prstGeom>
-          <a:noFill/>
-          <a:ln/>
-        </p:spPr>
-        <p:txBody>
-          <a:bodyPr wrap="square" lIns="0" tIns="0" rIns="0" bIns="0" rtlCol="0" anchor="ctr"/>
-          <a:lstStyle/>
-          <a:p>
-            <a:pPr algn="ctr" indent="0" marL="0">
-              <a:buNone/>
-            </a:pPr>
-            <a:r>
-              <a:rPr lang="en-US" sz="1200" b="1" dirty="0">
-                <a:solidFill>
-                  <a:srgbClr val="4338CA"/>
-                </a:solidFill>
-                <a:latin typeface="Trebuchet MS" pitchFamily="34" charset="0"/>
-                <a:ea typeface="Trebuchet MS" pitchFamily="34" charset="-122"/>
-                <a:cs typeface="Trebuchet MS" pitchFamily="34" charset="-120"/>
-              </a:rPr>
-              <a:t>sharper</a:t>
-            </a:r>
-            <a:endParaRPr lang="en-US" sz="1200" dirty="0"/>
-          </a:p>
-        </p:txBody>
-      </p:sp>
-      <p:sp>
-        <p:nvSpPr>
-          <p:cNvPr id="48" name="Shape 46"/>
-          <p:cNvSpPr/>
-          <p:nvPr/>
-        </p:nvSpPr>
-        <p:spPr>
-          <a:xfrm>
-            <a:off x="4718304" y="4023360"/>
-            <a:ext cx="2011680" cy="402336"/>
-          </a:xfrm>
-          <a:prstGeom prst="rect">
-            <a:avLst>
-              <a:gd name="adj" fmla="val 13636"/>
-            </a:avLst>
-          </a:prstGeom>
-          <a:solidFill>
-            <a:srgbClr val="EEF2FF"/>
-          </a:solidFill>
-          <a:ln w="12700">
-            <a:solidFill>
-              <a:srgbClr val="6366F1"/>
-            </a:solidFill>
-            <a:prstDash val="solid"/>
-          </a:ln>
-        </p:spPr>
-      </p:sp>
-      <p:sp>
-        <p:nvSpPr>
-          <p:cNvPr id="49" name="Text 47"/>
-          <p:cNvSpPr/>
-          <p:nvPr/>
-        </p:nvSpPr>
-        <p:spPr>
-          <a:xfrm>
-            <a:off x="4718304" y="4023360"/>
-            <a:ext cx="2011680" cy="402336"/>
-          </a:xfrm>
-          <a:prstGeom prst="rect">
-            <a:avLst/>
-          </a:prstGeom>
-          <a:noFill/>
-          <a:ln/>
-        </p:spPr>
-        <p:txBody>
-          <a:bodyPr wrap="square" lIns="0" tIns="0" rIns="0" bIns="0" rtlCol="0" anchor="ctr"/>
-          <a:lstStyle/>
-          <a:p>
-            <a:pPr algn="ctr" indent="0" marL="0">
-              <a:buNone/>
-            </a:pPr>
-            <a:r>
-              <a:rPr lang="en-US" sz="1200" b="1" dirty="0">
-                <a:solidFill>
-                  <a:srgbClr val="4338CA"/>
-                </a:solidFill>
-                <a:latin typeface="Trebuchet MS" pitchFamily="34" charset="0"/>
-                <a:ea typeface="Trebuchet MS" pitchFamily="34" charset="-122"/>
-                <a:cs typeface="Trebuchet MS" pitchFamily="34" charset="-120"/>
-              </a:rPr>
-              <a:t>sharpest</a:t>
-            </a:r>
-            <a:endParaRPr lang="en-US" sz="1200" dirty="0"/>
-          </a:p>
-        </p:txBody>
-      </p:sp>
-      <p:sp>
-        <p:nvSpPr>
-          <p:cNvPr id="50" name="Shape 48"/>
-          <p:cNvSpPr/>
-          <p:nvPr/>
-        </p:nvSpPr>
-        <p:spPr>
-          <a:xfrm>
-            <a:off x="6894576" y="4023360"/>
-            <a:ext cx="2011680" cy="402336"/>
-          </a:xfrm>
-          <a:prstGeom prst="rect">
-            <a:avLst>
-              <a:gd name="adj" fmla="val 13636"/>
-            </a:avLst>
-          </a:prstGeom>
-          <a:solidFill>
-            <a:srgbClr val="EEF2FF"/>
-          </a:solidFill>
-          <a:ln w="12700">
-            <a:solidFill>
-              <a:srgbClr val="6366F1"/>
-            </a:solidFill>
-            <a:prstDash val="solid"/>
-          </a:ln>
-        </p:spPr>
-      </p:sp>
-      <p:sp>
-        <p:nvSpPr>
-          <p:cNvPr id="51" name="Text 49"/>
-          <p:cNvSpPr/>
-          <p:nvPr/>
-        </p:nvSpPr>
-        <p:spPr>
-          <a:xfrm>
-            <a:off x="6894576" y="4023360"/>
-            <a:ext cx="2011680" cy="402336"/>
-          </a:xfrm>
-          <a:prstGeom prst="rect">
-            <a:avLst/>
-          </a:prstGeom>
-          <a:noFill/>
-          <a:ln/>
-        </p:spPr>
-        <p:txBody>
-          <a:bodyPr wrap="square" lIns="0" tIns="0" rIns="0" bIns="0" rtlCol="0" anchor="ctr"/>
-          <a:lstStyle/>
-          <a:p>
-            <a:pPr algn="ctr" indent="0" marL="0">
-              <a:buNone/>
-            </a:pPr>
-            <a:r>
-              <a:rPr lang="en-US" sz="1200" b="1" dirty="0">
-                <a:solidFill>
-                  <a:srgbClr val="4338CA"/>
-                </a:solidFill>
-                <a:latin typeface="Trebuchet MS" pitchFamily="34" charset="0"/>
-                <a:ea typeface="Trebuchet MS" pitchFamily="34" charset="-122"/>
-                <a:cs typeface="Trebuchet MS" pitchFamily="34" charset="-120"/>
-              </a:rPr>
               <a:t>sharply</a:t>
-            </a:r>
-            <a:endParaRPr lang="en-US" sz="1200" dirty="0"/>
-          </a:p>
-        </p:txBody>
-      </p:sp>
-      <p:sp>
-        <p:nvSpPr>
-          <p:cNvPr id="52" name="Shape 50"/>
-          <p:cNvSpPr/>
-          <p:nvPr/>
-        </p:nvSpPr>
-        <p:spPr>
-          <a:xfrm>
-            <a:off x="365760" y="4498848"/>
-            <a:ext cx="2011680" cy="402336"/>
-          </a:xfrm>
-          <a:prstGeom prst="rect">
-            <a:avLst>
-              <a:gd name="adj" fmla="val 13636"/>
-            </a:avLst>
-          </a:prstGeom>
-          <a:solidFill>
-            <a:srgbClr val="EEF2FF"/>
-          </a:solidFill>
-          <a:ln w="12700">
-            <a:solidFill>
-              <a:srgbClr val="6366F1"/>
-            </a:solidFill>
-            <a:prstDash val="solid"/>
-          </a:ln>
-        </p:spPr>
-      </p:sp>
-      <p:sp>
-        <p:nvSpPr>
-          <p:cNvPr id="53" name="Text 51"/>
-          <p:cNvSpPr/>
-          <p:nvPr/>
-        </p:nvSpPr>
-        <p:spPr>
-          <a:xfrm>
-            <a:off x="365760" y="4498848"/>
-            <a:ext cx="2011680" cy="402336"/>
-          </a:xfrm>
-          <a:prstGeom prst="rect">
-            <a:avLst/>
-          </a:prstGeom>
-          <a:noFill/>
-          <a:ln/>
-        </p:spPr>
-        <p:txBody>
-          <a:bodyPr wrap="square" lIns="0" tIns="0" rIns="0" bIns="0" rtlCol="0" anchor="ctr"/>
-          <a:lstStyle/>
-          <a:p>
-            <a:pPr algn="ctr" indent="0" marL="0">
-              <a:buNone/>
-            </a:pPr>
-            <a:r>
-              <a:rPr lang="en-US" sz="1200" b="1" dirty="0">
-                <a:solidFill>
-                  <a:srgbClr val="4338CA"/>
-                </a:solidFill>
-                <a:latin typeface="Trebuchet MS" pitchFamily="34" charset="0"/>
-                <a:ea typeface="Trebuchet MS" pitchFamily="34" charset="-122"/>
-                <a:cs typeface="Trebuchet MS" pitchFamily="34" charset="-120"/>
-              </a:rPr>
-              <a:t>sharpness</a:t>
-            </a:r>
-            <a:endParaRPr lang="en-US" sz="1200" dirty="0"/>
-          </a:p>
-        </p:txBody>
-      </p:sp>
-      <p:sp>
-        <p:nvSpPr>
-          <p:cNvPr id="54" name="Shape 52"/>
-          <p:cNvSpPr/>
-          <p:nvPr/>
-        </p:nvSpPr>
-        <p:spPr>
-          <a:xfrm>
-            <a:off x="2542032" y="4498848"/>
-            <a:ext cx="2011680" cy="402336"/>
-          </a:xfrm>
-          <a:prstGeom prst="rect">
-            <a:avLst>
-              <a:gd name="adj" fmla="val 13636"/>
-            </a:avLst>
-          </a:prstGeom>
-          <a:solidFill>
-            <a:srgbClr val="EEF2FF"/>
-          </a:solidFill>
-          <a:ln w="12700">
-            <a:solidFill>
-              <a:srgbClr val="6366F1"/>
-            </a:solidFill>
-            <a:prstDash val="solid"/>
-          </a:ln>
-        </p:spPr>
-      </p:sp>
-      <p:sp>
-        <p:nvSpPr>
-          <p:cNvPr id="55" name="Text 53"/>
-          <p:cNvSpPr/>
-          <p:nvPr/>
-        </p:nvSpPr>
-        <p:spPr>
-          <a:xfrm>
-            <a:off x="2542032" y="4498848"/>
-            <a:ext cx="2011680" cy="402336"/>
-          </a:xfrm>
-          <a:prstGeom prst="rect">
-            <a:avLst/>
-          </a:prstGeom>
-          <a:noFill/>
-          <a:ln/>
-        </p:spPr>
-        <p:txBody>
-          <a:bodyPr wrap="square" lIns="0" tIns="0" rIns="0" bIns="0" rtlCol="0" anchor="ctr"/>
-          <a:lstStyle/>
-          <a:p>
-            <a:pPr algn="ctr" indent="0" marL="0">
-              <a:buNone/>
-            </a:pPr>
-            <a:r>
-              <a:rPr lang="en-US" sz="1200" b="1" dirty="0">
-                <a:solidFill>
-                  <a:srgbClr val="4338CA"/>
-                </a:solidFill>
-                <a:latin typeface="Trebuchet MS" pitchFamily="34" charset="0"/>
-                <a:ea typeface="Trebuchet MS" pitchFamily="34" charset="-122"/>
-                <a:cs typeface="Trebuchet MS" pitchFamily="34" charset="-120"/>
-              </a:rPr>
-              <a:t>sharpener</a:t>
-            </a:r>
-            <a:endParaRPr lang="en-US" sz="1200" dirty="0"/>
-          </a:p>
-        </p:txBody>
-      </p:sp>
-      <p:sp>
-        <p:nvSpPr>
-          <p:cNvPr id="56" name="Shape 54"/>
-          <p:cNvSpPr/>
-          <p:nvPr/>
-        </p:nvSpPr>
-        <p:spPr>
-          <a:xfrm>
-            <a:off x="4718304" y="4498848"/>
-            <a:ext cx="2011680" cy="402336"/>
-          </a:xfrm>
-          <a:prstGeom prst="rect">
-            <a:avLst>
-              <a:gd name="adj" fmla="val 13636"/>
-            </a:avLst>
-          </a:prstGeom>
-          <a:solidFill>
-            <a:srgbClr val="EEF2FF"/>
-          </a:solidFill>
-          <a:ln w="12700">
-            <a:solidFill>
-              <a:srgbClr val="6366F1"/>
-            </a:solidFill>
-            <a:prstDash val="solid"/>
-          </a:ln>
-        </p:spPr>
-      </p:sp>
-      <p:sp>
-        <p:nvSpPr>
-          <p:cNvPr id="57" name="Text 55"/>
-          <p:cNvSpPr/>
-          <p:nvPr/>
-        </p:nvSpPr>
-        <p:spPr>
-          <a:xfrm>
-            <a:off x="4718304" y="4498848"/>
-            <a:ext cx="2011680" cy="402336"/>
-          </a:xfrm>
-          <a:prstGeom prst="rect">
-            <a:avLst/>
-          </a:prstGeom>
-          <a:noFill/>
-          <a:ln/>
-        </p:spPr>
-        <p:txBody>
-          <a:bodyPr wrap="square" lIns="0" tIns="0" rIns="0" bIns="0" rtlCol="0" anchor="ctr"/>
-          <a:lstStyle/>
-          <a:p>
-            <a:pPr algn="ctr" indent="0" marL="0">
-              <a:buNone/>
-            </a:pPr>
-            <a:r>
-              <a:rPr lang="en-US" sz="1200" b="1" dirty="0">
-                <a:solidFill>
-                  <a:srgbClr val="4338CA"/>
-                </a:solidFill>
-                <a:latin typeface="Trebuchet MS" pitchFamily="34" charset="0"/>
-                <a:ea typeface="Trebuchet MS" pitchFamily="34" charset="-122"/>
-                <a:cs typeface="Trebuchet MS" pitchFamily="34" charset="-120"/>
-              </a:rPr>
-              <a:t>unsharpened</a:t>
-            </a:r>
-            <a:endParaRPr lang="en-US" sz="1200" dirty="0"/>
-          </a:p>
-        </p:txBody>
-      </p:sp>
-      <p:sp>
-        <p:nvSpPr>
-          <p:cNvPr id="58" name="Shape 56"/>
-          <p:cNvSpPr/>
-          <p:nvPr/>
-        </p:nvSpPr>
-        <p:spPr>
-          <a:xfrm>
-            <a:off x="6894576" y="4498848"/>
-            <a:ext cx="2011680" cy="402336"/>
-          </a:xfrm>
-          <a:prstGeom prst="rect">
-            <a:avLst>
-              <a:gd name="adj" fmla="val 13636"/>
-            </a:avLst>
-          </a:prstGeom>
-          <a:solidFill>
-            <a:srgbClr val="EEF2FF"/>
-          </a:solidFill>
-          <a:ln w="12700">
-            <a:solidFill>
-              <a:srgbClr val="6366F1"/>
-            </a:solidFill>
-            <a:prstDash val="solid"/>
-          </a:ln>
-        </p:spPr>
-      </p:sp>
-      <p:sp>
-        <p:nvSpPr>
-          <p:cNvPr id="59" name="Text 57"/>
-          <p:cNvSpPr/>
-          <p:nvPr/>
-        </p:nvSpPr>
-        <p:spPr>
-          <a:xfrm>
-            <a:off x="6894576" y="4498848"/>
-            <a:ext cx="2011680" cy="402336"/>
-          </a:xfrm>
-          <a:prstGeom prst="rect">
-            <a:avLst/>
-          </a:prstGeom>
-          <a:noFill/>
-          <a:ln/>
-        </p:spPr>
-        <p:txBody>
-          <a:bodyPr wrap="square" lIns="0" tIns="0" rIns="0" bIns="0" rtlCol="0" anchor="ctr"/>
-          <a:lstStyle/>
-          <a:p>
-            <a:pPr algn="ctr" indent="0" marL="0">
-              <a:buNone/>
-            </a:pPr>
-            <a:r>
-              <a:rPr lang="en-US" sz="1200" b="1" dirty="0">
-                <a:solidFill>
-                  <a:srgbClr val="4338CA"/>
-                </a:solidFill>
-                <a:latin typeface="Trebuchet MS" pitchFamily="34" charset="0"/>
-                <a:ea typeface="Trebuchet MS" pitchFamily="34" charset="-122"/>
-                <a:cs typeface="Trebuchet MS" pitchFamily="34" charset="-120"/>
-              </a:rPr>
-              <a:t>outsharp</a:t>
             </a:r>
             <a:endParaRPr lang="en-US" sz="1200" dirty="0"/>
           </a:p>
@@ -35469,7 +35754,7 @@
                 <a:ea typeface="Calibri" pitchFamily="34" charset="-122"/>
                 <a:cs typeface="Calibri" pitchFamily="34" charset="-120"/>
               </a:rPr>
-              <a:t>Word Labs  •  wordlabs.app  •  Root: 'sharp' = having a fine cutting edge</a:t>
+              <a:t>Word Labs  •  wordlabs.app  •  Root: 'sharp' = having a fine edge or point</a:t>
             </a:r>
             <a:endParaRPr lang="en-US" sz="800" dirty="0"/>
           </a:p>
@@ -35633,7 +35918,7 @@
                 <a:ea typeface="Calibri" pitchFamily="34" charset="-122"/>
                 <a:cs typeface="Calibri" pitchFamily="34" charset="-120"/>
               </a:rPr>
-              <a:t>The core part of a word carrying its basic meaning. For example, 'sharp' means 'having a fine cutting edge'.</a:t>
+              <a:t>The core part of a word carrying its basic meaning. For example, 'sharp' means 'having a fine edge or point'.</a:t>
             </a:r>
             <a:endParaRPr lang="en-US" sz="1350" dirty="0"/>
           </a:p>
@@ -36253,7 +36538,7 @@
                 <a:ea typeface="Calibri" pitchFamily="34" charset="-122"/>
                 <a:cs typeface="Calibri" pitchFamily="34" charset="-120"/>
               </a:rPr>
-              <a:t>Word Labs  •  wordlabs.app  •  Root: 'sharp' = having a fine cutting edge</a:t>
+              <a:t>Word Labs  •  wordlabs.app  •  Root: 'sharp' = having a fine edge or point</a:t>
             </a:r>
             <a:endParaRPr lang="en-US" sz="800" dirty="0"/>
           </a:p>
@@ -36365,7 +36650,7 @@
                 <a:ea typeface="Calibri" pitchFamily="34" charset="-122"/>
                 <a:cs typeface="Calibri" pitchFamily="34" charset="-120"/>
               </a:rPr>
-              <a:t>1.  Adding '-ly' to 'sharp' makes an adverb that describes how something is done.</a:t>
+              <a:t>1.  'sharp' means 'soft and fluffy to touch'.</a:t>
             </a:r>
             <a:endParaRPr lang="en-US" sz="1300" dirty="0"/>
           </a:p>
@@ -36388,11 +36673,11 @@
             </a:avLst>
           </a:prstGeom>
           <a:solidFill>
-            <a:srgbClr val="DCFCE7"/>
-          </a:solidFill>
-          <a:ln w="12700">
-            <a:solidFill>
-              <a:srgbClr val="16A34A"/>
+            <a:srgbClr val="FEE2E2"/>
+          </a:solidFill>
+          <a:ln w="12700">
+            <a:solidFill>
+              <a:srgbClr val="DC2626"/>
             </a:solidFill>
             <a:prstDash val="solid"/>
           </a:ln>
@@ -36425,13 +36710,13 @@
             <a:r>
               <a:rPr lang="en-US" sz="1100" b="1" dirty="0">
                 <a:solidFill>
-                  <a:srgbClr val="16A34A"/>
+                  <a:srgbClr val="DC2626"/>
                 </a:solidFill>
                 <a:latin typeface="Trebuchet MS" pitchFamily="34" charset="0"/>
                 <a:ea typeface="Trebuchet MS" pitchFamily="34" charset="-122"/>
                 <a:cs typeface="Trebuchet MS" pitchFamily="34" charset="-120"/>
               </a:rPr>
-              <a:t>TRUE</a:t>
+              <a:t>FALSE</a:t>
             </a:r>
             <a:endParaRPr lang="en-US" sz="1100" dirty="0"/>
           </a:p>
@@ -36504,7 +36789,7 @@
                 <a:ea typeface="Calibri" pitchFamily="34" charset="-122"/>
                 <a:cs typeface="Calibri" pitchFamily="34" charset="-120"/>
               </a:rPr>
-              <a:t>2.  The root 'sharp' comes from a French word.</a:t>
+              <a:t>2.  'sharp' means 'having a fine edge or point'.</a:t>
             </a:r>
             <a:endParaRPr lang="en-US" sz="1300" dirty="0"/>
           </a:p>
@@ -36527,11 +36812,11 @@
             </a:avLst>
           </a:prstGeom>
           <a:solidFill>
-            <a:srgbClr val="FEE2E2"/>
-          </a:solidFill>
-          <a:ln w="12700">
-            <a:solidFill>
-              <a:srgbClr val="DC2626"/>
+            <a:srgbClr val="DCFCE7"/>
+          </a:solidFill>
+          <a:ln w="12700">
+            <a:solidFill>
+              <a:srgbClr val="16A34A"/>
             </a:solidFill>
             <a:prstDash val="solid"/>
           </a:ln>
@@ -36564,13 +36849,13 @@
             <a:r>
               <a:rPr lang="en-US" sz="1100" b="1" dirty="0">
                 <a:solidFill>
-                  <a:srgbClr val="DC2626"/>
+                  <a:srgbClr val="16A34A"/>
                 </a:solidFill>
                 <a:latin typeface="Trebuchet MS" pitchFamily="34" charset="0"/>
                 <a:ea typeface="Trebuchet MS" pitchFamily="34" charset="-122"/>
                 <a:cs typeface="Trebuchet MS" pitchFamily="34" charset="-120"/>
               </a:rPr>
-              <a:t>FALSE</a:t>
+              <a:t>TRUE</a:t>
             </a:r>
             <a:endParaRPr lang="en-US" sz="1100" dirty="0"/>
           </a:p>
@@ -36643,7 +36928,7 @@
                 <a:ea typeface="Calibri" pitchFamily="34" charset="-122"/>
                 <a:cs typeface="Calibri" pitchFamily="34" charset="-120"/>
               </a:rPr>
-              <a:t>3.  The word 'sharpen' is an adjective.</a:t>
+              <a:t>3.  'sharpen' means 'to make something softer'.</a:t>
             </a:r>
             <a:endParaRPr lang="en-US" sz="1300" dirty="0"/>
           </a:p>
@@ -36782,7 +37067,7 @@
                 <a:ea typeface="Calibri" pitchFamily="34" charset="-122"/>
                 <a:cs typeface="Calibri" pitchFamily="34" charset="-120"/>
               </a:rPr>
-              <a:t>4.  The word 'sharpen' contains the root 'sharp' and the suffix '-en'.</a:t>
+              <a:t>4.  'sharpen' means 'to make something have a finer edge or point'.</a:t>
             </a:r>
             <a:endParaRPr lang="en-US" sz="1300" dirty="0"/>
           </a:p>
@@ -36921,7 +37206,7 @@
                 <a:ea typeface="Calibri" pitchFamily="34" charset="-122"/>
                 <a:cs typeface="Calibri" pitchFamily="34" charset="-120"/>
               </a:rPr>
-              <a:t>5.  The word 'sharpness' uses the suffix '-ness' to make a noun.</a:t>
+              <a:t>5.  'sharp' means 'having a fine edge or point that can cut, or quick to notice and understand things'.</a:t>
             </a:r>
             <a:endParaRPr lang="en-US" sz="1300" dirty="0"/>
           </a:p>
@@ -37279,7 +37564,7 @@
                 <a:ea typeface="Calibri" pitchFamily="34" charset="-122"/>
                 <a:cs typeface="Calibri" pitchFamily="34" charset="-120"/>
               </a:rPr>
-              <a:t>Word Labs  •  wordlabs.app  •  Root: 'sharp' = having a fine cutting edge</a:t>
+              <a:t>Word Labs  •  wordlabs.app  •  Root: 'sharp' = having a fine edge or point</a:t>
             </a:r>
             <a:endParaRPr lang="en-US" sz="800" dirty="0"/>
           </a:p>
@@ -37416,7 +37701,7 @@
                 <a:ea typeface="Trebuchet MS" pitchFamily="34" charset="-122"/>
                 <a:cs typeface="Trebuchet MS" pitchFamily="34" charset="-120"/>
               </a:rPr>
-              <a:t>having a fine cutting edge</a:t>
+              <a:t>having a fine edge or point</a:t>
             </a:r>
             <a:endParaRPr lang="en-US" sz="2000" dirty="0"/>
           </a:p>
@@ -37455,7 +37740,7 @@
                 <a:ea typeface="Calibri" pitchFamily="34" charset="-122"/>
                 <a:cs typeface="Calibri" pitchFamily="34" charset="-120"/>
               </a:rPr>
-              <a:t>Origin: Latin: scarpus</a:t>
+              <a:t>Origin: Anglo-Saxon (Old English) root</a:t>
             </a:r>
             <a:endParaRPr lang="en-US" sz="1100" dirty="0"/>
           </a:p>
@@ -37560,7 +37845,7 @@
                 <a:ea typeface="Trebuchet MS" pitchFamily="34" charset="-122"/>
                 <a:cs typeface="Trebuchet MS" pitchFamily="34" charset="-120"/>
               </a:rPr>
-              <a:t>sharpen</a:t>
+              <a:t>sharp</a:t>
             </a:r>
             <a:endParaRPr lang="en-US" sz="1300" dirty="0"/>
           </a:p>
@@ -37626,7 +37911,7 @@
                 <a:ea typeface="Trebuchet MS" pitchFamily="34" charset="-122"/>
                 <a:cs typeface="Trebuchet MS" pitchFamily="34" charset="-120"/>
               </a:rPr>
-              <a:t>sharper</a:t>
+              <a:t>sharpen</a:t>
             </a:r>
             <a:endParaRPr lang="en-US" sz="1300" dirty="0"/>
           </a:p>
@@ -37692,7 +37977,7 @@
                 <a:ea typeface="Trebuchet MS" pitchFamily="34" charset="-122"/>
                 <a:cs typeface="Trebuchet MS" pitchFamily="34" charset="-120"/>
               </a:rPr>
-              <a:t>sharpest</a:t>
+              <a:t>sharper</a:t>
             </a:r>
             <a:endParaRPr lang="en-US" sz="1300" dirty="0"/>
           </a:p>
@@ -37759,204 +38044,6 @@
                 <a:cs typeface="Trebuchet MS" pitchFamily="34" charset="-120"/>
               </a:rPr>
               <a:t>sharply</a:t>
-            </a:r>
-            <a:endParaRPr lang="en-US" sz="1300" dirty="0"/>
-          </a:p>
-        </p:txBody>
-      </p:sp>
-      <p:sp>
-        <p:nvSpPr>
-          <p:cNvPr id="24" name="Shape 22"/>
-          <p:cNvSpPr/>
-          <p:nvPr/>
-        </p:nvSpPr>
-        <p:spPr>
-          <a:xfrm>
-            <a:off x="365760" y="3401568"/>
-            <a:ext cx="2011680" cy="502920"/>
-          </a:xfrm>
-          <a:prstGeom prst="rect">
-            <a:avLst>
-              <a:gd name="adj" fmla="val 14545"/>
-            </a:avLst>
-          </a:prstGeom>
-          <a:solidFill>
-            <a:srgbClr val="EEF2FF"/>
-          </a:solidFill>
-          <a:ln w="12700">
-            <a:solidFill>
-              <a:srgbClr val="6366F1"/>
-            </a:solidFill>
-            <a:prstDash val="solid"/>
-          </a:ln>
-        </p:spPr>
-      </p:sp>
-      <p:sp>
-        <p:nvSpPr>
-          <p:cNvPr id="25" name="Text 23"/>
-          <p:cNvSpPr/>
-          <p:nvPr/>
-        </p:nvSpPr>
-        <p:spPr>
-          <a:xfrm>
-            <a:off x="365760" y="3401568"/>
-            <a:ext cx="2011680" cy="502920"/>
-          </a:xfrm>
-          <a:prstGeom prst="rect">
-            <a:avLst/>
-          </a:prstGeom>
-          <a:noFill/>
-          <a:ln/>
-        </p:spPr>
-        <p:txBody>
-          <a:bodyPr wrap="square" lIns="0" tIns="0" rIns="0" bIns="0" rtlCol="0" anchor="ctr"/>
-          <a:lstStyle/>
-          <a:p>
-            <a:pPr algn="ctr" indent="0" marL="0">
-              <a:buNone/>
-            </a:pPr>
-            <a:r>
-              <a:rPr lang="en-US" sz="1300" b="1" dirty="0">
-                <a:solidFill>
-                  <a:srgbClr val="4338CA"/>
-                </a:solidFill>
-                <a:latin typeface="Trebuchet MS" pitchFamily="34" charset="0"/>
-                <a:ea typeface="Trebuchet MS" pitchFamily="34" charset="-122"/>
-                <a:cs typeface="Trebuchet MS" pitchFamily="34" charset="-120"/>
-              </a:rPr>
-              <a:t>sharpness</a:t>
-            </a:r>
-            <a:endParaRPr lang="en-US" sz="1300" dirty="0"/>
-          </a:p>
-        </p:txBody>
-      </p:sp>
-      <p:sp>
-        <p:nvSpPr>
-          <p:cNvPr id="26" name="Shape 24"/>
-          <p:cNvSpPr/>
-          <p:nvPr/>
-        </p:nvSpPr>
-        <p:spPr>
-          <a:xfrm>
-            <a:off x="2514600" y="3401568"/>
-            <a:ext cx="2011680" cy="502920"/>
-          </a:xfrm>
-          <a:prstGeom prst="rect">
-            <a:avLst>
-              <a:gd name="adj" fmla="val 14545"/>
-            </a:avLst>
-          </a:prstGeom>
-          <a:solidFill>
-            <a:srgbClr val="EEF2FF"/>
-          </a:solidFill>
-          <a:ln w="12700">
-            <a:solidFill>
-              <a:srgbClr val="6366F1"/>
-            </a:solidFill>
-            <a:prstDash val="solid"/>
-          </a:ln>
-        </p:spPr>
-      </p:sp>
-      <p:sp>
-        <p:nvSpPr>
-          <p:cNvPr id="27" name="Text 25"/>
-          <p:cNvSpPr/>
-          <p:nvPr/>
-        </p:nvSpPr>
-        <p:spPr>
-          <a:xfrm>
-            <a:off x="2514600" y="3401568"/>
-            <a:ext cx="2011680" cy="502920"/>
-          </a:xfrm>
-          <a:prstGeom prst="rect">
-            <a:avLst/>
-          </a:prstGeom>
-          <a:noFill/>
-          <a:ln/>
-        </p:spPr>
-        <p:txBody>
-          <a:bodyPr wrap="square" lIns="0" tIns="0" rIns="0" bIns="0" rtlCol="0" anchor="ctr"/>
-          <a:lstStyle/>
-          <a:p>
-            <a:pPr algn="ctr" indent="0" marL="0">
-              <a:buNone/>
-            </a:pPr>
-            <a:r>
-              <a:rPr lang="en-US" sz="1300" b="1" dirty="0">
-                <a:solidFill>
-                  <a:srgbClr val="4338CA"/>
-                </a:solidFill>
-                <a:latin typeface="Trebuchet MS" pitchFamily="34" charset="0"/>
-                <a:ea typeface="Trebuchet MS" pitchFamily="34" charset="-122"/>
-                <a:cs typeface="Trebuchet MS" pitchFamily="34" charset="-120"/>
-              </a:rPr>
-              <a:t>sharpener</a:t>
-            </a:r>
-            <a:endParaRPr lang="en-US" sz="1300" dirty="0"/>
-          </a:p>
-        </p:txBody>
-      </p:sp>
-      <p:sp>
-        <p:nvSpPr>
-          <p:cNvPr id="28" name="Shape 26"/>
-          <p:cNvSpPr/>
-          <p:nvPr/>
-        </p:nvSpPr>
-        <p:spPr>
-          <a:xfrm>
-            <a:off x="4663440" y="3401568"/>
-            <a:ext cx="2011680" cy="502920"/>
-          </a:xfrm>
-          <a:prstGeom prst="rect">
-            <a:avLst>
-              <a:gd name="adj" fmla="val 14545"/>
-            </a:avLst>
-          </a:prstGeom>
-          <a:solidFill>
-            <a:srgbClr val="EEF2FF"/>
-          </a:solidFill>
-          <a:ln w="12700">
-            <a:solidFill>
-              <a:srgbClr val="6366F1"/>
-            </a:solidFill>
-            <a:prstDash val="solid"/>
-          </a:ln>
-        </p:spPr>
-      </p:sp>
-      <p:sp>
-        <p:nvSpPr>
-          <p:cNvPr id="29" name="Text 27"/>
-          <p:cNvSpPr/>
-          <p:nvPr/>
-        </p:nvSpPr>
-        <p:spPr>
-          <a:xfrm>
-            <a:off x="4663440" y="3401568"/>
-            <a:ext cx="2011680" cy="502920"/>
-          </a:xfrm>
-          <a:prstGeom prst="rect">
-            <a:avLst/>
-          </a:prstGeom>
-          <a:noFill/>
-          <a:ln/>
-        </p:spPr>
-        <p:txBody>
-          <a:bodyPr wrap="square" lIns="0" tIns="0" rIns="0" bIns="0" rtlCol="0" anchor="ctr"/>
-          <a:lstStyle/>
-          <a:p>
-            <a:pPr algn="ctr" indent="0" marL="0">
-              <a:buNone/>
-            </a:pPr>
-            <a:r>
-              <a:rPr lang="en-US" sz="1300" b="1" dirty="0">
-                <a:solidFill>
-                  <a:srgbClr val="4338CA"/>
-                </a:solidFill>
-                <a:latin typeface="Trebuchet MS" pitchFamily="34" charset="0"/>
-                <a:ea typeface="Trebuchet MS" pitchFamily="34" charset="-122"/>
-                <a:cs typeface="Trebuchet MS" pitchFamily="34" charset="-120"/>
-              </a:rPr>
-              <a:t>unsharpened</a:t>
             </a:r>
             <a:endParaRPr lang="en-US" sz="1300" dirty="0"/>
           </a:p>
@@ -38248,7 +38335,7 @@
                 <a:ea typeface="Calibri" pitchFamily="34" charset="-122"/>
                 <a:cs typeface="Calibri" pitchFamily="34" charset="-120"/>
               </a:rPr>
-              <a:t>Word Labs  •  wordlabs.app  •  Root: 'sharp' = having a fine cutting edge</a:t>
+              <a:t>Word Labs  •  wordlabs.app  •  Root: 'sharp' = having a fine edge or point</a:t>
             </a:r>
             <a:endParaRPr lang="en-US" sz="800" dirty="0"/>
           </a:p>
@@ -38506,7 +38593,7 @@
             <a:avLst/>
           </a:prstGeom>
           <a:solidFill>
-            <a:srgbClr val="DDD6FE"/>
+            <a:srgbClr val="F8FAFC"/>
           </a:solidFill>
           <a:ln w="12700">
             <a:solidFill>
@@ -38518,14 +38605,39 @@
       </p:sp>
       <p:sp>
         <p:nvSpPr>
-          <p:cNvPr id="18" name="Text 16"/>
-          <p:cNvSpPr/>
-          <p:nvPr/>
-        </p:nvSpPr>
-        <p:spPr>
-          <a:xfrm>
-            <a:off x="640080" y="1755648"/>
-            <a:ext cx="1463040" cy="420624"/>
+          <p:cNvPr id="18" name="Shape 16"/>
+          <p:cNvSpPr/>
+          <p:nvPr/>
+        </p:nvSpPr>
+        <p:spPr>
+          <a:xfrm>
+            <a:off x="3291840" y="1755648"/>
+            <a:ext cx="1645920" cy="420624"/>
+          </a:xfrm>
+          <a:prstGeom prst="rect">
+            <a:avLst/>
+          </a:prstGeom>
+          <a:solidFill>
+            <a:srgbClr val="CCFBF1"/>
+          </a:solidFill>
+          <a:ln w="12700">
+            <a:solidFill>
+              <a:srgbClr val="E5E7EB"/>
+            </a:solidFill>
+            <a:prstDash val="solid"/>
+          </a:ln>
+        </p:spPr>
+      </p:sp>
+      <p:sp>
+        <p:nvSpPr>
+          <p:cNvPr id="19" name="Text 17"/>
+          <p:cNvSpPr/>
+          <p:nvPr/>
+        </p:nvSpPr>
+        <p:spPr>
+          <a:xfrm>
+            <a:off x="3291840" y="1755648"/>
+            <a:ext cx="1645920" cy="420624"/>
           </a:xfrm>
           <a:prstGeom prst="rect">
             <a:avLst/>
@@ -38543,13 +38655,13 @@
             <a:r>
               <a:rPr lang="en-US" sz="1300" b="1" dirty="0">
                 <a:solidFill>
-                  <a:srgbClr val="4C1D95"/>
+                  <a:srgbClr val="0F766E"/>
                 </a:solidFill>
                 <a:latin typeface="Trebuchet MS" pitchFamily="34" charset="0"/>
                 <a:ea typeface="Trebuchet MS" pitchFamily="34" charset="-122"/>
                 <a:cs typeface="Trebuchet MS" pitchFamily="34" charset="-120"/>
               </a:rPr>
-              <a:t>un-</a:t>
+              <a:t>sharp</a:t>
             </a:r>
             <a:endParaRPr lang="en-US" sz="1300" dirty="0"/>
           </a:p>
@@ -38557,20 +38669,20 @@
       </p:sp>
       <p:sp>
         <p:nvSpPr>
-          <p:cNvPr id="19" name="Shape 17"/>
-          <p:cNvSpPr/>
-          <p:nvPr/>
-        </p:nvSpPr>
-        <p:spPr>
-          <a:xfrm>
-            <a:off x="3291840" y="1755648"/>
-            <a:ext cx="1645920" cy="420624"/>
-          </a:xfrm>
-          <a:prstGeom prst="rect">
-            <a:avLst/>
-          </a:prstGeom>
-          <a:solidFill>
-            <a:srgbClr val="CCFBF1"/>
+          <p:cNvPr id="20" name="Shape 18"/>
+          <p:cNvSpPr/>
+          <p:nvPr/>
+        </p:nvSpPr>
+        <p:spPr>
+          <a:xfrm>
+            <a:off x="5943600" y="1755648"/>
+            <a:ext cx="1463040" cy="420624"/>
+          </a:xfrm>
+          <a:prstGeom prst="rect">
+            <a:avLst/>
+          </a:prstGeom>
+          <a:solidFill>
+            <a:srgbClr val="FCE7F3"/>
           </a:solidFill>
           <a:ln w="12700">
             <a:solidFill>
@@ -38582,14 +38694,14 @@
       </p:sp>
       <p:sp>
         <p:nvSpPr>
-          <p:cNvPr id="20" name="Text 18"/>
-          <p:cNvSpPr/>
-          <p:nvPr/>
-        </p:nvSpPr>
-        <p:spPr>
-          <a:xfrm>
-            <a:off x="3291840" y="1755648"/>
-            <a:ext cx="1645920" cy="420624"/>
+          <p:cNvPr id="21" name="Text 19"/>
+          <p:cNvSpPr/>
+          <p:nvPr/>
+        </p:nvSpPr>
+        <p:spPr>
+          <a:xfrm>
+            <a:off x="5943600" y="1755648"/>
+            <a:ext cx="1463040" cy="420624"/>
           </a:xfrm>
           <a:prstGeom prst="rect">
             <a:avLst/>
@@ -38607,13 +38719,13 @@
             <a:r>
               <a:rPr lang="en-US" sz="1300" b="1" dirty="0">
                 <a:solidFill>
-                  <a:srgbClr val="0F766E"/>
+                  <a:srgbClr val="9D174D"/>
                 </a:solidFill>
                 <a:latin typeface="Trebuchet MS" pitchFamily="34" charset="0"/>
                 <a:ea typeface="Trebuchet MS" pitchFamily="34" charset="-122"/>
                 <a:cs typeface="Trebuchet MS" pitchFamily="34" charset="-120"/>
               </a:rPr>
-              <a:t>sharp</a:t>
+              <a:t>-en</a:t>
             </a:r>
             <a:endParaRPr lang="en-US" sz="1300" dirty="0"/>
           </a:p>
@@ -38621,19 +38733,69 @@
       </p:sp>
       <p:sp>
         <p:nvSpPr>
-          <p:cNvPr id="21" name="Shape 19"/>
-          <p:cNvSpPr/>
-          <p:nvPr/>
-        </p:nvSpPr>
-        <p:spPr>
-          <a:xfrm>
-            <a:off x="5943600" y="1755648"/>
+          <p:cNvPr id="22" name="Shape 20"/>
+          <p:cNvSpPr/>
+          <p:nvPr/>
+        </p:nvSpPr>
+        <p:spPr>
+          <a:xfrm>
+            <a:off x="640080" y="2212848"/>
             <a:ext cx="1463040" cy="420624"/>
           </a:xfrm>
           <a:prstGeom prst="rect">
             <a:avLst/>
           </a:prstGeom>
           <a:solidFill>
+            <a:srgbClr val="F1F5F9"/>
+          </a:solidFill>
+          <a:ln w="12700">
+            <a:solidFill>
+              <a:srgbClr val="E5E7EB"/>
+            </a:solidFill>
+            <a:prstDash val="solid"/>
+          </a:ln>
+        </p:spPr>
+      </p:sp>
+      <p:sp>
+        <p:nvSpPr>
+          <p:cNvPr id="23" name="Shape 21"/>
+          <p:cNvSpPr/>
+          <p:nvPr/>
+        </p:nvSpPr>
+        <p:spPr>
+          <a:xfrm>
+            <a:off x="3291840" y="2212848"/>
+            <a:ext cx="1645920" cy="420624"/>
+          </a:xfrm>
+          <a:prstGeom prst="rect">
+            <a:avLst/>
+          </a:prstGeom>
+          <a:solidFill>
+            <a:srgbClr val="F1F5F9"/>
+          </a:solidFill>
+          <a:ln w="12700">
+            <a:solidFill>
+              <a:srgbClr val="E5E7EB"/>
+            </a:solidFill>
+            <a:prstDash val="solid"/>
+          </a:ln>
+        </p:spPr>
+      </p:sp>
+      <p:sp>
+        <p:nvSpPr>
+          <p:cNvPr id="24" name="Shape 22"/>
+          <p:cNvSpPr/>
+          <p:nvPr/>
+        </p:nvSpPr>
+        <p:spPr>
+          <a:xfrm>
+            <a:off x="5943600" y="2212848"/>
+            <a:ext cx="1463040" cy="420624"/>
+          </a:xfrm>
+          <a:prstGeom prst="rect">
+            <a:avLst/>
+          </a:prstGeom>
+          <a:solidFill>
             <a:srgbClr val="FCE7F3"/>
           </a:solidFill>
           <a:ln w="12700">
@@ -38646,13 +38808,13 @@
       </p:sp>
       <p:sp>
         <p:nvSpPr>
-          <p:cNvPr id="22" name="Text 20"/>
-          <p:cNvSpPr/>
-          <p:nvPr/>
-        </p:nvSpPr>
-        <p:spPr>
-          <a:xfrm>
-            <a:off x="5943600" y="1755648"/>
+          <p:cNvPr id="25" name="Text 23"/>
+          <p:cNvSpPr/>
+          <p:nvPr/>
+        </p:nvSpPr>
+        <p:spPr>
+          <a:xfrm>
+            <a:off x="5943600" y="2212848"/>
             <a:ext cx="1463040" cy="420624"/>
           </a:xfrm>
           <a:prstGeom prst="rect">
@@ -38677,7 +38839,7 @@
                 <a:ea typeface="Trebuchet MS" pitchFamily="34" charset="-122"/>
                 <a:cs typeface="Trebuchet MS" pitchFamily="34" charset="-120"/>
               </a:rPr>
-              <a:t>-en</a:t>
+              <a:t>-er</a:t>
             </a:r>
             <a:endParaRPr lang="en-US" sz="1300" dirty="0"/>
           </a:p>
@@ -38685,20 +38847,20 @@
       </p:sp>
       <p:sp>
         <p:nvSpPr>
-          <p:cNvPr id="23" name="Shape 21"/>
-          <p:cNvSpPr/>
-          <p:nvPr/>
-        </p:nvSpPr>
-        <p:spPr>
-          <a:xfrm>
-            <a:off x="640080" y="2212848"/>
+          <p:cNvPr id="26" name="Shape 24"/>
+          <p:cNvSpPr/>
+          <p:nvPr/>
+        </p:nvSpPr>
+        <p:spPr>
+          <a:xfrm>
+            <a:off x="640080" y="2670048"/>
             <a:ext cx="1463040" cy="420624"/>
           </a:xfrm>
           <a:prstGeom prst="rect">
             <a:avLst/>
           </a:prstGeom>
           <a:solidFill>
-            <a:srgbClr val="DDD6FE"/>
+            <a:srgbClr val="F8FAFC"/>
           </a:solidFill>
           <a:ln w="12700">
             <a:solidFill>
@@ -38710,18 +38872,68 @@
       </p:sp>
       <p:sp>
         <p:nvSpPr>
-          <p:cNvPr id="24" name="Text 22"/>
-          <p:cNvSpPr/>
-          <p:nvPr/>
-        </p:nvSpPr>
-        <p:spPr>
-          <a:xfrm>
-            <a:off x="640080" y="2212848"/>
+          <p:cNvPr id="27" name="Shape 25"/>
+          <p:cNvSpPr/>
+          <p:nvPr/>
+        </p:nvSpPr>
+        <p:spPr>
+          <a:xfrm>
+            <a:off x="3291840" y="2670048"/>
+            <a:ext cx="1645920" cy="420624"/>
+          </a:xfrm>
+          <a:prstGeom prst="rect">
+            <a:avLst/>
+          </a:prstGeom>
+          <a:solidFill>
+            <a:srgbClr val="F8FAFC"/>
+          </a:solidFill>
+          <a:ln w="12700">
+            <a:solidFill>
+              <a:srgbClr val="E5E7EB"/>
+            </a:solidFill>
+            <a:prstDash val="solid"/>
+          </a:ln>
+        </p:spPr>
+      </p:sp>
+      <p:sp>
+        <p:nvSpPr>
+          <p:cNvPr id="28" name="Shape 26"/>
+          <p:cNvSpPr/>
+          <p:nvPr/>
+        </p:nvSpPr>
+        <p:spPr>
+          <a:xfrm>
+            <a:off x="5943600" y="2670048"/>
             <a:ext cx="1463040" cy="420624"/>
           </a:xfrm>
           <a:prstGeom prst="rect">
             <a:avLst/>
           </a:prstGeom>
+          <a:solidFill>
+            <a:srgbClr val="FCE7F3"/>
+          </a:solidFill>
+          <a:ln w="12700">
+            <a:solidFill>
+              <a:srgbClr val="E5E7EB"/>
+            </a:solidFill>
+            <a:prstDash val="solid"/>
+          </a:ln>
+        </p:spPr>
+      </p:sp>
+      <p:sp>
+        <p:nvSpPr>
+          <p:cNvPr id="29" name="Text 27"/>
+          <p:cNvSpPr/>
+          <p:nvPr/>
+        </p:nvSpPr>
+        <p:spPr>
+          <a:xfrm>
+            <a:off x="5943600" y="2670048"/>
+            <a:ext cx="1463040" cy="420624"/>
+          </a:xfrm>
+          <a:prstGeom prst="rect">
+            <a:avLst/>
+          </a:prstGeom>
           <a:noFill/>
           <a:ln/>
         </p:spPr>
@@ -38735,13 +38947,13 @@
             <a:r>
               <a:rPr lang="en-US" sz="1300" b="1" dirty="0">
                 <a:solidFill>
-                  <a:srgbClr val="4C1D95"/>
+                  <a:srgbClr val="9D174D"/>
                 </a:solidFill>
                 <a:latin typeface="Trebuchet MS" pitchFamily="34" charset="0"/>
                 <a:ea typeface="Trebuchet MS" pitchFamily="34" charset="-122"/>
                 <a:cs typeface="Trebuchet MS" pitchFamily="34" charset="-120"/>
               </a:rPr>
-              <a:t>out-</a:t>
+              <a:t>-est</a:t>
             </a:r>
             <a:endParaRPr lang="en-US" sz="1300" dirty="0"/>
           </a:p>
@@ -38749,13 +38961,38 @@
       </p:sp>
       <p:sp>
         <p:nvSpPr>
-          <p:cNvPr id="25" name="Shape 23"/>
-          <p:cNvSpPr/>
-          <p:nvPr/>
-        </p:nvSpPr>
-        <p:spPr>
-          <a:xfrm>
-            <a:off x="3291840" y="2212848"/>
+          <p:cNvPr id="30" name="Shape 28"/>
+          <p:cNvSpPr/>
+          <p:nvPr/>
+        </p:nvSpPr>
+        <p:spPr>
+          <a:xfrm>
+            <a:off x="640080" y="3127248"/>
+            <a:ext cx="1463040" cy="420624"/>
+          </a:xfrm>
+          <a:prstGeom prst="rect">
+            <a:avLst/>
+          </a:prstGeom>
+          <a:solidFill>
+            <a:srgbClr val="F1F5F9"/>
+          </a:solidFill>
+          <a:ln w="12700">
+            <a:solidFill>
+              <a:srgbClr val="E5E7EB"/>
+            </a:solidFill>
+            <a:prstDash val="solid"/>
+          </a:ln>
+        </p:spPr>
+      </p:sp>
+      <p:sp>
+        <p:nvSpPr>
+          <p:cNvPr id="31" name="Shape 29"/>
+          <p:cNvSpPr/>
+          <p:nvPr/>
+        </p:nvSpPr>
+        <p:spPr>
+          <a:xfrm>
+            <a:off x="3291840" y="3127248"/>
             <a:ext cx="1645920" cy="420624"/>
           </a:xfrm>
           <a:prstGeom prst="rect">
@@ -38774,13 +39011,13 @@
       </p:sp>
       <p:sp>
         <p:nvSpPr>
-          <p:cNvPr id="26" name="Shape 24"/>
-          <p:cNvSpPr/>
-          <p:nvPr/>
-        </p:nvSpPr>
-        <p:spPr>
-          <a:xfrm>
-            <a:off x="5943600" y="2212848"/>
+          <p:cNvPr id="32" name="Shape 30"/>
+          <p:cNvSpPr/>
+          <p:nvPr/>
+        </p:nvSpPr>
+        <p:spPr>
+          <a:xfrm>
+            <a:off x="5943600" y="3127248"/>
             <a:ext cx="1463040" cy="420624"/>
           </a:xfrm>
           <a:prstGeom prst="rect">
@@ -38799,13 +39036,13 @@
       </p:sp>
       <p:sp>
         <p:nvSpPr>
-          <p:cNvPr id="27" name="Text 25"/>
-          <p:cNvSpPr/>
-          <p:nvPr/>
-        </p:nvSpPr>
-        <p:spPr>
-          <a:xfrm>
-            <a:off x="5943600" y="2212848"/>
+          <p:cNvPr id="33" name="Text 31"/>
+          <p:cNvSpPr/>
+          <p:nvPr/>
+        </p:nvSpPr>
+        <p:spPr>
+          <a:xfrm>
+            <a:off x="5943600" y="3127248"/>
             <a:ext cx="1463040" cy="420624"/>
           </a:xfrm>
           <a:prstGeom prst="rect">
@@ -38830,7 +39067,7 @@
                 <a:ea typeface="Trebuchet MS" pitchFamily="34" charset="-122"/>
                 <a:cs typeface="Trebuchet MS" pitchFamily="34" charset="-120"/>
               </a:rPr>
-              <a:t>-er</a:t>
+              <a:t>-ly</a:t>
             </a:r>
             <a:endParaRPr lang="en-US" sz="1300" dirty="0"/>
           </a:p>
@@ -38838,20 +39075,20 @@
       </p:sp>
       <p:sp>
         <p:nvSpPr>
-          <p:cNvPr id="28" name="Shape 26"/>
-          <p:cNvSpPr/>
-          <p:nvPr/>
-        </p:nvSpPr>
-        <p:spPr>
-          <a:xfrm>
-            <a:off x="640080" y="2670048"/>
+          <p:cNvPr id="34" name="Shape 32"/>
+          <p:cNvSpPr/>
+          <p:nvPr/>
+        </p:nvSpPr>
+        <p:spPr>
+          <a:xfrm>
+            <a:off x="640080" y="3584448"/>
             <a:ext cx="1463040" cy="420624"/>
           </a:xfrm>
           <a:prstGeom prst="rect">
             <a:avLst/>
           </a:prstGeom>
           <a:solidFill>
-            <a:srgbClr val="DDD6FE"/>
+            <a:srgbClr val="F8FAFC"/>
           </a:solidFill>
           <a:ln w="12700">
             <a:solidFill>
@@ -38863,18 +39100,68 @@
       </p:sp>
       <p:sp>
         <p:nvSpPr>
-          <p:cNvPr id="29" name="Text 27"/>
-          <p:cNvSpPr/>
-          <p:nvPr/>
-        </p:nvSpPr>
-        <p:spPr>
-          <a:xfrm>
-            <a:off x="640080" y="2670048"/>
+          <p:cNvPr id="35" name="Shape 33"/>
+          <p:cNvSpPr/>
+          <p:nvPr/>
+        </p:nvSpPr>
+        <p:spPr>
+          <a:xfrm>
+            <a:off x="3291840" y="3584448"/>
+            <a:ext cx="1645920" cy="420624"/>
+          </a:xfrm>
+          <a:prstGeom prst="rect">
+            <a:avLst/>
+          </a:prstGeom>
+          <a:solidFill>
+            <a:srgbClr val="F8FAFC"/>
+          </a:solidFill>
+          <a:ln w="12700">
+            <a:solidFill>
+              <a:srgbClr val="E5E7EB"/>
+            </a:solidFill>
+            <a:prstDash val="solid"/>
+          </a:ln>
+        </p:spPr>
+      </p:sp>
+      <p:sp>
+        <p:nvSpPr>
+          <p:cNvPr id="36" name="Shape 34"/>
+          <p:cNvSpPr/>
+          <p:nvPr/>
+        </p:nvSpPr>
+        <p:spPr>
+          <a:xfrm>
+            <a:off x="5943600" y="3584448"/>
             <a:ext cx="1463040" cy="420624"/>
           </a:xfrm>
           <a:prstGeom prst="rect">
             <a:avLst/>
           </a:prstGeom>
+          <a:solidFill>
+            <a:srgbClr val="FCE7F3"/>
+          </a:solidFill>
+          <a:ln w="12700">
+            <a:solidFill>
+              <a:srgbClr val="E5E7EB"/>
+            </a:solidFill>
+            <a:prstDash val="solid"/>
+          </a:ln>
+        </p:spPr>
+      </p:sp>
+      <p:sp>
+        <p:nvSpPr>
+          <p:cNvPr id="37" name="Text 35"/>
+          <p:cNvSpPr/>
+          <p:nvPr/>
+        </p:nvSpPr>
+        <p:spPr>
+          <a:xfrm>
+            <a:off x="5943600" y="3584448"/>
+            <a:ext cx="1463040" cy="420624"/>
+          </a:xfrm>
+          <a:prstGeom prst="rect">
+            <a:avLst/>
+          </a:prstGeom>
           <a:noFill/>
           <a:ln/>
         </p:spPr>
@@ -38888,13 +39175,13 @@
             <a:r>
               <a:rPr lang="en-US" sz="1300" b="1" dirty="0">
                 <a:solidFill>
-                  <a:srgbClr val="4C1D95"/>
+                  <a:srgbClr val="9D174D"/>
                 </a:solidFill>
                 <a:latin typeface="Trebuchet MS" pitchFamily="34" charset="0"/>
                 <a:ea typeface="Trebuchet MS" pitchFamily="34" charset="-122"/>
                 <a:cs typeface="Trebuchet MS" pitchFamily="34" charset="-120"/>
               </a:rPr>
-              <a:t>over-</a:t>
+              <a:t>-ness</a:t>
             </a:r>
             <a:endParaRPr lang="en-US" sz="1300" dirty="0"/>
           </a:p>
@@ -38902,402 +39189,7 @@
       </p:sp>
       <p:sp>
         <p:nvSpPr>
-          <p:cNvPr id="30" name="Shape 28"/>
-          <p:cNvSpPr/>
-          <p:nvPr/>
-        </p:nvSpPr>
-        <p:spPr>
-          <a:xfrm>
-            <a:off x="3291840" y="2670048"/>
-            <a:ext cx="1645920" cy="420624"/>
-          </a:xfrm>
-          <a:prstGeom prst="rect">
-            <a:avLst/>
-          </a:prstGeom>
-          <a:solidFill>
-            <a:srgbClr val="F8FAFC"/>
-          </a:solidFill>
-          <a:ln w="12700">
-            <a:solidFill>
-              <a:srgbClr val="E5E7EB"/>
-            </a:solidFill>
-            <a:prstDash val="solid"/>
-          </a:ln>
-        </p:spPr>
-      </p:sp>
-      <p:sp>
-        <p:nvSpPr>
-          <p:cNvPr id="31" name="Shape 29"/>
-          <p:cNvSpPr/>
-          <p:nvPr/>
-        </p:nvSpPr>
-        <p:spPr>
-          <a:xfrm>
-            <a:off x="5943600" y="2670048"/>
-            <a:ext cx="1463040" cy="420624"/>
-          </a:xfrm>
-          <a:prstGeom prst="rect">
-            <a:avLst/>
-          </a:prstGeom>
-          <a:solidFill>
-            <a:srgbClr val="FCE7F3"/>
-          </a:solidFill>
-          <a:ln w="12700">
-            <a:solidFill>
-              <a:srgbClr val="E5E7EB"/>
-            </a:solidFill>
-            <a:prstDash val="solid"/>
-          </a:ln>
-        </p:spPr>
-      </p:sp>
-      <p:sp>
-        <p:nvSpPr>
-          <p:cNvPr id="32" name="Text 30"/>
-          <p:cNvSpPr/>
-          <p:nvPr/>
-        </p:nvSpPr>
-        <p:spPr>
-          <a:xfrm>
-            <a:off x="5943600" y="2670048"/>
-            <a:ext cx="1463040" cy="420624"/>
-          </a:xfrm>
-          <a:prstGeom prst="rect">
-            <a:avLst/>
-          </a:prstGeom>
-          <a:noFill/>
-          <a:ln/>
-        </p:spPr>
-        <p:txBody>
-          <a:bodyPr wrap="square" lIns="0" tIns="0" rIns="0" bIns="0" rtlCol="0" anchor="ctr"/>
-          <a:lstStyle/>
-          <a:p>
-            <a:pPr algn="ctr" indent="0" marL="0">
-              <a:buNone/>
-            </a:pPr>
-            <a:r>
-              <a:rPr lang="en-US" sz="1300" b="1" dirty="0">
-                <a:solidFill>
-                  <a:srgbClr val="9D174D"/>
-                </a:solidFill>
-                <a:latin typeface="Trebuchet MS" pitchFamily="34" charset="0"/>
-                <a:ea typeface="Trebuchet MS" pitchFamily="34" charset="-122"/>
-                <a:cs typeface="Trebuchet MS" pitchFamily="34" charset="-120"/>
-              </a:rPr>
-              <a:t>-est</a:t>
-            </a:r>
-            <a:endParaRPr lang="en-US" sz="1300" dirty="0"/>
-          </a:p>
-        </p:txBody>
-      </p:sp>
-      <p:sp>
-        <p:nvSpPr>
-          <p:cNvPr id="33" name="Shape 31"/>
-          <p:cNvSpPr/>
-          <p:nvPr/>
-        </p:nvSpPr>
-        <p:spPr>
-          <a:xfrm>
-            <a:off x="640080" y="3127248"/>
-            <a:ext cx="1463040" cy="420624"/>
-          </a:xfrm>
-          <a:prstGeom prst="rect">
-            <a:avLst/>
-          </a:prstGeom>
-          <a:solidFill>
-            <a:srgbClr val="DDD6FE"/>
-          </a:solidFill>
-          <a:ln w="12700">
-            <a:solidFill>
-              <a:srgbClr val="E5E7EB"/>
-            </a:solidFill>
-            <a:prstDash val="solid"/>
-          </a:ln>
-        </p:spPr>
-      </p:sp>
-      <p:sp>
-        <p:nvSpPr>
-          <p:cNvPr id="34" name="Text 32"/>
-          <p:cNvSpPr/>
-          <p:nvPr/>
-        </p:nvSpPr>
-        <p:spPr>
-          <a:xfrm>
-            <a:off x="640080" y="3127248"/>
-            <a:ext cx="1463040" cy="420624"/>
-          </a:xfrm>
-          <a:prstGeom prst="rect">
-            <a:avLst/>
-          </a:prstGeom>
-          <a:noFill/>
-          <a:ln/>
-        </p:spPr>
-        <p:txBody>
-          <a:bodyPr wrap="square" lIns="0" tIns="0" rIns="0" bIns="0" rtlCol="0" anchor="ctr"/>
-          <a:lstStyle/>
-          <a:p>
-            <a:pPr algn="ctr" indent="0" marL="0">
-              <a:buNone/>
-            </a:pPr>
-            <a:r>
-              <a:rPr lang="en-US" sz="1300" b="1" dirty="0">
-                <a:solidFill>
-                  <a:srgbClr val="4C1D95"/>
-                </a:solidFill>
-                <a:latin typeface="Trebuchet MS" pitchFamily="34" charset="0"/>
-                <a:ea typeface="Trebuchet MS" pitchFamily="34" charset="-122"/>
-                <a:cs typeface="Trebuchet MS" pitchFamily="34" charset="-120"/>
-              </a:rPr>
-              <a:t>super-</a:t>
-            </a:r>
-            <a:endParaRPr lang="en-US" sz="1300" dirty="0"/>
-          </a:p>
-        </p:txBody>
-      </p:sp>
-      <p:sp>
-        <p:nvSpPr>
-          <p:cNvPr id="35" name="Shape 33"/>
-          <p:cNvSpPr/>
-          <p:nvPr/>
-        </p:nvSpPr>
-        <p:spPr>
-          <a:xfrm>
-            <a:off x="3291840" y="3127248"/>
-            <a:ext cx="1645920" cy="420624"/>
-          </a:xfrm>
-          <a:prstGeom prst="rect">
-            <a:avLst/>
-          </a:prstGeom>
-          <a:solidFill>
-            <a:srgbClr val="F1F5F9"/>
-          </a:solidFill>
-          <a:ln w="12700">
-            <a:solidFill>
-              <a:srgbClr val="E5E7EB"/>
-            </a:solidFill>
-            <a:prstDash val="solid"/>
-          </a:ln>
-        </p:spPr>
-      </p:sp>
-      <p:sp>
-        <p:nvSpPr>
-          <p:cNvPr id="36" name="Shape 34"/>
-          <p:cNvSpPr/>
-          <p:nvPr/>
-        </p:nvSpPr>
-        <p:spPr>
-          <a:xfrm>
-            <a:off x="5943600" y="3127248"/>
-            <a:ext cx="1463040" cy="420624"/>
-          </a:xfrm>
-          <a:prstGeom prst="rect">
-            <a:avLst/>
-          </a:prstGeom>
-          <a:solidFill>
-            <a:srgbClr val="FCE7F3"/>
-          </a:solidFill>
-          <a:ln w="12700">
-            <a:solidFill>
-              <a:srgbClr val="E5E7EB"/>
-            </a:solidFill>
-            <a:prstDash val="solid"/>
-          </a:ln>
-        </p:spPr>
-      </p:sp>
-      <p:sp>
-        <p:nvSpPr>
-          <p:cNvPr id="37" name="Text 35"/>
-          <p:cNvSpPr/>
-          <p:nvPr/>
-        </p:nvSpPr>
-        <p:spPr>
-          <a:xfrm>
-            <a:off x="5943600" y="3127248"/>
-            <a:ext cx="1463040" cy="420624"/>
-          </a:xfrm>
-          <a:prstGeom prst="rect">
-            <a:avLst/>
-          </a:prstGeom>
-          <a:noFill/>
-          <a:ln/>
-        </p:spPr>
-        <p:txBody>
-          <a:bodyPr wrap="square" lIns="0" tIns="0" rIns="0" bIns="0" rtlCol="0" anchor="ctr"/>
-          <a:lstStyle/>
-          <a:p>
-            <a:pPr algn="ctr" indent="0" marL="0">
-              <a:buNone/>
-            </a:pPr>
-            <a:r>
-              <a:rPr lang="en-US" sz="1300" b="1" dirty="0">
-                <a:solidFill>
-                  <a:srgbClr val="9D174D"/>
-                </a:solidFill>
-                <a:latin typeface="Trebuchet MS" pitchFamily="34" charset="0"/>
-                <a:ea typeface="Trebuchet MS" pitchFamily="34" charset="-122"/>
-                <a:cs typeface="Trebuchet MS" pitchFamily="34" charset="-120"/>
-              </a:rPr>
-              <a:t>-ly</a:t>
-            </a:r>
-            <a:endParaRPr lang="en-US" sz="1300" dirty="0"/>
-          </a:p>
-        </p:txBody>
-      </p:sp>
-      <p:sp>
-        <p:nvSpPr>
-          <p:cNvPr id="38" name="Shape 36"/>
-          <p:cNvSpPr/>
-          <p:nvPr/>
-        </p:nvSpPr>
-        <p:spPr>
-          <a:xfrm>
-            <a:off x="640080" y="3584448"/>
-            <a:ext cx="1463040" cy="420624"/>
-          </a:xfrm>
-          <a:prstGeom prst="rect">
-            <a:avLst/>
-          </a:prstGeom>
-          <a:solidFill>
-            <a:srgbClr val="DDD6FE"/>
-          </a:solidFill>
-          <a:ln w="12700">
-            <a:solidFill>
-              <a:srgbClr val="E5E7EB"/>
-            </a:solidFill>
-            <a:prstDash val="solid"/>
-          </a:ln>
-        </p:spPr>
-      </p:sp>
-      <p:sp>
-        <p:nvSpPr>
-          <p:cNvPr id="39" name="Text 37"/>
-          <p:cNvSpPr/>
-          <p:nvPr/>
-        </p:nvSpPr>
-        <p:spPr>
-          <a:xfrm>
-            <a:off x="640080" y="3584448"/>
-            <a:ext cx="1463040" cy="420624"/>
-          </a:xfrm>
-          <a:prstGeom prst="rect">
-            <a:avLst/>
-          </a:prstGeom>
-          <a:noFill/>
-          <a:ln/>
-        </p:spPr>
-        <p:txBody>
-          <a:bodyPr wrap="square" lIns="0" tIns="0" rIns="0" bIns="0" rtlCol="0" anchor="ctr"/>
-          <a:lstStyle/>
-          <a:p>
-            <a:pPr algn="ctr" indent="0" marL="0">
-              <a:buNone/>
-            </a:pPr>
-            <a:r>
-              <a:rPr lang="en-US" sz="1300" b="1" dirty="0">
-                <a:solidFill>
-                  <a:srgbClr val="4C1D95"/>
-                </a:solidFill>
-                <a:latin typeface="Trebuchet MS" pitchFamily="34" charset="0"/>
-                <a:ea typeface="Trebuchet MS" pitchFamily="34" charset="-122"/>
-                <a:cs typeface="Trebuchet MS" pitchFamily="34" charset="-120"/>
-              </a:rPr>
-              <a:t>re-</a:t>
-            </a:r>
-            <a:endParaRPr lang="en-US" sz="1300" dirty="0"/>
-          </a:p>
-        </p:txBody>
-      </p:sp>
-      <p:sp>
-        <p:nvSpPr>
-          <p:cNvPr id="40" name="Shape 38"/>
-          <p:cNvSpPr/>
-          <p:nvPr/>
-        </p:nvSpPr>
-        <p:spPr>
-          <a:xfrm>
-            <a:off x="3291840" y="3584448"/>
-            <a:ext cx="1645920" cy="420624"/>
-          </a:xfrm>
-          <a:prstGeom prst="rect">
-            <a:avLst/>
-          </a:prstGeom>
-          <a:solidFill>
-            <a:srgbClr val="F8FAFC"/>
-          </a:solidFill>
-          <a:ln w="12700">
-            <a:solidFill>
-              <a:srgbClr val="E5E7EB"/>
-            </a:solidFill>
-            <a:prstDash val="solid"/>
-          </a:ln>
-        </p:spPr>
-      </p:sp>
-      <p:sp>
-        <p:nvSpPr>
-          <p:cNvPr id="41" name="Shape 39"/>
-          <p:cNvSpPr/>
-          <p:nvPr/>
-        </p:nvSpPr>
-        <p:spPr>
-          <a:xfrm>
-            <a:off x="5943600" y="3584448"/>
-            <a:ext cx="1463040" cy="420624"/>
-          </a:xfrm>
-          <a:prstGeom prst="rect">
-            <a:avLst/>
-          </a:prstGeom>
-          <a:solidFill>
-            <a:srgbClr val="FCE7F3"/>
-          </a:solidFill>
-          <a:ln w="12700">
-            <a:solidFill>
-              <a:srgbClr val="E5E7EB"/>
-            </a:solidFill>
-            <a:prstDash val="solid"/>
-          </a:ln>
-        </p:spPr>
-      </p:sp>
-      <p:sp>
-        <p:nvSpPr>
-          <p:cNvPr id="42" name="Text 40"/>
-          <p:cNvSpPr/>
-          <p:nvPr/>
-        </p:nvSpPr>
-        <p:spPr>
-          <a:xfrm>
-            <a:off x="5943600" y="3584448"/>
-            <a:ext cx="1463040" cy="420624"/>
-          </a:xfrm>
-          <a:prstGeom prst="rect">
-            <a:avLst/>
-          </a:prstGeom>
-          <a:noFill/>
-          <a:ln/>
-        </p:spPr>
-        <p:txBody>
-          <a:bodyPr wrap="square" lIns="0" tIns="0" rIns="0" bIns="0" rtlCol="0" anchor="ctr"/>
-          <a:lstStyle/>
-          <a:p>
-            <a:pPr algn="ctr" indent="0" marL="0">
-              <a:buNone/>
-            </a:pPr>
-            <a:r>
-              <a:rPr lang="en-US" sz="1300" b="1" dirty="0">
-                <a:solidFill>
-                  <a:srgbClr val="9D174D"/>
-                </a:solidFill>
-                <a:latin typeface="Trebuchet MS" pitchFamily="34" charset="0"/>
-                <a:ea typeface="Trebuchet MS" pitchFamily="34" charset="-122"/>
-                <a:cs typeface="Trebuchet MS" pitchFamily="34" charset="-120"/>
-              </a:rPr>
-              <a:t>-ness</a:t>
-            </a:r>
-            <a:endParaRPr lang="en-US" sz="1300" dirty="0"/>
-          </a:p>
-        </p:txBody>
-      </p:sp>
-      <p:sp>
-        <p:nvSpPr>
-          <p:cNvPr id="43" name="Text 41"/>
+          <p:cNvPr id="38" name="Text 36"/>
           <p:cNvSpPr/>
           <p:nvPr/>
         </p:nvSpPr>
@@ -39336,14 +39228,14 @@
       </p:sp>
       <p:sp>
         <p:nvSpPr>
-          <p:cNvPr id="44" name="Shape 42"/>
+          <p:cNvPr id="39" name="Shape 37"/>
           <p:cNvSpPr/>
           <p:nvPr/>
         </p:nvSpPr>
         <p:spPr>
           <a:xfrm>
             <a:off x="1508760" y="4178808"/>
-            <a:ext cx="822960" cy="420624"/>
+            <a:ext cx="1389888" cy="420624"/>
           </a:xfrm>
           <a:prstGeom prst="rect">
             <a:avLst>
@@ -39351,11 +39243,11 @@
             </a:avLst>
           </a:prstGeom>
           <a:solidFill>
-            <a:srgbClr val="DDD6FE"/>
+            <a:srgbClr val="CCFBF1"/>
           </a:solidFill>
           <a:ln w="19050">
             <a:solidFill>
-              <a:srgbClr val="7C3AED"/>
+              <a:srgbClr val="0D9488"/>
             </a:solidFill>
             <a:prstDash val="solid"/>
           </a:ln>
@@ -39370,14 +39262,14 @@
       </p:sp>
       <p:sp>
         <p:nvSpPr>
-          <p:cNvPr id="45" name="Text 43"/>
+          <p:cNvPr id="40" name="Text 38"/>
           <p:cNvSpPr/>
           <p:nvPr/>
         </p:nvSpPr>
         <p:spPr>
           <a:xfrm>
             <a:off x="1508760" y="4178808"/>
-            <a:ext cx="822960" cy="420624"/>
+            <a:ext cx="1389888" cy="420624"/>
           </a:xfrm>
           <a:prstGeom prst="rect">
             <a:avLst/>
@@ -39395,13 +39287,13 @@
             <a:r>
               <a:rPr lang="en-US" sz="1300" b="1" dirty="0">
                 <a:solidFill>
-                  <a:srgbClr val="4C1D95"/>
+                  <a:srgbClr val="0F766E"/>
                 </a:solidFill>
                 <a:latin typeface="Trebuchet MS" pitchFamily="34" charset="0"/>
                 <a:ea typeface="Trebuchet MS" pitchFamily="34" charset="-122"/>
                 <a:cs typeface="Trebuchet MS" pitchFamily="34" charset="-120"/>
               </a:rPr>
-              <a:t>un-</a:t>
+              <a:t>'sharp'</a:t>
             </a:r>
             <a:endParaRPr lang="en-US" sz="1300" dirty="0"/>
           </a:p>
@@ -39409,13 +39301,13 @@
       </p:sp>
       <p:sp>
         <p:nvSpPr>
-          <p:cNvPr id="46" name="Text 44"/>
-          <p:cNvSpPr/>
-          <p:nvPr/>
-        </p:nvSpPr>
-        <p:spPr>
-          <a:xfrm>
-            <a:off x="2359152" y="4178808"/>
+          <p:cNvPr id="41" name="Text 39"/>
+          <p:cNvSpPr/>
+          <p:nvPr/>
+        </p:nvSpPr>
+        <p:spPr>
+          <a:xfrm>
+            <a:off x="2926080" y="4178808"/>
             <a:ext cx="320040" cy="420624"/>
           </a:xfrm>
           <a:prstGeom prst="rect">
@@ -39448,14 +39340,14 @@
       </p:sp>
       <p:sp>
         <p:nvSpPr>
-          <p:cNvPr id="47" name="Shape 45"/>
-          <p:cNvSpPr/>
-          <p:nvPr/>
-        </p:nvSpPr>
-        <p:spPr>
-          <a:xfrm>
-            <a:off x="2706624" y="4178808"/>
-            <a:ext cx="1389888" cy="420624"/>
+          <p:cNvPr id="42" name="Shape 40"/>
+          <p:cNvSpPr/>
+          <p:nvPr/>
+        </p:nvSpPr>
+        <p:spPr>
+          <a:xfrm>
+            <a:off x="3273552" y="4178808"/>
+            <a:ext cx="822960" cy="420624"/>
           </a:xfrm>
           <a:prstGeom prst="rect">
             <a:avLst>
@@ -39463,11 +39355,11 @@
             </a:avLst>
           </a:prstGeom>
           <a:solidFill>
-            <a:srgbClr val="CCFBF1"/>
+            <a:srgbClr val="FCE7F3"/>
           </a:solidFill>
           <a:ln w="19050">
             <a:solidFill>
-              <a:srgbClr val="0D9488"/>
+              <a:srgbClr val="DB2777"/>
             </a:solidFill>
             <a:prstDash val="solid"/>
           </a:ln>
@@ -39482,14 +39374,14 @@
       </p:sp>
       <p:sp>
         <p:nvSpPr>
-          <p:cNvPr id="48" name="Text 46"/>
-          <p:cNvSpPr/>
-          <p:nvPr/>
-        </p:nvSpPr>
-        <p:spPr>
-          <a:xfrm>
-            <a:off x="2706624" y="4178808"/>
-            <a:ext cx="1389888" cy="420624"/>
+          <p:cNvPr id="43" name="Text 41"/>
+          <p:cNvSpPr/>
+          <p:nvPr/>
+        </p:nvSpPr>
+        <p:spPr>
+          <a:xfrm>
+            <a:off x="3273552" y="4178808"/>
+            <a:ext cx="822960" cy="420624"/>
           </a:xfrm>
           <a:prstGeom prst="rect">
             <a:avLst/>
@@ -39507,13 +39399,13 @@
             <a:r>
               <a:rPr lang="en-US" sz="1300" b="1" dirty="0">
                 <a:solidFill>
-                  <a:srgbClr val="0F766E"/>
+                  <a:srgbClr val="9D174D"/>
                 </a:solidFill>
                 <a:latin typeface="Trebuchet MS" pitchFamily="34" charset="0"/>
                 <a:ea typeface="Trebuchet MS" pitchFamily="34" charset="-122"/>
                 <a:cs typeface="Trebuchet MS" pitchFamily="34" charset="-120"/>
               </a:rPr>
-              <a:t>'sharp'</a:t>
+              <a:t>-en</a:t>
             </a:r>
             <a:endParaRPr lang="en-US" sz="1300" dirty="0"/>
           </a:p>
@@ -39521,14 +39413,14 @@
       </p:sp>
       <p:sp>
         <p:nvSpPr>
-          <p:cNvPr id="49" name="Text 47"/>
-          <p:cNvSpPr/>
-          <p:nvPr/>
-        </p:nvSpPr>
-        <p:spPr>
-          <a:xfrm>
-            <a:off x="4123944" y="4178808"/>
-            <a:ext cx="320040" cy="420624"/>
+          <p:cNvPr id="44" name="Text 42"/>
+          <p:cNvSpPr/>
+          <p:nvPr/>
+        </p:nvSpPr>
+        <p:spPr>
+          <a:xfrm>
+            <a:off x="4169664" y="4178808"/>
+            <a:ext cx="365760" cy="420624"/>
           </a:xfrm>
           <a:prstGeom prst="rect">
             <a:avLst/>
@@ -39544,30 +39436,30 @@
               <a:buNone/>
             </a:pPr>
             <a:r>
-              <a:rPr lang="en-US" sz="1400" dirty="0">
-                <a:solidFill>
-                  <a:srgbClr val="475569"/>
+              <a:rPr lang="en-US" sz="1800" b="1" dirty="0">
+                <a:solidFill>
+                  <a:srgbClr val="0D9488"/>
                 </a:solidFill>
                 <a:latin typeface="Trebuchet MS" pitchFamily="34" charset="0"/>
                 <a:ea typeface="Trebuchet MS" pitchFamily="34" charset="-122"/>
                 <a:cs typeface="Trebuchet MS" pitchFamily="34" charset="-120"/>
               </a:rPr>
-              <a:t>+</a:t>
-            </a:r>
-            <a:endParaRPr lang="en-US" sz="1400" dirty="0"/>
-          </a:p>
-        </p:txBody>
-      </p:sp>
-      <p:sp>
-        <p:nvSpPr>
-          <p:cNvPr id="50" name="Shape 48"/>
-          <p:cNvSpPr/>
-          <p:nvPr/>
-        </p:nvSpPr>
-        <p:spPr>
-          <a:xfrm>
-            <a:off x="4471416" y="4178808"/>
-            <a:ext cx="822960" cy="420624"/>
+              <a:t>=</a:t>
+            </a:r>
+            <a:endParaRPr lang="en-US" sz="1800" dirty="0"/>
+          </a:p>
+        </p:txBody>
+      </p:sp>
+      <p:sp>
+        <p:nvSpPr>
+          <p:cNvPr id="45" name="Shape 43"/>
+          <p:cNvSpPr/>
+          <p:nvPr/>
+        </p:nvSpPr>
+        <p:spPr>
+          <a:xfrm>
+            <a:off x="4581144" y="4178808"/>
+            <a:ext cx="2194560" cy="420624"/>
           </a:xfrm>
           <a:prstGeom prst="rect">
             <a:avLst>
@@ -39575,33 +39467,26 @@
             </a:avLst>
           </a:prstGeom>
           <a:solidFill>
-            <a:srgbClr val="FCE7F3"/>
-          </a:solidFill>
-          <a:ln w="19050">
-            <a:solidFill>
-              <a:srgbClr val="DB2777"/>
-            </a:solidFill>
-            <a:prstDash val="solid"/>
-          </a:ln>
-          <a:effectLst>
-            <a:outerShdw sx="100000" sy="100000" kx="0" ky="0" algn="bl" rotWithShape="0" blurRad="101600" dist="38100" dir="8100000">
-              <a:srgbClr val="000000">
-                <a:alpha val="12000"/>
-              </a:srgbClr>
-            </a:outerShdw>
-          </a:effectLst>
-        </p:spPr>
-      </p:sp>
-      <p:sp>
-        <p:nvSpPr>
-          <p:cNvPr id="51" name="Text 49"/>
-          <p:cNvSpPr/>
-          <p:nvPr/>
-        </p:nvSpPr>
-        <p:spPr>
-          <a:xfrm>
-            <a:off x="4471416" y="4178808"/>
-            <a:ext cx="822960" cy="420624"/>
+            <a:srgbClr val="0D9488"/>
+          </a:solidFill>
+          <a:ln w="12700">
+            <a:solidFill>
+              <a:srgbClr val="0D9488"/>
+            </a:solidFill>
+            <a:prstDash val="solid"/>
+          </a:ln>
+        </p:spPr>
+      </p:sp>
+      <p:sp>
+        <p:nvSpPr>
+          <p:cNvPr id="46" name="Text 44"/>
+          <p:cNvSpPr/>
+          <p:nvPr/>
+        </p:nvSpPr>
+        <p:spPr>
+          <a:xfrm>
+            <a:off x="4581144" y="4178808"/>
+            <a:ext cx="2194560" cy="420624"/>
           </a:xfrm>
           <a:prstGeom prst="rect">
             <a:avLst/>
@@ -39617,120 +39502,15 @@
               <a:buNone/>
             </a:pPr>
             <a:r>
-              <a:rPr lang="en-US" sz="1300" b="1" dirty="0">
-                <a:solidFill>
-                  <a:srgbClr val="9D174D"/>
+              <a:rPr lang="en-US" sz="1400" b="1" dirty="0">
+                <a:solidFill>
+                  <a:srgbClr val="FFFFFF"/>
                 </a:solidFill>
                 <a:latin typeface="Trebuchet MS" pitchFamily="34" charset="0"/>
                 <a:ea typeface="Trebuchet MS" pitchFamily="34" charset="-122"/>
                 <a:cs typeface="Trebuchet MS" pitchFamily="34" charset="-120"/>
               </a:rPr>
-              <a:t>-en</a:t>
-            </a:r>
-            <a:endParaRPr lang="en-US" sz="1300" dirty="0"/>
-          </a:p>
-        </p:txBody>
-      </p:sp>
-      <p:sp>
-        <p:nvSpPr>
-          <p:cNvPr id="52" name="Text 50"/>
-          <p:cNvSpPr/>
-          <p:nvPr/>
-        </p:nvSpPr>
-        <p:spPr>
-          <a:xfrm>
-            <a:off x="5367528" y="4178808"/>
-            <a:ext cx="365760" cy="420624"/>
-          </a:xfrm>
-          <a:prstGeom prst="rect">
-            <a:avLst/>
-          </a:prstGeom>
-          <a:noFill/>
-          <a:ln/>
-        </p:spPr>
-        <p:txBody>
-          <a:bodyPr wrap="square" lIns="0" tIns="0" rIns="0" bIns="0" rtlCol="0" anchor="ctr"/>
-          <a:lstStyle/>
-          <a:p>
-            <a:pPr algn="ctr" indent="0" marL="0">
-              <a:buNone/>
-            </a:pPr>
-            <a:r>
-              <a:rPr lang="en-US" sz="1800" b="1" dirty="0">
-                <a:solidFill>
-                  <a:srgbClr val="0D9488"/>
-                </a:solidFill>
-                <a:latin typeface="Trebuchet MS" pitchFamily="34" charset="0"/>
-                <a:ea typeface="Trebuchet MS" pitchFamily="34" charset="-122"/>
-                <a:cs typeface="Trebuchet MS" pitchFamily="34" charset="-120"/>
-              </a:rPr>
-              <a:t>=</a:t>
-            </a:r>
-            <a:endParaRPr lang="en-US" sz="1800" dirty="0"/>
-          </a:p>
-        </p:txBody>
-      </p:sp>
-      <p:sp>
-        <p:nvSpPr>
-          <p:cNvPr id="53" name="Shape 51"/>
-          <p:cNvSpPr/>
-          <p:nvPr/>
-        </p:nvSpPr>
-        <p:spPr>
-          <a:xfrm>
-            <a:off x="5779008" y="4178808"/>
-            <a:ext cx="2194560" cy="420624"/>
-          </a:xfrm>
-          <a:prstGeom prst="rect">
-            <a:avLst>
-              <a:gd name="adj" fmla="val 17391"/>
-            </a:avLst>
-          </a:prstGeom>
-          <a:solidFill>
-            <a:srgbClr val="0D9488"/>
-          </a:solidFill>
-          <a:ln w="12700">
-            <a:solidFill>
-              <a:srgbClr val="0D9488"/>
-            </a:solidFill>
-            <a:prstDash val="solid"/>
-          </a:ln>
-        </p:spPr>
-      </p:sp>
-      <p:sp>
-        <p:nvSpPr>
-          <p:cNvPr id="54" name="Text 52"/>
-          <p:cNvSpPr/>
-          <p:nvPr/>
-        </p:nvSpPr>
-        <p:spPr>
-          <a:xfrm>
-            <a:off x="5779008" y="4178808"/>
-            <a:ext cx="2194560" cy="420624"/>
-          </a:xfrm>
-          <a:prstGeom prst="rect">
-            <a:avLst/>
-          </a:prstGeom>
-          <a:noFill/>
-          <a:ln/>
-        </p:spPr>
-        <p:txBody>
-          <a:bodyPr wrap="square" lIns="0" tIns="0" rIns="0" bIns="0" rtlCol="0" anchor="ctr"/>
-          <a:lstStyle/>
-          <a:p>
-            <a:pPr algn="ctr" indent="0" marL="0">
-              <a:buNone/>
-            </a:pPr>
-            <a:r>
-              <a:rPr lang="en-US" sz="1400" b="1" dirty="0">
-                <a:solidFill>
-                  <a:srgbClr val="FFFFFF"/>
-                </a:solidFill>
-                <a:latin typeface="Trebuchet MS" pitchFamily="34" charset="0"/>
-                <a:ea typeface="Trebuchet MS" pitchFamily="34" charset="-122"/>
-                <a:cs typeface="Trebuchet MS" pitchFamily="34" charset="-120"/>
-              </a:rPr>
-              <a:t>sharpen</a:t>
+              <a:t>sharp</a:t>
             </a:r>
             <a:endParaRPr lang="en-US" sz="1400" dirty="0"/>
           </a:p>
@@ -40022,7 +39802,7 @@
                 <a:ea typeface="Calibri" pitchFamily="34" charset="-122"/>
                 <a:cs typeface="Calibri" pitchFamily="34" charset="-120"/>
               </a:rPr>
-              <a:t>Word Labs  •  wordlabs.app  •  Root: 'sharp' = having a fine cutting edge</a:t>
+              <a:t>Word Labs  •  wordlabs.app  •  Root: 'sharp' = having a fine edge or point</a:t>
             </a:r>
             <a:endParaRPr lang="en-US" sz="800" dirty="0"/>
           </a:p>
@@ -40134,7 +39914,7 @@
                 <a:ea typeface="Trebuchet MS" pitchFamily="34" charset="-122"/>
                 <a:cs typeface="Trebuchet MS" pitchFamily="34" charset="-120"/>
               </a:rPr>
-              <a:t>sharpen</a:t>
+              <a:t>sharp</a:t>
             </a:r>
             <a:endParaRPr lang="en-US" sz="1200" dirty="0"/>
           </a:p>
@@ -40200,7 +39980,7 @@
                 <a:ea typeface="Calibri" pitchFamily="34" charset="-122"/>
                 <a:cs typeface="Calibri" pitchFamily="34" charset="-120"/>
               </a:rPr>
-              <a:t>Describes something that has not been made sharp yet, like an unsharpened pencil.</a:t>
+              <a:t>to make something have a finer edge or point</a:t>
             </a:r>
             <a:endParaRPr lang="en-US" sz="1200" dirty="0"/>
           </a:p>
@@ -40273,7 +40053,7 @@
                 <a:ea typeface="Trebuchet MS" pitchFamily="34" charset="-122"/>
                 <a:cs typeface="Trebuchet MS" pitchFamily="34" charset="-120"/>
               </a:rPr>
-              <a:t>sharper</a:t>
+              <a:t>sharpen</a:t>
             </a:r>
             <a:endParaRPr lang="en-US" sz="1200" dirty="0"/>
           </a:p>
@@ -40339,7 +40119,7 @@
                 <a:ea typeface="Calibri" pitchFamily="34" charset="-122"/>
                 <a:cs typeface="Calibri" pitchFamily="34" charset="-120"/>
               </a:rPr>
-              <a:t>The quality of being sharp, such as the sharpness of a knife blade.</a:t>
+              <a:t>having a finer point or edge than something else, or quicker-witted</a:t>
             </a:r>
             <a:endParaRPr lang="en-US" sz="1200" dirty="0"/>
           </a:p>
@@ -40412,7 +40192,7 @@
                 <a:ea typeface="Trebuchet MS" pitchFamily="34" charset="-122"/>
                 <a:cs typeface="Trebuchet MS" pitchFamily="34" charset="-120"/>
               </a:rPr>
-              <a:t>sharpest</a:t>
+              <a:t>sharper</a:t>
             </a:r>
             <a:endParaRPr lang="en-US" sz="1200" dirty="0"/>
           </a:p>
@@ -40478,7 +40258,7 @@
                 <a:ea typeface="Calibri" pitchFamily="34" charset="-122"/>
                 <a:cs typeface="Calibri" pitchFamily="34" charset="-120"/>
               </a:rPr>
-              <a:t>In a sudden or severe way, like turning sharply around a corner.</a:t>
+              <a:t>in a sudden or forceful way, or with a fine point or edge</a:t>
             </a:r>
             <a:endParaRPr lang="en-US" sz="1200" dirty="0"/>
           </a:p>
@@ -40617,424 +40397,7 @@
                 <a:ea typeface="Calibri" pitchFamily="34" charset="-122"/>
                 <a:cs typeface="Calibri" pitchFamily="34" charset="-120"/>
               </a:rPr>
-              <a:t>A tool used to make pencils or blades sharper and more pointed.</a:t>
-            </a:r>
-            <a:endParaRPr lang="en-US" sz="1200" dirty="0"/>
-          </a:p>
-        </p:txBody>
-      </p:sp>
-      <p:sp>
-        <p:nvSpPr>
-          <p:cNvPr id="27" name="Shape 25"/>
-          <p:cNvSpPr/>
-          <p:nvPr/>
-        </p:nvSpPr>
-        <p:spPr>
-          <a:xfrm>
-            <a:off x="365760" y="3310128"/>
-            <a:ext cx="2011680" cy="457200"/>
-          </a:xfrm>
-          <a:prstGeom prst="rect">
-            <a:avLst>
-              <a:gd name="adj" fmla="val 12000"/>
-            </a:avLst>
-          </a:prstGeom>
-          <a:solidFill>
-            <a:srgbClr val="EEF2FF"/>
-          </a:solidFill>
-          <a:ln w="12700">
-            <a:solidFill>
-              <a:srgbClr val="6366F1"/>
-            </a:solidFill>
-            <a:prstDash val="solid"/>
-          </a:ln>
-          <a:effectLst>
-            <a:outerShdw sx="100000" sy="100000" kx="0" ky="0" algn="bl" rotWithShape="0" blurRad="101600" dist="38100" dir="8100000">
-              <a:srgbClr val="000000">
-                <a:alpha val="12000"/>
-              </a:srgbClr>
-            </a:outerShdw>
-          </a:effectLst>
-        </p:spPr>
-      </p:sp>
-      <p:sp>
-        <p:nvSpPr>
-          <p:cNvPr id="28" name="Text 26"/>
-          <p:cNvSpPr/>
-          <p:nvPr/>
-        </p:nvSpPr>
-        <p:spPr>
-          <a:xfrm>
-            <a:off x="365760" y="3310128"/>
-            <a:ext cx="2011680" cy="457200"/>
-          </a:xfrm>
-          <a:prstGeom prst="rect">
-            <a:avLst/>
-          </a:prstGeom>
-          <a:noFill/>
-          <a:ln/>
-        </p:spPr>
-        <p:txBody>
-          <a:bodyPr wrap="square" lIns="0" tIns="0" rIns="0" bIns="0" rtlCol="0" anchor="ctr"/>
-          <a:lstStyle/>
-          <a:p>
-            <a:pPr algn="ctr" indent="0" marL="0">
-              <a:buNone/>
-            </a:pPr>
-            <a:r>
-              <a:rPr lang="en-US" sz="1200" b="1" dirty="0">
-                <a:solidFill>
-                  <a:srgbClr val="4338CA"/>
-                </a:solidFill>
-                <a:latin typeface="Trebuchet MS" pitchFamily="34" charset="0"/>
-                <a:ea typeface="Trebuchet MS" pitchFamily="34" charset="-122"/>
-                <a:cs typeface="Trebuchet MS" pitchFamily="34" charset="-120"/>
-              </a:rPr>
-              <a:t>sharpness</a:t>
-            </a:r>
-            <a:endParaRPr lang="en-US" sz="1200" dirty="0"/>
-          </a:p>
-        </p:txBody>
-      </p:sp>
-      <p:sp>
-        <p:nvSpPr>
-          <p:cNvPr id="29" name="Shape 27"/>
-          <p:cNvSpPr/>
-          <p:nvPr/>
-        </p:nvSpPr>
-        <p:spPr>
-          <a:xfrm>
-            <a:off x="2514600" y="3310128"/>
-            <a:ext cx="6263640" cy="457200"/>
-          </a:xfrm>
-          <a:prstGeom prst="rect">
-            <a:avLst>
-              <a:gd name="adj" fmla="val 12000"/>
-            </a:avLst>
-          </a:prstGeom>
-          <a:solidFill>
-            <a:srgbClr val="F8FAFC"/>
-          </a:solidFill>
-          <a:ln w="12700">
-            <a:solidFill>
-              <a:srgbClr val="E2E8F0"/>
-            </a:solidFill>
-            <a:prstDash val="solid"/>
-          </a:ln>
-        </p:spPr>
-      </p:sp>
-      <p:sp>
-        <p:nvSpPr>
-          <p:cNvPr id="30" name="Text 28"/>
-          <p:cNvSpPr/>
-          <p:nvPr/>
-        </p:nvSpPr>
-        <p:spPr>
-          <a:xfrm>
-            <a:off x="2651760" y="3310128"/>
-            <a:ext cx="6035040" cy="457200"/>
-          </a:xfrm>
-          <a:prstGeom prst="rect">
-            <a:avLst/>
-          </a:prstGeom>
-          <a:noFill/>
-          <a:ln/>
-        </p:spPr>
-        <p:txBody>
-          <a:bodyPr wrap="square" rtlCol="0" anchor="ctr"/>
-          <a:lstStyle/>
-          <a:p>
-            <a:pPr algn="l" indent="0" marL="0">
-              <a:buNone/>
-            </a:pPr>
-            <a:r>
-              <a:rPr lang="en-US" sz="1200" dirty="0">
-                <a:solidFill>
-                  <a:srgbClr val="0F172A"/>
-                </a:solidFill>
-                <a:latin typeface="Calibri" pitchFamily="34" charset="0"/>
-                <a:ea typeface="Calibri" pitchFamily="34" charset="-122"/>
-                <a:cs typeface="Calibri" pitchFamily="34" charset="-120"/>
-              </a:rPr>
-              <a:t>The most sharp of all; having the finest point or edge.</a:t>
-            </a:r>
-            <a:endParaRPr lang="en-US" sz="1200" dirty="0"/>
-          </a:p>
-        </p:txBody>
-      </p:sp>
-      <p:sp>
-        <p:nvSpPr>
-          <p:cNvPr id="31" name="Shape 29"/>
-          <p:cNvSpPr/>
-          <p:nvPr/>
-        </p:nvSpPr>
-        <p:spPr>
-          <a:xfrm>
-            <a:off x="365760" y="3840480"/>
-            <a:ext cx="2011680" cy="457200"/>
-          </a:xfrm>
-          <a:prstGeom prst="rect">
-            <a:avLst>
-              <a:gd name="adj" fmla="val 12000"/>
-            </a:avLst>
-          </a:prstGeom>
-          <a:solidFill>
-            <a:srgbClr val="EEF2FF"/>
-          </a:solidFill>
-          <a:ln w="12700">
-            <a:solidFill>
-              <a:srgbClr val="6366F1"/>
-            </a:solidFill>
-            <a:prstDash val="solid"/>
-          </a:ln>
-          <a:effectLst>
-            <a:outerShdw sx="100000" sy="100000" kx="0" ky="0" algn="bl" rotWithShape="0" blurRad="101600" dist="38100" dir="8100000">
-              <a:srgbClr val="000000">
-                <a:alpha val="12000"/>
-              </a:srgbClr>
-            </a:outerShdw>
-          </a:effectLst>
-        </p:spPr>
-      </p:sp>
-      <p:sp>
-        <p:nvSpPr>
-          <p:cNvPr id="32" name="Text 30"/>
-          <p:cNvSpPr/>
-          <p:nvPr/>
-        </p:nvSpPr>
-        <p:spPr>
-          <a:xfrm>
-            <a:off x="365760" y="3840480"/>
-            <a:ext cx="2011680" cy="457200"/>
-          </a:xfrm>
-          <a:prstGeom prst="rect">
-            <a:avLst/>
-          </a:prstGeom>
-          <a:noFill/>
-          <a:ln/>
-        </p:spPr>
-        <p:txBody>
-          <a:bodyPr wrap="square" lIns="0" tIns="0" rIns="0" bIns="0" rtlCol="0" anchor="ctr"/>
-          <a:lstStyle/>
-          <a:p>
-            <a:pPr algn="ctr" indent="0" marL="0">
-              <a:buNone/>
-            </a:pPr>
-            <a:r>
-              <a:rPr lang="en-US" sz="1200" b="1" dirty="0">
-                <a:solidFill>
-                  <a:srgbClr val="4338CA"/>
-                </a:solidFill>
-                <a:latin typeface="Trebuchet MS" pitchFamily="34" charset="0"/>
-                <a:ea typeface="Trebuchet MS" pitchFamily="34" charset="-122"/>
-                <a:cs typeface="Trebuchet MS" pitchFamily="34" charset="-120"/>
-              </a:rPr>
-              <a:t>sharpener</a:t>
-            </a:r>
-            <a:endParaRPr lang="en-US" sz="1200" dirty="0"/>
-          </a:p>
-        </p:txBody>
-      </p:sp>
-      <p:sp>
-        <p:nvSpPr>
-          <p:cNvPr id="33" name="Shape 31"/>
-          <p:cNvSpPr/>
-          <p:nvPr/>
-        </p:nvSpPr>
-        <p:spPr>
-          <a:xfrm>
-            <a:off x="2514600" y="3840480"/>
-            <a:ext cx="6263640" cy="457200"/>
-          </a:xfrm>
-          <a:prstGeom prst="rect">
-            <a:avLst>
-              <a:gd name="adj" fmla="val 12000"/>
-            </a:avLst>
-          </a:prstGeom>
-          <a:solidFill>
-            <a:srgbClr val="F8FAFC"/>
-          </a:solidFill>
-          <a:ln w="12700">
-            <a:solidFill>
-              <a:srgbClr val="E2E8F0"/>
-            </a:solidFill>
-            <a:prstDash val="solid"/>
-          </a:ln>
-        </p:spPr>
-      </p:sp>
-      <p:sp>
-        <p:nvSpPr>
-          <p:cNvPr id="34" name="Text 32"/>
-          <p:cNvSpPr/>
-          <p:nvPr/>
-        </p:nvSpPr>
-        <p:spPr>
-          <a:xfrm>
-            <a:off x="2651760" y="3840480"/>
-            <a:ext cx="6035040" cy="457200"/>
-          </a:xfrm>
-          <a:prstGeom prst="rect">
-            <a:avLst/>
-          </a:prstGeom>
-          <a:noFill/>
-          <a:ln/>
-        </p:spPr>
-        <p:txBody>
-          <a:bodyPr wrap="square" rtlCol="0" anchor="ctr"/>
-          <a:lstStyle/>
-          <a:p>
-            <a:pPr algn="l" indent="0" marL="0">
-              <a:buNone/>
-            </a:pPr>
-            <a:r>
-              <a:rPr lang="en-US" sz="1200" dirty="0">
-                <a:solidFill>
-                  <a:srgbClr val="0F172A"/>
-                </a:solidFill>
-                <a:latin typeface="Calibri" pitchFamily="34" charset="0"/>
-                <a:ea typeface="Calibri" pitchFamily="34" charset="-122"/>
-                <a:cs typeface="Calibri" pitchFamily="34" charset="-120"/>
-              </a:rPr>
-              <a:t>To make something have a finer point or edge, like sharpening a pencil.</a:t>
-            </a:r>
-            <a:endParaRPr lang="en-US" sz="1200" dirty="0"/>
-          </a:p>
-        </p:txBody>
-      </p:sp>
-      <p:sp>
-        <p:nvSpPr>
-          <p:cNvPr id="35" name="Shape 33"/>
-          <p:cNvSpPr/>
-          <p:nvPr/>
-        </p:nvSpPr>
-        <p:spPr>
-          <a:xfrm>
-            <a:off x="365760" y="4370832"/>
-            <a:ext cx="2011680" cy="457200"/>
-          </a:xfrm>
-          <a:prstGeom prst="rect">
-            <a:avLst>
-              <a:gd name="adj" fmla="val 12000"/>
-            </a:avLst>
-          </a:prstGeom>
-          <a:solidFill>
-            <a:srgbClr val="EEF2FF"/>
-          </a:solidFill>
-          <a:ln w="12700">
-            <a:solidFill>
-              <a:srgbClr val="6366F1"/>
-            </a:solidFill>
-            <a:prstDash val="solid"/>
-          </a:ln>
-          <a:effectLst>
-            <a:outerShdw sx="100000" sy="100000" kx="0" ky="0" algn="bl" rotWithShape="0" blurRad="101600" dist="38100" dir="8100000">
-              <a:srgbClr val="000000">
-                <a:alpha val="12000"/>
-              </a:srgbClr>
-            </a:outerShdw>
-          </a:effectLst>
-        </p:spPr>
-      </p:sp>
-      <p:sp>
-        <p:nvSpPr>
-          <p:cNvPr id="36" name="Text 34"/>
-          <p:cNvSpPr/>
-          <p:nvPr/>
-        </p:nvSpPr>
-        <p:spPr>
-          <a:xfrm>
-            <a:off x="365760" y="4370832"/>
-            <a:ext cx="2011680" cy="457200"/>
-          </a:xfrm>
-          <a:prstGeom prst="rect">
-            <a:avLst/>
-          </a:prstGeom>
-          <a:noFill/>
-          <a:ln/>
-        </p:spPr>
-        <p:txBody>
-          <a:bodyPr wrap="square" lIns="0" tIns="0" rIns="0" bIns="0" rtlCol="0" anchor="ctr"/>
-          <a:lstStyle/>
-          <a:p>
-            <a:pPr algn="ctr" indent="0" marL="0">
-              <a:buNone/>
-            </a:pPr>
-            <a:r>
-              <a:rPr lang="en-US" sz="1200" b="1" dirty="0">
-                <a:solidFill>
-                  <a:srgbClr val="4338CA"/>
-                </a:solidFill>
-                <a:latin typeface="Trebuchet MS" pitchFamily="34" charset="0"/>
-                <a:ea typeface="Trebuchet MS" pitchFamily="34" charset="-122"/>
-                <a:cs typeface="Trebuchet MS" pitchFamily="34" charset="-120"/>
-              </a:rPr>
-              <a:t>unsharpened</a:t>
-            </a:r>
-            <a:endParaRPr lang="en-US" sz="1200" dirty="0"/>
-          </a:p>
-        </p:txBody>
-      </p:sp>
-      <p:sp>
-        <p:nvSpPr>
-          <p:cNvPr id="37" name="Shape 35"/>
-          <p:cNvSpPr/>
-          <p:nvPr/>
-        </p:nvSpPr>
-        <p:spPr>
-          <a:xfrm>
-            <a:off x="2514600" y="4370832"/>
-            <a:ext cx="6263640" cy="457200"/>
-          </a:xfrm>
-          <a:prstGeom prst="rect">
-            <a:avLst>
-              <a:gd name="adj" fmla="val 12000"/>
-            </a:avLst>
-          </a:prstGeom>
-          <a:solidFill>
-            <a:srgbClr val="F8FAFC"/>
-          </a:solidFill>
-          <a:ln w="12700">
-            <a:solidFill>
-              <a:srgbClr val="E2E8F0"/>
-            </a:solidFill>
-            <a:prstDash val="solid"/>
-          </a:ln>
-        </p:spPr>
-      </p:sp>
-      <p:sp>
-        <p:nvSpPr>
-          <p:cNvPr id="38" name="Text 36"/>
-          <p:cNvSpPr/>
-          <p:nvPr/>
-        </p:nvSpPr>
-        <p:spPr>
-          <a:xfrm>
-            <a:off x="2651760" y="4370832"/>
-            <a:ext cx="6035040" cy="457200"/>
-          </a:xfrm>
-          <a:prstGeom prst="rect">
-            <a:avLst/>
-          </a:prstGeom>
-          <a:noFill/>
-          <a:ln/>
-        </p:spPr>
-        <p:txBody>
-          <a:bodyPr wrap="square" rtlCol="0" anchor="ctr"/>
-          <a:lstStyle/>
-          <a:p>
-            <a:pPr algn="l" indent="0" marL="0">
-              <a:buNone/>
-            </a:pPr>
-            <a:r>
-              <a:rPr lang="en-US" sz="1200" dirty="0">
-                <a:solidFill>
-                  <a:srgbClr val="0F172A"/>
-                </a:solidFill>
-                <a:latin typeface="Calibri" pitchFamily="34" charset="0"/>
-                <a:ea typeface="Calibri" pitchFamily="34" charset="-122"/>
-                <a:cs typeface="Calibri" pitchFamily="34" charset="-120"/>
-              </a:rPr>
-              <a:t>More sharp than something else; having a keener edge or point.</a:t>
+              <a:t>having a fine edge or point that can cut, or quick to notice and understand things</a:t>
             </a:r>
             <a:endParaRPr lang="en-US" sz="1200" dirty="0"/>
           </a:p>
@@ -41326,7 +40689,7 @@
                 <a:ea typeface="Calibri" pitchFamily="34" charset="-122"/>
                 <a:cs typeface="Calibri" pitchFamily="34" charset="-120"/>
               </a:rPr>
-              <a:t>Word Labs  •  wordlabs.app  •  Root: 'sharp' = having a fine cutting edge</a:t>
+              <a:t>Word Labs  •  wordlabs.app  •  Root: 'sharp' = having a fine edge or point</a:t>
             </a:r>
             <a:endParaRPr lang="en-US" sz="800" dirty="0"/>
           </a:p>
@@ -41529,7 +40892,7 @@
                 <a:ea typeface="Calibri" pitchFamily="34" charset="-122"/>
                 <a:cs typeface="Calibri" pitchFamily="34" charset="-120"/>
               </a:rPr>
-              <a:t>The chef used a sharpener to make sure his kitchen knives were ready before cooking the meal.</a:t>
+              <a:t>Be careful, that knife is very sharp.</a:t>
             </a:r>
             <a:endParaRPr lang="en-US" sz="1500" dirty="0"/>
           </a:p>
@@ -41693,7 +41056,7 @@
                 <a:ea typeface="Calibri" pitchFamily="34" charset="-122"/>
                 <a:cs typeface="Calibri" pitchFamily="34" charset="-120"/>
               </a:rPr>
-              <a:t>She turned sharply at the corner and nearly bumped into her friend coming the other way.</a:t>
+              <a:t>I need to sharpen my pencil before the test.</a:t>
             </a:r>
             <a:endParaRPr lang="en-US" sz="1500" dirty="0"/>
           </a:p>
@@ -41857,7 +41220,7 @@
                 <a:ea typeface="Calibri" pitchFamily="34" charset="-122"/>
                 <a:cs typeface="Calibri" pitchFamily="34" charset="-120"/>
               </a:rPr>
-              <a:t>The sharpness of the new pencil made his drawing look neat and detailed.</a:t>
+              <a:t>This knife is much sharper than the old one.</a:t>
             </a:r>
             <a:endParaRPr lang="en-US" sz="1500" dirty="0"/>
           </a:p>
